--- a/LINE広告トレンドレポート_2026年10月.pptx
+++ b/LINE広告トレンドレポート_2026年10月.pptx
@@ -1,32 +1,46 @@
 
 <file path=ppt/presentation.xml><?xml version="1.0" encoding="utf-8"?>
-<p:presentation xmlns:a="http://schemas.openxmlformats.org/drawingml/2006/main" xmlns:r="http://schemas.openxmlformats.org/officeDocument/2006/relationships" xmlns:mc="http://schemas.openxmlformats.org/markup-compatibility/2006" xmlns:mv="urn:schemas-microsoft-com:mac:vml" xmlns:p="http://schemas.openxmlformats.org/presentationml/2006/main" xmlns:c="http://schemas.openxmlformats.org/drawingml/2006/chart" xmlns:dgm="http://schemas.openxmlformats.org/drawingml/2006/diagram" xmlns:o="urn:schemas-microsoft-com:office:office" xmlns:v="urn:schemas-microsoft-com:vml" xmlns:pvml="urn:schemas-microsoft-com:office:powerpoint" xmlns:com="http://schemas.openxmlformats.org/drawingml/2006/compatibility" xmlns:p14="http://schemas.microsoft.com/office/powerpoint/2010/main" xmlns:p15="http://schemas.microsoft.com/office/powerpoint/2012/main" xmlns:ahyp="http://schemas.microsoft.com/office/drawing/2018/hyperlinkcolor" autoCompressPictures="0" embedTrueTypeFonts="1" strictFirstAndLastChars="0" saveSubsetFonts="1">
+<p:presentation xmlns:a="http://schemas.openxmlformats.org/drawingml/2006/main" xmlns:r="http://schemas.openxmlformats.org/officeDocument/2006/relationships" xmlns:p="http://schemas.openxmlformats.org/presentationml/2006/main" strictFirstAndLastChars="0" embedTrueTypeFonts="1" saveSubsetFonts="1" autoCompressPictures="0">
   <p:sldMasterIdLst>
-    <p:sldMasterId id="2147483648" r:id="rId4"/>
+    <p:sldMasterId id="2147483648" r:id="rId1"/>
   </p:sldMasterIdLst>
   <p:notesMasterIdLst>
-    <p:notesMasterId r:id="rId5"/>
+    <p:notesMasterId r:id="rId7"/>
   </p:notesMasterIdLst>
   <p:sldIdLst>
-    <p:sldId id="256" r:id="rId6"/>
-    <p:sldId id="257" r:id="rId7"/>
-    <p:sldId id="258" r:id="rId8"/>
-    <p:sldId id="259" r:id="rId14"/>
-    <p:sldId id="260" r:id="rId15"/>
+    <p:sldId id="256" r:id="rId2"/>
+    <p:sldId id="257" r:id="rId3"/>
+    <p:sldId id="258" r:id="rId4"/>
+    <p:sldId id="259" r:id="rId5"/>
+    <p:sldId id="260" r:id="rId6"/>
   </p:sldIdLst>
-  <p:sldSz cy="6858000" cx="9906000"/>
-  <p:notesSz cx="6799250" cy="9929800"/>
+  <p:sldSz cx="9906000" cy="6858000" type="A4"/>
+  <p:notesSz cx="6799263" cy="9929813"/>
   <p:embeddedFontLst>
     <p:embeddedFont>
-      <p:font typeface="Century Gothic"/>
-      <p:regular r:id="rId17"/>
-      <p:bold r:id="rId18"/>
-      <p:italic r:id="rId19"/>
-      <p:boldItalic r:id="rId20"/>
+      <p:font typeface="Meiryo" panose="020B0604030504040204" pitchFamily="50" charset="-128"/>
+      <p:regular r:id="rId8"/>
+      <p:bold r:id="rId9"/>
+      <p:italic r:id="rId10"/>
+      <p:boldItalic r:id="rId11"/>
+    </p:embeddedFont>
+    <p:embeddedFont>
+      <p:font typeface="Meiryo" panose="020B0604030504040204" pitchFamily="50" charset="-128"/>
+      <p:regular r:id="rId8"/>
+      <p:bold r:id="rId9"/>
+      <p:italic r:id="rId10"/>
+      <p:boldItalic r:id="rId11"/>
+    </p:embeddedFont>
+    <p:embeddedFont>
+      <p:font typeface="Century Gothic" panose="020B0502020202020204" pitchFamily="34" charset="0"/>
+      <p:regular r:id="rId12"/>
+      <p:bold r:id="rId13"/>
+      <p:italic r:id="rId14"/>
+      <p:boldItalic r:id="rId15"/>
     </p:embeddedFont>
   </p:embeddedFontLst>
   <p:defaultTextStyle>
-    <a:defPPr lvl="0" marR="0" rtl="0" algn="l">
+    <a:defPPr marR="0" lvl="0" algn="l" rtl="0">
       <a:lnSpc>
         <a:spcPct val="100000"/>
       </a:lnSpc>
@@ -37,7 +51,7 @@
         <a:spcPts val="0"/>
       </a:spcAft>
     </a:defPPr>
-    <a:lvl1pPr lvl="0" marR="0" rtl="0" algn="l">
+    <a:lvl1pPr marR="0" lvl="0" algn="l" rtl="0">
       <a:lnSpc>
         <a:spcPct val="100000"/>
       </a:lnSpc>
@@ -51,7 +65,7 @@
         <a:srgbClr val="000000"/>
       </a:buClr>
       <a:buFont typeface="Arial"/>
-      <a:defRPr b="0" i="0" spc="0" sz="1400" u="none" cap="none" strike="noStrike">
+      <a:defRPr sz="1400" b="0" i="0" u="none" strike="noStrike" cap="none" spc="0">
         <a:solidFill>
           <a:srgbClr val="000000"/>
         </a:solidFill>
@@ -61,7 +75,7 @@
         <a:sym typeface="Arial"/>
       </a:defRPr>
     </a:lvl1pPr>
-    <a:lvl2pPr lvl="1" marR="0" rtl="0" algn="l">
+    <a:lvl2pPr marR="0" lvl="1" algn="l" rtl="0">
       <a:lnSpc>
         <a:spcPct val="100000"/>
       </a:lnSpc>
@@ -75,7 +89,7 @@
         <a:srgbClr val="000000"/>
       </a:buClr>
       <a:buFont typeface="Arial"/>
-      <a:defRPr b="0" i="0" spc="0" sz="1400" u="none" cap="none" strike="noStrike">
+      <a:defRPr sz="1400" b="0" i="0" u="none" strike="noStrike" cap="none" spc="0">
         <a:solidFill>
           <a:srgbClr val="000000"/>
         </a:solidFill>
@@ -85,7 +99,7 @@
         <a:sym typeface="Arial"/>
       </a:defRPr>
     </a:lvl2pPr>
-    <a:lvl3pPr lvl="2" marR="0" rtl="0" algn="l">
+    <a:lvl3pPr marR="0" lvl="2" algn="l" rtl="0">
       <a:lnSpc>
         <a:spcPct val="100000"/>
       </a:lnSpc>
@@ -99,7 +113,7 @@
         <a:srgbClr val="000000"/>
       </a:buClr>
       <a:buFont typeface="Arial"/>
-      <a:defRPr b="0" i="0" spc="0" sz="1400" u="none" cap="none" strike="noStrike">
+      <a:defRPr sz="1400" b="0" i="0" u="none" strike="noStrike" cap="none" spc="0">
         <a:solidFill>
           <a:srgbClr val="000000"/>
         </a:solidFill>
@@ -109,7 +123,7 @@
         <a:sym typeface="Arial"/>
       </a:defRPr>
     </a:lvl3pPr>
-    <a:lvl4pPr lvl="3" marR="0" rtl="0" algn="l">
+    <a:lvl4pPr marR="0" lvl="3" algn="l" rtl="0">
       <a:lnSpc>
         <a:spcPct val="100000"/>
       </a:lnSpc>
@@ -123,7 +137,7 @@
         <a:srgbClr val="000000"/>
       </a:buClr>
       <a:buFont typeface="Arial"/>
-      <a:defRPr b="0" i="0" spc="0" sz="1400" u="none" cap="none" strike="noStrike">
+      <a:defRPr sz="1400" b="0" i="0" u="none" strike="noStrike" cap="none" spc="0">
         <a:solidFill>
           <a:srgbClr val="000000"/>
         </a:solidFill>
@@ -133,7 +147,7 @@
         <a:sym typeface="Arial"/>
       </a:defRPr>
     </a:lvl4pPr>
-    <a:lvl5pPr lvl="4" marR="0" rtl="0" algn="l">
+    <a:lvl5pPr marR="0" lvl="4" algn="l" rtl="0">
       <a:lnSpc>
         <a:spcPct val="100000"/>
       </a:lnSpc>
@@ -147,7 +161,7 @@
         <a:srgbClr val="000000"/>
       </a:buClr>
       <a:buFont typeface="Arial"/>
-      <a:defRPr b="0" i="0" spc="0" sz="1400" u="none" cap="none" strike="noStrike">
+      <a:defRPr sz="1400" b="0" i="0" u="none" strike="noStrike" cap="none" spc="0">
         <a:solidFill>
           <a:srgbClr val="000000"/>
         </a:solidFill>
@@ -157,7 +171,7 @@
         <a:sym typeface="Arial"/>
       </a:defRPr>
     </a:lvl5pPr>
-    <a:lvl6pPr lvl="5" marR="0" rtl="0" algn="l">
+    <a:lvl6pPr marR="0" lvl="5" algn="l" rtl="0">
       <a:lnSpc>
         <a:spcPct val="100000"/>
       </a:lnSpc>
@@ -171,7 +185,7 @@
         <a:srgbClr val="000000"/>
       </a:buClr>
       <a:buFont typeface="Arial"/>
-      <a:defRPr b="0" i="0" spc="0" sz="1400" u="none" cap="none" strike="noStrike">
+      <a:defRPr sz="1400" b="0" i="0" u="none" strike="noStrike" cap="none" spc="0">
         <a:solidFill>
           <a:srgbClr val="000000"/>
         </a:solidFill>
@@ -181,7 +195,7 @@
         <a:sym typeface="Arial"/>
       </a:defRPr>
     </a:lvl6pPr>
-    <a:lvl7pPr lvl="6" marR="0" rtl="0" algn="l">
+    <a:lvl7pPr marR="0" lvl="6" algn="l" rtl="0">
       <a:lnSpc>
         <a:spcPct val="100000"/>
       </a:lnSpc>
@@ -195,7 +209,7 @@
         <a:srgbClr val="000000"/>
       </a:buClr>
       <a:buFont typeface="Arial"/>
-      <a:defRPr b="0" i="0" spc="0" sz="1400" u="none" cap="none" strike="noStrike">
+      <a:defRPr sz="1400" b="0" i="0" u="none" strike="noStrike" cap="none" spc="0">
         <a:solidFill>
           <a:srgbClr val="000000"/>
         </a:solidFill>
@@ -205,7 +219,7 @@
         <a:sym typeface="Arial"/>
       </a:defRPr>
     </a:lvl7pPr>
-    <a:lvl8pPr lvl="7" marR="0" rtl="0" algn="l">
+    <a:lvl8pPr marR="0" lvl="7" algn="l" rtl="0">
       <a:lnSpc>
         <a:spcPct val="100000"/>
       </a:lnSpc>
@@ -219,7 +233,7 @@
         <a:srgbClr val="000000"/>
       </a:buClr>
       <a:buFont typeface="Arial"/>
-      <a:defRPr b="0" i="0" spc="0" sz="1400" u="none" cap="none" strike="noStrike">
+      <a:defRPr sz="1400" b="0" i="0" u="none" strike="noStrike" cap="none" spc="0">
         <a:solidFill>
           <a:srgbClr val="000000"/>
         </a:solidFill>
@@ -229,7 +243,7 @@
         <a:sym typeface="Arial"/>
       </a:defRPr>
     </a:lvl8pPr>
-    <a:lvl9pPr lvl="8" marR="0" rtl="0" algn="l">
+    <a:lvl9pPr marR="0" lvl="8" algn="l" rtl="0">
       <a:lnSpc>
         <a:spcPct val="100000"/>
       </a:lnSpc>
@@ -243,7 +257,7 @@
         <a:srgbClr val="000000"/>
       </a:buClr>
       <a:buFont typeface="Arial"/>
-      <a:defRPr b="0" i="0" spc="0" sz="1400" u="none" cap="none" strike="noStrike">
+      <a:defRPr sz="1400" b="0" i="0" u="none" strike="noStrike" cap="none" spc="0">
         <a:solidFill>
           <a:srgbClr val="000000"/>
         </a:solidFill>
@@ -256,25 +270,26 @@
   </p:defaultTextStyle>
   <p:extLst>
     <p:ext uri="GoogleSlidesCustomDataVersion2">
-      <go:slidesCustomData xmlns:go="http://customooxmlschemas.google.com/" r:id="rId21" roundtripDataSignature="AMtx7mgQCoaVnfxROPv51WSWo8GFar7+Gw=="/>
+      <go:slidesCustomData xmlns:go="http://customooxmlschemas.google.com/" xmlns:ahyp="http://schemas.microsoft.com/office/drawing/2018/hyperlinkcolor" xmlns:p15="http://schemas.microsoft.com/office/powerpoint/2012/main" xmlns:p14="http://schemas.microsoft.com/office/powerpoint/2010/main" xmlns:com="http://schemas.openxmlformats.org/drawingml/2006/compatibility" xmlns:pvml="urn:schemas-microsoft-com:office:powerpoint" xmlns:v="urn:schemas-microsoft-com:vml" xmlns:o="urn:schemas-microsoft-com:office:office" xmlns:dgm="http://schemas.openxmlformats.org/drawingml/2006/diagram" xmlns:c="http://schemas.openxmlformats.org/drawingml/2006/chart" xmlns:mv="urn:schemas-microsoft-com:mac:vml" xmlns:mc="http://schemas.openxmlformats.org/markup-compatibility/2006" xmlns="" r:id="rId21" roundtripDataSignature="AMtx7mgQCoaVnfxROPv51WSWo8GFar7+Gw=="/>
     </p:ext>
   </p:extLst>
 </p:presentation>
 </file>
 
 <file path=ppt/notesMasters/notesMaster1.xml><?xml version="1.0" encoding="utf-8"?>
-<p:notesMaster xmlns:a="http://schemas.openxmlformats.org/drawingml/2006/main" xmlns:r="http://schemas.openxmlformats.org/officeDocument/2006/relationships" xmlns:mc="http://schemas.openxmlformats.org/markup-compatibility/2006" xmlns:mv="urn:schemas-microsoft-com:mac:vml" xmlns:p="http://schemas.openxmlformats.org/presentationml/2006/main" xmlns:c="http://schemas.openxmlformats.org/drawingml/2006/chart" xmlns:dgm="http://schemas.openxmlformats.org/drawingml/2006/diagram" xmlns:o="urn:schemas-microsoft-com:office:office" xmlns:v="urn:schemas-microsoft-com:vml" xmlns:pvml="urn:schemas-microsoft-com:office:powerpoint" xmlns:com="http://schemas.openxmlformats.org/drawingml/2006/compatibility" xmlns:p14="http://schemas.microsoft.com/office/powerpoint/2010/main" xmlns:p15="http://schemas.microsoft.com/office/powerpoint/2012/main" xmlns:ahyp="http://schemas.microsoft.com/office/drawing/2018/hyperlinkcolor">
+<p:notesMaster xmlns:a="http://schemas.openxmlformats.org/drawingml/2006/main" xmlns:r="http://schemas.openxmlformats.org/officeDocument/2006/relationships" xmlns:p="http://schemas.openxmlformats.org/presentationml/2006/main">
   <p:cSld>
     <p:bg>
       <p:bgPr>
         <a:solidFill>
           <a:schemeClr val="lt1"/>
         </a:solidFill>
+        <a:effectLst/>
       </p:bgPr>
     </p:bg>
     <p:spTree>
       <p:nvGrpSpPr>
-        <p:cNvPr id="2" name="Shape 2"/>
+        <p:cNvPr id="1" name="Shape 2"/>
         <p:cNvGrpSpPr/>
         <p:nvPr/>
       </p:nvGrpSpPr>
@@ -289,9 +304,11 @@
       <p:sp>
         <p:nvSpPr>
           <p:cNvPr id="3" name="Google Shape;3;n"/>
-          <p:cNvSpPr txBox="1"/>
+          <p:cNvSpPr txBox="1">
+            <a:spLocks noGrp="1"/>
+          </p:cNvSpPr>
           <p:nvPr>
-            <p:ph idx="2" type="hdr"/>
+            <p:ph type="hdr" idx="2"/>
           </p:nvPr>
         </p:nvSpPr>
         <p:spPr>
@@ -308,11 +325,11 @@
           </a:ln>
         </p:spPr>
         <p:txBody>
-          <a:bodyPr anchorCtr="0" anchor="t" bIns="44100" lIns="88200" spcFirstLastPara="1" rIns="88200" wrap="square" tIns="44100">
+          <a:bodyPr spcFirstLastPara="1" wrap="square" lIns="88200" tIns="44100" rIns="88200" bIns="44100" anchor="t" anchorCtr="0">
             <a:noAutofit/>
           </a:bodyPr>
           <a:lstStyle>
-            <a:lvl1pPr lvl="0" marR="0" rtl="0" algn="l">
+            <a:lvl1pPr marR="0" lvl="0" algn="l" rtl="0">
               <a:spcBef>
                 <a:spcPts val="0"/>
               </a:spcBef>
@@ -321,7 +338,7 @@
               </a:spcAft>
               <a:buSzPts val="1400"/>
               <a:buNone/>
-              <a:defRPr b="0" i="0" sz="1200" u="none" cap="none" strike="noStrike">
+              <a:defRPr sz="1200" b="0" i="0" u="none" strike="noStrike" cap="none">
                 <a:solidFill>
                   <a:schemeClr val="dk1"/>
                 </a:solidFill>
@@ -331,7 +348,7 @@
                 <a:sym typeface="Calibri"/>
               </a:defRPr>
             </a:lvl1pPr>
-            <a:lvl2pPr lvl="1" marR="0" rtl="0" algn="l">
+            <a:lvl2pPr marR="0" lvl="1" algn="l" rtl="0">
               <a:spcBef>
                 <a:spcPts val="0"/>
               </a:spcBef>
@@ -340,7 +357,7 @@
               </a:spcAft>
               <a:buSzPts val="1400"/>
               <a:buNone/>
-              <a:defRPr b="0" i="0" sz="1800" u="none" cap="none" strike="noStrike">
+              <a:defRPr sz="1800" b="0" i="0" u="none" strike="noStrike" cap="none">
                 <a:solidFill>
                   <a:schemeClr val="dk1"/>
                 </a:solidFill>
@@ -350,7 +367,7 @@
                 <a:sym typeface="Calibri"/>
               </a:defRPr>
             </a:lvl2pPr>
-            <a:lvl3pPr lvl="2" marR="0" rtl="0" algn="l">
+            <a:lvl3pPr marR="0" lvl="2" algn="l" rtl="0">
               <a:spcBef>
                 <a:spcPts val="0"/>
               </a:spcBef>
@@ -359,7 +376,7 @@
               </a:spcAft>
               <a:buSzPts val="1400"/>
               <a:buNone/>
-              <a:defRPr b="0" i="0" sz="1800" u="none" cap="none" strike="noStrike">
+              <a:defRPr sz="1800" b="0" i="0" u="none" strike="noStrike" cap="none">
                 <a:solidFill>
                   <a:schemeClr val="dk1"/>
                 </a:solidFill>
@@ -369,7 +386,7 @@
                 <a:sym typeface="Calibri"/>
               </a:defRPr>
             </a:lvl3pPr>
-            <a:lvl4pPr lvl="3" marR="0" rtl="0" algn="l">
+            <a:lvl4pPr marR="0" lvl="3" algn="l" rtl="0">
               <a:spcBef>
                 <a:spcPts val="0"/>
               </a:spcBef>
@@ -378,7 +395,7 @@
               </a:spcAft>
               <a:buSzPts val="1400"/>
               <a:buNone/>
-              <a:defRPr b="0" i="0" sz="1800" u="none" cap="none" strike="noStrike">
+              <a:defRPr sz="1800" b="0" i="0" u="none" strike="noStrike" cap="none">
                 <a:solidFill>
                   <a:schemeClr val="dk1"/>
                 </a:solidFill>
@@ -388,7 +405,7 @@
                 <a:sym typeface="Calibri"/>
               </a:defRPr>
             </a:lvl4pPr>
-            <a:lvl5pPr lvl="4" marR="0" rtl="0" algn="l">
+            <a:lvl5pPr marR="0" lvl="4" algn="l" rtl="0">
               <a:spcBef>
                 <a:spcPts val="0"/>
               </a:spcBef>
@@ -397,7 +414,7 @@
               </a:spcAft>
               <a:buSzPts val="1400"/>
               <a:buNone/>
-              <a:defRPr b="0" i="0" sz="1800" u="none" cap="none" strike="noStrike">
+              <a:defRPr sz="1800" b="0" i="0" u="none" strike="noStrike" cap="none">
                 <a:solidFill>
                   <a:schemeClr val="dk1"/>
                 </a:solidFill>
@@ -407,7 +424,7 @@
                 <a:sym typeface="Calibri"/>
               </a:defRPr>
             </a:lvl5pPr>
-            <a:lvl6pPr lvl="5" marR="0" rtl="0" algn="l">
+            <a:lvl6pPr marR="0" lvl="5" algn="l" rtl="0">
               <a:spcBef>
                 <a:spcPts val="0"/>
               </a:spcBef>
@@ -416,7 +433,7 @@
               </a:spcAft>
               <a:buSzPts val="1400"/>
               <a:buNone/>
-              <a:defRPr b="0" i="0" sz="1800" u="none" cap="none" strike="noStrike">
+              <a:defRPr sz="1800" b="0" i="0" u="none" strike="noStrike" cap="none">
                 <a:solidFill>
                   <a:schemeClr val="dk1"/>
                 </a:solidFill>
@@ -426,7 +443,7 @@
                 <a:sym typeface="Calibri"/>
               </a:defRPr>
             </a:lvl6pPr>
-            <a:lvl7pPr lvl="6" marR="0" rtl="0" algn="l">
+            <a:lvl7pPr marR="0" lvl="6" algn="l" rtl="0">
               <a:spcBef>
                 <a:spcPts val="0"/>
               </a:spcBef>
@@ -435,7 +452,7 @@
               </a:spcAft>
               <a:buSzPts val="1400"/>
               <a:buNone/>
-              <a:defRPr b="0" i="0" sz="1800" u="none" cap="none" strike="noStrike">
+              <a:defRPr sz="1800" b="0" i="0" u="none" strike="noStrike" cap="none">
                 <a:solidFill>
                   <a:schemeClr val="dk1"/>
                 </a:solidFill>
@@ -445,7 +462,7 @@
                 <a:sym typeface="Calibri"/>
               </a:defRPr>
             </a:lvl7pPr>
-            <a:lvl8pPr lvl="7" marR="0" rtl="0" algn="l">
+            <a:lvl8pPr marR="0" lvl="7" algn="l" rtl="0">
               <a:spcBef>
                 <a:spcPts val="0"/>
               </a:spcBef>
@@ -454,7 +471,7 @@
               </a:spcAft>
               <a:buSzPts val="1400"/>
               <a:buNone/>
-              <a:defRPr b="0" i="0" sz="1800" u="none" cap="none" strike="noStrike">
+              <a:defRPr sz="1800" b="0" i="0" u="none" strike="noStrike" cap="none">
                 <a:solidFill>
                   <a:schemeClr val="dk1"/>
                 </a:solidFill>
@@ -464,7 +481,7 @@
                 <a:sym typeface="Calibri"/>
               </a:defRPr>
             </a:lvl8pPr>
-            <a:lvl9pPr lvl="8" marR="0" rtl="0" algn="l">
+            <a:lvl9pPr marR="0" lvl="8" algn="l" rtl="0">
               <a:spcBef>
                 <a:spcPts val="0"/>
               </a:spcBef>
@@ -473,7 +490,7 @@
               </a:spcAft>
               <a:buSzPts val="1400"/>
               <a:buNone/>
-              <a:defRPr b="0" i="0" sz="1800" u="none" cap="none" strike="noStrike">
+              <a:defRPr sz="1800" b="0" i="0" u="none" strike="noStrike" cap="none">
                 <a:solidFill>
                   <a:schemeClr val="dk1"/>
                 </a:solidFill>
@@ -484,15 +501,19 @@
               </a:defRPr>
             </a:lvl9pPr>
           </a:lstStyle>
-          <a:p/>
+          <a:p>
+            <a:endParaRPr/>
+          </a:p>
         </p:txBody>
       </p:sp>
       <p:sp>
         <p:nvSpPr>
           <p:cNvPr id="4" name="Google Shape;4;n"/>
-          <p:cNvSpPr txBox="1"/>
+          <p:cNvSpPr txBox="1">
+            <a:spLocks noGrp="1"/>
+          </p:cNvSpPr>
           <p:nvPr>
-            <p:ph idx="10" type="dt"/>
+            <p:ph type="dt" idx="10"/>
           </p:nvPr>
         </p:nvSpPr>
         <p:spPr>
@@ -509,11 +530,11 @@
           </a:ln>
         </p:spPr>
         <p:txBody>
-          <a:bodyPr anchorCtr="0" anchor="t" bIns="44100" lIns="88200" spcFirstLastPara="1" rIns="88200" wrap="square" tIns="44100">
+          <a:bodyPr spcFirstLastPara="1" wrap="square" lIns="88200" tIns="44100" rIns="88200" bIns="44100" anchor="t" anchorCtr="0">
             <a:noAutofit/>
           </a:bodyPr>
           <a:lstStyle>
-            <a:lvl1pPr lvl="0" marR="0" rtl="0" algn="r">
+            <a:lvl1pPr marR="0" lvl="0" algn="r" rtl="0">
               <a:spcBef>
                 <a:spcPts val="0"/>
               </a:spcBef>
@@ -522,7 +543,7 @@
               </a:spcAft>
               <a:buSzPts val="1400"/>
               <a:buNone/>
-              <a:defRPr b="0" i="0" sz="1200" u="none" cap="none" strike="noStrike">
+              <a:defRPr sz="1200" b="0" i="0" u="none" strike="noStrike" cap="none">
                 <a:solidFill>
                   <a:schemeClr val="dk1"/>
                 </a:solidFill>
@@ -532,7 +553,7 @@
                 <a:sym typeface="Calibri"/>
               </a:defRPr>
             </a:lvl1pPr>
-            <a:lvl2pPr lvl="1" marR="0" rtl="0" algn="l">
+            <a:lvl2pPr marR="0" lvl="1" algn="l" rtl="0">
               <a:spcBef>
                 <a:spcPts val="0"/>
               </a:spcBef>
@@ -541,7 +562,7 @@
               </a:spcAft>
               <a:buSzPts val="1400"/>
               <a:buNone/>
-              <a:defRPr b="0" i="0" sz="1800" u="none" cap="none" strike="noStrike">
+              <a:defRPr sz="1800" b="0" i="0" u="none" strike="noStrike" cap="none">
                 <a:solidFill>
                   <a:schemeClr val="dk1"/>
                 </a:solidFill>
@@ -551,7 +572,7 @@
                 <a:sym typeface="Calibri"/>
               </a:defRPr>
             </a:lvl2pPr>
-            <a:lvl3pPr lvl="2" marR="0" rtl="0" algn="l">
+            <a:lvl3pPr marR="0" lvl="2" algn="l" rtl="0">
               <a:spcBef>
                 <a:spcPts val="0"/>
               </a:spcBef>
@@ -560,7 +581,7 @@
               </a:spcAft>
               <a:buSzPts val="1400"/>
               <a:buNone/>
-              <a:defRPr b="0" i="0" sz="1800" u="none" cap="none" strike="noStrike">
+              <a:defRPr sz="1800" b="0" i="0" u="none" strike="noStrike" cap="none">
                 <a:solidFill>
                   <a:schemeClr val="dk1"/>
                 </a:solidFill>
@@ -570,7 +591,7 @@
                 <a:sym typeface="Calibri"/>
               </a:defRPr>
             </a:lvl3pPr>
-            <a:lvl4pPr lvl="3" marR="0" rtl="0" algn="l">
+            <a:lvl4pPr marR="0" lvl="3" algn="l" rtl="0">
               <a:spcBef>
                 <a:spcPts val="0"/>
               </a:spcBef>
@@ -579,7 +600,7 @@
               </a:spcAft>
               <a:buSzPts val="1400"/>
               <a:buNone/>
-              <a:defRPr b="0" i="0" sz="1800" u="none" cap="none" strike="noStrike">
+              <a:defRPr sz="1800" b="0" i="0" u="none" strike="noStrike" cap="none">
                 <a:solidFill>
                   <a:schemeClr val="dk1"/>
                 </a:solidFill>
@@ -589,7 +610,7 @@
                 <a:sym typeface="Calibri"/>
               </a:defRPr>
             </a:lvl4pPr>
-            <a:lvl5pPr lvl="4" marR="0" rtl="0" algn="l">
+            <a:lvl5pPr marR="0" lvl="4" algn="l" rtl="0">
               <a:spcBef>
                 <a:spcPts val="0"/>
               </a:spcBef>
@@ -598,7 +619,7 @@
               </a:spcAft>
               <a:buSzPts val="1400"/>
               <a:buNone/>
-              <a:defRPr b="0" i="0" sz="1800" u="none" cap="none" strike="noStrike">
+              <a:defRPr sz="1800" b="0" i="0" u="none" strike="noStrike" cap="none">
                 <a:solidFill>
                   <a:schemeClr val="dk1"/>
                 </a:solidFill>
@@ -608,7 +629,7 @@
                 <a:sym typeface="Calibri"/>
               </a:defRPr>
             </a:lvl5pPr>
-            <a:lvl6pPr lvl="5" marR="0" rtl="0" algn="l">
+            <a:lvl6pPr marR="0" lvl="5" algn="l" rtl="0">
               <a:spcBef>
                 <a:spcPts val="0"/>
               </a:spcBef>
@@ -617,7 +638,7 @@
               </a:spcAft>
               <a:buSzPts val="1400"/>
               <a:buNone/>
-              <a:defRPr b="0" i="0" sz="1800" u="none" cap="none" strike="noStrike">
+              <a:defRPr sz="1800" b="0" i="0" u="none" strike="noStrike" cap="none">
                 <a:solidFill>
                   <a:schemeClr val="dk1"/>
                 </a:solidFill>
@@ -627,7 +648,7 @@
                 <a:sym typeface="Calibri"/>
               </a:defRPr>
             </a:lvl6pPr>
-            <a:lvl7pPr lvl="6" marR="0" rtl="0" algn="l">
+            <a:lvl7pPr marR="0" lvl="6" algn="l" rtl="0">
               <a:spcBef>
                 <a:spcPts val="0"/>
               </a:spcBef>
@@ -636,7 +657,7 @@
               </a:spcAft>
               <a:buSzPts val="1400"/>
               <a:buNone/>
-              <a:defRPr b="0" i="0" sz="1800" u="none" cap="none" strike="noStrike">
+              <a:defRPr sz="1800" b="0" i="0" u="none" strike="noStrike" cap="none">
                 <a:solidFill>
                   <a:schemeClr val="dk1"/>
                 </a:solidFill>
@@ -646,7 +667,7 @@
                 <a:sym typeface="Calibri"/>
               </a:defRPr>
             </a:lvl7pPr>
-            <a:lvl8pPr lvl="7" marR="0" rtl="0" algn="l">
+            <a:lvl8pPr marR="0" lvl="7" algn="l" rtl="0">
               <a:spcBef>
                 <a:spcPts val="0"/>
               </a:spcBef>
@@ -655,7 +676,7 @@
               </a:spcAft>
               <a:buSzPts val="1400"/>
               <a:buNone/>
-              <a:defRPr b="0" i="0" sz="1800" u="none" cap="none" strike="noStrike">
+              <a:defRPr sz="1800" b="0" i="0" u="none" strike="noStrike" cap="none">
                 <a:solidFill>
                   <a:schemeClr val="dk1"/>
                 </a:solidFill>
@@ -665,7 +686,7 @@
                 <a:sym typeface="Calibri"/>
               </a:defRPr>
             </a:lvl8pPr>
-            <a:lvl9pPr lvl="8" marR="0" rtl="0" algn="l">
+            <a:lvl9pPr marR="0" lvl="8" algn="l" rtl="0">
               <a:spcBef>
                 <a:spcPts val="0"/>
               </a:spcBef>
@@ -674,7 +695,7 @@
               </a:spcAft>
               <a:buSzPts val="1400"/>
               <a:buNone/>
-              <a:defRPr b="0" i="0" sz="1800" u="none" cap="none" strike="noStrike">
+              <a:defRPr sz="1800" b="0" i="0" u="none" strike="noStrike" cap="none">
                 <a:solidFill>
                   <a:schemeClr val="dk1"/>
                 </a:solidFill>
@@ -685,15 +706,19 @@
               </a:defRPr>
             </a:lvl9pPr>
           </a:lstStyle>
-          <a:p/>
+          <a:p>
+            <a:endParaRPr/>
+          </a:p>
         </p:txBody>
       </p:sp>
       <p:sp>
         <p:nvSpPr>
           <p:cNvPr id="5" name="Google Shape;5;n"/>
-          <p:cNvSpPr/>
+          <p:cNvSpPr>
+            <a:spLocks noGrp="1" noRot="1" noChangeAspect="1"/>
+          </p:cNvSpPr>
           <p:nvPr>
-            <p:ph idx="3" type="sldImg"/>
+            <p:ph type="sldImg" idx="3"/>
           </p:nvPr>
         </p:nvSpPr>
         <p:spPr>
@@ -702,9 +727,13 @@
             <a:ext cx="5376863" cy="3724275"/>
           </a:xfrm>
           <a:custGeom>
-            <a:rect b="b" l="l" r="r" t="t"/>
+            <a:avLst/>
+            <a:gdLst/>
+            <a:ahLst/>
+            <a:cxnLst/>
+            <a:rect l="l" t="t" r="r" b="b"/>
             <a:pathLst>
-              <a:path extrusionOk="0" h="120000" w="120000">
+              <a:path w="120000" h="120000" extrusionOk="0">
                 <a:moveTo>
                   <a:pt x="0" y="0"/>
                 </a:moveTo>
@@ -722,23 +751,25 @@
             </a:pathLst>
           </a:custGeom>
           <a:noFill/>
-          <a:ln cap="flat" cmpd="sng" w="12700">
+          <a:ln w="12700" cap="flat" cmpd="sng">
             <a:solidFill>
               <a:srgbClr val="000000"/>
             </a:solidFill>
             <a:prstDash val="solid"/>
             <a:round/>
-            <a:headEnd len="sm" w="sm" type="none"/>
-            <a:tailEnd len="sm" w="sm" type="none"/>
+            <a:headEnd type="none" w="sm" len="sm"/>
+            <a:tailEnd type="none" w="sm" len="sm"/>
           </a:ln>
         </p:spPr>
       </p:sp>
       <p:sp>
         <p:nvSpPr>
           <p:cNvPr id="6" name="Google Shape;6;n"/>
-          <p:cNvSpPr txBox="1"/>
+          <p:cNvSpPr txBox="1">
+            <a:spLocks noGrp="1"/>
+          </p:cNvSpPr>
           <p:nvPr>
-            <p:ph idx="1" type="body"/>
+            <p:ph type="body" idx="1"/>
           </p:nvPr>
         </p:nvSpPr>
         <p:spPr>
@@ -755,11 +786,11 @@
           </a:ln>
         </p:spPr>
         <p:txBody>
-          <a:bodyPr anchorCtr="0" anchor="t" bIns="44100" lIns="88200" spcFirstLastPara="1" rIns="88200" wrap="square" tIns="44100">
+          <a:bodyPr spcFirstLastPara="1" wrap="square" lIns="88200" tIns="44100" rIns="88200" bIns="44100" anchor="t" anchorCtr="0">
             <a:noAutofit/>
           </a:bodyPr>
           <a:lstStyle>
-            <a:lvl1pPr indent="-228600" lvl="0" marL="457200" marR="0" rtl="0" algn="l">
+            <a:lvl1pPr marL="457200" marR="0" lvl="0" indent="-228600" algn="l" rtl="0">
               <a:spcBef>
                 <a:spcPts val="0"/>
               </a:spcBef>
@@ -768,7 +799,7 @@
               </a:spcAft>
               <a:buSzPts val="1400"/>
               <a:buNone/>
-              <a:defRPr b="0" i="0" sz="1200" u="none" cap="none" strike="noStrike">
+              <a:defRPr sz="1200" b="0" i="0" u="none" strike="noStrike" cap="none">
                 <a:solidFill>
                   <a:schemeClr val="dk1"/>
                 </a:solidFill>
@@ -778,7 +809,7 @@
                 <a:sym typeface="Calibri"/>
               </a:defRPr>
             </a:lvl1pPr>
-            <a:lvl2pPr indent="-228600" lvl="1" marL="914400" marR="0" rtl="0" algn="l">
+            <a:lvl2pPr marL="914400" marR="0" lvl="1" indent="-228600" algn="l" rtl="0">
               <a:spcBef>
                 <a:spcPts val="0"/>
               </a:spcBef>
@@ -787,7 +818,7 @@
               </a:spcAft>
               <a:buSzPts val="1400"/>
               <a:buNone/>
-              <a:defRPr b="0" i="0" sz="1200" u="none" cap="none" strike="noStrike">
+              <a:defRPr sz="1200" b="0" i="0" u="none" strike="noStrike" cap="none">
                 <a:solidFill>
                   <a:schemeClr val="dk1"/>
                 </a:solidFill>
@@ -797,7 +828,7 @@
                 <a:sym typeface="Calibri"/>
               </a:defRPr>
             </a:lvl2pPr>
-            <a:lvl3pPr indent="-228600" lvl="2" marL="1371600" marR="0" rtl="0" algn="l">
+            <a:lvl3pPr marL="1371600" marR="0" lvl="2" indent="-228600" algn="l" rtl="0">
               <a:spcBef>
                 <a:spcPts val="0"/>
               </a:spcBef>
@@ -806,7 +837,7 @@
               </a:spcAft>
               <a:buSzPts val="1400"/>
               <a:buNone/>
-              <a:defRPr b="0" i="0" sz="1200" u="none" cap="none" strike="noStrike">
+              <a:defRPr sz="1200" b="0" i="0" u="none" strike="noStrike" cap="none">
                 <a:solidFill>
                   <a:schemeClr val="dk1"/>
                 </a:solidFill>
@@ -816,7 +847,7 @@
                 <a:sym typeface="Calibri"/>
               </a:defRPr>
             </a:lvl3pPr>
-            <a:lvl4pPr indent="-228600" lvl="3" marL="1828800" marR="0" rtl="0" algn="l">
+            <a:lvl4pPr marL="1828800" marR="0" lvl="3" indent="-228600" algn="l" rtl="0">
               <a:spcBef>
                 <a:spcPts val="0"/>
               </a:spcBef>
@@ -825,7 +856,7 @@
               </a:spcAft>
               <a:buSzPts val="1400"/>
               <a:buNone/>
-              <a:defRPr b="0" i="0" sz="1200" u="none" cap="none" strike="noStrike">
+              <a:defRPr sz="1200" b="0" i="0" u="none" strike="noStrike" cap="none">
                 <a:solidFill>
                   <a:schemeClr val="dk1"/>
                 </a:solidFill>
@@ -835,7 +866,7 @@
                 <a:sym typeface="Calibri"/>
               </a:defRPr>
             </a:lvl4pPr>
-            <a:lvl5pPr indent="-228600" lvl="4" marL="2286000" marR="0" rtl="0" algn="l">
+            <a:lvl5pPr marL="2286000" marR="0" lvl="4" indent="-228600" algn="l" rtl="0">
               <a:spcBef>
                 <a:spcPts val="0"/>
               </a:spcBef>
@@ -844,7 +875,7 @@
               </a:spcAft>
               <a:buSzPts val="1400"/>
               <a:buNone/>
-              <a:defRPr b="0" i="0" sz="1200" u="none" cap="none" strike="noStrike">
+              <a:defRPr sz="1200" b="0" i="0" u="none" strike="noStrike" cap="none">
                 <a:solidFill>
                   <a:schemeClr val="dk1"/>
                 </a:solidFill>
@@ -854,7 +885,7 @@
                 <a:sym typeface="Calibri"/>
               </a:defRPr>
             </a:lvl5pPr>
-            <a:lvl6pPr indent="-228600" lvl="5" marL="2743200" marR="0" rtl="0" algn="l">
+            <a:lvl6pPr marL="2743200" marR="0" lvl="5" indent="-228600" algn="l" rtl="0">
               <a:spcBef>
                 <a:spcPts val="0"/>
               </a:spcBef>
@@ -863,7 +894,7 @@
               </a:spcAft>
               <a:buSzPts val="1400"/>
               <a:buNone/>
-              <a:defRPr b="0" i="0" sz="1200" u="none" cap="none" strike="noStrike">
+              <a:defRPr sz="1200" b="0" i="0" u="none" strike="noStrike" cap="none">
                 <a:solidFill>
                   <a:schemeClr val="dk1"/>
                 </a:solidFill>
@@ -873,7 +904,7 @@
                 <a:sym typeface="Calibri"/>
               </a:defRPr>
             </a:lvl6pPr>
-            <a:lvl7pPr indent="-228600" lvl="6" marL="3200400" marR="0" rtl="0" algn="l">
+            <a:lvl7pPr marL="3200400" marR="0" lvl="6" indent="-228600" algn="l" rtl="0">
               <a:spcBef>
                 <a:spcPts val="0"/>
               </a:spcBef>
@@ -882,7 +913,7 @@
               </a:spcAft>
               <a:buSzPts val="1400"/>
               <a:buNone/>
-              <a:defRPr b="0" i="0" sz="1200" u="none" cap="none" strike="noStrike">
+              <a:defRPr sz="1200" b="0" i="0" u="none" strike="noStrike" cap="none">
                 <a:solidFill>
                   <a:schemeClr val="dk1"/>
                 </a:solidFill>
@@ -892,7 +923,7 @@
                 <a:sym typeface="Calibri"/>
               </a:defRPr>
             </a:lvl7pPr>
-            <a:lvl8pPr indent="-228600" lvl="7" marL="3657600" marR="0" rtl="0" algn="l">
+            <a:lvl8pPr marL="3657600" marR="0" lvl="7" indent="-228600" algn="l" rtl="0">
               <a:spcBef>
                 <a:spcPts val="0"/>
               </a:spcBef>
@@ -901,7 +932,7 @@
               </a:spcAft>
               <a:buSzPts val="1400"/>
               <a:buNone/>
-              <a:defRPr b="0" i="0" sz="1200" u="none" cap="none" strike="noStrike">
+              <a:defRPr sz="1200" b="0" i="0" u="none" strike="noStrike" cap="none">
                 <a:solidFill>
                   <a:schemeClr val="dk1"/>
                 </a:solidFill>
@@ -911,7 +942,7 @@
                 <a:sym typeface="Calibri"/>
               </a:defRPr>
             </a:lvl8pPr>
-            <a:lvl9pPr indent="-228600" lvl="8" marL="4114800" marR="0" rtl="0" algn="l">
+            <a:lvl9pPr marL="4114800" marR="0" lvl="8" indent="-228600" algn="l" rtl="0">
               <a:spcBef>
                 <a:spcPts val="0"/>
               </a:spcBef>
@@ -920,7 +951,7 @@
               </a:spcAft>
               <a:buSzPts val="1400"/>
               <a:buNone/>
-              <a:defRPr b="0" i="0" sz="1200" u="none" cap="none" strike="noStrike">
+              <a:defRPr sz="1200" b="0" i="0" u="none" strike="noStrike" cap="none">
                 <a:solidFill>
                   <a:schemeClr val="dk1"/>
                 </a:solidFill>
@@ -931,15 +962,19 @@
               </a:defRPr>
             </a:lvl9pPr>
           </a:lstStyle>
-          <a:p/>
+          <a:p>
+            <a:endParaRPr/>
+          </a:p>
         </p:txBody>
       </p:sp>
       <p:sp>
         <p:nvSpPr>
           <p:cNvPr id="7" name="Google Shape;7;n"/>
-          <p:cNvSpPr txBox="1"/>
+          <p:cNvSpPr txBox="1">
+            <a:spLocks noGrp="1"/>
+          </p:cNvSpPr>
           <p:nvPr>
-            <p:ph idx="11" type="ftr"/>
+            <p:ph type="ftr" idx="11"/>
           </p:nvPr>
         </p:nvSpPr>
         <p:spPr>
@@ -956,11 +991,11 @@
           </a:ln>
         </p:spPr>
         <p:txBody>
-          <a:bodyPr anchorCtr="0" anchor="b" bIns="44100" lIns="88200" spcFirstLastPara="1" rIns="88200" wrap="square" tIns="44100">
+          <a:bodyPr spcFirstLastPara="1" wrap="square" lIns="88200" tIns="44100" rIns="88200" bIns="44100" anchor="b" anchorCtr="0">
             <a:noAutofit/>
           </a:bodyPr>
           <a:lstStyle>
-            <a:lvl1pPr lvl="0" marR="0" rtl="0" algn="l">
+            <a:lvl1pPr marR="0" lvl="0" algn="l" rtl="0">
               <a:spcBef>
                 <a:spcPts val="0"/>
               </a:spcBef>
@@ -969,7 +1004,7 @@
               </a:spcAft>
               <a:buSzPts val="1400"/>
               <a:buNone/>
-              <a:defRPr b="0" i="0" sz="1200" u="none" cap="none" strike="noStrike">
+              <a:defRPr sz="1200" b="0" i="0" u="none" strike="noStrike" cap="none">
                 <a:solidFill>
                   <a:schemeClr val="dk1"/>
                 </a:solidFill>
@@ -979,7 +1014,7 @@
                 <a:sym typeface="Calibri"/>
               </a:defRPr>
             </a:lvl1pPr>
-            <a:lvl2pPr lvl="1" marR="0" rtl="0" algn="l">
+            <a:lvl2pPr marR="0" lvl="1" algn="l" rtl="0">
               <a:spcBef>
                 <a:spcPts val="0"/>
               </a:spcBef>
@@ -988,7 +1023,7 @@
               </a:spcAft>
               <a:buSzPts val="1400"/>
               <a:buNone/>
-              <a:defRPr b="0" i="0" sz="1800" u="none" cap="none" strike="noStrike">
+              <a:defRPr sz="1800" b="0" i="0" u="none" strike="noStrike" cap="none">
                 <a:solidFill>
                   <a:schemeClr val="dk1"/>
                 </a:solidFill>
@@ -998,7 +1033,7 @@
                 <a:sym typeface="Calibri"/>
               </a:defRPr>
             </a:lvl2pPr>
-            <a:lvl3pPr lvl="2" marR="0" rtl="0" algn="l">
+            <a:lvl3pPr marR="0" lvl="2" algn="l" rtl="0">
               <a:spcBef>
                 <a:spcPts val="0"/>
               </a:spcBef>
@@ -1007,7 +1042,7 @@
               </a:spcAft>
               <a:buSzPts val="1400"/>
               <a:buNone/>
-              <a:defRPr b="0" i="0" sz="1800" u="none" cap="none" strike="noStrike">
+              <a:defRPr sz="1800" b="0" i="0" u="none" strike="noStrike" cap="none">
                 <a:solidFill>
                   <a:schemeClr val="dk1"/>
                 </a:solidFill>
@@ -1017,7 +1052,7 @@
                 <a:sym typeface="Calibri"/>
               </a:defRPr>
             </a:lvl3pPr>
-            <a:lvl4pPr lvl="3" marR="0" rtl="0" algn="l">
+            <a:lvl4pPr marR="0" lvl="3" algn="l" rtl="0">
               <a:spcBef>
                 <a:spcPts val="0"/>
               </a:spcBef>
@@ -1026,7 +1061,7 @@
               </a:spcAft>
               <a:buSzPts val="1400"/>
               <a:buNone/>
-              <a:defRPr b="0" i="0" sz="1800" u="none" cap="none" strike="noStrike">
+              <a:defRPr sz="1800" b="0" i="0" u="none" strike="noStrike" cap="none">
                 <a:solidFill>
                   <a:schemeClr val="dk1"/>
                 </a:solidFill>
@@ -1036,7 +1071,7 @@
                 <a:sym typeface="Calibri"/>
               </a:defRPr>
             </a:lvl4pPr>
-            <a:lvl5pPr lvl="4" marR="0" rtl="0" algn="l">
+            <a:lvl5pPr marR="0" lvl="4" algn="l" rtl="0">
               <a:spcBef>
                 <a:spcPts val="0"/>
               </a:spcBef>
@@ -1045,7 +1080,7 @@
               </a:spcAft>
               <a:buSzPts val="1400"/>
               <a:buNone/>
-              <a:defRPr b="0" i="0" sz="1800" u="none" cap="none" strike="noStrike">
+              <a:defRPr sz="1800" b="0" i="0" u="none" strike="noStrike" cap="none">
                 <a:solidFill>
                   <a:schemeClr val="dk1"/>
                 </a:solidFill>
@@ -1055,7 +1090,7 @@
                 <a:sym typeface="Calibri"/>
               </a:defRPr>
             </a:lvl5pPr>
-            <a:lvl6pPr lvl="5" marR="0" rtl="0" algn="l">
+            <a:lvl6pPr marR="0" lvl="5" algn="l" rtl="0">
               <a:spcBef>
                 <a:spcPts val="0"/>
               </a:spcBef>
@@ -1064,7 +1099,7 @@
               </a:spcAft>
               <a:buSzPts val="1400"/>
               <a:buNone/>
-              <a:defRPr b="0" i="0" sz="1800" u="none" cap="none" strike="noStrike">
+              <a:defRPr sz="1800" b="0" i="0" u="none" strike="noStrike" cap="none">
                 <a:solidFill>
                   <a:schemeClr val="dk1"/>
                 </a:solidFill>
@@ -1074,7 +1109,7 @@
                 <a:sym typeface="Calibri"/>
               </a:defRPr>
             </a:lvl6pPr>
-            <a:lvl7pPr lvl="6" marR="0" rtl="0" algn="l">
+            <a:lvl7pPr marR="0" lvl="6" algn="l" rtl="0">
               <a:spcBef>
                 <a:spcPts val="0"/>
               </a:spcBef>
@@ -1083,7 +1118,7 @@
               </a:spcAft>
               <a:buSzPts val="1400"/>
               <a:buNone/>
-              <a:defRPr b="0" i="0" sz="1800" u="none" cap="none" strike="noStrike">
+              <a:defRPr sz="1800" b="0" i="0" u="none" strike="noStrike" cap="none">
                 <a:solidFill>
                   <a:schemeClr val="dk1"/>
                 </a:solidFill>
@@ -1093,7 +1128,7 @@
                 <a:sym typeface="Calibri"/>
               </a:defRPr>
             </a:lvl7pPr>
-            <a:lvl8pPr lvl="7" marR="0" rtl="0" algn="l">
+            <a:lvl8pPr marR="0" lvl="7" algn="l" rtl="0">
               <a:spcBef>
                 <a:spcPts val="0"/>
               </a:spcBef>
@@ -1102,7 +1137,7 @@
               </a:spcAft>
               <a:buSzPts val="1400"/>
               <a:buNone/>
-              <a:defRPr b="0" i="0" sz="1800" u="none" cap="none" strike="noStrike">
+              <a:defRPr sz="1800" b="0" i="0" u="none" strike="noStrike" cap="none">
                 <a:solidFill>
                   <a:schemeClr val="dk1"/>
                 </a:solidFill>
@@ -1112,7 +1147,7 @@
                 <a:sym typeface="Calibri"/>
               </a:defRPr>
             </a:lvl8pPr>
-            <a:lvl9pPr lvl="8" marR="0" rtl="0" algn="l">
+            <a:lvl9pPr marR="0" lvl="8" algn="l" rtl="0">
               <a:spcBef>
                 <a:spcPts val="0"/>
               </a:spcBef>
@@ -1121,7 +1156,7 @@
               </a:spcAft>
               <a:buSzPts val="1400"/>
               <a:buNone/>
-              <a:defRPr b="0" i="0" sz="1800" u="none" cap="none" strike="noStrike">
+              <a:defRPr sz="1800" b="0" i="0" u="none" strike="noStrike" cap="none">
                 <a:solidFill>
                   <a:schemeClr val="dk1"/>
                 </a:solidFill>
@@ -1132,15 +1167,19 @@
               </a:defRPr>
             </a:lvl9pPr>
           </a:lstStyle>
-          <a:p/>
+          <a:p>
+            <a:endParaRPr/>
+          </a:p>
         </p:txBody>
       </p:sp>
       <p:sp>
         <p:nvSpPr>
           <p:cNvPr id="8" name="Google Shape;8;n"/>
-          <p:cNvSpPr txBox="1"/>
+          <p:cNvSpPr txBox="1">
+            <a:spLocks noGrp="1"/>
+          </p:cNvSpPr>
           <p:nvPr>
-            <p:ph idx="12" type="sldNum"/>
+            <p:ph type="sldNum" idx="12"/>
           </p:nvPr>
         </p:nvSpPr>
         <p:spPr>
@@ -1157,12 +1196,12 @@
           </a:ln>
         </p:spPr>
         <p:txBody>
-          <a:bodyPr anchorCtr="0" anchor="b" bIns="44100" lIns="88200" spcFirstLastPara="1" rIns="88200" wrap="square" tIns="44100">
+          <a:bodyPr spcFirstLastPara="1" wrap="square" lIns="88200" tIns="44100" rIns="88200" bIns="44100" anchor="b" anchorCtr="0">
             <a:noAutofit/>
           </a:bodyPr>
           <a:lstStyle/>
           <a:p>
-            <a:pPr indent="0" lvl="0" marL="0" marR="0" rtl="0" algn="r">
+            <a:pPr marL="0" marR="0" lvl="0" indent="0" algn="r" rtl="0">
               <a:spcBef>
                 <a:spcPts val="0"/>
               </a:spcBef>
@@ -1172,7 +1211,7 @@
               <a:buNone/>
             </a:pPr>
             <a:fld id="{00000000-1234-1234-1234-123412341234}" type="slidenum">
-              <a:rPr b="0" i="0" lang="ja-JP" sz="1200" u="none" cap="none" strike="noStrike">
+              <a:rPr lang="ja-JP" sz="1200" b="0" i="0" u="none" strike="noStrike" cap="none">
                 <a:solidFill>
                   <a:schemeClr val="dk1"/>
                 </a:solidFill>
@@ -1183,7 +1222,7 @@
               </a:rPr>
               <a:t>‹#›</a:t>
             </a:fld>
-            <a:endParaRPr b="0" i="0" sz="1200" u="none" cap="none" strike="noStrike">
+            <a:endParaRPr sz="1200" b="0" i="0" u="none" strike="noStrike" cap="none">
               <a:solidFill>
                 <a:schemeClr val="dk1"/>
               </a:solidFill>
@@ -1197,9 +1236,9 @@
       </p:sp>
     </p:spTree>
   </p:cSld>
-  <p:clrMap accent1="accent1" accent2="accent2" accent3="accent3" accent4="accent4" accent5="accent5" accent6="accent6" bg1="lt1" bg2="dk2" tx1="dk1" tx2="lt2" folHlink="folHlink" hlink="hlink"/>
+  <p:clrMap bg1="lt1" tx1="dk1" bg2="dk2" tx2="lt2" accent1="accent1" accent2="accent2" accent3="accent3" accent4="accent4" accent5="accent5" accent6="accent6" hlink="hlink" folHlink="folHlink"/>
   <p:notesStyle>
-    <a:defPPr lvl="0" marR="0" rtl="0" algn="l">
+    <a:defPPr marR="0" lvl="0" algn="l" rtl="0">
       <a:lnSpc>
         <a:spcPct val="100000"/>
       </a:lnSpc>
@@ -1210,7 +1249,7 @@
         <a:spcPts val="0"/>
       </a:spcAft>
     </a:defPPr>
-    <a:lvl1pPr lvl="0" marR="0" rtl="0" algn="l">
+    <a:lvl1pPr marR="0" lvl="0" algn="l" rtl="0">
       <a:lnSpc>
         <a:spcPct val="100000"/>
       </a:lnSpc>
@@ -1224,7 +1263,7 @@
         <a:srgbClr val="000000"/>
       </a:buClr>
       <a:buFont typeface="Arial"/>
-      <a:defRPr b="0" i="0" spc="0" sz="1400" u="none" cap="none" strike="noStrike">
+      <a:defRPr sz="1400" b="0" i="0" u="none" strike="noStrike" cap="none" spc="0">
         <a:solidFill>
           <a:srgbClr val="000000"/>
         </a:solidFill>
@@ -1234,7 +1273,7 @@
         <a:sym typeface="Arial"/>
       </a:defRPr>
     </a:lvl1pPr>
-    <a:lvl2pPr lvl="1" marR="0" rtl="0" algn="l">
+    <a:lvl2pPr marR="0" lvl="1" algn="l" rtl="0">
       <a:lnSpc>
         <a:spcPct val="100000"/>
       </a:lnSpc>
@@ -1248,7 +1287,7 @@
         <a:srgbClr val="000000"/>
       </a:buClr>
       <a:buFont typeface="Arial"/>
-      <a:defRPr b="0" i="0" spc="0" sz="1400" u="none" cap="none" strike="noStrike">
+      <a:defRPr sz="1400" b="0" i="0" u="none" strike="noStrike" cap="none" spc="0">
         <a:solidFill>
           <a:srgbClr val="000000"/>
         </a:solidFill>
@@ -1258,7 +1297,7 @@
         <a:sym typeface="Arial"/>
       </a:defRPr>
     </a:lvl2pPr>
-    <a:lvl3pPr lvl="2" marR="0" rtl="0" algn="l">
+    <a:lvl3pPr marR="0" lvl="2" algn="l" rtl="0">
       <a:lnSpc>
         <a:spcPct val="100000"/>
       </a:lnSpc>
@@ -1272,7 +1311,7 @@
         <a:srgbClr val="000000"/>
       </a:buClr>
       <a:buFont typeface="Arial"/>
-      <a:defRPr b="0" i="0" spc="0" sz="1400" u="none" cap="none" strike="noStrike">
+      <a:defRPr sz="1400" b="0" i="0" u="none" strike="noStrike" cap="none" spc="0">
         <a:solidFill>
           <a:srgbClr val="000000"/>
         </a:solidFill>
@@ -1282,7 +1321,7 @@
         <a:sym typeface="Arial"/>
       </a:defRPr>
     </a:lvl3pPr>
-    <a:lvl4pPr lvl="3" marR="0" rtl="0" algn="l">
+    <a:lvl4pPr marR="0" lvl="3" algn="l" rtl="0">
       <a:lnSpc>
         <a:spcPct val="100000"/>
       </a:lnSpc>
@@ -1296,7 +1335,7 @@
         <a:srgbClr val="000000"/>
       </a:buClr>
       <a:buFont typeface="Arial"/>
-      <a:defRPr b="0" i="0" spc="0" sz="1400" u="none" cap="none" strike="noStrike">
+      <a:defRPr sz="1400" b="0" i="0" u="none" strike="noStrike" cap="none" spc="0">
         <a:solidFill>
           <a:srgbClr val="000000"/>
         </a:solidFill>
@@ -1306,7 +1345,7 @@
         <a:sym typeface="Arial"/>
       </a:defRPr>
     </a:lvl4pPr>
-    <a:lvl5pPr lvl="4" marR="0" rtl="0" algn="l">
+    <a:lvl5pPr marR="0" lvl="4" algn="l" rtl="0">
       <a:lnSpc>
         <a:spcPct val="100000"/>
       </a:lnSpc>
@@ -1320,7 +1359,7 @@
         <a:srgbClr val="000000"/>
       </a:buClr>
       <a:buFont typeface="Arial"/>
-      <a:defRPr b="0" i="0" spc="0" sz="1400" u="none" cap="none" strike="noStrike">
+      <a:defRPr sz="1400" b="0" i="0" u="none" strike="noStrike" cap="none" spc="0">
         <a:solidFill>
           <a:srgbClr val="000000"/>
         </a:solidFill>
@@ -1330,7 +1369,7 @@
         <a:sym typeface="Arial"/>
       </a:defRPr>
     </a:lvl5pPr>
-    <a:lvl6pPr lvl="5" marR="0" rtl="0" algn="l">
+    <a:lvl6pPr marR="0" lvl="5" algn="l" rtl="0">
       <a:lnSpc>
         <a:spcPct val="100000"/>
       </a:lnSpc>
@@ -1344,7 +1383,7 @@
         <a:srgbClr val="000000"/>
       </a:buClr>
       <a:buFont typeface="Arial"/>
-      <a:defRPr b="0" i="0" spc="0" sz="1400" u="none" cap="none" strike="noStrike">
+      <a:defRPr sz="1400" b="0" i="0" u="none" strike="noStrike" cap="none" spc="0">
         <a:solidFill>
           <a:srgbClr val="000000"/>
         </a:solidFill>
@@ -1354,7 +1393,7 @@
         <a:sym typeface="Arial"/>
       </a:defRPr>
     </a:lvl6pPr>
-    <a:lvl7pPr lvl="6" marR="0" rtl="0" algn="l">
+    <a:lvl7pPr marR="0" lvl="6" algn="l" rtl="0">
       <a:lnSpc>
         <a:spcPct val="100000"/>
       </a:lnSpc>
@@ -1368,7 +1407,7 @@
         <a:srgbClr val="000000"/>
       </a:buClr>
       <a:buFont typeface="Arial"/>
-      <a:defRPr b="0" i="0" spc="0" sz="1400" u="none" cap="none" strike="noStrike">
+      <a:defRPr sz="1400" b="0" i="0" u="none" strike="noStrike" cap="none" spc="0">
         <a:solidFill>
           <a:srgbClr val="000000"/>
         </a:solidFill>
@@ -1378,7 +1417,7 @@
         <a:sym typeface="Arial"/>
       </a:defRPr>
     </a:lvl7pPr>
-    <a:lvl8pPr lvl="7" marR="0" rtl="0" algn="l">
+    <a:lvl8pPr marR="0" lvl="7" algn="l" rtl="0">
       <a:lnSpc>
         <a:spcPct val="100000"/>
       </a:lnSpc>
@@ -1392,7 +1431,7 @@
         <a:srgbClr val="000000"/>
       </a:buClr>
       <a:buFont typeface="Arial"/>
-      <a:defRPr b="0" i="0" spc="0" sz="1400" u="none" cap="none" strike="noStrike">
+      <a:defRPr sz="1400" b="0" i="0" u="none" strike="noStrike" cap="none" spc="0">
         <a:solidFill>
           <a:srgbClr val="000000"/>
         </a:solidFill>
@@ -1402,7 +1441,7 @@
         <a:sym typeface="Arial"/>
       </a:defRPr>
     </a:lvl8pPr>
-    <a:lvl9pPr lvl="8" marR="0" rtl="0" algn="l">
+    <a:lvl9pPr marR="0" lvl="8" algn="l" rtl="0">
       <a:lnSpc>
         <a:spcPct val="100000"/>
       </a:lnSpc>
@@ -1416,7 +1455,7 @@
         <a:srgbClr val="000000"/>
       </a:buClr>
       <a:buFont typeface="Arial"/>
-      <a:defRPr b="0" i="0" spc="0" sz="1400" u="none" cap="none" strike="noStrike">
+      <a:defRPr sz="1400" b="0" i="0" u="none" strike="noStrike" cap="none" spc="0">
         <a:solidFill>
           <a:srgbClr val="000000"/>
         </a:solidFill>
@@ -1431,11 +1470,11 @@
 </file>
 
 <file path=ppt/notesSlides/notesSlide1.xml><?xml version="1.0" encoding="utf-8"?>
-<p:notes xmlns:a="http://schemas.openxmlformats.org/drawingml/2006/main" xmlns:r="http://schemas.openxmlformats.org/officeDocument/2006/relationships" xmlns:mc="http://schemas.openxmlformats.org/markup-compatibility/2006" xmlns:mv="urn:schemas-microsoft-com:mac:vml" xmlns:p="http://schemas.openxmlformats.org/presentationml/2006/main" xmlns:c="http://schemas.openxmlformats.org/drawingml/2006/chart" xmlns:dgm="http://schemas.openxmlformats.org/drawingml/2006/diagram" xmlns:o="urn:schemas-microsoft-com:office:office" xmlns:v="urn:schemas-microsoft-com:vml" xmlns:pvml="urn:schemas-microsoft-com:office:powerpoint" xmlns:com="http://schemas.openxmlformats.org/drawingml/2006/compatibility" xmlns:p14="http://schemas.microsoft.com/office/powerpoint/2010/main" xmlns:p15="http://schemas.microsoft.com/office/powerpoint/2012/main" xmlns:ahyp="http://schemas.microsoft.com/office/drawing/2018/hyperlinkcolor" showMasterPhAnim="0" showMasterSp="0">
+<p:notes xmlns:a="http://schemas.openxmlformats.org/drawingml/2006/main" xmlns:r="http://schemas.openxmlformats.org/officeDocument/2006/relationships" xmlns:p="http://schemas.openxmlformats.org/presentationml/2006/main" showMasterSp="0" showMasterPhAnim="0">
   <p:cSld>
     <p:spTree>
       <p:nvGrpSpPr>
-        <p:cNvPr id="20" name="Shape 20"/>
+        <p:cNvPr id="1" name="Shape 20"/>
         <p:cNvGrpSpPr/>
         <p:nvPr/>
       </p:nvGrpSpPr>
@@ -1450,9 +1489,11 @@
       <p:sp>
         <p:nvSpPr>
           <p:cNvPr id="21" name="Google Shape;21;p1:notes"/>
-          <p:cNvSpPr/>
+          <p:cNvSpPr>
+            <a:spLocks noGrp="1" noRot="1" noChangeAspect="1"/>
+          </p:cNvSpPr>
           <p:nvPr>
-            <p:ph idx="2" type="sldImg"/>
+            <p:ph type="sldImg" idx="2"/>
           </p:nvPr>
         </p:nvSpPr>
         <p:spPr>
@@ -1461,9 +1502,13 @@
             <a:ext cx="3681413" cy="2549525"/>
           </a:xfrm>
           <a:custGeom>
-            <a:rect b="b" l="l" r="r" t="t"/>
+            <a:avLst/>
+            <a:gdLst/>
+            <a:ahLst/>
+            <a:cxnLst/>
+            <a:rect l="l" t="t" r="r" b="b"/>
             <a:pathLst>
-              <a:path extrusionOk="0" h="120000" w="120000">
+              <a:path w="120000" h="120000" extrusionOk="0">
                 <a:moveTo>
                   <a:pt x="0" y="0"/>
                 </a:moveTo>
@@ -1481,23 +1526,25 @@
             </a:pathLst>
           </a:custGeom>
           <a:noFill/>
-          <a:ln cap="flat" cmpd="sng" w="9525">
+          <a:ln w="9525" cap="flat" cmpd="sng">
             <a:solidFill>
               <a:srgbClr val="000000"/>
             </a:solidFill>
             <a:prstDash val="solid"/>
             <a:miter lim="8000"/>
-            <a:headEnd len="sm" w="sm" type="none"/>
-            <a:tailEnd len="sm" w="sm" type="none"/>
+            <a:headEnd type="none" w="sm" len="sm"/>
+            <a:tailEnd type="none" w="sm" len="sm"/>
           </a:ln>
         </p:spPr>
       </p:sp>
       <p:sp>
         <p:nvSpPr>
           <p:cNvPr id="22" name="Google Shape;22;p1:notes"/>
-          <p:cNvSpPr txBox="1"/>
+          <p:cNvSpPr txBox="1">
+            <a:spLocks noGrp="1"/>
+          </p:cNvSpPr>
           <p:nvPr>
-            <p:ph idx="1" type="body"/>
+            <p:ph type="body" idx="1"/>
           </p:nvPr>
         </p:nvSpPr>
         <p:spPr>
@@ -1514,12 +1561,12 @@
           </a:ln>
         </p:spPr>
         <p:txBody>
-          <a:bodyPr anchorCtr="0" anchor="t" bIns="44100" lIns="88200" spcFirstLastPara="1" rIns="88200" wrap="square" tIns="44100">
+          <a:bodyPr spcFirstLastPara="1" wrap="square" lIns="88200" tIns="44100" rIns="88200" bIns="44100" anchor="t" anchorCtr="0">
             <a:noAutofit/>
           </a:bodyPr>
           <a:lstStyle/>
           <a:p>
-            <a:pPr indent="0" lvl="0" marL="0" rtl="0" algn="l">
+            <a:pPr marL="0" lvl="0" indent="0" algn="l" rtl="0">
               <a:spcBef>
                 <a:spcPts val="0"/>
               </a:spcBef>
@@ -1528,9 +1575,6 @@
               </a:spcAft>
               <a:buNone/>
             </a:pPr>
-            <a:r>
-              <a:t/>
-            </a:r>
             <a:endParaRPr>
               <a:latin typeface="Calibri"/>
               <a:ea typeface="Calibri"/>
@@ -1543,9 +1587,11 @@
       <p:sp>
         <p:nvSpPr>
           <p:cNvPr id="23" name="Google Shape;23;p1:notes"/>
-          <p:cNvSpPr txBox="1"/>
+          <p:cNvSpPr txBox="1">
+            <a:spLocks noGrp="1"/>
+          </p:cNvSpPr>
           <p:nvPr>
-            <p:ph idx="11" type="ftr"/>
+            <p:ph type="ftr" idx="11"/>
           </p:nvPr>
         </p:nvSpPr>
         <p:spPr>
@@ -1562,12 +1608,12 @@
           </a:ln>
         </p:spPr>
         <p:txBody>
-          <a:bodyPr anchorCtr="0" anchor="b" bIns="44100" lIns="88200" spcFirstLastPara="1" rIns="88200" wrap="square" tIns="44100">
+          <a:bodyPr spcFirstLastPara="1" wrap="square" lIns="88200" tIns="44100" rIns="88200" bIns="44100" anchor="b" anchorCtr="0">
             <a:noAutofit/>
           </a:bodyPr>
           <a:lstStyle/>
           <a:p>
-            <a:pPr indent="0" lvl="0" marL="0" rtl="0" algn="l">
+            <a:pPr marL="0" lvl="0" indent="0" algn="l" rtl="0">
               <a:spcBef>
                 <a:spcPts val="0"/>
               </a:spcBef>
@@ -1576,9 +1622,6 @@
               </a:spcAft>
               <a:buNone/>
             </a:pPr>
-            <a:r>
-              <a:t/>
-            </a:r>
             <a:endParaRPr/>
           </a:p>
         </p:txBody>
@@ -1586,9 +1629,11 @@
       <p:sp>
         <p:nvSpPr>
           <p:cNvPr id="24" name="Google Shape;24;p1:notes"/>
-          <p:cNvSpPr txBox="1"/>
+          <p:cNvSpPr txBox="1">
+            <a:spLocks noGrp="1"/>
+          </p:cNvSpPr>
           <p:nvPr>
-            <p:ph idx="12" type="sldNum"/>
+            <p:ph type="sldNum" idx="12"/>
           </p:nvPr>
         </p:nvSpPr>
         <p:spPr>
@@ -1605,12 +1650,12 @@
           </a:ln>
         </p:spPr>
         <p:txBody>
-          <a:bodyPr anchorCtr="0" anchor="b" bIns="44100" lIns="88200" spcFirstLastPara="1" rIns="88200" wrap="square" tIns="44100">
+          <a:bodyPr spcFirstLastPara="1" wrap="square" lIns="88200" tIns="44100" rIns="88200" bIns="44100" anchor="b" anchorCtr="0">
             <a:noAutofit/>
           </a:bodyPr>
           <a:lstStyle/>
           <a:p>
-            <a:pPr indent="0" lvl="0" marL="0" rtl="0" algn="r">
+            <a:pPr marL="0" lvl="0" indent="0" algn="r" rtl="0">
               <a:spcBef>
                 <a:spcPts val="0"/>
               </a:spcBef>
@@ -1620,7 +1665,7 @@
               <a:buNone/>
             </a:pPr>
             <a:fld id="{00000000-1234-1234-1234-123412341234}" type="slidenum">
-              <a:rPr b="0" i="0" lang="ja-JP" sz="1300" u="none" cap="none" strike="noStrike">
+              <a:rPr lang="en-US" altLang="ja-JP" sz="1300" b="0" i="0" u="none" strike="noStrike" cap="none">
                 <a:solidFill>
                   <a:schemeClr val="dk1"/>
                 </a:solidFill>
@@ -1629,9 +1674,9 @@
                 <a:cs typeface="Calibri"/>
                 <a:sym typeface="Calibri"/>
               </a:rPr>
-              <a:t>‹#›</a:t>
+              <a:t>1</a:t>
             </a:fld>
-            <a:endParaRPr b="0" i="0" sz="1300" u="none" cap="none" strike="noStrike">
+            <a:endParaRPr sz="1300" b="0" i="0" u="none" strike="noStrike" cap="none">
               <a:solidFill>
                 <a:schemeClr val="dk1"/>
               </a:solidFill>
@@ -1652,11 +1697,11 @@
 </file>
 
 <file path=ppt/notesSlides/notesSlide2.xml><?xml version="1.0" encoding="utf-8"?>
-<p:notes xmlns:a="http://schemas.openxmlformats.org/drawingml/2006/main" xmlns:r="http://schemas.openxmlformats.org/officeDocument/2006/relationships" xmlns:mc="http://schemas.openxmlformats.org/markup-compatibility/2006" xmlns:mv="urn:schemas-microsoft-com:mac:vml" xmlns:p="http://schemas.openxmlformats.org/presentationml/2006/main" xmlns:c="http://schemas.openxmlformats.org/drawingml/2006/chart" xmlns:dgm="http://schemas.openxmlformats.org/drawingml/2006/diagram" xmlns:o="urn:schemas-microsoft-com:office:office" xmlns:v="urn:schemas-microsoft-com:vml" xmlns:pvml="urn:schemas-microsoft-com:office:powerpoint" xmlns:com="http://schemas.openxmlformats.org/drawingml/2006/compatibility" xmlns:p14="http://schemas.microsoft.com/office/powerpoint/2010/main" xmlns:p15="http://schemas.microsoft.com/office/powerpoint/2012/main" xmlns:ahyp="http://schemas.microsoft.com/office/drawing/2018/hyperlinkcolor" showMasterPhAnim="0" showMasterSp="0">
+<p:notes xmlns:a="http://schemas.openxmlformats.org/drawingml/2006/main" xmlns:r="http://schemas.openxmlformats.org/officeDocument/2006/relationships" xmlns:p="http://schemas.openxmlformats.org/presentationml/2006/main" showMasterSp="0" showMasterPhAnim="0">
   <p:cSld>
     <p:spTree>
       <p:nvGrpSpPr>
-        <p:cNvPr id="30" name="Shape 30"/>
+        <p:cNvPr id="1" name="Shape 30"/>
         <p:cNvGrpSpPr/>
         <p:nvPr/>
       </p:nvGrpSpPr>
@@ -1671,9 +1716,11 @@
       <p:sp>
         <p:nvSpPr>
           <p:cNvPr id="31" name="Google Shape;31;p2:notes"/>
-          <p:cNvSpPr txBox="1"/>
+          <p:cNvSpPr txBox="1">
+            <a:spLocks noGrp="1"/>
+          </p:cNvSpPr>
           <p:nvPr>
-            <p:ph idx="1" type="body"/>
+            <p:ph type="body" idx="1"/>
           </p:nvPr>
         </p:nvSpPr>
         <p:spPr>
@@ -1690,12 +1737,12 @@
           </a:ln>
         </p:spPr>
         <p:txBody>
-          <a:bodyPr anchorCtr="0" anchor="t" bIns="45700" lIns="91425" spcFirstLastPara="1" rIns="91425" wrap="square" tIns="45700">
+          <a:bodyPr spcFirstLastPara="1" wrap="square" lIns="91425" tIns="45700" rIns="91425" bIns="45700" anchor="t" anchorCtr="0">
             <a:noAutofit/>
           </a:bodyPr>
           <a:lstStyle/>
           <a:p>
-            <a:pPr indent="0" lvl="0" marL="0" rtl="0" algn="l">
+            <a:pPr marL="0" lvl="0" indent="0" algn="l" rtl="0">
               <a:spcBef>
                 <a:spcPts val="0"/>
               </a:spcBef>
@@ -1709,9 +1756,6 @@
               <a:buFont typeface="Calibri"/>
               <a:buNone/>
             </a:pPr>
-            <a:r>
-              <a:t/>
-            </a:r>
             <a:endParaRPr/>
           </a:p>
         </p:txBody>
@@ -1719,9 +1763,11 @@
       <p:sp>
         <p:nvSpPr>
           <p:cNvPr id="32" name="Google Shape;32;p2:notes"/>
-          <p:cNvSpPr/>
+          <p:cNvSpPr>
+            <a:spLocks noGrp="1" noRot="1" noChangeAspect="1"/>
+          </p:cNvSpPr>
           <p:nvPr>
-            <p:ph idx="2" type="sldImg"/>
+            <p:ph type="sldImg" idx="2"/>
           </p:nvPr>
         </p:nvSpPr>
         <p:spPr>
@@ -1730,9 +1776,13 @@
             <a:ext cx="4845050" cy="3354387"/>
           </a:xfrm>
           <a:custGeom>
-            <a:rect b="b" l="l" r="r" t="t"/>
+            <a:avLst/>
+            <a:gdLst/>
+            <a:ahLst/>
+            <a:cxnLst/>
+            <a:rect l="l" t="t" r="r" b="b"/>
             <a:pathLst>
-              <a:path extrusionOk="0" h="120000" w="120000">
+              <a:path w="120000" h="120000" extrusionOk="0">
                 <a:moveTo>
                   <a:pt x="0" y="0"/>
                 </a:moveTo>
@@ -1750,14 +1800,14 @@
             </a:pathLst>
           </a:custGeom>
           <a:noFill/>
-          <a:ln cap="flat" cmpd="sng" w="12700">
+          <a:ln w="12700" cap="flat" cmpd="sng">
             <a:solidFill>
               <a:srgbClr val="000000"/>
             </a:solidFill>
             <a:prstDash val="solid"/>
             <a:round/>
-            <a:headEnd len="sm" w="sm" type="none"/>
-            <a:tailEnd len="sm" w="sm" type="none"/>
+            <a:headEnd type="none" w="sm" len="sm"/>
+            <a:tailEnd type="none" w="sm" len="sm"/>
           </a:ln>
         </p:spPr>
       </p:sp>
@@ -1770,11 +1820,11 @@
 </file>
 
 <file path=ppt/notesSlides/notesSlide3.xml><?xml version="1.0" encoding="utf-8"?>
-<p:notes xmlns:a="http://schemas.openxmlformats.org/drawingml/2006/main" xmlns:r="http://schemas.openxmlformats.org/officeDocument/2006/relationships" xmlns:mc="http://schemas.openxmlformats.org/markup-compatibility/2006" xmlns:mv="urn:schemas-microsoft-com:mac:vml" xmlns:p="http://schemas.openxmlformats.org/presentationml/2006/main" xmlns:c="http://schemas.openxmlformats.org/drawingml/2006/chart" xmlns:dgm="http://schemas.openxmlformats.org/drawingml/2006/diagram" xmlns:o="urn:schemas-microsoft-com:office:office" xmlns:v="urn:schemas-microsoft-com:vml" xmlns:pvml="urn:schemas-microsoft-com:office:powerpoint" xmlns:com="http://schemas.openxmlformats.org/drawingml/2006/compatibility" xmlns:p14="http://schemas.microsoft.com/office/powerpoint/2010/main" xmlns:p15="http://schemas.microsoft.com/office/powerpoint/2012/main" xmlns:ahyp="http://schemas.microsoft.com/office/drawing/2018/hyperlinkcolor" showMasterPhAnim="0" showMasterSp="0">
+<p:notes xmlns:a="http://schemas.openxmlformats.org/drawingml/2006/main" xmlns:r="http://schemas.openxmlformats.org/officeDocument/2006/relationships" xmlns:p="http://schemas.openxmlformats.org/presentationml/2006/main" showMasterSp="0" showMasterPhAnim="0">
   <p:cSld>
     <p:spTree>
       <p:nvGrpSpPr>
-        <p:cNvPr id="36" name="Shape 36"/>
+        <p:cNvPr id="1" name="Shape 36"/>
         <p:cNvGrpSpPr/>
         <p:nvPr/>
       </p:nvGrpSpPr>
@@ -1789,9 +1839,11 @@
       <p:sp>
         <p:nvSpPr>
           <p:cNvPr id="37" name="Google Shape;37;p3:notes"/>
-          <p:cNvSpPr txBox="1"/>
+          <p:cNvSpPr txBox="1">
+            <a:spLocks noGrp="1"/>
+          </p:cNvSpPr>
           <p:nvPr>
-            <p:ph idx="1" type="body"/>
+            <p:ph type="body" idx="1"/>
           </p:nvPr>
         </p:nvSpPr>
         <p:spPr>
@@ -1804,12 +1856,12 @@
           </a:prstGeom>
         </p:spPr>
         <p:txBody>
-          <a:bodyPr anchorCtr="0" anchor="t" bIns="44100" lIns="88200" spcFirstLastPara="1" rIns="88200" wrap="square" tIns="44100">
+          <a:bodyPr spcFirstLastPara="1" wrap="square" lIns="88200" tIns="44100" rIns="88200" bIns="44100" anchor="t" anchorCtr="0">
             <a:noAutofit/>
           </a:bodyPr>
           <a:lstStyle/>
           <a:p>
-            <a:pPr indent="0" lvl="0" marL="0" rtl="0" algn="l">
+            <a:pPr marL="0" lvl="0" indent="0" algn="l" rtl="0">
               <a:spcBef>
                 <a:spcPts val="0"/>
               </a:spcBef>
@@ -1818,9 +1870,6 @@
               </a:spcAft>
               <a:buNone/>
             </a:pPr>
-            <a:r>
-              <a:t/>
-            </a:r>
             <a:endParaRPr/>
           </a:p>
         </p:txBody>
@@ -1828,9 +1877,11 @@
       <p:sp>
         <p:nvSpPr>
           <p:cNvPr id="38" name="Google Shape;38;p3:notes"/>
-          <p:cNvSpPr/>
+          <p:cNvSpPr>
+            <a:spLocks noGrp="1" noRot="1" noChangeAspect="1"/>
+          </p:cNvSpPr>
           <p:nvPr>
-            <p:ph idx="2" type="sldImg"/>
+            <p:ph type="sldImg" idx="2"/>
           </p:nvPr>
         </p:nvSpPr>
         <p:spPr>
@@ -1839,9 +1890,13 @@
             <a:ext cx="5376863" cy="3724275"/>
           </a:xfrm>
           <a:custGeom>
-            <a:rect b="b" l="l" r="r" t="t"/>
+            <a:avLst/>
+            <a:gdLst/>
+            <a:ahLst/>
+            <a:cxnLst/>
+            <a:rect l="l" t="t" r="r" b="b"/>
             <a:pathLst>
-              <a:path extrusionOk="0" h="120000" w="120000">
+              <a:path w="120000" h="120000" extrusionOk="0">
                 <a:moveTo>
                   <a:pt x="0" y="0"/>
                 </a:moveTo>
@@ -1869,11 +1924,11 @@
 </file>
 
 <file path=ppt/slideLayouts/slideLayout1.xml><?xml version="1.0" encoding="utf-8"?>
-<p:sldLayout xmlns:a="http://schemas.openxmlformats.org/drawingml/2006/main" xmlns:r="http://schemas.openxmlformats.org/officeDocument/2006/relationships" xmlns:mc="http://schemas.openxmlformats.org/markup-compatibility/2006" xmlns:mv="urn:schemas-microsoft-com:mac:vml" xmlns:p="http://schemas.openxmlformats.org/presentationml/2006/main" xmlns:c="http://schemas.openxmlformats.org/drawingml/2006/chart" xmlns:dgm="http://schemas.openxmlformats.org/drawingml/2006/diagram" xmlns:o="urn:schemas-microsoft-com:office:office" xmlns:v="urn:schemas-microsoft-com:vml" xmlns:pvml="urn:schemas-microsoft-com:office:powerpoint" xmlns:com="http://schemas.openxmlformats.org/drawingml/2006/compatibility" xmlns:p14="http://schemas.microsoft.com/office/powerpoint/2010/main" xmlns:p15="http://schemas.microsoft.com/office/powerpoint/2012/main" xmlns:ahyp="http://schemas.microsoft.com/office/drawing/2018/hyperlinkcolor" matchingName="1_タイトル スライド">
+<p:sldLayout xmlns:a="http://schemas.openxmlformats.org/drawingml/2006/main" xmlns:r="http://schemas.openxmlformats.org/officeDocument/2006/relationships" xmlns:p="http://schemas.openxmlformats.org/presentationml/2006/main" matchingName="1_タイトル スライド">
   <p:cSld name="1_タイトル スライド">
     <p:spTree>
       <p:nvGrpSpPr>
-        <p:cNvPr id="16" name="Shape 16"/>
+        <p:cNvPr id="1" name="Shape 16"/>
         <p:cNvGrpSpPr/>
         <p:nvPr/>
       </p:nvGrpSpPr>
@@ -1894,11 +1949,11 @@
 </file>
 
 <file path=ppt/slideLayouts/slideLayout2.xml><?xml version="1.0" encoding="utf-8"?>
-<p:sldLayout xmlns:a="http://schemas.openxmlformats.org/drawingml/2006/main" xmlns:r="http://schemas.openxmlformats.org/officeDocument/2006/relationships" xmlns:mc="http://schemas.openxmlformats.org/markup-compatibility/2006" xmlns:mv="urn:schemas-microsoft-com:mac:vml" xmlns:p="http://schemas.openxmlformats.org/presentationml/2006/main" xmlns:c="http://schemas.openxmlformats.org/drawingml/2006/chart" xmlns:dgm="http://schemas.openxmlformats.org/drawingml/2006/diagram" xmlns:o="urn:schemas-microsoft-com:office:office" xmlns:v="urn:schemas-microsoft-com:vml" xmlns:pvml="urn:schemas-microsoft-com:office:powerpoint" xmlns:com="http://schemas.openxmlformats.org/drawingml/2006/compatibility" xmlns:p14="http://schemas.microsoft.com/office/powerpoint/2010/main" xmlns:p15="http://schemas.microsoft.com/office/powerpoint/2012/main" xmlns:ahyp="http://schemas.microsoft.com/office/drawing/2018/hyperlinkcolor" matchingName="4_タイトルとコンテンツ">
+<p:sldLayout xmlns:a="http://schemas.openxmlformats.org/drawingml/2006/main" xmlns:r="http://schemas.openxmlformats.org/officeDocument/2006/relationships" xmlns:p="http://schemas.openxmlformats.org/presentationml/2006/main" matchingName="4_タイトルとコンテンツ">
   <p:cSld name="4_タイトルとコンテンツ">
     <p:spTree>
       <p:nvGrpSpPr>
-        <p:cNvPr id="17" name="Shape 17"/>
+        <p:cNvPr id="1" name="Shape 17"/>
         <p:cNvGrpSpPr/>
         <p:nvPr/>
       </p:nvGrpSpPr>
@@ -1932,12 +1987,12 @@
           </a:ln>
         </p:spPr>
         <p:txBody>
-          <a:bodyPr anchorCtr="0" anchor="ctr" bIns="45700" lIns="91425" spcFirstLastPara="1" rIns="91425" wrap="square" tIns="45700">
+          <a:bodyPr spcFirstLastPara="1" wrap="square" lIns="91425" tIns="45700" rIns="91425" bIns="45700" anchor="ctr" anchorCtr="0">
             <a:noAutofit/>
           </a:bodyPr>
           <a:lstStyle/>
           <a:p>
-            <a:pPr indent="0" lvl="0" marL="0" marR="0" rtl="0" algn="ctr">
+            <a:pPr marL="0" marR="0" lvl="0" indent="0" algn="ctr" rtl="0">
               <a:spcBef>
                 <a:spcPts val="0"/>
               </a:spcBef>
@@ -1951,10 +2006,7 @@
               <a:buFont typeface="Calibri"/>
               <a:buNone/>
             </a:pPr>
-            <a:r>
-              <a:t/>
-            </a:r>
-            <a:endParaRPr b="0" i="0" sz="1800" u="none" cap="none" strike="noStrike">
+            <a:endParaRPr sz="1800" b="0" i="0" u="none" strike="noStrike" cap="none">
               <a:solidFill>
                 <a:srgbClr val="FFFFFF"/>
               </a:solidFill>
@@ -1981,14 +2033,14 @@
             <a:avLst/>
           </a:prstGeom>
           <a:noFill/>
-          <a:ln cap="flat" cmpd="sng" w="25400">
+          <a:ln w="25400" cap="flat" cmpd="sng">
             <a:solidFill>
               <a:srgbClr val="191F54"/>
             </a:solidFill>
             <a:prstDash val="solid"/>
             <a:round/>
-            <a:headEnd len="sm" w="sm" type="none"/>
-            <a:tailEnd len="sm" w="sm" type="none"/>
+            <a:headEnd type="none" w="sm" len="sm"/>
+            <a:tailEnd type="none" w="sm" len="sm"/>
           </a:ln>
         </p:spPr>
       </p:cxnSp>
@@ -2001,18 +2053,19 @@
 </file>
 
 <file path=ppt/slideMasters/slideMaster1.xml><?xml version="1.0" encoding="utf-8"?>
-<p:sldMaster xmlns:a="http://schemas.openxmlformats.org/drawingml/2006/main" xmlns:r="http://schemas.openxmlformats.org/officeDocument/2006/relationships" xmlns:mc="http://schemas.openxmlformats.org/markup-compatibility/2006" xmlns:mv="urn:schemas-microsoft-com:mac:vml" xmlns:p="http://schemas.openxmlformats.org/presentationml/2006/main" xmlns:c="http://schemas.openxmlformats.org/drawingml/2006/chart" xmlns:dgm="http://schemas.openxmlformats.org/drawingml/2006/diagram" xmlns:o="urn:schemas-microsoft-com:office:office" xmlns:v="urn:schemas-microsoft-com:vml" xmlns:pvml="urn:schemas-microsoft-com:office:powerpoint" xmlns:com="http://schemas.openxmlformats.org/drawingml/2006/compatibility" xmlns:p14="http://schemas.microsoft.com/office/powerpoint/2010/main" xmlns:p15="http://schemas.microsoft.com/office/powerpoint/2012/main" xmlns:ahyp="http://schemas.microsoft.com/office/drawing/2018/hyperlinkcolor">
+<p:sldMaster xmlns:a="http://schemas.openxmlformats.org/drawingml/2006/main" xmlns:r="http://schemas.openxmlformats.org/officeDocument/2006/relationships" xmlns:p="http://schemas.openxmlformats.org/presentationml/2006/main">
   <p:cSld>
     <p:bg>
       <p:bgPr>
         <a:solidFill>
           <a:schemeClr val="lt1"/>
         </a:solidFill>
+        <a:effectLst/>
       </p:bgPr>
     </p:bg>
     <p:spTree>
       <p:nvGrpSpPr>
-        <p:cNvPr id="9" name="Shape 9"/>
+        <p:cNvPr id="1" name="Shape 9"/>
         <p:cNvGrpSpPr/>
         <p:nvPr/>
       </p:nvGrpSpPr>
@@ -2046,12 +2099,12 @@
           </a:ln>
         </p:spPr>
         <p:txBody>
-          <a:bodyPr anchorCtr="0" anchor="ctr" bIns="45700" lIns="91425" spcFirstLastPara="1" rIns="91425" wrap="square" tIns="45700">
+          <a:bodyPr spcFirstLastPara="1" wrap="square" lIns="91425" tIns="45700" rIns="91425" bIns="45700" anchor="ctr" anchorCtr="0">
             <a:noAutofit/>
           </a:bodyPr>
           <a:lstStyle/>
           <a:p>
-            <a:pPr indent="0" lvl="0" marL="0" marR="0" rtl="0" algn="ctr">
+            <a:pPr marL="0" marR="0" lvl="0" indent="0" algn="ctr" rtl="0">
               <a:spcBef>
                 <a:spcPts val="0"/>
               </a:spcBef>
@@ -2060,10 +2113,7 @@
               </a:spcAft>
               <a:buNone/>
             </a:pPr>
-            <a:r>
-              <a:t/>
-            </a:r>
-            <a:endParaRPr b="0" i="0" sz="1800" u="none" cap="none" strike="noStrike">
+            <a:endParaRPr sz="1800" b="0" i="0" u="none" strike="noStrike" cap="none">
               <a:solidFill>
                 <a:schemeClr val="lt1"/>
               </a:solidFill>
@@ -2095,12 +2145,12 @@
           </a:ln>
         </p:spPr>
         <p:txBody>
-          <a:bodyPr anchorCtr="0" anchor="t" bIns="45700" lIns="91425" spcFirstLastPara="1" rIns="91425" wrap="square" tIns="45700">
+          <a:bodyPr spcFirstLastPara="1" wrap="square" lIns="91425" tIns="45700" rIns="91425" bIns="45700" anchor="t" anchorCtr="0">
             <a:spAutoFit/>
           </a:bodyPr>
           <a:lstStyle/>
           <a:p>
-            <a:pPr indent="0" lvl="0" marL="0" marR="0" rtl="0" algn="l">
+            <a:pPr marL="0" marR="0" lvl="0" indent="0" algn="l" rtl="0">
               <a:spcBef>
                 <a:spcPts val="0"/>
               </a:spcBef>
@@ -2110,7 +2160,7 @@
               <a:buNone/>
             </a:pPr>
             <a:r>
-              <a:rPr b="1" i="0" lang="ja-JP" sz="800" u="none" cap="none" strike="noStrike">
+              <a:rPr lang="ja-JP" sz="800" b="1" i="0" u="none" strike="noStrike" cap="none">
                 <a:solidFill>
                   <a:schemeClr val="lt1"/>
                 </a:solidFill>
@@ -2147,12 +2197,12 @@
           </a:ln>
         </p:spPr>
         <p:txBody>
-          <a:bodyPr anchorCtr="0" anchor="ctr" bIns="45700" lIns="91425" spcFirstLastPara="1" rIns="91425" wrap="square" tIns="45700">
+          <a:bodyPr spcFirstLastPara="1" wrap="square" lIns="91425" tIns="45700" rIns="91425" bIns="45700" anchor="ctr" anchorCtr="0">
             <a:noAutofit/>
           </a:bodyPr>
           <a:lstStyle/>
           <a:p>
-            <a:pPr indent="0" lvl="0" marL="0" marR="0" rtl="0" algn="ctr">
+            <a:pPr marL="0" marR="0" lvl="0" indent="0" algn="ctr" rtl="0">
               <a:spcBef>
                 <a:spcPts val="0"/>
               </a:spcBef>
@@ -2161,10 +2211,7 @@
               </a:spcAft>
               <a:buNone/>
             </a:pPr>
-            <a:r>
-              <a:t/>
-            </a:r>
-            <a:endParaRPr b="0" i="0" sz="1800" u="none" cap="none" strike="noStrike">
+            <a:endParaRPr sz="1800" b="0" i="0" u="none" strike="noStrike" cap="none">
               <a:solidFill>
                 <a:schemeClr val="lt1"/>
               </a:solidFill>
@@ -2191,14 +2238,14 @@
             <a:avLst/>
           </a:prstGeom>
           <a:noFill/>
-          <a:ln cap="flat" cmpd="sng" w="25400">
+          <a:ln w="25400" cap="flat" cmpd="sng">
             <a:solidFill>
               <a:srgbClr val="00324B"/>
             </a:solidFill>
             <a:prstDash val="solid"/>
             <a:round/>
-            <a:headEnd len="sm" w="sm" type="none"/>
-            <a:tailEnd len="sm" w="sm" type="none"/>
+            <a:headEnd type="none" w="sm" len="sm"/>
+            <a:tailEnd type="none" w="sm" len="sm"/>
           </a:ln>
         </p:spPr>
       </p:cxnSp>
@@ -2209,10 +2256,10 @@
           <p:nvPr/>
         </p:nvPicPr>
         <p:blipFill rotWithShape="1">
-          <a:blip r:embed="rId1">
+          <a:blip r:embed="rId4">
             <a:alphaModFix/>
           </a:blip>
-          <a:srcRect b="0" l="-1647" r="-11171" t="0"/>
+          <a:srcRect l="-1647" r="-11171"/>
           <a:stretch/>
         </p:blipFill>
         <p:spPr>
@@ -2249,12 +2296,12 @@
           </a:ln>
         </p:spPr>
         <p:txBody>
-          <a:bodyPr anchorCtr="0" anchor="t" bIns="45700" lIns="91425" spcFirstLastPara="1" rIns="91425" wrap="square" tIns="25200">
+          <a:bodyPr spcFirstLastPara="1" wrap="square" lIns="91425" tIns="25200" rIns="91425" bIns="45700" anchor="t" anchorCtr="0">
             <a:noAutofit/>
           </a:bodyPr>
           <a:lstStyle/>
           <a:p>
-            <a:pPr indent="0" lvl="0" marL="0" marR="0" rtl="0" algn="r">
+            <a:pPr marL="0" marR="0" lvl="0" indent="0" algn="r" rtl="0">
               <a:spcBef>
                 <a:spcPts val="0"/>
               </a:spcBef>
@@ -2264,7 +2311,7 @@
               <a:buNone/>
             </a:pPr>
             <a:fld id="{00000000-1234-1234-1234-123412341234}" type="slidenum">
-              <a:rPr b="0" i="1" lang="ja-JP" sz="1400" u="none" cap="none" strike="noStrike">
+              <a:rPr lang="ja-JP" sz="1400" b="0" i="1" u="none" strike="noStrike" cap="none">
                 <a:solidFill>
                   <a:schemeClr val="lt1"/>
                 </a:solidFill>
@@ -2275,7 +2322,7 @@
               </a:rPr>
               <a:t>‹#›</a:t>
             </a:fld>
-            <a:endParaRPr b="0" i="1" sz="1400" u="none" cap="none" strike="noStrike">
+            <a:endParaRPr sz="1400" b="0" i="1" u="none" strike="noStrike" cap="none">
               <a:solidFill>
                 <a:schemeClr val="lt1"/>
               </a:solidFill>
@@ -2289,15 +2336,15 @@
       </p:sp>
     </p:spTree>
   </p:cSld>
-  <p:clrMap accent1="accent1" accent2="accent2" accent3="accent3" accent4="accent4" accent5="accent5" accent6="accent6" bg1="lt1" bg2="dk2" tx1="dk1" tx2="lt2" folHlink="folHlink" hlink="hlink"/>
+  <p:clrMap bg1="lt1" tx1="dk1" bg2="dk2" tx2="lt2" accent1="accent1" accent2="accent2" accent3="accent3" accent4="accent4" accent5="accent5" accent6="accent6" hlink="hlink" folHlink="folHlink"/>
   <p:sldLayoutIdLst>
-    <p:sldLayoutId id="2147483649" r:id="rId2"/>
-    <p:sldLayoutId id="2147483650" r:id="rId3"/>
+    <p:sldLayoutId id="2147483649" r:id="rId1"/>
+    <p:sldLayoutId id="2147483650" r:id="rId2"/>
   </p:sldLayoutIdLst>
-  <p:hf dt="0" ftr="0" hdr="0"/>
+  <p:hf hdr="0" ftr="0" dt="0"/>
   <p:txStyles>
     <p:titleStyle>
-      <a:defPPr lvl="0" marR="0" rtl="0" algn="l">
+      <a:defPPr marR="0" lvl="0" algn="l" rtl="0">
         <a:lnSpc>
           <a:spcPct val="100000"/>
         </a:lnSpc>
@@ -2308,7 +2355,7 @@
           <a:spcPts val="0"/>
         </a:spcAft>
       </a:defPPr>
-      <a:lvl1pPr lvl="0" marR="0" rtl="0" algn="l">
+      <a:lvl1pPr marR="0" lvl="0" algn="l" rtl="0">
         <a:lnSpc>
           <a:spcPct val="100000"/>
         </a:lnSpc>
@@ -2322,7 +2369,7 @@
           <a:srgbClr val="000000"/>
         </a:buClr>
         <a:buFont typeface="Arial"/>
-        <a:defRPr b="0" i="0" spc="0" sz="1400" u="none" cap="none" strike="noStrike">
+        <a:defRPr sz="1400" b="0" i="0" u="none" strike="noStrike" cap="none" spc="0">
           <a:solidFill>
             <a:srgbClr val="000000"/>
           </a:solidFill>
@@ -2332,7 +2379,7 @@
           <a:sym typeface="Arial"/>
         </a:defRPr>
       </a:lvl1pPr>
-      <a:lvl2pPr lvl="1" marR="0" rtl="0" algn="l">
+      <a:lvl2pPr marR="0" lvl="1" algn="l" rtl="0">
         <a:lnSpc>
           <a:spcPct val="100000"/>
         </a:lnSpc>
@@ -2346,7 +2393,7 @@
           <a:srgbClr val="000000"/>
         </a:buClr>
         <a:buFont typeface="Arial"/>
-        <a:defRPr b="0" i="0" spc="0" sz="1400" u="none" cap="none" strike="noStrike">
+        <a:defRPr sz="1400" b="0" i="0" u="none" strike="noStrike" cap="none" spc="0">
           <a:solidFill>
             <a:srgbClr val="000000"/>
           </a:solidFill>
@@ -2356,7 +2403,7 @@
           <a:sym typeface="Arial"/>
         </a:defRPr>
       </a:lvl2pPr>
-      <a:lvl3pPr lvl="2" marR="0" rtl="0" algn="l">
+      <a:lvl3pPr marR="0" lvl="2" algn="l" rtl="0">
         <a:lnSpc>
           <a:spcPct val="100000"/>
         </a:lnSpc>
@@ -2370,7 +2417,7 @@
           <a:srgbClr val="000000"/>
         </a:buClr>
         <a:buFont typeface="Arial"/>
-        <a:defRPr b="0" i="0" spc="0" sz="1400" u="none" cap="none" strike="noStrike">
+        <a:defRPr sz="1400" b="0" i="0" u="none" strike="noStrike" cap="none" spc="0">
           <a:solidFill>
             <a:srgbClr val="000000"/>
           </a:solidFill>
@@ -2380,7 +2427,7 @@
           <a:sym typeface="Arial"/>
         </a:defRPr>
       </a:lvl3pPr>
-      <a:lvl4pPr lvl="3" marR="0" rtl="0" algn="l">
+      <a:lvl4pPr marR="0" lvl="3" algn="l" rtl="0">
         <a:lnSpc>
           <a:spcPct val="100000"/>
         </a:lnSpc>
@@ -2394,7 +2441,7 @@
           <a:srgbClr val="000000"/>
         </a:buClr>
         <a:buFont typeface="Arial"/>
-        <a:defRPr b="0" i="0" spc="0" sz="1400" u="none" cap="none" strike="noStrike">
+        <a:defRPr sz="1400" b="0" i="0" u="none" strike="noStrike" cap="none" spc="0">
           <a:solidFill>
             <a:srgbClr val="000000"/>
           </a:solidFill>
@@ -2404,7 +2451,7 @@
           <a:sym typeface="Arial"/>
         </a:defRPr>
       </a:lvl4pPr>
-      <a:lvl5pPr lvl="4" marR="0" rtl="0" algn="l">
+      <a:lvl5pPr marR="0" lvl="4" algn="l" rtl="0">
         <a:lnSpc>
           <a:spcPct val="100000"/>
         </a:lnSpc>
@@ -2418,7 +2465,7 @@
           <a:srgbClr val="000000"/>
         </a:buClr>
         <a:buFont typeface="Arial"/>
-        <a:defRPr b="0" i="0" spc="0" sz="1400" u="none" cap="none" strike="noStrike">
+        <a:defRPr sz="1400" b="0" i="0" u="none" strike="noStrike" cap="none" spc="0">
           <a:solidFill>
             <a:srgbClr val="000000"/>
           </a:solidFill>
@@ -2428,7 +2475,7 @@
           <a:sym typeface="Arial"/>
         </a:defRPr>
       </a:lvl5pPr>
-      <a:lvl6pPr lvl="5" marR="0" rtl="0" algn="l">
+      <a:lvl6pPr marR="0" lvl="5" algn="l" rtl="0">
         <a:lnSpc>
           <a:spcPct val="100000"/>
         </a:lnSpc>
@@ -2442,7 +2489,7 @@
           <a:srgbClr val="000000"/>
         </a:buClr>
         <a:buFont typeface="Arial"/>
-        <a:defRPr b="0" i="0" spc="0" sz="1400" u="none" cap="none" strike="noStrike">
+        <a:defRPr sz="1400" b="0" i="0" u="none" strike="noStrike" cap="none" spc="0">
           <a:solidFill>
             <a:srgbClr val="000000"/>
           </a:solidFill>
@@ -2452,7 +2499,7 @@
           <a:sym typeface="Arial"/>
         </a:defRPr>
       </a:lvl6pPr>
-      <a:lvl7pPr lvl="6" marR="0" rtl="0" algn="l">
+      <a:lvl7pPr marR="0" lvl="6" algn="l" rtl="0">
         <a:lnSpc>
           <a:spcPct val="100000"/>
         </a:lnSpc>
@@ -2466,7 +2513,7 @@
           <a:srgbClr val="000000"/>
         </a:buClr>
         <a:buFont typeface="Arial"/>
-        <a:defRPr b="0" i="0" spc="0" sz="1400" u="none" cap="none" strike="noStrike">
+        <a:defRPr sz="1400" b="0" i="0" u="none" strike="noStrike" cap="none" spc="0">
           <a:solidFill>
             <a:srgbClr val="000000"/>
           </a:solidFill>
@@ -2476,7 +2523,7 @@
           <a:sym typeface="Arial"/>
         </a:defRPr>
       </a:lvl7pPr>
-      <a:lvl8pPr lvl="7" marR="0" rtl="0" algn="l">
+      <a:lvl8pPr marR="0" lvl="7" algn="l" rtl="0">
         <a:lnSpc>
           <a:spcPct val="100000"/>
         </a:lnSpc>
@@ -2490,7 +2537,7 @@
           <a:srgbClr val="000000"/>
         </a:buClr>
         <a:buFont typeface="Arial"/>
-        <a:defRPr b="0" i="0" spc="0" sz="1400" u="none" cap="none" strike="noStrike">
+        <a:defRPr sz="1400" b="0" i="0" u="none" strike="noStrike" cap="none" spc="0">
           <a:solidFill>
             <a:srgbClr val="000000"/>
           </a:solidFill>
@@ -2500,7 +2547,7 @@
           <a:sym typeface="Arial"/>
         </a:defRPr>
       </a:lvl8pPr>
-      <a:lvl9pPr lvl="8" marR="0" rtl="0" algn="l">
+      <a:lvl9pPr marR="0" lvl="8" algn="l" rtl="0">
         <a:lnSpc>
           <a:spcPct val="100000"/>
         </a:lnSpc>
@@ -2514,7 +2561,7 @@
           <a:srgbClr val="000000"/>
         </a:buClr>
         <a:buFont typeface="Arial"/>
-        <a:defRPr b="0" i="0" spc="0" sz="1400" u="none" cap="none" strike="noStrike">
+        <a:defRPr sz="1400" b="0" i="0" u="none" strike="noStrike" cap="none" spc="0">
           <a:solidFill>
             <a:srgbClr val="000000"/>
           </a:solidFill>
@@ -2526,7 +2573,7 @@
       </a:lvl9pPr>
     </p:titleStyle>
     <p:bodyStyle>
-      <a:defPPr lvl="0" marR="0" rtl="0" algn="l">
+      <a:defPPr marR="0" lvl="0" algn="l" rtl="0">
         <a:lnSpc>
           <a:spcPct val="100000"/>
         </a:lnSpc>
@@ -2537,7 +2584,7 @@
           <a:spcPts val="0"/>
         </a:spcAft>
       </a:defPPr>
-      <a:lvl1pPr lvl="0" marR="0" rtl="0" algn="l">
+      <a:lvl1pPr marR="0" lvl="0" algn="l" rtl="0">
         <a:lnSpc>
           <a:spcPct val="100000"/>
         </a:lnSpc>
@@ -2551,7 +2598,7 @@
           <a:srgbClr val="000000"/>
         </a:buClr>
         <a:buFont typeface="Arial"/>
-        <a:defRPr b="0" i="0" spc="0" sz="1400" u="none" cap="none" strike="noStrike">
+        <a:defRPr sz="1400" b="0" i="0" u="none" strike="noStrike" cap="none" spc="0">
           <a:solidFill>
             <a:srgbClr val="000000"/>
           </a:solidFill>
@@ -2561,7 +2608,7 @@
           <a:sym typeface="Arial"/>
         </a:defRPr>
       </a:lvl1pPr>
-      <a:lvl2pPr lvl="1" marR="0" rtl="0" algn="l">
+      <a:lvl2pPr marR="0" lvl="1" algn="l" rtl="0">
         <a:lnSpc>
           <a:spcPct val="100000"/>
         </a:lnSpc>
@@ -2575,7 +2622,7 @@
           <a:srgbClr val="000000"/>
         </a:buClr>
         <a:buFont typeface="Arial"/>
-        <a:defRPr b="0" i="0" spc="0" sz="1400" u="none" cap="none" strike="noStrike">
+        <a:defRPr sz="1400" b="0" i="0" u="none" strike="noStrike" cap="none" spc="0">
           <a:solidFill>
             <a:srgbClr val="000000"/>
           </a:solidFill>
@@ -2585,7 +2632,7 @@
           <a:sym typeface="Arial"/>
         </a:defRPr>
       </a:lvl2pPr>
-      <a:lvl3pPr lvl="2" marR="0" rtl="0" algn="l">
+      <a:lvl3pPr marR="0" lvl="2" algn="l" rtl="0">
         <a:lnSpc>
           <a:spcPct val="100000"/>
         </a:lnSpc>
@@ -2599,7 +2646,7 @@
           <a:srgbClr val="000000"/>
         </a:buClr>
         <a:buFont typeface="Arial"/>
-        <a:defRPr b="0" i="0" spc="0" sz="1400" u="none" cap="none" strike="noStrike">
+        <a:defRPr sz="1400" b="0" i="0" u="none" strike="noStrike" cap="none" spc="0">
           <a:solidFill>
             <a:srgbClr val="000000"/>
           </a:solidFill>
@@ -2609,7 +2656,7 @@
           <a:sym typeface="Arial"/>
         </a:defRPr>
       </a:lvl3pPr>
-      <a:lvl4pPr lvl="3" marR="0" rtl="0" algn="l">
+      <a:lvl4pPr marR="0" lvl="3" algn="l" rtl="0">
         <a:lnSpc>
           <a:spcPct val="100000"/>
         </a:lnSpc>
@@ -2623,7 +2670,7 @@
           <a:srgbClr val="000000"/>
         </a:buClr>
         <a:buFont typeface="Arial"/>
-        <a:defRPr b="0" i="0" spc="0" sz="1400" u="none" cap="none" strike="noStrike">
+        <a:defRPr sz="1400" b="0" i="0" u="none" strike="noStrike" cap="none" spc="0">
           <a:solidFill>
             <a:srgbClr val="000000"/>
           </a:solidFill>
@@ -2633,7 +2680,7 @@
           <a:sym typeface="Arial"/>
         </a:defRPr>
       </a:lvl4pPr>
-      <a:lvl5pPr lvl="4" marR="0" rtl="0" algn="l">
+      <a:lvl5pPr marR="0" lvl="4" algn="l" rtl="0">
         <a:lnSpc>
           <a:spcPct val="100000"/>
         </a:lnSpc>
@@ -2647,7 +2694,7 @@
           <a:srgbClr val="000000"/>
         </a:buClr>
         <a:buFont typeface="Arial"/>
-        <a:defRPr b="0" i="0" spc="0" sz="1400" u="none" cap="none" strike="noStrike">
+        <a:defRPr sz="1400" b="0" i="0" u="none" strike="noStrike" cap="none" spc="0">
           <a:solidFill>
             <a:srgbClr val="000000"/>
           </a:solidFill>
@@ -2657,7 +2704,7 @@
           <a:sym typeface="Arial"/>
         </a:defRPr>
       </a:lvl5pPr>
-      <a:lvl6pPr lvl="5" marR="0" rtl="0" algn="l">
+      <a:lvl6pPr marR="0" lvl="5" algn="l" rtl="0">
         <a:lnSpc>
           <a:spcPct val="100000"/>
         </a:lnSpc>
@@ -2671,7 +2718,7 @@
           <a:srgbClr val="000000"/>
         </a:buClr>
         <a:buFont typeface="Arial"/>
-        <a:defRPr b="0" i="0" spc="0" sz="1400" u="none" cap="none" strike="noStrike">
+        <a:defRPr sz="1400" b="0" i="0" u="none" strike="noStrike" cap="none" spc="0">
           <a:solidFill>
             <a:srgbClr val="000000"/>
           </a:solidFill>
@@ -2681,7 +2728,7 @@
           <a:sym typeface="Arial"/>
         </a:defRPr>
       </a:lvl6pPr>
-      <a:lvl7pPr lvl="6" marR="0" rtl="0" algn="l">
+      <a:lvl7pPr marR="0" lvl="6" algn="l" rtl="0">
         <a:lnSpc>
           <a:spcPct val="100000"/>
         </a:lnSpc>
@@ -2695,7 +2742,7 @@
           <a:srgbClr val="000000"/>
         </a:buClr>
         <a:buFont typeface="Arial"/>
-        <a:defRPr b="0" i="0" spc="0" sz="1400" u="none" cap="none" strike="noStrike">
+        <a:defRPr sz="1400" b="0" i="0" u="none" strike="noStrike" cap="none" spc="0">
           <a:solidFill>
             <a:srgbClr val="000000"/>
           </a:solidFill>
@@ -2705,7 +2752,7 @@
           <a:sym typeface="Arial"/>
         </a:defRPr>
       </a:lvl7pPr>
-      <a:lvl8pPr lvl="7" marR="0" rtl="0" algn="l">
+      <a:lvl8pPr marR="0" lvl="7" algn="l" rtl="0">
         <a:lnSpc>
           <a:spcPct val="100000"/>
         </a:lnSpc>
@@ -2719,7 +2766,7 @@
           <a:srgbClr val="000000"/>
         </a:buClr>
         <a:buFont typeface="Arial"/>
-        <a:defRPr b="0" i="0" spc="0" sz="1400" u="none" cap="none" strike="noStrike">
+        <a:defRPr sz="1400" b="0" i="0" u="none" strike="noStrike" cap="none" spc="0">
           <a:solidFill>
             <a:srgbClr val="000000"/>
           </a:solidFill>
@@ -2729,7 +2776,7 @@
           <a:sym typeface="Arial"/>
         </a:defRPr>
       </a:lvl8pPr>
-      <a:lvl9pPr lvl="8" marR="0" rtl="0" algn="l">
+      <a:lvl9pPr marR="0" lvl="8" algn="l" rtl="0">
         <a:lnSpc>
           <a:spcPct val="100000"/>
         </a:lnSpc>
@@ -2743,7 +2790,7 @@
           <a:srgbClr val="000000"/>
         </a:buClr>
         <a:buFont typeface="Arial"/>
-        <a:defRPr b="0" i="0" spc="0" sz="1400" u="none" cap="none" strike="noStrike">
+        <a:defRPr sz="1400" b="0" i="0" u="none" strike="noStrike" cap="none" spc="0">
           <a:solidFill>
             <a:srgbClr val="000000"/>
           </a:solidFill>
@@ -2755,7 +2802,7 @@
       </a:lvl9pPr>
     </p:bodyStyle>
     <p:otherStyle>
-      <a:defPPr lvl="0" marR="0" rtl="0" algn="l">
+      <a:defPPr marR="0" lvl="0" algn="l" rtl="0">
         <a:lnSpc>
           <a:spcPct val="100000"/>
         </a:lnSpc>
@@ -2766,7 +2813,7 @@
           <a:spcPts val="0"/>
         </a:spcAft>
       </a:defPPr>
-      <a:lvl1pPr lvl="0" marR="0" rtl="0" algn="l">
+      <a:lvl1pPr marR="0" lvl="0" algn="l" rtl="0">
         <a:lnSpc>
           <a:spcPct val="100000"/>
         </a:lnSpc>
@@ -2780,7 +2827,7 @@
           <a:srgbClr val="000000"/>
         </a:buClr>
         <a:buFont typeface="Arial"/>
-        <a:defRPr b="0" i="0" spc="0" sz="1400" u="none" cap="none" strike="noStrike">
+        <a:defRPr sz="1400" b="0" i="0" u="none" strike="noStrike" cap="none" spc="0">
           <a:solidFill>
             <a:srgbClr val="000000"/>
           </a:solidFill>
@@ -2790,7 +2837,7 @@
           <a:sym typeface="Arial"/>
         </a:defRPr>
       </a:lvl1pPr>
-      <a:lvl2pPr lvl="1" marR="0" rtl="0" algn="l">
+      <a:lvl2pPr marR="0" lvl="1" algn="l" rtl="0">
         <a:lnSpc>
           <a:spcPct val="100000"/>
         </a:lnSpc>
@@ -2804,7 +2851,7 @@
           <a:srgbClr val="000000"/>
         </a:buClr>
         <a:buFont typeface="Arial"/>
-        <a:defRPr b="0" i="0" spc="0" sz="1400" u="none" cap="none" strike="noStrike">
+        <a:defRPr sz="1400" b="0" i="0" u="none" strike="noStrike" cap="none" spc="0">
           <a:solidFill>
             <a:srgbClr val="000000"/>
           </a:solidFill>
@@ -2814,7 +2861,7 @@
           <a:sym typeface="Arial"/>
         </a:defRPr>
       </a:lvl2pPr>
-      <a:lvl3pPr lvl="2" marR="0" rtl="0" algn="l">
+      <a:lvl3pPr marR="0" lvl="2" algn="l" rtl="0">
         <a:lnSpc>
           <a:spcPct val="100000"/>
         </a:lnSpc>
@@ -2828,7 +2875,7 @@
           <a:srgbClr val="000000"/>
         </a:buClr>
         <a:buFont typeface="Arial"/>
-        <a:defRPr b="0" i="0" spc="0" sz="1400" u="none" cap="none" strike="noStrike">
+        <a:defRPr sz="1400" b="0" i="0" u="none" strike="noStrike" cap="none" spc="0">
           <a:solidFill>
             <a:srgbClr val="000000"/>
           </a:solidFill>
@@ -2838,7 +2885,7 @@
           <a:sym typeface="Arial"/>
         </a:defRPr>
       </a:lvl3pPr>
-      <a:lvl4pPr lvl="3" marR="0" rtl="0" algn="l">
+      <a:lvl4pPr marR="0" lvl="3" algn="l" rtl="0">
         <a:lnSpc>
           <a:spcPct val="100000"/>
         </a:lnSpc>
@@ -2852,7 +2899,7 @@
           <a:srgbClr val="000000"/>
         </a:buClr>
         <a:buFont typeface="Arial"/>
-        <a:defRPr b="0" i="0" spc="0" sz="1400" u="none" cap="none" strike="noStrike">
+        <a:defRPr sz="1400" b="0" i="0" u="none" strike="noStrike" cap="none" spc="0">
           <a:solidFill>
             <a:srgbClr val="000000"/>
           </a:solidFill>
@@ -2862,7 +2909,7 @@
           <a:sym typeface="Arial"/>
         </a:defRPr>
       </a:lvl4pPr>
-      <a:lvl5pPr lvl="4" marR="0" rtl="0" algn="l">
+      <a:lvl5pPr marR="0" lvl="4" algn="l" rtl="0">
         <a:lnSpc>
           <a:spcPct val="100000"/>
         </a:lnSpc>
@@ -2876,7 +2923,7 @@
           <a:srgbClr val="000000"/>
         </a:buClr>
         <a:buFont typeface="Arial"/>
-        <a:defRPr b="0" i="0" spc="0" sz="1400" u="none" cap="none" strike="noStrike">
+        <a:defRPr sz="1400" b="0" i="0" u="none" strike="noStrike" cap="none" spc="0">
           <a:solidFill>
             <a:srgbClr val="000000"/>
           </a:solidFill>
@@ -2886,7 +2933,7 @@
           <a:sym typeface="Arial"/>
         </a:defRPr>
       </a:lvl5pPr>
-      <a:lvl6pPr lvl="5" marR="0" rtl="0" algn="l">
+      <a:lvl6pPr marR="0" lvl="5" algn="l" rtl="0">
         <a:lnSpc>
           <a:spcPct val="100000"/>
         </a:lnSpc>
@@ -2900,7 +2947,7 @@
           <a:srgbClr val="000000"/>
         </a:buClr>
         <a:buFont typeface="Arial"/>
-        <a:defRPr b="0" i="0" spc="0" sz="1400" u="none" cap="none" strike="noStrike">
+        <a:defRPr sz="1400" b="0" i="0" u="none" strike="noStrike" cap="none" spc="0">
           <a:solidFill>
             <a:srgbClr val="000000"/>
           </a:solidFill>
@@ -2910,7 +2957,7 @@
           <a:sym typeface="Arial"/>
         </a:defRPr>
       </a:lvl6pPr>
-      <a:lvl7pPr lvl="6" marR="0" rtl="0" algn="l">
+      <a:lvl7pPr marR="0" lvl="6" algn="l" rtl="0">
         <a:lnSpc>
           <a:spcPct val="100000"/>
         </a:lnSpc>
@@ -2924,7 +2971,7 @@
           <a:srgbClr val="000000"/>
         </a:buClr>
         <a:buFont typeface="Arial"/>
-        <a:defRPr b="0" i="0" spc="0" sz="1400" u="none" cap="none" strike="noStrike">
+        <a:defRPr sz="1400" b="0" i="0" u="none" strike="noStrike" cap="none" spc="0">
           <a:solidFill>
             <a:srgbClr val="000000"/>
           </a:solidFill>
@@ -2934,7 +2981,7 @@
           <a:sym typeface="Arial"/>
         </a:defRPr>
       </a:lvl7pPr>
-      <a:lvl8pPr lvl="7" marR="0" rtl="0" algn="l">
+      <a:lvl8pPr marR="0" lvl="7" algn="l" rtl="0">
         <a:lnSpc>
           <a:spcPct val="100000"/>
         </a:lnSpc>
@@ -2948,7 +2995,7 @@
           <a:srgbClr val="000000"/>
         </a:buClr>
         <a:buFont typeface="Arial"/>
-        <a:defRPr b="0" i="0" spc="0" sz="1400" u="none" cap="none" strike="noStrike">
+        <a:defRPr sz="1400" b="0" i="0" u="none" strike="noStrike" cap="none" spc="0">
           <a:solidFill>
             <a:srgbClr val="000000"/>
           </a:solidFill>
@@ -2958,7 +3005,7 @@
           <a:sym typeface="Arial"/>
         </a:defRPr>
       </a:lvl8pPr>
-      <a:lvl9pPr lvl="8" marR="0" rtl="0" algn="l">
+      <a:lvl9pPr marR="0" lvl="8" algn="l" rtl="0">
         <a:lnSpc>
           <a:spcPct val="100000"/>
         </a:lnSpc>
@@ -2972,7 +3019,7 @@
           <a:srgbClr val="000000"/>
         </a:buClr>
         <a:buFont typeface="Arial"/>
-        <a:defRPr b="0" i="0" spc="0" sz="1400" u="none" cap="none" strike="noStrike">
+        <a:defRPr sz="1400" b="0" i="0" u="none" strike="noStrike" cap="none" spc="0">
           <a:solidFill>
             <a:srgbClr val="000000"/>
           </a:solidFill>
@@ -2988,11 +3035,11 @@
 </file>
 
 <file path=ppt/slides/slide1.xml><?xml version="1.0" encoding="utf-8"?>
-<p:sld xmlns:a="http://schemas.openxmlformats.org/drawingml/2006/main" xmlns:r="http://schemas.openxmlformats.org/officeDocument/2006/relationships" xmlns:mc="http://schemas.openxmlformats.org/markup-compatibility/2006" xmlns:mv="urn:schemas-microsoft-com:mac:vml" xmlns:p="http://schemas.openxmlformats.org/presentationml/2006/main" xmlns:c="http://schemas.openxmlformats.org/drawingml/2006/chart" xmlns:dgm="http://schemas.openxmlformats.org/drawingml/2006/diagram" xmlns:o="urn:schemas-microsoft-com:office:office" xmlns:v="urn:schemas-microsoft-com:vml" xmlns:pvml="urn:schemas-microsoft-com:office:powerpoint" xmlns:com="http://schemas.openxmlformats.org/drawingml/2006/compatibility" xmlns:p14="http://schemas.microsoft.com/office/powerpoint/2010/main" xmlns:p15="http://schemas.microsoft.com/office/powerpoint/2012/main" xmlns:ahyp="http://schemas.microsoft.com/office/drawing/2018/hyperlinkcolor">
+<p:sld xmlns:a="http://schemas.openxmlformats.org/drawingml/2006/main" xmlns:r="http://schemas.openxmlformats.org/officeDocument/2006/relationships" xmlns:p="http://schemas.openxmlformats.org/presentationml/2006/main">
   <p:cSld>
     <p:spTree>
       <p:nvGrpSpPr>
-        <p:cNvPr id="25" name="Shape 25"/>
+        <p:cNvPr id="1" name="Shape 25"/>
         <p:cNvGrpSpPr/>
         <p:nvPr/>
       </p:nvGrpSpPr>
@@ -3026,12 +3073,12 @@
           </a:ln>
         </p:spPr>
         <p:txBody>
-          <a:bodyPr anchorCtr="0" anchor="ctr" bIns="45700" lIns="91425" spcFirstLastPara="1" rIns="91425" wrap="square" tIns="45700">
+          <a:bodyPr spcFirstLastPara="1" wrap="square" lIns="91425" tIns="45700" rIns="91425" bIns="45700" anchor="ctr" anchorCtr="0">
             <a:noAutofit/>
           </a:bodyPr>
           <a:lstStyle/>
           <a:p>
-            <a:pPr indent="0" lvl="0" marL="0" marR="0" rtl="0" algn="ctr">
+            <a:pPr marL="0" marR="0" lvl="0" indent="0" algn="ctr" rtl="0">
               <a:spcBef>
                 <a:spcPts val="0"/>
               </a:spcBef>
@@ -3040,13 +3087,7 @@
               </a:spcAft>
               <a:buNone/>
             </a:pPr>
-            <a:r>
-              <a:rPr>
-                <a:latin typeface="メイリオ"/>
-              </a:rPr>
-              <a:t/>
-            </a:r>
-            <a:endParaRPr b="0" i="0" sz="1800" u="none" cap="none" strike="noStrike">
+            <a:endParaRPr sz="1800" b="0" i="0" u="none" strike="noStrike" cap="none">
               <a:solidFill>
                 <a:schemeClr val="lt1"/>
               </a:solidFill>
@@ -3068,7 +3109,7 @@
           <a:blip r:embed="rId3">
             <a:alphaModFix/>
           </a:blip>
-          <a:srcRect b="0" l="-1647" r="-11171" t="0"/>
+          <a:srcRect l="-1647" r="-11171"/>
           <a:stretch/>
         </p:blipFill>
         <p:spPr>
@@ -3107,12 +3148,12 @@
           </a:ln>
         </p:spPr>
         <p:txBody>
-          <a:bodyPr anchorCtr="0" anchor="ctr" bIns="45700" lIns="91425" spcFirstLastPara="1" rIns="91425" wrap="square" tIns="45700">
+          <a:bodyPr spcFirstLastPara="1" wrap="square" lIns="91425" tIns="45700" rIns="91425" bIns="45700" anchor="ctr" anchorCtr="0">
             <a:noAutofit/>
           </a:bodyPr>
           <a:lstStyle/>
           <a:p>
-            <a:pPr indent="0" lvl="0" marL="0" marR="0" rtl="0" algn="ctr">
+            <a:pPr marL="0" marR="0" lvl="0" indent="0" algn="ctr" rtl="0">
               <a:spcBef>
                 <a:spcPts val="0"/>
               </a:spcBef>
@@ -3121,13 +3162,7 @@
               </a:spcAft>
               <a:buNone/>
             </a:pPr>
-            <a:r>
-              <a:rPr>
-                <a:latin typeface="メイリオ"/>
-              </a:rPr>
-              <a:t/>
-            </a:r>
-            <a:endParaRPr b="1" i="0" sz="1800" u="none" cap="none" strike="noStrike">
+            <a:endParaRPr sz="1800" b="1" i="0" u="none" strike="noStrike" cap="none">
               <a:solidFill>
                 <a:schemeClr val="lt1"/>
               </a:solidFill>
@@ -3159,12 +3194,12 @@
           </a:ln>
         </p:spPr>
         <p:txBody>
-          <a:bodyPr anchorCtr="0" anchor="t" bIns="45700" lIns="91425" spcFirstLastPara="1" rIns="91425" wrap="square" tIns="45700">
+          <a:bodyPr spcFirstLastPara="1" wrap="square" lIns="91425" tIns="45700" rIns="91425" bIns="45700" anchor="t" anchorCtr="0">
             <a:spAutoFit/>
           </a:bodyPr>
           <a:lstStyle/>
           <a:p>
-            <a:pPr indent="0" lvl="0" marL="0" marR="0" rtl="0" algn="ctr">
+            <a:pPr marL="0" marR="0" lvl="0" indent="0" algn="ctr" rtl="0">
               <a:spcBef>
                 <a:spcPts val="0"/>
               </a:spcBef>
@@ -3174,7 +3209,7 @@
               <a:buNone/>
             </a:pPr>
             <a:r>
-              <a:rPr b="1" i="0" lang="ja-JP" sz="3200" u="none" cap="none" strike="noStrike">
+              <a:rPr lang="ja-JP" sz="3200" b="1" i="0" u="none" strike="noStrike" cap="none">
                 <a:solidFill>
                   <a:srgbClr val="0F243E"/>
                 </a:solidFill>
@@ -3185,7 +3220,7 @@
               </a:rPr>
               <a:t>2026年10月　LINE広告トレンドレポート</a:t>
             </a:r>
-            <a:endParaRPr b="1" i="0" sz="2000" u="none" cap="none" strike="noStrike">
+            <a:endParaRPr sz="2000" b="1" i="0" u="none" strike="noStrike" cap="none">
               <a:solidFill>
                 <a:srgbClr val="0F243E"/>
               </a:solidFill>
@@ -3206,11 +3241,11 @@
 </file>
 
 <file path=ppt/slides/slide2.xml><?xml version="1.0" encoding="utf-8"?>
-<p:sld xmlns:a="http://schemas.openxmlformats.org/drawingml/2006/main" xmlns:r="http://schemas.openxmlformats.org/officeDocument/2006/relationships" xmlns:mc="http://schemas.openxmlformats.org/markup-compatibility/2006" xmlns:mv="urn:schemas-microsoft-com:mac:vml" xmlns:p="http://schemas.openxmlformats.org/presentationml/2006/main" xmlns:c="http://schemas.openxmlformats.org/drawingml/2006/chart" xmlns:dgm="http://schemas.openxmlformats.org/drawingml/2006/diagram" xmlns:o="urn:schemas-microsoft-com:office:office" xmlns:v="urn:schemas-microsoft-com:vml" xmlns:pvml="urn:schemas-microsoft-com:office:powerpoint" xmlns:com="http://schemas.openxmlformats.org/drawingml/2006/compatibility" xmlns:p14="http://schemas.microsoft.com/office/powerpoint/2010/main" xmlns:p15="http://schemas.microsoft.com/office/powerpoint/2012/main" xmlns:ahyp="http://schemas.microsoft.com/office/drawing/2018/hyperlinkcolor">
+<p:sld xmlns:a="http://schemas.openxmlformats.org/drawingml/2006/main" xmlns:r="http://schemas.openxmlformats.org/officeDocument/2006/relationships" xmlns:p="http://schemas.openxmlformats.org/presentationml/2006/main">
   <p:cSld>
     <p:spTree>
       <p:nvGrpSpPr>
-        <p:cNvPr id="33" name="Shape 33"/>
+        <p:cNvPr id="1" name="Shape 33"/>
         <p:cNvGrpSpPr/>
         <p:nvPr/>
       </p:nvGrpSpPr>
@@ -3242,12 +3277,12 @@
           </a:ln>
         </p:spPr>
         <p:txBody>
-          <a:bodyPr anchorCtr="0" anchor="t" bIns="90000" lIns="91425" spcFirstLastPara="1" rIns="91425" wrap="square" tIns="90000">
+          <a:bodyPr spcFirstLastPara="1" wrap="square" lIns="91425" tIns="90000" rIns="91425" bIns="90000" anchor="t" anchorCtr="0">
             <a:spAutoFit/>
           </a:bodyPr>
           <a:lstStyle/>
           <a:p>
-            <a:pPr indent="0" lvl="0" marL="0" marR="0" rtl="0" algn="l">
+            <a:pPr marL="0" marR="0" lvl="0" indent="0" algn="l" rtl="0">
               <a:lnSpc>
                 <a:spcPct val="200000"/>
               </a:lnSpc>
@@ -3260,7 +3295,7 @@
               <a:buNone/>
             </a:pPr>
             <a:r>
-              <a:rPr b="1" i="0" lang="ja-JP" sz="1500" u="none" cap="none" strike="noStrike">
+              <a:rPr lang="ja-JP" sz="1500" b="1" i="0" u="none" strike="noStrike" cap="none">
                 <a:solidFill>
                   <a:schemeClr val="dk1"/>
                 </a:solidFill>
@@ -3274,7 +3309,7 @@
             <a:endParaRPr/>
           </a:p>
           <a:p>
-            <a:pPr indent="0" lvl="0" marL="0" marR="0" rtl="0" algn="l">
+            <a:pPr marL="0" marR="0" lvl="0" indent="0" algn="l" rtl="0">
               <a:lnSpc>
                 <a:spcPct val="200000"/>
               </a:lnSpc>
@@ -3287,7 +3322,7 @@
               <a:buNone/>
             </a:pPr>
             <a:r>
-              <a:rPr b="1" i="0" lang="ja-JP" sz="1500" u="none" cap="none" strike="noStrike">
+              <a:rPr lang="ja-JP" sz="1500" b="1" i="0" u="none" strike="noStrike" cap="none">
                 <a:solidFill>
                   <a:schemeClr val="dk1"/>
                 </a:solidFill>
@@ -3301,7 +3336,7 @@
             <a:endParaRPr/>
           </a:p>
           <a:p>
-            <a:pPr indent="0" lvl="0" marL="0" marR="0" rtl="0" algn="l">
+            <a:pPr marL="0" marR="0" lvl="0" indent="0" algn="l" rtl="0">
               <a:lnSpc>
                 <a:spcPct val="200000"/>
               </a:lnSpc>
@@ -3314,7 +3349,7 @@
               <a:buNone/>
             </a:pPr>
             <a:r>
-              <a:rPr b="1" i="0" lang="ja-JP" sz="1500" u="none" cap="none" strike="noStrike">
+              <a:rPr lang="ja-JP" sz="1500" b="1" i="0" u="none" strike="noStrike" cap="none">
                 <a:solidFill>
                   <a:schemeClr val="dk1"/>
                 </a:solidFill>
@@ -3325,7 +3360,7 @@
               </a:rPr>
               <a:t>P.5</a:t>
             </a:r>
-            <a:endParaRPr b="1" i="0" sz="1500" u="none" cap="none" strike="noStrike">
+            <a:endParaRPr sz="1500" b="1" i="0" u="none" strike="noStrike" cap="none">
               <a:solidFill>
                 <a:schemeClr val="dk1"/>
               </a:solidFill>
@@ -3357,12 +3392,12 @@
           </a:ln>
         </p:spPr>
         <p:txBody>
-          <a:bodyPr anchorCtr="0" anchor="t" bIns="90000" lIns="91425" spcFirstLastPara="1" rIns="91425" wrap="square" tIns="90000">
+          <a:bodyPr spcFirstLastPara="1" wrap="square" lIns="91425" tIns="90000" rIns="91425" bIns="90000" anchor="t" anchorCtr="0">
             <a:spAutoFit/>
           </a:bodyPr>
           <a:lstStyle/>
           <a:p>
-            <a:pPr indent="0" lvl="0" marL="0" marR="0" rtl="0" algn="l">
+            <a:pPr marL="0" marR="0" lvl="0" indent="0" algn="l" rtl="0">
               <a:lnSpc>
                 <a:spcPct val="200000"/>
               </a:lnSpc>
@@ -3375,7 +3410,7 @@
               <a:buNone/>
             </a:pPr>
             <a:r>
-              <a:rPr b="1" i="0" lang="ja-JP" sz="1500" u="none" cap="none" strike="noStrike">
+              <a:rPr lang="ja-JP" sz="1500" b="1" i="0" u="none" strike="noStrike" cap="none">
                 <a:solidFill>
                   <a:schemeClr val="dk1"/>
                 </a:solidFill>
@@ -3389,7 +3424,7 @@
             <a:endParaRPr/>
           </a:p>
           <a:p>
-            <a:pPr indent="0" lvl="0" marL="0" marR="0" rtl="0" algn="l">
+            <a:pPr marL="0" marR="0" lvl="0" indent="0" algn="l" rtl="0">
               <a:lnSpc>
                 <a:spcPct val="200000"/>
               </a:lnSpc>
@@ -3402,7 +3437,7 @@
               <a:buNone/>
             </a:pPr>
             <a:r>
-              <a:rPr b="1" i="0" lang="ja-JP" sz="1500" u="none" cap="none" strike="noStrike">
+              <a:rPr lang="ja-JP" sz="1500" b="1" i="0" u="none" strike="noStrike" cap="none">
                 <a:solidFill>
                   <a:schemeClr val="dk1"/>
                 </a:solidFill>
@@ -3416,7 +3451,7 @@
             <a:endParaRPr/>
           </a:p>
           <a:p>
-            <a:pPr indent="0" lvl="0" marL="0" marR="0" rtl="0" algn="l">
+            <a:pPr marL="0" marR="0" lvl="0" indent="0" algn="l" rtl="0">
               <a:lnSpc>
                 <a:spcPct val="200000"/>
               </a:lnSpc>
@@ -3429,7 +3464,7 @@
               <a:buNone/>
             </a:pPr>
             <a:r>
-              <a:rPr b="1" i="0" lang="ja-JP" sz="1500" u="none" cap="none" strike="noStrike">
+              <a:rPr lang="ja-JP" sz="1500" b="1" i="0" u="none" strike="noStrike" cap="none">
                 <a:solidFill>
                   <a:schemeClr val="dk1"/>
                 </a:solidFill>
@@ -3440,7 +3475,7 @@
               </a:rPr>
               <a:t>【LINE VOOM】サービス終了に伴う広告枠の終了</a:t>
             </a:r>
-            <a:endParaRPr b="1" i="0" sz="1500" u="none" cap="none" strike="noStrike">
+            <a:endParaRPr sz="1500" b="1" i="0" u="none" strike="noStrike" cap="none">
               <a:solidFill>
                 <a:schemeClr val="dk1"/>
               </a:solidFill>
@@ -3472,12 +3507,12 @@
           </a:ln>
         </p:spPr>
         <p:txBody>
-          <a:bodyPr anchorCtr="0" anchor="t" bIns="45700" lIns="91425" spcFirstLastPara="1" rIns="91425" wrap="square" tIns="72000">
+          <a:bodyPr spcFirstLastPara="1" wrap="square" lIns="91425" tIns="72000" rIns="91425" bIns="45700" anchor="t" anchorCtr="0">
             <a:spAutoFit/>
           </a:bodyPr>
           <a:lstStyle/>
           <a:p>
-            <a:pPr indent="0" lvl="0" marL="0" marR="0" rtl="0" algn="l">
+            <a:pPr marL="0" marR="0" lvl="0" indent="0" algn="l" rtl="0">
               <a:lnSpc>
                 <a:spcPct val="100000"/>
               </a:lnSpc>
@@ -3495,7 +3530,7 @@
               <a:buNone/>
             </a:pPr>
             <a:r>
-              <a:rPr b="0" i="0" lang="ja-JP" sz="1600" u="none" cap="none" strike="noStrike">
+              <a:rPr lang="ja-JP" sz="1600" b="0" i="0" u="none" strike="noStrike" cap="none">
                 <a:solidFill>
                   <a:srgbClr val="000000"/>
                 </a:solidFill>
@@ -3506,7 +3541,7 @@
               </a:rPr>
               <a:t>    目次</a:t>
             </a:r>
-            <a:endParaRPr b="0" i="0" sz="1600" u="none" cap="none" strike="noStrike">
+            <a:endParaRPr sz="1600" b="0" i="0" u="none" strike="noStrike" cap="none">
               <a:solidFill>
                 <a:srgbClr val="000000"/>
               </a:solidFill>
@@ -3527,11 +3562,11 @@
 </file>
 
 <file path=ppt/slides/slide3.xml><?xml version="1.0" encoding="utf-8"?>
-<p:sld xmlns:a="http://schemas.openxmlformats.org/drawingml/2006/main" xmlns:r="http://schemas.openxmlformats.org/officeDocument/2006/relationships" xmlns:mc="http://schemas.openxmlformats.org/markup-compatibility/2006" xmlns:mv="urn:schemas-microsoft-com:mac:vml" xmlns:p="http://schemas.openxmlformats.org/presentationml/2006/main" xmlns:c="http://schemas.openxmlformats.org/drawingml/2006/chart" xmlns:dgm="http://schemas.openxmlformats.org/drawingml/2006/diagram" xmlns:o="urn:schemas-microsoft-com:office:office" xmlns:v="urn:schemas-microsoft-com:vml" xmlns:pvml="urn:schemas-microsoft-com:office:powerpoint" xmlns:com="http://schemas.openxmlformats.org/drawingml/2006/compatibility" xmlns:p14="http://schemas.microsoft.com/office/powerpoint/2010/main" xmlns:p15="http://schemas.microsoft.com/office/powerpoint/2012/main" xmlns:ahyp="http://schemas.microsoft.com/office/drawing/2018/hyperlinkcolor">
+<p:sld xmlns:a="http://schemas.openxmlformats.org/drawingml/2006/main" xmlns:r="http://schemas.openxmlformats.org/officeDocument/2006/relationships" xmlns:p="http://schemas.openxmlformats.org/presentationml/2006/main">
   <p:cSld>
     <p:spTree>
       <p:nvGrpSpPr>
-        <p:cNvPr id="39" name="Shape 39"/>
+        <p:cNvPr id="1" name="Shape 39"/>
         <p:cNvGrpSpPr/>
         <p:nvPr/>
       </p:nvGrpSpPr>
@@ -3560,23 +3595,23 @@
           <a:solidFill>
             <a:schemeClr val="dk2"/>
           </a:solidFill>
-          <a:ln cap="flat" cmpd="sng" w="9525">
+          <a:ln w="9525" cap="flat" cmpd="sng">
             <a:solidFill>
               <a:srgbClr val="4A7DBA"/>
             </a:solidFill>
             <a:prstDash val="solid"/>
             <a:round/>
-            <a:headEnd len="sm" w="sm" type="none"/>
-            <a:tailEnd len="sm" w="sm" type="none"/>
+            <a:headEnd type="none" w="sm" len="sm"/>
+            <a:tailEnd type="none" w="sm" len="sm"/>
           </a:ln>
         </p:spPr>
         <p:txBody>
-          <a:bodyPr anchorCtr="0" anchor="ctr" bIns="45700" lIns="91425" spcFirstLastPara="1" rIns="91425" wrap="square" tIns="45700">
+          <a:bodyPr spcFirstLastPara="1" wrap="square" lIns="91425" tIns="45700" rIns="91425" bIns="45700" anchor="ctr" anchorCtr="0">
             <a:noAutofit/>
           </a:bodyPr>
           <a:lstStyle/>
           <a:p>
-            <a:pPr indent="0" lvl="0" marL="0" marR="0" rtl="0" algn="ctr">
+            <a:pPr marL="0" marR="0" lvl="0" indent="0" algn="ctr" rtl="0">
               <a:spcBef>
                 <a:spcPts val="0"/>
               </a:spcBef>
@@ -3586,7 +3621,7 @@
               <a:buNone/>
             </a:pPr>
             <a:r>
-              <a:rPr b="0" i="0" lang="ja-JP" sz="1800" u="none" cap="none" strike="noStrike">
+              <a:rPr lang="ja-JP" sz="1800" b="0" i="0" u="none" strike="noStrike" cap="none">
                 <a:solidFill>
                   <a:schemeClr val="lt1"/>
                 </a:solidFill>
@@ -3618,23 +3653,23 @@
           <a:solidFill>
             <a:schemeClr val="bg1"/>
           </a:solidFill>
-          <a:ln cap="flat" cmpd="sng" w="9525">
+          <a:ln w="9525" cap="flat" cmpd="sng">
             <a:solidFill>
               <a:srgbClr val="4F81BD"/>
             </a:solidFill>
             <a:prstDash val="sysDash"/>
             <a:round/>
-            <a:headEnd len="sm" w="sm" type="none"/>
-            <a:tailEnd len="sm" w="sm" type="none"/>
+            <a:headEnd type="none" w="sm" len="sm"/>
+            <a:tailEnd type="none" w="sm" len="sm"/>
           </a:ln>
         </p:spPr>
         <p:txBody>
-          <a:bodyPr anchorCtr="0" anchor="ctr" bIns="45700" lIns="91425" spcFirstLastPara="1" rIns="91425" wrap="square" tIns="45700">
+          <a:bodyPr spcFirstLastPara="1" wrap="square" lIns="91425" tIns="45700" rIns="91425" bIns="45700" anchor="ctr" anchorCtr="0">
             <a:noAutofit/>
           </a:bodyPr>
           <a:lstStyle/>
           <a:p>
-            <a:pPr indent="0" lvl="0" marL="0" marR="0" rtl="0" algn="ctr">
+            <a:pPr marL="0" marR="0" lvl="0" indent="0" algn="ctr" rtl="0">
               <a:spcBef>
                 <a:spcPts val="0"/>
               </a:spcBef>
@@ -3644,7 +3679,7 @@
               <a:buNone/>
             </a:pPr>
             <a:r>
-              <a:rPr b="0" i="0" lang="ja-JP" sz="1200" u="none" cap="none" strike="noStrike">
+              <a:rPr lang="ja-JP" sz="1200" b="0" i="0" u="none" strike="noStrike" cap="none">
                 <a:solidFill>
                   <a:schemeClr val="dk1"/>
                 </a:solidFill>
@@ -3655,7 +3690,7 @@
               </a:rPr>
               <a:t>その他</a:t>
             </a:r>
-            <a:endParaRPr b="0" i="0" sz="1200" u="none" cap="none" strike="noStrike">
+            <a:endParaRPr sz="1200" b="0" i="0" u="none" strike="noStrike" cap="none">
               <a:solidFill>
                 <a:schemeClr val="dk1"/>
               </a:solidFill>
@@ -3684,23 +3719,23 @@
           <a:solidFill>
             <a:schemeClr val="bg1"/>
           </a:solidFill>
-          <a:ln cap="flat" cmpd="sng" w="9525">
+          <a:ln w="9525" cap="flat" cmpd="sng">
             <a:solidFill>
               <a:srgbClr val="4F81BD"/>
             </a:solidFill>
             <a:prstDash val="sysDash"/>
             <a:round/>
-            <a:headEnd len="sm" w="sm" type="none"/>
-            <a:tailEnd len="sm" w="sm" type="none"/>
+            <a:headEnd type="none" w="sm" len="sm"/>
+            <a:tailEnd type="none" w="sm" len="sm"/>
           </a:ln>
         </p:spPr>
         <p:txBody>
-          <a:bodyPr anchorCtr="0" anchor="ctr" bIns="45700" lIns="91425" spcFirstLastPara="1" rIns="91425" wrap="square" tIns="45700">
+          <a:bodyPr spcFirstLastPara="1" wrap="square" lIns="91425" tIns="45700" rIns="91425" bIns="45700" anchor="ctr" anchorCtr="0">
             <a:noAutofit/>
           </a:bodyPr>
           <a:lstStyle/>
           <a:p>
-            <a:pPr indent="0" lvl="0" marL="0" marR="0" rtl="0" algn="ctr">
+            <a:pPr marL="0" marR="0" lvl="0" indent="0" algn="ctr" rtl="0">
               <a:spcBef>
                 <a:spcPts val="0"/>
               </a:spcBef>
@@ -3710,7 +3745,7 @@
               <a:buNone/>
             </a:pPr>
             <a:r>
-              <a:rPr b="0" i="0" lang="ja-JP" sz="1000" u="none" cap="none" strike="noStrike">
+              <a:rPr lang="ja-JP" sz="1000" b="0" i="0" u="none" strike="noStrike" cap="none">
                 <a:solidFill>
                   <a:schemeClr val="dk1"/>
                 </a:solidFill>
@@ -3721,7 +3756,7 @@
               </a:rPr>
               <a:t>配信面</a:t>
             </a:r>
-            <a:endParaRPr b="0" i="0" sz="1000" u="none" cap="none" strike="noStrike">
+            <a:endParaRPr sz="1000" b="0" i="0" u="none" strike="noStrike" cap="none">
               <a:solidFill>
                 <a:schemeClr val="dk1"/>
               </a:solidFill>
@@ -3748,23 +3783,23 @@
             <a:avLst/>
           </a:prstGeom>
           <a:noFill/>
-          <a:ln cap="flat" cmpd="sng" w="9525">
+          <a:ln w="9525" cap="flat" cmpd="sng">
             <a:solidFill>
               <a:srgbClr val="4A7DBA"/>
             </a:solidFill>
             <a:prstDash val="solid"/>
             <a:round/>
-            <a:headEnd len="sm" w="sm" type="none"/>
-            <a:tailEnd len="sm" w="sm" type="none"/>
+            <a:headEnd type="none" w="sm" len="sm"/>
+            <a:tailEnd type="none" w="sm" len="sm"/>
           </a:ln>
         </p:spPr>
         <p:txBody>
-          <a:bodyPr anchorCtr="0" anchor="ctr" bIns="45700" lIns="91425" spcFirstLastPara="1" rIns="91425" wrap="square" tIns="45700">
+          <a:bodyPr spcFirstLastPara="1" wrap="square" lIns="91425" tIns="45700" rIns="91425" bIns="45700" anchor="ctr" anchorCtr="0">
             <a:noAutofit/>
           </a:bodyPr>
           <a:lstStyle/>
           <a:p>
-            <a:pPr indent="0" lvl="0" marL="0" marR="0" rtl="0" algn="ctr">
+            <a:pPr marL="0" marR="0" lvl="0" indent="0" algn="ctr" rtl="0">
               <a:spcBef>
                 <a:spcPts val="0"/>
               </a:spcBef>
@@ -3774,7 +3809,7 @@
               <a:buNone/>
             </a:pPr>
             <a:r>
-              <a:rPr b="0" i="0" lang="ja-JP" sz="1300" u="none" cap="none" strike="noStrike">
+              <a:rPr lang="ja-JP" sz="1300" b="0" i="0" u="none" strike="noStrike" cap="none">
                 <a:solidFill>
                   <a:schemeClr val="dk1"/>
                 </a:solidFill>
@@ -3809,12 +3844,12 @@
           </a:ln>
         </p:spPr>
         <p:txBody>
-          <a:bodyPr anchorCtr="0" anchor="t" bIns="45700" lIns="91425" spcFirstLastPara="1" rIns="91425" wrap="square" tIns="45700">
+          <a:bodyPr spcFirstLastPara="1" wrap="square" lIns="91425" tIns="45700" rIns="91425" bIns="45700" anchor="t" anchorCtr="0">
             <a:spAutoFit/>
           </a:bodyPr>
           <a:lstStyle/>
           <a:p>
-            <a:pPr indent="0" lvl="0" marL="0" marR="0" rtl="0" algn="l">
+            <a:pPr marL="0" marR="0" lvl="0" indent="0" algn="l" rtl="0">
               <a:spcBef>
                 <a:spcPts val="0"/>
               </a:spcBef>
@@ -3824,7 +3859,7 @@
               <a:buNone/>
             </a:pPr>
             <a:r>
-              <a:rPr b="0" i="0" lang="ja-JP" sz="800" u="none" cap="none" strike="noStrike">
+              <a:rPr lang="ja-JP" sz="800" b="0" i="0" u="none" strike="noStrike" cap="none">
                 <a:solidFill>
                   <a:schemeClr val="lt1"/>
                 </a:solidFill>
@@ -3869,12 +3904,12 @@
           </a:ln>
         </p:spPr>
         <p:txBody>
-          <a:bodyPr anchorCtr="0" anchor="ctr" bIns="45700" lIns="91425" spcFirstLastPara="1" rIns="91425" wrap="square" tIns="45700">
+          <a:bodyPr spcFirstLastPara="1" wrap="square" lIns="91425" tIns="45700" rIns="91425" bIns="45700" anchor="ctr" anchorCtr="0">
             <a:noAutofit/>
           </a:bodyPr>
           <a:lstStyle/>
           <a:p>
-            <a:pPr indent="0" lvl="0" marL="0" marR="0" rtl="0" algn="ctr">
+            <a:pPr marL="0" marR="0" lvl="0" indent="0" algn="ctr" rtl="0">
               <a:spcBef>
                 <a:spcPts val="0"/>
               </a:spcBef>
@@ -3884,7 +3919,7 @@
               <a:buNone/>
             </a:pPr>
             <a:r>
-              <a:rPr b="1" lang="ja-JP" sz="1600">
+              <a:rPr lang="ja-JP" sz="1600" b="1">
                 <a:solidFill>
                   <a:srgbClr val="004DE6"/>
                 </a:solidFill>
@@ -3895,7 +3930,7 @@
               </a:rPr>
               <a:t>　　　　　　</a:t>
             </a:r>
-            <a:endParaRPr b="1" sz="1800">
+            <a:endParaRPr sz="1800" b="1">
               <a:solidFill>
                 <a:srgbClr val="004DE6"/>
               </a:solidFill>
@@ -3927,12 +3962,12 @@
           </a:ln>
         </p:spPr>
         <p:txBody>
-          <a:bodyPr anchorCtr="0" anchor="t" bIns="45700" lIns="91425" spcFirstLastPara="1" rIns="91425" wrap="square" tIns="45700">
+          <a:bodyPr spcFirstLastPara="1" wrap="square" lIns="91425" tIns="45700" rIns="91425" bIns="45700" anchor="t" anchorCtr="0">
             <a:spAutoFit/>
           </a:bodyPr>
           <a:lstStyle/>
           <a:p>
-            <a:pPr indent="0" lvl="0" marL="0" marR="0" rtl="0" algn="l">
+            <a:pPr marL="0" marR="0" lvl="0" indent="0" algn="l" rtl="0">
               <a:spcBef>
                 <a:spcPts val="0"/>
               </a:spcBef>
@@ -3942,7 +3977,7 @@
               <a:buNone/>
             </a:pPr>
             <a:r>
-              <a:rPr b="1" lang="ja-JP" sz="1600">
+              <a:rPr lang="ja-JP" sz="1600" b="1">
                 <a:solidFill>
                   <a:srgbClr val="004DE6"/>
                 </a:solidFill>
@@ -3953,7 +3988,7 @@
               </a:rPr>
               <a:t>【LINE広告】旧「LINE広告」の配信停止（10/26）</a:t>
             </a:r>
-            <a:endParaRPr b="1" sz="1600">
+            <a:endParaRPr sz="1600" b="1">
               <a:solidFill>
                 <a:srgbClr val="004DE6"/>
               </a:solidFill>
@@ -3985,12 +4020,12 @@
           </a:ln>
         </p:spPr>
         <p:txBody>
-          <a:bodyPr anchorCtr="0" anchor="t" bIns="45700" lIns="91425" spcFirstLastPara="1" rIns="91425" wrap="square" tIns="72000">
+          <a:bodyPr spcFirstLastPara="1" wrap="square" lIns="91425" tIns="72000" rIns="91425" bIns="45700" anchor="t" anchorCtr="0">
             <a:spAutoFit/>
           </a:bodyPr>
           <a:lstStyle/>
           <a:p>
-            <a:pPr indent="0" lvl="0" marL="0" marR="0" rtl="0" algn="l">
+            <a:pPr marL="0" marR="0" lvl="0" indent="0" algn="l" rtl="0">
               <a:spcBef>
                 <a:spcPts val="0"/>
               </a:spcBef>
@@ -4005,7 +4040,7 @@
               <a:buNone/>
             </a:pPr>
             <a:r>
-              <a:rPr b="0" lang="ja-JP" sz="1600" u="none">
+              <a:rPr lang="ja-JP" sz="1600" b="0" u="none">
                 <a:solidFill>
                   <a:schemeClr val="dk1"/>
                 </a:solidFill>
@@ -4016,7 +4051,7 @@
               </a:rPr>
               <a:t>    今後のアップデート情報</a:t>
             </a:r>
-            <a:endParaRPr b="0" sz="1600" u="none">
+            <a:endParaRPr sz="1600" b="0" u="none">
               <a:solidFill>
                 <a:schemeClr val="dk1"/>
               </a:solidFill>
@@ -4045,23 +4080,23 @@
           <a:solidFill>
             <a:schemeClr val="bg1"/>
           </a:solidFill>
-          <a:ln cap="flat" cmpd="sng" w="9525">
+          <a:ln w="9525" cap="flat" cmpd="sng">
             <a:solidFill>
               <a:srgbClr val="4F81BD"/>
             </a:solidFill>
             <a:prstDash val="sysDash"/>
             <a:round/>
-            <a:headEnd len="sm" w="sm" type="none"/>
-            <a:tailEnd len="sm" w="sm" type="none"/>
+            <a:headEnd type="none" w="sm" len="sm"/>
+            <a:tailEnd type="none" w="sm" len="sm"/>
           </a:ln>
         </p:spPr>
         <p:txBody>
-          <a:bodyPr anchorCtr="0" anchor="ctr" bIns="45700" lIns="91425" spcFirstLastPara="1" rIns="91425" wrap="square" tIns="45700">
+          <a:bodyPr spcFirstLastPara="1" wrap="square" lIns="91425" tIns="45700" rIns="91425" bIns="45700" anchor="ctr" anchorCtr="0">
             <a:noAutofit/>
           </a:bodyPr>
           <a:lstStyle/>
           <a:p>
-            <a:pPr indent="0" lvl="0" marL="0" marR="0" rtl="0" algn="ctr">
+            <a:pPr marL="0" marR="0" lvl="0" indent="0" algn="ctr" rtl="0">
               <a:spcBef>
                 <a:spcPts val="0"/>
               </a:spcBef>
@@ -4098,7 +4133,7 @@
             </a:endParaRPr>
           </a:p>
           <a:p>
-            <a:pPr indent="0" lvl="0" marL="0" marR="0" rtl="0" algn="ctr">
+            <a:pPr marL="0" marR="0" lvl="0" indent="0" algn="ctr" rtl="0">
               <a:spcBef>
                 <a:spcPts val="0"/>
               </a:spcBef>
@@ -4153,23 +4188,23 @@
           <a:solidFill>
             <a:schemeClr val="tx2"/>
           </a:solidFill>
-          <a:ln cap="flat" cmpd="sng" w="9525">
+          <a:ln w="9525" cap="flat" cmpd="sng">
             <a:solidFill>
               <a:srgbClr val="4F81BD"/>
             </a:solidFill>
             <a:prstDash val="solid"/>
             <a:round/>
-            <a:headEnd len="sm" w="sm" type="none"/>
-            <a:tailEnd len="sm" w="sm" type="none"/>
+            <a:headEnd type="none" w="sm" len="sm"/>
+            <a:tailEnd type="none" w="sm" len="sm"/>
           </a:ln>
         </p:spPr>
         <p:txBody>
-          <a:bodyPr anchorCtr="0" anchor="ctr" bIns="45700" lIns="91425" spcFirstLastPara="1" rIns="91425" wrap="square" tIns="45700">
+          <a:bodyPr spcFirstLastPara="1" wrap="square" lIns="91425" tIns="45700" rIns="91425" bIns="45700" anchor="ctr" anchorCtr="0">
             <a:noAutofit/>
           </a:bodyPr>
           <a:lstStyle/>
           <a:p>
-            <a:pPr indent="0" lvl="0" marL="0" marR="0" rtl="0" algn="ctr">
+            <a:pPr marL="0" marR="0" lvl="0" indent="0" algn="ctr" rtl="0">
               <a:spcBef>
                 <a:spcPts val="0"/>
               </a:spcBef>
@@ -4224,12 +4259,12 @@
           </a:ln>
         </p:spPr>
         <p:txBody>
-          <a:bodyPr anchorCtr="0" anchor="ctr" bIns="45700" lIns="91425" spcFirstLastPara="1" rIns="91425" wrap="square" tIns="45700">
+          <a:bodyPr spcFirstLastPara="1" wrap="square" lIns="91425" tIns="45700" rIns="91425" bIns="45700" anchor="ctr" anchorCtr="0">
             <a:noAutofit/>
           </a:bodyPr>
           <a:lstStyle/>
           <a:p>
-            <a:pPr indent="0" lvl="0" marL="0" marR="0" rtl="0" algn="ctr">
+            <a:pPr marL="0" marR="0" lvl="0" indent="0" algn="ctr" rtl="0">
               <a:spcBef>
                 <a:spcPts val="0"/>
               </a:spcBef>
@@ -4238,12 +4273,6 @@
               </a:spcAft>
               <a:buNone/>
             </a:pPr>
-            <a:r>
-              <a:rPr>
-                <a:latin typeface="メイリオ"/>
-              </a:rPr>
-              <a:t/>
-            </a:r>
             <a:endParaRPr sz="1200">
               <a:solidFill>
                 <a:schemeClr val="dk1"/>
@@ -4276,12 +4305,12 @@
           </a:ln>
         </p:spPr>
         <p:txBody>
-          <a:bodyPr anchorCtr="0" anchor="t" bIns="45700" lIns="91425" spcFirstLastPara="1" rIns="91425" wrap="square" tIns="45700">
+          <a:bodyPr spcFirstLastPara="1" wrap="square" lIns="91425" tIns="45700" rIns="91425" bIns="45700" anchor="t" anchorCtr="0">
             <a:spAutoFit/>
           </a:bodyPr>
           <a:lstStyle/>
           <a:p>
-            <a:pPr indent="0" lvl="0" marL="0" marR="0" rtl="0" algn="ctr">
+            <a:pPr marL="0" marR="0" lvl="0" indent="0" algn="ctr" rtl="0">
               <a:spcBef>
                 <a:spcPts val="0"/>
               </a:spcBef>
@@ -4291,7 +4320,7 @@
               <a:buNone/>
             </a:pPr>
             <a:r>
-              <a:rPr b="1" lang="ja-JP" sz="1200">
+              <a:rPr lang="ja-JP" sz="1200" b="1">
                 <a:solidFill>
                   <a:schemeClr val="dk1"/>
                 </a:solidFill>
@@ -4302,7 +4331,7 @@
               </a:rPr>
               <a:t>2026年10月26日（月）に、旧「LINE広告」の新規作成・編集・広告配信が停止された。</a:t>
             </a:r>
-            <a:endParaRPr b="1" sz="1200">
+            <a:endParaRPr sz="1200" b="1">
               <a:solidFill>
                 <a:schemeClr val="dk1"/>
               </a:solidFill>
@@ -4313,7 +4342,7 @@
             </a:endParaRPr>
           </a:p>
           <a:p>
-            <a:pPr indent="0" lvl="0" marL="0" marR="0" rtl="0" algn="ctr">
+            <a:pPr marL="0" marR="0" lvl="0" indent="0" algn="ctr" rtl="0">
               <a:spcBef>
                 <a:spcPts val="0"/>
               </a:spcBef>
@@ -4323,7 +4352,7 @@
               <a:buNone/>
             </a:pPr>
             <a:r>
-              <a:rPr b="1" lang="ja-JP" sz="1200">
+              <a:rPr lang="ja-JP" sz="1200" b="1">
                 <a:solidFill>
                   <a:schemeClr val="dk1"/>
                 </a:solidFill>
@@ -4337,7 +4366,7 @@
             <a:endParaRPr/>
           </a:p>
           <a:p>
-            <a:pPr indent="0" lvl="0" marL="0" marR="0" rtl="0" algn="ctr">
+            <a:pPr marL="0" marR="0" lvl="0" indent="0" algn="ctr" rtl="0">
               <a:spcBef>
                 <a:spcPts val="0"/>
               </a:spcBef>
@@ -4347,7 +4376,7 @@
               <a:buNone/>
             </a:pPr>
             <a:r>
-              <a:rPr b="1" lang="ja-JP" sz="1200">
+              <a:rPr lang="ja-JP" sz="1200" b="1">
                 <a:solidFill>
                   <a:schemeClr val="dk1"/>
                 </a:solidFill>
@@ -4358,7 +4387,7 @@
               </a:rPr>
               <a:t>2027年3月末頃に提供終了となり、それ以降はレポートも確認できなくなる。</a:t>
             </a:r>
-            <a:endParaRPr b="1" sz="1400">
+            <a:endParaRPr sz="1400" b="1">
               <a:solidFill>
                 <a:schemeClr val="dk1"/>
               </a:solidFill>
@@ -4390,12 +4419,12 @@
           </a:ln>
         </p:spPr>
         <p:txBody>
-          <a:bodyPr anchorCtr="0" anchor="t" bIns="45700" lIns="91425" spcFirstLastPara="1" rIns="91425" wrap="square" tIns="45700">
+          <a:bodyPr spcFirstLastPara="1" wrap="square" lIns="91425" tIns="45700" rIns="91425" bIns="45700" anchor="t" anchorCtr="0">
             <a:noAutofit/>
           </a:bodyPr>
           <a:lstStyle/>
           <a:p>
-            <a:pPr indent="0" lvl="0" marL="0" marR="0" rtl="0" algn="l">
+            <a:pPr marL="0" marR="0" lvl="0" indent="0" algn="l" rtl="0">
               <a:spcBef>
                 <a:spcPts val="0"/>
               </a:spcBef>
@@ -4405,7 +4434,7 @@
               <a:buNone/>
             </a:pPr>
             <a:r>
-              <a:rPr b="1" lang="ja-JP" sz="1400">
+              <a:rPr lang="ja-JP" sz="1400" b="1">
                 <a:solidFill>
                   <a:srgbClr val="15133D"/>
                 </a:solidFill>
@@ -4447,29 +4476,29 @@
             </a:xfrm>
             <a:prstGeom prst="trapezoid">
               <a:avLst>
-                <a:gd fmla="val 60792" name="adj"/>
+                <a:gd name="adj" fmla="val 60792"/>
               </a:avLst>
             </a:prstGeom>
             <a:solidFill>
               <a:srgbClr val="EAEDF5"/>
             </a:solidFill>
-            <a:ln cap="flat" cmpd="sng" w="25400">
+            <a:ln w="25400" cap="flat" cmpd="sng">
               <a:solidFill>
                 <a:schemeClr val="dk2"/>
               </a:solidFill>
               <a:prstDash val="solid"/>
               <a:round/>
-              <a:headEnd len="sm" w="sm" type="none"/>
-              <a:tailEnd len="sm" w="sm" type="none"/>
+              <a:headEnd type="none" w="sm" len="sm"/>
+              <a:tailEnd type="none" w="sm" len="sm"/>
             </a:ln>
           </p:spPr>
           <p:txBody>
-            <a:bodyPr anchorCtr="0" anchor="ctr" bIns="91425" lIns="91425" spcFirstLastPara="1" rIns="91425" wrap="square" tIns="91425">
+            <a:bodyPr spcFirstLastPara="1" wrap="square" lIns="91425" tIns="91425" rIns="91425" bIns="91425" anchor="ctr" anchorCtr="0">
               <a:noAutofit/>
             </a:bodyPr>
             <a:lstStyle/>
             <a:p>
-              <a:pPr indent="0" lvl="0" marL="0" rtl="0" algn="l">
+              <a:pPr marL="0" lvl="0" indent="0" algn="l" rtl="0">
                 <a:spcBef>
                   <a:spcPts val="0"/>
                 </a:spcBef>
@@ -4478,9 +4507,6 @@
                 </a:spcAft>
                 <a:buNone/>
               </a:pPr>
-              <a:r>
-                <a:t/>
-              </a:r>
               <a:endParaRPr/>
             </a:p>
           </p:txBody>
@@ -4505,12 +4531,12 @@
             </a:ln>
           </p:spPr>
           <p:txBody>
-            <a:bodyPr anchorCtr="0" anchor="ctr" bIns="10150" lIns="10150" spcFirstLastPara="1" rIns="10150" wrap="square" tIns="10150">
+            <a:bodyPr spcFirstLastPara="1" wrap="square" lIns="10150" tIns="10150" rIns="10150" bIns="10150" anchor="ctr" anchorCtr="0">
               <a:noAutofit/>
             </a:bodyPr>
             <a:lstStyle/>
             <a:p>
-              <a:pPr indent="0" lvl="0" marL="0" marR="0" rtl="0" algn="ctr">
+              <a:pPr marL="0" marR="0" lvl="0" indent="0" algn="ctr" rtl="0">
                 <a:lnSpc>
                   <a:spcPct val="90000"/>
                 </a:lnSpc>
@@ -4528,7 +4554,7 @@
                 <a:buNone/>
               </a:pPr>
               <a:r>
-                <a:rPr b="1" lang="ja-JP" sz="800">
+                <a:rPr lang="ja-JP" sz="800" b="1">
                   <a:solidFill>
                     <a:srgbClr val="262626"/>
                   </a:solidFill>
@@ -4556,29 +4582,29 @@
             </a:xfrm>
             <a:prstGeom prst="trapezoid">
               <a:avLst>
-                <a:gd fmla="val 60792" name="adj"/>
+                <a:gd name="adj" fmla="val 60792"/>
               </a:avLst>
             </a:prstGeom>
             <a:solidFill>
               <a:schemeClr val="lt1"/>
             </a:solidFill>
-            <a:ln cap="flat" cmpd="sng" w="25400">
+            <a:ln w="25400" cap="flat" cmpd="sng">
               <a:solidFill>
                 <a:schemeClr val="dk2"/>
               </a:solidFill>
               <a:prstDash val="solid"/>
               <a:round/>
-              <a:headEnd len="sm" w="sm" type="none"/>
-              <a:tailEnd len="sm" w="sm" type="none"/>
+              <a:headEnd type="none" w="sm" len="sm"/>
+              <a:tailEnd type="none" w="sm" len="sm"/>
             </a:ln>
           </p:spPr>
           <p:txBody>
-            <a:bodyPr anchorCtr="0" anchor="ctr" bIns="91425" lIns="91425" spcFirstLastPara="1" rIns="91425" wrap="square" tIns="91425">
+            <a:bodyPr spcFirstLastPara="1" wrap="square" lIns="91425" tIns="91425" rIns="91425" bIns="91425" anchor="ctr" anchorCtr="0">
               <a:noAutofit/>
             </a:bodyPr>
             <a:lstStyle/>
             <a:p>
-              <a:pPr indent="0" lvl="0" marL="0" rtl="0" algn="l">
+              <a:pPr marL="0" lvl="0" indent="0" algn="l" rtl="0">
                 <a:spcBef>
                   <a:spcPts val="0"/>
                 </a:spcBef>
@@ -4587,9 +4613,6 @@
                 </a:spcAft>
                 <a:buNone/>
               </a:pPr>
-              <a:r>
-                <a:t/>
-              </a:r>
               <a:endParaRPr/>
             </a:p>
           </p:txBody>
@@ -4614,12 +4637,12 @@
             </a:ln>
           </p:spPr>
           <p:txBody>
-            <a:bodyPr anchorCtr="0" anchor="ctr" bIns="10150" lIns="10150" spcFirstLastPara="1" rIns="10150" wrap="square" tIns="10150">
+            <a:bodyPr spcFirstLastPara="1" wrap="square" lIns="10150" tIns="10150" rIns="10150" bIns="10150" anchor="ctr" anchorCtr="0">
               <a:noAutofit/>
             </a:bodyPr>
             <a:lstStyle/>
             <a:p>
-              <a:pPr indent="0" lvl="0" marL="0" marR="0" rtl="0" algn="ctr">
+              <a:pPr marL="0" marR="0" lvl="0" indent="0" algn="ctr" rtl="0">
                 <a:lnSpc>
                   <a:spcPct val="90000"/>
                 </a:lnSpc>
@@ -4637,7 +4660,7 @@
                 <a:buNone/>
               </a:pPr>
               <a:r>
-                <a:rPr b="1" lang="ja-JP" sz="800">
+                <a:rPr lang="ja-JP" sz="800" b="1">
                   <a:solidFill>
                     <a:srgbClr val="262626"/>
                   </a:solidFill>
@@ -4665,29 +4688,29 @@
             </a:xfrm>
             <a:prstGeom prst="trapezoid">
               <a:avLst>
-                <a:gd fmla="val 60792" name="adj"/>
+                <a:gd name="adj" fmla="val 60792"/>
               </a:avLst>
             </a:prstGeom>
             <a:solidFill>
               <a:schemeClr val="lt1"/>
             </a:solidFill>
-            <a:ln cap="flat" cmpd="sng" w="25400">
+            <a:ln w="25400" cap="flat" cmpd="sng">
               <a:solidFill>
                 <a:schemeClr val="dk2"/>
               </a:solidFill>
               <a:prstDash val="solid"/>
               <a:round/>
-              <a:headEnd len="sm" w="sm" type="none"/>
-              <a:tailEnd len="sm" w="sm" type="none"/>
+              <a:headEnd type="none" w="sm" len="sm"/>
+              <a:tailEnd type="none" w="sm" len="sm"/>
             </a:ln>
           </p:spPr>
           <p:txBody>
-            <a:bodyPr anchorCtr="0" anchor="ctr" bIns="91425" lIns="91425" spcFirstLastPara="1" rIns="91425" wrap="square" tIns="91425">
+            <a:bodyPr spcFirstLastPara="1" wrap="square" lIns="91425" tIns="91425" rIns="91425" bIns="91425" anchor="ctr" anchorCtr="0">
               <a:noAutofit/>
             </a:bodyPr>
             <a:lstStyle/>
             <a:p>
-              <a:pPr indent="0" lvl="0" marL="0" rtl="0" algn="l">
+              <a:pPr marL="0" lvl="0" indent="0" algn="l" rtl="0">
                 <a:spcBef>
                   <a:spcPts val="0"/>
                 </a:spcBef>
@@ -4696,9 +4719,6 @@
                 </a:spcAft>
                 <a:buNone/>
               </a:pPr>
-              <a:r>
-                <a:t/>
-              </a:r>
               <a:endParaRPr/>
             </a:p>
           </p:txBody>
@@ -4723,12 +4743,12 @@
             </a:ln>
           </p:spPr>
           <p:txBody>
-            <a:bodyPr anchorCtr="0" anchor="ctr" bIns="10150" lIns="10150" spcFirstLastPara="1" rIns="10150" wrap="square" tIns="10150">
+            <a:bodyPr spcFirstLastPara="1" wrap="square" lIns="10150" tIns="10150" rIns="10150" bIns="10150" anchor="ctr" anchorCtr="0">
               <a:noAutofit/>
             </a:bodyPr>
             <a:lstStyle/>
             <a:p>
-              <a:pPr indent="0" lvl="0" marL="0" marR="0" rtl="0" algn="ctr">
+              <a:pPr marL="0" marR="0" lvl="0" indent="0" algn="ctr" rtl="0">
                 <a:lnSpc>
                   <a:spcPct val="90000"/>
                 </a:lnSpc>
@@ -4746,7 +4766,7 @@
                 <a:buNone/>
               </a:pPr>
               <a:r>
-                <a:rPr b="1" lang="ja-JP" sz="800">
+                <a:rPr lang="ja-JP" sz="800" b="1">
                   <a:solidFill>
                     <a:srgbClr val="262626"/>
                   </a:solidFill>
@@ -4774,27 +4794,27 @@
             </a:xfrm>
             <a:prstGeom prst="trapezoid">
               <a:avLst>
-                <a:gd fmla="val 60792" name="adj"/>
+                <a:gd name="adj" fmla="val 60792"/>
               </a:avLst>
             </a:prstGeom>
             <a:noFill/>
-            <a:ln cap="flat" cmpd="sng" w="25400">
+            <a:ln w="25400" cap="flat" cmpd="sng">
               <a:solidFill>
                 <a:schemeClr val="dk2"/>
               </a:solidFill>
               <a:prstDash val="solid"/>
               <a:round/>
-              <a:headEnd len="sm" w="sm" type="none"/>
-              <a:tailEnd len="sm" w="sm" type="none"/>
+              <a:headEnd type="none" w="sm" len="sm"/>
+              <a:tailEnd type="none" w="sm" len="sm"/>
             </a:ln>
           </p:spPr>
           <p:txBody>
-            <a:bodyPr anchorCtr="0" anchor="ctr" bIns="91425" lIns="91425" spcFirstLastPara="1" rIns="91425" wrap="square" tIns="91425">
+            <a:bodyPr spcFirstLastPara="1" wrap="square" lIns="91425" tIns="91425" rIns="91425" bIns="91425" anchor="ctr" anchorCtr="0">
               <a:noAutofit/>
             </a:bodyPr>
             <a:lstStyle/>
             <a:p>
-              <a:pPr indent="0" lvl="0" marL="0" rtl="0" algn="l">
+              <a:pPr marL="0" lvl="0" indent="0" algn="l" rtl="0">
                 <a:spcBef>
                   <a:spcPts val="0"/>
                 </a:spcBef>
@@ -4803,9 +4823,6 @@
                 </a:spcAft>
                 <a:buNone/>
               </a:pPr>
-              <a:r>
-                <a:t/>
-              </a:r>
               <a:endParaRPr/>
             </a:p>
           </p:txBody>
@@ -4830,12 +4847,12 @@
             </a:ln>
           </p:spPr>
           <p:txBody>
-            <a:bodyPr anchorCtr="0" anchor="ctr" bIns="10150" lIns="10150" spcFirstLastPara="1" rIns="10150" wrap="square" tIns="10150">
+            <a:bodyPr spcFirstLastPara="1" wrap="square" lIns="10150" tIns="10150" rIns="10150" bIns="10150" anchor="ctr" anchorCtr="0">
               <a:noAutofit/>
             </a:bodyPr>
             <a:lstStyle/>
             <a:p>
-              <a:pPr indent="0" lvl="0" marL="0" marR="0" rtl="0" algn="ctr">
+              <a:pPr marL="0" marR="0" lvl="0" indent="0" algn="ctr" rtl="0">
                 <a:lnSpc>
                   <a:spcPct val="90000"/>
                 </a:lnSpc>
@@ -4853,7 +4870,7 @@
                 <a:buNone/>
               </a:pPr>
               <a:r>
-                <a:rPr b="1" lang="ja-JP" sz="800">
+                <a:rPr lang="ja-JP" sz="800" b="1">
                   <a:solidFill>
                     <a:srgbClr val="262626"/>
                   </a:solidFill>
@@ -4871,7 +4888,7 @@
       </p:grpSp>
       <p:pic>
         <p:nvPicPr>
-          <p:cNvPr descr="LINE公式アカウントのロゴの使用方法とは？種類やダウンロード方法、利用時の注意点を紹介 | Mico（ミコ）" id="62" name="Google Shape;62;p3"/>
+          <p:cNvPr id="62" name="Google Shape;62;p3" descr="LINE公式アカウントのロゴの使用方法とは？種類やダウンロード方法、利用時の注意点を紹介 | Mico（ミコ）"/>
           <p:cNvPicPr preferRelativeResize="0"/>
           <p:nvPr/>
         </p:nvPicPr>
@@ -4879,7 +4896,7 @@
           <a:blip r:embed="rId3">
             <a:alphaModFix/>
           </a:blip>
-          <a:srcRect b="0" l="0" r="0" t="0"/>
+          <a:srcRect/>
           <a:stretch/>
         </p:blipFill>
         <p:spPr>
@@ -4933,7 +4950,7 @@
           </a:fontRef>
         </p:style>
         <p:txBody>
-          <a:bodyPr rtlCol="0" anchor="ctr" wrap="square" rIns="45720"/>
+          <a:bodyPr wrap="square" rIns="45720" rtlCol="0" anchor="ctr"/>
           <a:lstStyle/>
           <a:p>
             <a:pPr algn="ctr"/>
@@ -4988,7 +5005,7 @@
           </a:fontRef>
         </p:style>
         <p:txBody>
-          <a:bodyPr rtlCol="0" anchor="ctr" wrap="square" lIns="182880" rIns="137160" tIns="54864" bIns="54864"/>
+          <a:bodyPr wrap="square" lIns="182880" tIns="54864" rIns="137160" bIns="54864" rtlCol="0" anchor="ctr"/>
           <a:lstStyle/>
           <a:p>
             <a:pPr algn="ctr">
@@ -4997,7 +5014,7 @@
               </a:lnSpc>
             </a:pPr>
             <a:r>
-              <a:rPr sz="1050">
+              <a:rPr sz="1200" dirty="0" err="1">
                 <a:solidFill>
                   <a:srgbClr val="333333"/>
                 </a:solidFill>
@@ -5005,6 +5022,12 @@
               </a:rPr>
               <a:t>新規アカウントの作成が停止</a:t>
             </a:r>
+            <a:endParaRPr sz="1200" dirty="0">
+              <a:solidFill>
+                <a:srgbClr val="333333"/>
+              </a:solidFill>
+              <a:latin typeface="メイリオ"/>
+            </a:endParaRPr>
           </a:p>
         </p:txBody>
       </p:sp>
@@ -5080,7 +5103,7 @@
           </a:fontRef>
         </p:style>
         <p:txBody>
-          <a:bodyPr rtlCol="0" anchor="ctr" wrap="square" rIns="45720"/>
+          <a:bodyPr wrap="square" rIns="45720" rtlCol="0" anchor="ctr"/>
           <a:lstStyle/>
           <a:p>
             <a:pPr algn="ctr"/>
@@ -5135,7 +5158,7 @@
           </a:fontRef>
         </p:style>
         <p:txBody>
-          <a:bodyPr rtlCol="0" anchor="ctr" wrap="square" lIns="182880" rIns="137160" tIns="54864" bIns="54864"/>
+          <a:bodyPr wrap="square" lIns="182880" tIns="54864" rIns="137160" bIns="54864" rtlCol="0" anchor="ctr"/>
           <a:lstStyle/>
           <a:p>
             <a:pPr algn="ctr">
@@ -5144,7 +5167,7 @@
               </a:lnSpc>
             </a:pPr>
             <a:r>
-              <a:rPr sz="1050">
+              <a:rPr sz="1200">
                 <a:solidFill>
                   <a:srgbClr val="333333"/>
                 </a:solidFill>
@@ -5227,7 +5250,7 @@
           </a:fontRef>
         </p:style>
         <p:txBody>
-          <a:bodyPr rtlCol="0" anchor="ctr" wrap="square" rIns="45720"/>
+          <a:bodyPr wrap="square" rIns="45720" rtlCol="0" anchor="ctr"/>
           <a:lstStyle/>
           <a:p>
             <a:pPr algn="ctr"/>
@@ -5282,7 +5305,7 @@
           </a:fontRef>
         </p:style>
         <p:txBody>
-          <a:bodyPr rtlCol="0" anchor="ctr" wrap="square" lIns="182880" rIns="137160" tIns="54864" bIns="54864"/>
+          <a:bodyPr wrap="square" lIns="182880" tIns="54864" rIns="137160" bIns="54864" rtlCol="0" anchor="ctr"/>
           <a:lstStyle/>
           <a:p>
             <a:pPr algn="ctr">
@@ -5291,13 +5314,53 @@
               </a:lnSpc>
             </a:pPr>
             <a:r>
-              <a:rPr sz="1050">
+              <a:rPr sz="1200" dirty="0" err="1">
                 <a:solidFill>
                   <a:srgbClr val="333333"/>
                 </a:solidFill>
                 <a:latin typeface="メイリオ"/>
               </a:rPr>
-              <a:t>管理画面は閲覧のみ（レポート・明細は確認可）</a:t>
+              <a:t>管理画面は閲覧のみ</a:t>
+            </a:r>
+            <a:endParaRPr lang="en-US" sz="1200" dirty="0">
+              <a:solidFill>
+                <a:srgbClr val="333333"/>
+              </a:solidFill>
+              <a:latin typeface="メイリオ"/>
+            </a:endParaRPr>
+          </a:p>
+          <a:p>
+            <a:pPr algn="ctr">
+              <a:lnSpc>
+                <a:spcPct val="110000"/>
+              </a:lnSpc>
+            </a:pPr>
+            <a:r>
+              <a:rPr sz="1200" dirty="0">
+                <a:solidFill>
+                  <a:srgbClr val="333333"/>
+                </a:solidFill>
+                <a:latin typeface="メイリオ"/>
+              </a:rPr>
+              <a:t>（</a:t>
+            </a:r>
+            <a:r>
+              <a:rPr sz="1200" dirty="0" err="1">
+                <a:solidFill>
+                  <a:srgbClr val="333333"/>
+                </a:solidFill>
+                <a:latin typeface="メイリオ"/>
+              </a:rPr>
+              <a:t>レポート・明細は確認可</a:t>
+            </a:r>
+            <a:r>
+              <a:rPr sz="1200" dirty="0">
+                <a:solidFill>
+                  <a:srgbClr val="333333"/>
+                </a:solidFill>
+                <a:latin typeface="メイリオ"/>
+              </a:rPr>
+              <a:t>）</a:t>
             </a:r>
           </a:p>
         </p:txBody>
@@ -5374,7 +5437,7 @@
           </a:fontRef>
         </p:style>
         <p:txBody>
-          <a:bodyPr rtlCol="0" anchor="ctr" wrap="square" rIns="45720"/>
+          <a:bodyPr wrap="square" rIns="45720" rtlCol="0" anchor="ctr"/>
           <a:lstStyle/>
           <a:p>
             <a:pPr algn="ctr"/>
@@ -5429,7 +5492,7 @@
           </a:fontRef>
         </p:style>
         <p:txBody>
-          <a:bodyPr rtlCol="0" anchor="ctr" wrap="square" lIns="182880" rIns="137160" tIns="54864" bIns="54864"/>
+          <a:bodyPr wrap="square" lIns="182880" tIns="54864" rIns="137160" bIns="54864" rtlCol="0" anchor="ctr"/>
           <a:lstStyle/>
           <a:p>
             <a:pPr algn="ctr">
@@ -5438,13 +5501,22 @@
               </a:lnSpc>
             </a:pPr>
             <a:r>
-              <a:rPr sz="1050">
+              <a:rPr sz="1200" dirty="0" err="1">
                 <a:solidFill>
                   <a:srgbClr val="333333"/>
                 </a:solidFill>
                 <a:latin typeface="メイリオ"/>
               </a:rPr>
-              <a:t>提供終了（レポートも確認不可）</a:t>
+              <a:t>提供終了（レポートも確認不可</a:t>
+            </a:r>
+            <a:r>
+              <a:rPr sz="1200" dirty="0">
+                <a:solidFill>
+                  <a:srgbClr val="333333"/>
+                </a:solidFill>
+                <a:latin typeface="メイリオ"/>
+              </a:rPr>
+              <a:t>）</a:t>
             </a:r>
           </a:p>
         </p:txBody>
@@ -5458,7 +5530,7 @@
         <p:spPr>
           <a:xfrm>
             <a:off x="544108" y="4669160"/>
-            <a:ext cx="8817784" cy="914400"/>
+            <a:ext cx="4317452" cy="1371600"/>
           </a:xfrm>
           <a:prstGeom prst="roundRect">
             <a:avLst>
@@ -5490,19 +5562,25 @@
           </a:fontRef>
         </p:style>
         <p:txBody>
-          <a:bodyPr rtlCol="0" anchor="ctr" wrap="square" lIns="228600" rIns="182880"/>
+          <a:bodyPr wrap="square" lIns="228600" rIns="182880" rtlCol="0" anchor="ctr"/>
           <a:lstStyle/>
           <a:p>
             <a:pPr algn="l"/>
             <a:r>
-              <a:rPr sz="1900" b="1">
+              <a:rPr sz="1900" b="1" dirty="0" err="1">
                 <a:solidFill>
                   <a:srgbClr val="15133D"/>
                 </a:solidFill>
                 <a:latin typeface="メイリオ"/>
               </a:rPr>
-              <a:t>レポートは提供終了までに保存</a:t>
+              <a:t>APIと一括登録も停止</a:t>
             </a:r>
+            <a:endParaRPr sz="1900" b="1" dirty="0">
+              <a:solidFill>
+                <a:srgbClr val="15133D"/>
+              </a:solidFill>
+              <a:latin typeface="メイリオ"/>
+            </a:endParaRPr>
           </a:p>
           <a:p>
             <a:pPr algn="l">
@@ -5514,13 +5592,95 @@
               </a:spcBef>
             </a:pPr>
             <a:r>
-              <a:rPr sz="1300">
+              <a:rPr dirty="0">
                 <a:solidFill>
                   <a:srgbClr val="333333"/>
                 </a:solidFill>
                 <a:latin typeface="メイリオ"/>
               </a:rPr>
-              <a:t>移行先のLINEヤフー広告には過去の配信実績が引き継がれないため、比較に使うレポートは2027年3月末頃の提供終了までに手元に残しておく。</a:t>
+              <a:t>コピー・一括登録での作成、画像・動画の追加・編集、再審査の依頼もできない。API経由の作成・編集も10/26に停止。</a:t>
+            </a:r>
+          </a:p>
+        </p:txBody>
+      </p:sp>
+      <p:sp>
+        <p:nvSpPr>
+          <p:cNvPr id="75" name="Rounded Rectangle 73_2"/>
+          <p:cNvSpPr/>
+          <p:nvPr/>
+        </p:nvSpPr>
+        <p:spPr>
+          <a:xfrm>
+            <a:off x="5044440" y="4669160"/>
+            <a:ext cx="4317452" cy="1371600"/>
+          </a:xfrm>
+          <a:prstGeom prst="roundRect">
+            <a:avLst>
+              <a:gd name="adj" fmla="val 6000"/>
+            </a:avLst>
+          </a:prstGeom>
+          <a:solidFill>
+            <a:srgbClr val="EAF0FA"/>
+          </a:solidFill>
+          <a:ln w="12700">
+            <a:solidFill>
+              <a:srgbClr val="3467B2"/>
+            </a:solidFill>
+          </a:ln>
+          <a:effectLst/>
+        </p:spPr>
+        <p:style>
+          <a:lnRef idx="1">
+            <a:schemeClr val="accent1"/>
+          </a:lnRef>
+          <a:fillRef idx="3">
+            <a:schemeClr val="accent1"/>
+          </a:fillRef>
+          <a:effectRef idx="2">
+            <a:schemeClr val="accent1"/>
+          </a:effectRef>
+          <a:fontRef idx="minor">
+            <a:schemeClr val="lt1"/>
+          </a:fontRef>
+        </p:style>
+        <p:txBody>
+          <a:bodyPr wrap="square" lIns="228600" rIns="182880" rtlCol="0" anchor="ctr"/>
+          <a:lstStyle/>
+          <a:p>
+            <a:pPr algn="l"/>
+            <a:r>
+              <a:rPr sz="1900" b="1" dirty="0" err="1">
+                <a:solidFill>
+                  <a:srgbClr val="15133D"/>
+                </a:solidFill>
+                <a:latin typeface="メイリオ"/>
+              </a:rPr>
+              <a:t>請求はあとから更新あり</a:t>
+            </a:r>
+            <a:endParaRPr sz="1900" b="1" dirty="0">
+              <a:solidFill>
+                <a:srgbClr val="15133D"/>
+              </a:solidFill>
+              <a:latin typeface="メイリオ"/>
+            </a:endParaRPr>
+          </a:p>
+          <a:p>
+            <a:pPr algn="l">
+              <a:lnSpc>
+                <a:spcPct val="115000"/>
+              </a:lnSpc>
+              <a:spcBef>
+                <a:spcPts val="600"/>
+              </a:spcBef>
+            </a:pPr>
+            <a:r>
+              <a:rPr dirty="0">
+                <a:solidFill>
+                  <a:srgbClr val="333333"/>
+                </a:solidFill>
+                <a:latin typeface="メイリオ"/>
+              </a:rPr>
+              <a:t>停止後も費用・明細があとから更新されることがある。クレジットカードの決済が配信終了後になる場合もある。</a:t>
             </a:r>
           </a:p>
         </p:txBody>
@@ -5534,7 +5694,7 @@
 </file>
 
 <file path=ppt/slides/slide4.xml><?xml version="1.0" encoding="utf-8"?>
-<p:sld xmlns:a="http://schemas.openxmlformats.org/drawingml/2006/main" xmlns:p="http://schemas.openxmlformats.org/presentationml/2006/main" xmlns:r="http://schemas.openxmlformats.org/officeDocument/2006/relationships">
+<p:sld xmlns:a="http://schemas.openxmlformats.org/drawingml/2006/main" xmlns:r="http://schemas.openxmlformats.org/officeDocument/2006/relationships" xmlns:p="http://schemas.openxmlformats.org/presentationml/2006/main">
   <p:cSld>
     <p:spTree>
       <p:nvGrpSpPr>
@@ -5542,7 +5702,14 @@
         <p:cNvGrpSpPr/>
         <p:nvPr/>
       </p:nvGrpSpPr>
-      <p:grpSpPr/>
+      <p:grpSpPr>
+        <a:xfrm>
+          <a:off x="0" y="0"/>
+          <a:ext cx="0" cy="0"/>
+          <a:chOff x="0" y="0"/>
+          <a:chExt cx="0" cy="0"/>
+        </a:xfrm>
+      </p:grpSpPr>
       <p:sp>
         <p:nvSpPr>
           <p:cNvPr id="40" name="Google Shape;40;p3"/>
@@ -5560,23 +5727,23 @@
           <a:solidFill>
             <a:schemeClr val="dk2"/>
           </a:solidFill>
-          <a:ln cap="flat" cmpd="sng" w="9525">
+          <a:ln w="9525" cap="flat" cmpd="sng">
             <a:solidFill>
               <a:srgbClr val="4A7DBA"/>
             </a:solidFill>
             <a:prstDash val="solid"/>
             <a:round/>
-            <a:headEnd len="sm" w="sm" type="none"/>
-            <a:tailEnd len="sm" w="sm" type="none"/>
+            <a:headEnd type="none" w="sm" len="sm"/>
+            <a:tailEnd type="none" w="sm" len="sm"/>
           </a:ln>
         </p:spPr>
         <p:txBody>
-          <a:bodyPr anchorCtr="0" anchor="ctr" bIns="45700" lIns="91425" spcFirstLastPara="1" rIns="91425" wrap="square" tIns="45700">
+          <a:bodyPr spcFirstLastPara="1" wrap="square" lIns="91425" tIns="45700" rIns="91425" bIns="45700" anchor="ctr" anchorCtr="0">
             <a:noAutofit/>
           </a:bodyPr>
           <a:lstStyle/>
           <a:p>
-            <a:pPr indent="0" lvl="0" marL="0" marR="0" rtl="0" algn="ctr">
+            <a:pPr marL="0" marR="0" lvl="0" indent="0" algn="ctr" rtl="0">
               <a:spcBef>
                 <a:spcPts val="0"/>
               </a:spcBef>
@@ -5586,7 +5753,7 @@
               <a:buNone/>
             </a:pPr>
             <a:r>
-              <a:rPr b="0" i="0" lang="ja-JP" sz="1800" u="none" cap="none" strike="noStrike">
+              <a:rPr lang="ja-JP" sz="1800" b="0" i="0" u="none" strike="noStrike" cap="none">
                 <a:solidFill>
                   <a:schemeClr val="lt1"/>
                 </a:solidFill>
@@ -5618,23 +5785,23 @@
           <a:solidFill>
             <a:schemeClr val="bg1"/>
           </a:solidFill>
-          <a:ln cap="flat" cmpd="sng" w="9525">
+          <a:ln w="9525" cap="flat" cmpd="sng">
             <a:solidFill>
               <a:srgbClr val="4F81BD"/>
             </a:solidFill>
             <a:prstDash val="sysDash"/>
             <a:round/>
-            <a:headEnd len="sm" w="sm" type="none"/>
-            <a:tailEnd len="sm" w="sm" type="none"/>
+            <a:headEnd type="none" w="sm" len="sm"/>
+            <a:tailEnd type="none" w="sm" len="sm"/>
           </a:ln>
         </p:spPr>
         <p:txBody>
-          <a:bodyPr anchorCtr="0" anchor="ctr" bIns="45700" lIns="91425" spcFirstLastPara="1" rIns="91425" wrap="square" tIns="45700">
+          <a:bodyPr spcFirstLastPara="1" wrap="square" lIns="91425" tIns="45700" rIns="91425" bIns="45700" anchor="ctr" anchorCtr="0">
             <a:noAutofit/>
           </a:bodyPr>
           <a:lstStyle/>
           <a:p>
-            <a:pPr indent="0" lvl="0" marL="0" marR="0" rtl="0" algn="ctr">
+            <a:pPr marL="0" marR="0" lvl="0" indent="0" algn="ctr" rtl="0">
               <a:spcBef>
                 <a:spcPts val="0"/>
               </a:spcBef>
@@ -5644,7 +5811,7 @@
               <a:buNone/>
             </a:pPr>
             <a:r>
-              <a:rPr b="0" i="0" lang="ja-JP" sz="1200" u="none" cap="none" strike="noStrike">
+              <a:rPr lang="ja-JP" sz="1200" b="0" i="0" u="none" strike="noStrike" cap="none">
                 <a:solidFill>
                   <a:schemeClr val="dk1"/>
                 </a:solidFill>
@@ -5655,7 +5822,7 @@
               </a:rPr>
               <a:t>その他</a:t>
             </a:r>
-            <a:endParaRPr b="0" i="0" sz="1200" u="none" cap="none" strike="noStrike">
+            <a:endParaRPr sz="1200" b="0" i="0" u="none" strike="noStrike" cap="none">
               <a:solidFill>
                 <a:schemeClr val="dk1"/>
               </a:solidFill>
@@ -5684,23 +5851,23 @@
           <a:solidFill>
             <a:schemeClr val="bg1"/>
           </a:solidFill>
-          <a:ln cap="flat" cmpd="sng" w="9525">
+          <a:ln w="9525" cap="flat" cmpd="sng">
             <a:solidFill>
               <a:srgbClr val="4F81BD"/>
             </a:solidFill>
             <a:prstDash val="sysDash"/>
             <a:round/>
-            <a:headEnd len="sm" w="sm" type="none"/>
-            <a:tailEnd len="sm" w="sm" type="none"/>
+            <a:headEnd type="none" w="sm" len="sm"/>
+            <a:tailEnd type="none" w="sm" len="sm"/>
           </a:ln>
         </p:spPr>
         <p:txBody>
-          <a:bodyPr anchorCtr="0" anchor="ctr" bIns="45700" lIns="91425" spcFirstLastPara="1" rIns="91425" wrap="square" tIns="45700">
+          <a:bodyPr spcFirstLastPara="1" wrap="square" lIns="91425" tIns="45700" rIns="91425" bIns="45700" anchor="ctr" anchorCtr="0">
             <a:noAutofit/>
           </a:bodyPr>
           <a:lstStyle/>
           <a:p>
-            <a:pPr indent="0" lvl="0" marL="0" marR="0" rtl="0" algn="ctr">
+            <a:pPr marL="0" marR="0" lvl="0" indent="0" algn="ctr" rtl="0">
               <a:spcBef>
                 <a:spcPts val="0"/>
               </a:spcBef>
@@ -5710,7 +5877,7 @@
               <a:buNone/>
             </a:pPr>
             <a:r>
-              <a:rPr b="0" i="0" lang="ja-JP" sz="1000" u="none" cap="none" strike="noStrike">
+              <a:rPr lang="ja-JP" sz="1000" b="0" i="0" u="none" strike="noStrike" cap="none">
                 <a:solidFill>
                   <a:schemeClr val="dk1"/>
                 </a:solidFill>
@@ -5721,7 +5888,7 @@
               </a:rPr>
               <a:t>配信面</a:t>
             </a:r>
-            <a:endParaRPr b="0" i="0" sz="1000" u="none" cap="none" strike="noStrike">
+            <a:endParaRPr sz="1000" b="0" i="0" u="none" strike="noStrike" cap="none">
               <a:solidFill>
                 <a:schemeClr val="dk1"/>
               </a:solidFill>
@@ -5748,23 +5915,23 @@
             <a:avLst/>
           </a:prstGeom>
           <a:noFill/>
-          <a:ln cap="flat" cmpd="sng" w="9525">
+          <a:ln w="9525" cap="flat" cmpd="sng">
             <a:solidFill>
               <a:srgbClr val="4A7DBA"/>
             </a:solidFill>
             <a:prstDash val="solid"/>
             <a:round/>
-            <a:headEnd len="sm" w="sm" type="none"/>
-            <a:tailEnd len="sm" w="sm" type="none"/>
+            <a:headEnd type="none" w="sm" len="sm"/>
+            <a:tailEnd type="none" w="sm" len="sm"/>
           </a:ln>
         </p:spPr>
         <p:txBody>
-          <a:bodyPr anchorCtr="0" anchor="ctr" bIns="45700" lIns="91425" spcFirstLastPara="1" rIns="91425" wrap="square" tIns="45700">
+          <a:bodyPr spcFirstLastPara="1" wrap="square" lIns="91425" tIns="45700" rIns="91425" bIns="45700" anchor="ctr" anchorCtr="0">
             <a:noAutofit/>
           </a:bodyPr>
           <a:lstStyle/>
           <a:p>
-            <a:pPr indent="0" lvl="0" marL="0" marR="0" rtl="0" algn="ctr">
+            <a:pPr marL="0" marR="0" lvl="0" indent="0" algn="ctr" rtl="0">
               <a:spcBef>
                 <a:spcPts val="0"/>
               </a:spcBef>
@@ -5774,7 +5941,7 @@
               <a:buNone/>
             </a:pPr>
             <a:r>
-              <a:rPr b="0" i="0" lang="ja-JP" sz="1300" u="none" cap="none" strike="noStrike">
+              <a:rPr lang="ja-JP" sz="1300" b="0" i="0" u="none" strike="noStrike" cap="none">
                 <a:solidFill>
                   <a:schemeClr val="dk1"/>
                 </a:solidFill>
@@ -5809,12 +5976,12 @@
           </a:ln>
         </p:spPr>
         <p:txBody>
-          <a:bodyPr anchorCtr="0" anchor="t" bIns="45700" lIns="91425" spcFirstLastPara="1" rIns="91425" wrap="square" tIns="45700">
+          <a:bodyPr spcFirstLastPara="1" wrap="square" lIns="91425" tIns="45700" rIns="91425" bIns="45700" anchor="t" anchorCtr="0">
             <a:spAutoFit/>
           </a:bodyPr>
           <a:lstStyle/>
           <a:p>
-            <a:pPr indent="0" lvl="0" marL="0" marR="0" rtl="0" algn="l">
+            <a:pPr marL="0" marR="0" lvl="0" indent="0" algn="l" rtl="0">
               <a:spcBef>
                 <a:spcPts val="0"/>
               </a:spcBef>
@@ -5824,7 +5991,7 @@
               <a:buNone/>
             </a:pPr>
             <a:r>
-              <a:rPr b="0" i="0" lang="ja-JP" sz="800" u="none" cap="none" strike="noStrike">
+              <a:rPr lang="ja-JP" sz="800" b="0" i="0" u="none" strike="noStrike" cap="none">
                 <a:solidFill>
                   <a:schemeClr val="lt1"/>
                 </a:solidFill>
@@ -5869,12 +6036,12 @@
           </a:ln>
         </p:spPr>
         <p:txBody>
-          <a:bodyPr anchorCtr="0" anchor="ctr" bIns="45700" lIns="91425" spcFirstLastPara="1" rIns="91425" wrap="square" tIns="45700">
+          <a:bodyPr spcFirstLastPara="1" wrap="square" lIns="91425" tIns="45700" rIns="91425" bIns="45700" anchor="ctr" anchorCtr="0">
             <a:noAutofit/>
           </a:bodyPr>
           <a:lstStyle/>
           <a:p>
-            <a:pPr indent="0" lvl="0" marL="0" marR="0" rtl="0" algn="ctr">
+            <a:pPr marL="0" marR="0" lvl="0" indent="0" algn="ctr" rtl="0">
               <a:spcBef>
                 <a:spcPts val="0"/>
               </a:spcBef>
@@ -5884,7 +6051,7 @@
               <a:buNone/>
             </a:pPr>
             <a:r>
-              <a:rPr b="1" lang="ja-JP" sz="1600">
+              <a:rPr lang="ja-JP" sz="1600" b="1">
                 <a:solidFill>
                   <a:srgbClr val="004DE6"/>
                 </a:solidFill>
@@ -5895,7 +6062,7 @@
               </a:rPr>
               <a:t>　　　　　　</a:t>
             </a:r>
-            <a:endParaRPr b="1" sz="1800">
+            <a:endParaRPr sz="1800" b="1">
               <a:solidFill>
                 <a:srgbClr val="004DE6"/>
               </a:solidFill>
@@ -5927,12 +6094,12 @@
           </a:ln>
         </p:spPr>
         <p:txBody>
-          <a:bodyPr anchorCtr="0" anchor="t" bIns="45700" lIns="91425" spcFirstLastPara="1" rIns="91425" wrap="square" tIns="45700">
+          <a:bodyPr spcFirstLastPara="1" wrap="square" lIns="91425" tIns="45700" rIns="91425" bIns="45700" anchor="t" anchorCtr="0">
             <a:spAutoFit/>
           </a:bodyPr>
           <a:lstStyle/>
           <a:p>
-            <a:pPr indent="0" lvl="0" marL="0" marR="0" rtl="0" algn="l">
+            <a:pPr marL="0" marR="0" lvl="0" indent="0" algn="l" rtl="0">
               <a:spcBef>
                 <a:spcPts val="0"/>
               </a:spcBef>
@@ -5942,7 +6109,7 @@
               <a:buNone/>
             </a:pPr>
             <a:r>
-              <a:rPr b="1" lang="ja-JP" sz="1600">
+              <a:rPr lang="ja-JP" sz="1600" b="1">
                 <a:solidFill>
                   <a:srgbClr val="004DE6"/>
                 </a:solidFill>
@@ -5953,7 +6120,7 @@
               </a:rPr>
               <a:t>【LINEヤフー広告】ディスプレイ広告への移行で必要な対応</a:t>
             </a:r>
-            <a:endParaRPr b="1" sz="1600">
+            <a:endParaRPr sz="1600" b="1">
               <a:solidFill>
                 <a:srgbClr val="004DE6"/>
               </a:solidFill>
@@ -5985,12 +6152,12 @@
           </a:ln>
         </p:spPr>
         <p:txBody>
-          <a:bodyPr anchorCtr="0" anchor="t" bIns="45700" lIns="91425" spcFirstLastPara="1" rIns="91425" wrap="square" tIns="72000">
+          <a:bodyPr spcFirstLastPara="1" wrap="square" lIns="91425" tIns="72000" rIns="91425" bIns="45700" anchor="t" anchorCtr="0">
             <a:spAutoFit/>
           </a:bodyPr>
           <a:lstStyle/>
           <a:p>
-            <a:pPr indent="0" lvl="0" marL="0" marR="0" rtl="0" algn="l">
+            <a:pPr marL="0" marR="0" lvl="0" indent="0" algn="l" rtl="0">
               <a:spcBef>
                 <a:spcPts val="0"/>
               </a:spcBef>
@@ -6005,7 +6172,7 @@
               <a:buNone/>
             </a:pPr>
             <a:r>
-              <a:rPr b="0" lang="ja-JP" sz="1600" u="none">
+              <a:rPr lang="ja-JP" sz="1600" b="0" u="none">
                 <a:solidFill>
                   <a:schemeClr val="dk1"/>
                 </a:solidFill>
@@ -6016,7 +6183,7 @@
               </a:rPr>
               <a:t>    今後のアップデート情報</a:t>
             </a:r>
-            <a:endParaRPr b="0" sz="1600" u="none">
+            <a:endParaRPr sz="1600" b="0" u="none">
               <a:solidFill>
                 <a:schemeClr val="dk1"/>
               </a:solidFill>
@@ -6045,23 +6212,23 @@
           <a:solidFill>
             <a:schemeClr val="tx2"/>
           </a:solidFill>
-          <a:ln cap="flat" cmpd="sng" w="9525">
+          <a:ln w="9525" cap="flat" cmpd="sng">
             <a:solidFill>
               <a:srgbClr val="4F81BD"/>
             </a:solidFill>
             <a:prstDash val="solid"/>
             <a:round/>
-            <a:headEnd len="sm" w="sm" type="none"/>
-            <a:tailEnd len="sm" w="sm" type="none"/>
+            <a:headEnd type="none" w="sm" len="sm"/>
+            <a:tailEnd type="none" w="sm" len="sm"/>
           </a:ln>
         </p:spPr>
         <p:txBody>
-          <a:bodyPr anchorCtr="0" anchor="ctr" bIns="45700" lIns="91425" spcFirstLastPara="1" rIns="91425" wrap="square" tIns="45700">
+          <a:bodyPr spcFirstLastPara="1" wrap="square" lIns="91425" tIns="45700" rIns="91425" bIns="45700" anchor="ctr" anchorCtr="0">
             <a:noAutofit/>
           </a:bodyPr>
           <a:lstStyle/>
           <a:p>
-            <a:pPr indent="0" lvl="0" marL="0" marR="0" rtl="0" algn="ctr">
+            <a:pPr marL="0" marR="0" lvl="0" indent="0" algn="ctr" rtl="0">
               <a:spcBef>
                 <a:spcPts val="0"/>
               </a:spcBef>
@@ -6098,7 +6265,7 @@
             </a:endParaRPr>
           </a:p>
           <a:p>
-            <a:pPr indent="0" lvl="0" marL="0" marR="0" rtl="0" algn="ctr">
+            <a:pPr marL="0" marR="0" lvl="0" indent="0" algn="ctr" rtl="0">
               <a:spcBef>
                 <a:spcPts val="0"/>
               </a:spcBef>
@@ -6153,23 +6320,23 @@
           <a:solidFill>
             <a:schemeClr val="bg1"/>
           </a:solidFill>
-          <a:ln cap="flat" cmpd="sng" w="9525">
+          <a:ln w="9525" cap="flat" cmpd="sng">
             <a:solidFill>
               <a:srgbClr val="4F81BD"/>
             </a:solidFill>
             <a:prstDash val="sysDash"/>
             <a:round/>
-            <a:headEnd len="sm" w="sm" type="none"/>
-            <a:tailEnd len="sm" w="sm" type="none"/>
+            <a:headEnd type="none" w="sm" len="sm"/>
+            <a:tailEnd type="none" w="sm" len="sm"/>
           </a:ln>
         </p:spPr>
         <p:txBody>
-          <a:bodyPr anchorCtr="0" anchor="ctr" bIns="45700" lIns="91425" spcFirstLastPara="1" rIns="91425" wrap="square" tIns="45700">
+          <a:bodyPr spcFirstLastPara="1" wrap="square" lIns="91425" tIns="45700" rIns="91425" bIns="45700" anchor="ctr" anchorCtr="0">
             <a:noAutofit/>
           </a:bodyPr>
           <a:lstStyle/>
           <a:p>
-            <a:pPr indent="0" lvl="0" marL="0" marR="0" rtl="0" algn="ctr">
+            <a:pPr marL="0" marR="0" lvl="0" indent="0" algn="ctr" rtl="0">
               <a:spcBef>
                 <a:spcPts val="0"/>
               </a:spcBef>
@@ -6224,12 +6391,12 @@
           </a:ln>
         </p:spPr>
         <p:txBody>
-          <a:bodyPr anchorCtr="0" anchor="ctr" bIns="45700" lIns="91425" spcFirstLastPara="1" rIns="91425" wrap="square" tIns="45700">
+          <a:bodyPr spcFirstLastPara="1" wrap="square" lIns="91425" tIns="45700" rIns="91425" bIns="45700" anchor="ctr" anchorCtr="0">
             <a:noAutofit/>
           </a:bodyPr>
           <a:lstStyle/>
           <a:p>
-            <a:pPr indent="0" lvl="0" marL="0" marR="0" rtl="0" algn="ctr">
+            <a:pPr marL="0" marR="0" lvl="0" indent="0" algn="ctr" rtl="0">
               <a:spcBef>
                 <a:spcPts val="0"/>
               </a:spcBef>
@@ -6238,12 +6405,6 @@
               </a:spcAft>
               <a:buNone/>
             </a:pPr>
-            <a:r>
-              <a:rPr>
-                <a:latin typeface="メイリオ"/>
-              </a:rPr>
-              <a:t/>
-            </a:r>
             <a:endParaRPr sz="1200">
               <a:solidFill>
                 <a:schemeClr val="dk1"/>
@@ -6276,12 +6437,12 @@
           </a:ln>
         </p:spPr>
         <p:txBody>
-          <a:bodyPr anchorCtr="0" anchor="t" bIns="45700" lIns="91425" spcFirstLastPara="1" rIns="91425" wrap="square" tIns="45700">
+          <a:bodyPr spcFirstLastPara="1" wrap="square" lIns="91425" tIns="45700" rIns="91425" bIns="45700" anchor="t" anchorCtr="0">
             <a:spAutoFit/>
           </a:bodyPr>
           <a:lstStyle/>
           <a:p>
-            <a:pPr indent="0" lvl="0" marL="0" marR="0" rtl="0" algn="ctr">
+            <a:pPr marL="0" marR="0" lvl="0" indent="0" algn="ctr" rtl="0">
               <a:spcBef>
                 <a:spcPts val="0"/>
               </a:spcBef>
@@ -6291,7 +6452,7 @@
               <a:buNone/>
             </a:pPr>
             <a:r>
-              <a:rPr b="1" lang="ja-JP" sz="1200">
+              <a:rPr lang="ja-JP" sz="1200" b="1">
                 <a:solidFill>
                   <a:schemeClr val="dk1"/>
                 </a:solidFill>
@@ -6302,7 +6463,7 @@
               </a:rPr>
               <a:t>配信を続けるには「LINEヤフー広告 ディスプレイ広告」への切り替えが必要。</a:t>
             </a:r>
-            <a:endParaRPr b="1" sz="1200">
+            <a:endParaRPr sz="1200" b="1">
               <a:solidFill>
                 <a:schemeClr val="dk1"/>
               </a:solidFill>
@@ -6313,7 +6474,7 @@
             </a:endParaRPr>
           </a:p>
           <a:p>
-            <a:pPr indent="0" lvl="0" marL="0" marR="0" rtl="0" algn="ctr">
+            <a:pPr marL="0" marR="0" lvl="0" indent="0" algn="ctr" rtl="0">
               <a:spcBef>
                 <a:spcPts val="0"/>
               </a:spcBef>
@@ -6323,7 +6484,7 @@
               <a:buNone/>
             </a:pPr>
             <a:r>
-              <a:rPr b="1" lang="ja-JP" sz="1200">
+              <a:rPr lang="ja-JP" sz="1200" b="1">
                 <a:solidFill>
                   <a:schemeClr val="dk1"/>
                 </a:solidFill>
@@ -6337,7 +6498,7 @@
             <a:endParaRPr/>
           </a:p>
           <a:p>
-            <a:pPr indent="0" lvl="0" marL="0" marR="0" rtl="0" algn="ctr">
+            <a:pPr marL="0" marR="0" lvl="0" indent="0" algn="ctr" rtl="0">
               <a:spcBef>
                 <a:spcPts val="0"/>
               </a:spcBef>
@@ -6347,7 +6508,7 @@
               <a:buNone/>
             </a:pPr>
             <a:r>
-              <a:rPr b="1" lang="ja-JP" sz="1200">
+              <a:rPr lang="ja-JP" sz="1200" b="1">
                 <a:solidFill>
                   <a:schemeClr val="dk1"/>
                 </a:solidFill>
@@ -6358,7 +6519,7 @@
               </a:rPr>
               <a:t>タグ・コンバージョン設定と自動入札の学習データは引き継がれない。</a:t>
             </a:r>
-            <a:endParaRPr b="1" sz="1400">
+            <a:endParaRPr sz="1400" b="1">
               <a:solidFill>
                 <a:schemeClr val="dk1"/>
               </a:solidFill>
@@ -6390,12 +6551,12 @@
           </a:ln>
         </p:spPr>
         <p:txBody>
-          <a:bodyPr anchorCtr="0" anchor="t" bIns="45700" lIns="91425" spcFirstLastPara="1" rIns="91425" wrap="square" tIns="45700">
+          <a:bodyPr spcFirstLastPara="1" wrap="square" lIns="91425" tIns="45700" rIns="91425" bIns="45700" anchor="t" anchorCtr="0">
             <a:noAutofit/>
           </a:bodyPr>
           <a:lstStyle/>
           <a:p>
-            <a:pPr indent="0" lvl="0" marL="0" marR="0" rtl="0" algn="l">
+            <a:pPr marL="0" marR="0" lvl="0" indent="0" algn="l" rtl="0">
               <a:spcBef>
                 <a:spcPts val="0"/>
               </a:spcBef>
@@ -6405,7 +6566,7 @@
               <a:buNone/>
             </a:pPr>
             <a:r>
-              <a:rPr b="1" lang="ja-JP" sz="1400">
+              <a:rPr lang="ja-JP" sz="1400" b="1">
                 <a:solidFill>
                   <a:srgbClr val="15133D"/>
                 </a:solidFill>
@@ -6447,29 +6608,29 @@
             </a:xfrm>
             <a:prstGeom prst="trapezoid">
               <a:avLst>
-                <a:gd fmla="val 60792" name="adj"/>
+                <a:gd name="adj" fmla="val 60792"/>
               </a:avLst>
             </a:prstGeom>
             <a:solidFill>
               <a:srgbClr val="EAEDF5"/>
             </a:solidFill>
-            <a:ln cap="flat" cmpd="sng" w="25400">
+            <a:ln w="25400" cap="flat" cmpd="sng">
               <a:solidFill>
                 <a:schemeClr val="dk2"/>
               </a:solidFill>
               <a:prstDash val="solid"/>
               <a:round/>
-              <a:headEnd len="sm" w="sm" type="none"/>
-              <a:tailEnd len="sm" w="sm" type="none"/>
+              <a:headEnd type="none" w="sm" len="sm"/>
+              <a:tailEnd type="none" w="sm" len="sm"/>
             </a:ln>
           </p:spPr>
           <p:txBody>
-            <a:bodyPr anchorCtr="0" anchor="ctr" bIns="91425" lIns="91425" spcFirstLastPara="1" rIns="91425" wrap="square" tIns="91425">
+            <a:bodyPr spcFirstLastPara="1" wrap="square" lIns="91425" tIns="91425" rIns="91425" bIns="91425" anchor="ctr" anchorCtr="0">
               <a:noAutofit/>
             </a:bodyPr>
             <a:lstStyle/>
             <a:p>
-              <a:pPr indent="0" lvl="0" marL="0" rtl="0" algn="l">
+              <a:pPr marL="0" lvl="0" indent="0" algn="l" rtl="0">
                 <a:spcBef>
                   <a:spcPts val="0"/>
                 </a:spcBef>
@@ -6478,9 +6639,6 @@
                 </a:spcAft>
                 <a:buNone/>
               </a:pPr>
-              <a:r>
-                <a:t/>
-              </a:r>
               <a:endParaRPr/>
             </a:p>
           </p:txBody>
@@ -6505,12 +6663,12 @@
             </a:ln>
           </p:spPr>
           <p:txBody>
-            <a:bodyPr anchorCtr="0" anchor="ctr" bIns="10150" lIns="10150" spcFirstLastPara="1" rIns="10150" wrap="square" tIns="10150">
+            <a:bodyPr spcFirstLastPara="1" wrap="square" lIns="10150" tIns="10150" rIns="10150" bIns="10150" anchor="ctr" anchorCtr="0">
               <a:noAutofit/>
             </a:bodyPr>
             <a:lstStyle/>
             <a:p>
-              <a:pPr indent="0" lvl="0" marL="0" marR="0" rtl="0" algn="ctr">
+              <a:pPr marL="0" marR="0" lvl="0" indent="0" algn="ctr" rtl="0">
                 <a:lnSpc>
                   <a:spcPct val="90000"/>
                 </a:lnSpc>
@@ -6528,7 +6686,7 @@
                 <a:buNone/>
               </a:pPr>
               <a:r>
-                <a:rPr b="1" lang="ja-JP" sz="800">
+                <a:rPr lang="ja-JP" sz="800" b="1">
                   <a:solidFill>
                     <a:srgbClr val="262626"/>
                   </a:solidFill>
@@ -6556,29 +6714,29 @@
             </a:xfrm>
             <a:prstGeom prst="trapezoid">
               <a:avLst>
-                <a:gd fmla="val 60792" name="adj"/>
+                <a:gd name="adj" fmla="val 60792"/>
               </a:avLst>
             </a:prstGeom>
             <a:solidFill>
               <a:schemeClr val="lt1"/>
             </a:solidFill>
-            <a:ln cap="flat" cmpd="sng" w="25400">
+            <a:ln w="25400" cap="flat" cmpd="sng">
               <a:solidFill>
                 <a:schemeClr val="dk2"/>
               </a:solidFill>
               <a:prstDash val="solid"/>
               <a:round/>
-              <a:headEnd len="sm" w="sm" type="none"/>
-              <a:tailEnd len="sm" w="sm" type="none"/>
+              <a:headEnd type="none" w="sm" len="sm"/>
+              <a:tailEnd type="none" w="sm" len="sm"/>
             </a:ln>
           </p:spPr>
           <p:txBody>
-            <a:bodyPr anchorCtr="0" anchor="ctr" bIns="91425" lIns="91425" spcFirstLastPara="1" rIns="91425" wrap="square" tIns="91425">
+            <a:bodyPr spcFirstLastPara="1" wrap="square" lIns="91425" tIns="91425" rIns="91425" bIns="91425" anchor="ctr" anchorCtr="0">
               <a:noAutofit/>
             </a:bodyPr>
             <a:lstStyle/>
             <a:p>
-              <a:pPr indent="0" lvl="0" marL="0" rtl="0" algn="l">
+              <a:pPr marL="0" lvl="0" indent="0" algn="l" rtl="0">
                 <a:spcBef>
                   <a:spcPts val="0"/>
                 </a:spcBef>
@@ -6587,9 +6745,6 @@
                 </a:spcAft>
                 <a:buNone/>
               </a:pPr>
-              <a:r>
-                <a:t/>
-              </a:r>
               <a:endParaRPr/>
             </a:p>
           </p:txBody>
@@ -6614,12 +6769,12 @@
             </a:ln>
           </p:spPr>
           <p:txBody>
-            <a:bodyPr anchorCtr="0" anchor="ctr" bIns="10150" lIns="10150" spcFirstLastPara="1" rIns="10150" wrap="square" tIns="10150">
+            <a:bodyPr spcFirstLastPara="1" wrap="square" lIns="10150" tIns="10150" rIns="10150" bIns="10150" anchor="ctr" anchorCtr="0">
               <a:noAutofit/>
             </a:bodyPr>
             <a:lstStyle/>
             <a:p>
-              <a:pPr indent="0" lvl="0" marL="0" marR="0" rtl="0" algn="ctr">
+              <a:pPr marL="0" marR="0" lvl="0" indent="0" algn="ctr" rtl="0">
                 <a:lnSpc>
                   <a:spcPct val="90000"/>
                 </a:lnSpc>
@@ -6637,7 +6792,7 @@
                 <a:buNone/>
               </a:pPr>
               <a:r>
-                <a:rPr b="1" lang="ja-JP" sz="800">
+                <a:rPr lang="ja-JP" sz="800" b="1">
                   <a:solidFill>
                     <a:srgbClr val="262626"/>
                   </a:solidFill>
@@ -6665,29 +6820,29 @@
             </a:xfrm>
             <a:prstGeom prst="trapezoid">
               <a:avLst>
-                <a:gd fmla="val 60792" name="adj"/>
+                <a:gd name="adj" fmla="val 60792"/>
               </a:avLst>
             </a:prstGeom>
             <a:solidFill>
               <a:schemeClr val="lt1"/>
             </a:solidFill>
-            <a:ln cap="flat" cmpd="sng" w="25400">
+            <a:ln w="25400" cap="flat" cmpd="sng">
               <a:solidFill>
                 <a:schemeClr val="dk2"/>
               </a:solidFill>
               <a:prstDash val="solid"/>
               <a:round/>
-              <a:headEnd len="sm" w="sm" type="none"/>
-              <a:tailEnd len="sm" w="sm" type="none"/>
+              <a:headEnd type="none" w="sm" len="sm"/>
+              <a:tailEnd type="none" w="sm" len="sm"/>
             </a:ln>
           </p:spPr>
           <p:txBody>
-            <a:bodyPr anchorCtr="0" anchor="ctr" bIns="91425" lIns="91425" spcFirstLastPara="1" rIns="91425" wrap="square" tIns="91425">
+            <a:bodyPr spcFirstLastPara="1" wrap="square" lIns="91425" tIns="91425" rIns="91425" bIns="91425" anchor="ctr" anchorCtr="0">
               <a:noAutofit/>
             </a:bodyPr>
             <a:lstStyle/>
             <a:p>
-              <a:pPr indent="0" lvl="0" marL="0" rtl="0" algn="l">
+              <a:pPr marL="0" lvl="0" indent="0" algn="l" rtl="0">
                 <a:spcBef>
                   <a:spcPts val="0"/>
                 </a:spcBef>
@@ -6696,9 +6851,6 @@
                 </a:spcAft>
                 <a:buNone/>
               </a:pPr>
-              <a:r>
-                <a:t/>
-              </a:r>
               <a:endParaRPr/>
             </a:p>
           </p:txBody>
@@ -6723,12 +6875,12 @@
             </a:ln>
           </p:spPr>
           <p:txBody>
-            <a:bodyPr anchorCtr="0" anchor="ctr" bIns="10150" lIns="10150" spcFirstLastPara="1" rIns="10150" wrap="square" tIns="10150">
+            <a:bodyPr spcFirstLastPara="1" wrap="square" lIns="10150" tIns="10150" rIns="10150" bIns="10150" anchor="ctr" anchorCtr="0">
               <a:noAutofit/>
             </a:bodyPr>
             <a:lstStyle/>
             <a:p>
-              <a:pPr indent="0" lvl="0" marL="0" marR="0" rtl="0" algn="ctr">
+              <a:pPr marL="0" marR="0" lvl="0" indent="0" algn="ctr" rtl="0">
                 <a:lnSpc>
                   <a:spcPct val="90000"/>
                 </a:lnSpc>
@@ -6746,7 +6898,7 @@
                 <a:buNone/>
               </a:pPr>
               <a:r>
-                <a:rPr b="1" lang="ja-JP" sz="800">
+                <a:rPr lang="ja-JP" sz="800" b="1">
                   <a:solidFill>
                     <a:srgbClr val="262626"/>
                   </a:solidFill>
@@ -6774,27 +6926,27 @@
             </a:xfrm>
             <a:prstGeom prst="trapezoid">
               <a:avLst>
-                <a:gd fmla="val 60792" name="adj"/>
+                <a:gd name="adj" fmla="val 60792"/>
               </a:avLst>
             </a:prstGeom>
             <a:noFill/>
-            <a:ln cap="flat" cmpd="sng" w="25400">
+            <a:ln w="25400" cap="flat" cmpd="sng">
               <a:solidFill>
                 <a:schemeClr val="dk2"/>
               </a:solidFill>
               <a:prstDash val="solid"/>
               <a:round/>
-              <a:headEnd len="sm" w="sm" type="none"/>
-              <a:tailEnd len="sm" w="sm" type="none"/>
+              <a:headEnd type="none" w="sm" len="sm"/>
+              <a:tailEnd type="none" w="sm" len="sm"/>
             </a:ln>
           </p:spPr>
           <p:txBody>
-            <a:bodyPr anchorCtr="0" anchor="ctr" bIns="91425" lIns="91425" spcFirstLastPara="1" rIns="91425" wrap="square" tIns="91425">
+            <a:bodyPr spcFirstLastPara="1" wrap="square" lIns="91425" tIns="91425" rIns="91425" bIns="91425" anchor="ctr" anchorCtr="0">
               <a:noAutofit/>
             </a:bodyPr>
             <a:lstStyle/>
             <a:p>
-              <a:pPr indent="0" lvl="0" marL="0" rtl="0" algn="l">
+              <a:pPr marL="0" lvl="0" indent="0" algn="l" rtl="0">
                 <a:spcBef>
                   <a:spcPts val="0"/>
                 </a:spcBef>
@@ -6803,9 +6955,6 @@
                 </a:spcAft>
                 <a:buNone/>
               </a:pPr>
-              <a:r>
-                <a:t/>
-              </a:r>
               <a:endParaRPr/>
             </a:p>
           </p:txBody>
@@ -6830,12 +6979,12 @@
             </a:ln>
           </p:spPr>
           <p:txBody>
-            <a:bodyPr anchorCtr="0" anchor="ctr" bIns="10150" lIns="10150" spcFirstLastPara="1" rIns="10150" wrap="square" tIns="10150">
+            <a:bodyPr spcFirstLastPara="1" wrap="square" lIns="10150" tIns="10150" rIns="10150" bIns="10150" anchor="ctr" anchorCtr="0">
               <a:noAutofit/>
             </a:bodyPr>
             <a:lstStyle/>
             <a:p>
-              <a:pPr indent="0" lvl="0" marL="0" marR="0" rtl="0" algn="ctr">
+              <a:pPr marL="0" marR="0" lvl="0" indent="0" algn="ctr" rtl="0">
                 <a:lnSpc>
                   <a:spcPct val="90000"/>
                 </a:lnSpc>
@@ -6853,7 +7002,7 @@
                 <a:buNone/>
               </a:pPr>
               <a:r>
-                <a:rPr b="1" lang="ja-JP" sz="800">
+                <a:rPr lang="ja-JP" sz="800" b="1">
                   <a:solidFill>
                     <a:srgbClr val="262626"/>
                   </a:solidFill>
@@ -6871,7 +7020,7 @@
       </p:grpSp>
       <p:pic>
         <p:nvPicPr>
-          <p:cNvPr descr="LINE公式アカウントのロゴの使用方法とは？種類やダウンロード方法、利用時の注意点を紹介 | Mico（ミコ）" id="62" name="Google Shape;62;p3"/>
+          <p:cNvPr id="62" name="Google Shape;62;p3" descr="LINE公式アカウントのロゴの使用方法とは？種類やダウンロード方法、利用時の注意点を紹介 | Mico（ミコ）"/>
           <p:cNvPicPr preferRelativeResize="0"/>
           <p:nvPr/>
         </p:nvPicPr>
@@ -6879,7 +7028,7 @@
           <a:blip r:embed="rId2">
             <a:alphaModFix/>
           </a:blip>
-          <a:srcRect b="0" l="0" r="0" t="0"/>
+          <a:srcRect/>
           <a:stretch/>
         </p:blipFill>
         <p:spPr>
@@ -6937,7 +7086,7 @@
           </a:fontRef>
         </p:style>
         <p:txBody>
-          <a:bodyPr rtlCol="0" anchor="ctr" wrap="square" lIns="228600" rIns="182880"/>
+          <a:bodyPr wrap="square" lIns="228600" rIns="182880" rtlCol="0" anchor="ctr"/>
           <a:lstStyle/>
           <a:p>
             <a:pPr algn="l"/>
@@ -7013,7 +7162,7 @@
           </a:fontRef>
         </p:style>
         <p:txBody>
-          <a:bodyPr rtlCol="0" anchor="ctr" wrap="square" lIns="228600" rIns="182880"/>
+          <a:bodyPr wrap="square" lIns="228600" rIns="182880" rtlCol="0" anchor="ctr"/>
           <a:lstStyle/>
           <a:p>
             <a:pPr algn="l"/>
@@ -7089,7 +7238,7 @@
           </a:fontRef>
         </p:style>
         <p:txBody>
-          <a:bodyPr rtlCol="0" anchor="ctr" wrap="square" lIns="228600" rIns="182880"/>
+          <a:bodyPr wrap="square" lIns="228600" rIns="182880" rtlCol="0" anchor="ctr"/>
           <a:lstStyle/>
           <a:p>
             <a:pPr algn="l"/>
@@ -7165,7 +7314,7 @@
           </a:fontRef>
         </p:style>
         <p:txBody>
-          <a:bodyPr rtlCol="0" anchor="ctr" wrap="square" lIns="228600" rIns="182880"/>
+          <a:bodyPr wrap="square" lIns="228600" rIns="182880" rtlCol="0" anchor="ctr"/>
           <a:lstStyle/>
           <a:p>
             <a:pPr algn="l"/>
@@ -7195,7 +7344,7 @@
                 </a:solidFill>
                 <a:latin typeface="メイリオ"/>
               </a:rPr>
-              <a:t>日本向け配信・運用型・審査が承認済みのアカウント。予約型や審査待ち・否認のものは対象外。</a:t>
+              <a:t>日本向け配信・運用型・審査承認済みのアカウントで、認証済みビジネスマネージャーとの連携が必須。予約型や審査待ち・否認のものは対象外。</a:t>
             </a:r>
           </a:p>
         </p:txBody>
@@ -7209,7 +7358,7 @@
 </file>
 
 <file path=ppt/slides/slide5.xml><?xml version="1.0" encoding="utf-8"?>
-<p:sld xmlns:a="http://schemas.openxmlformats.org/drawingml/2006/main" xmlns:p="http://schemas.openxmlformats.org/presentationml/2006/main" xmlns:r="http://schemas.openxmlformats.org/officeDocument/2006/relationships">
+<p:sld xmlns:a="http://schemas.openxmlformats.org/drawingml/2006/main" xmlns:r="http://schemas.openxmlformats.org/officeDocument/2006/relationships" xmlns:p="http://schemas.openxmlformats.org/presentationml/2006/main">
   <p:cSld>
     <p:spTree>
       <p:nvGrpSpPr>
@@ -7217,7 +7366,14 @@
         <p:cNvGrpSpPr/>
         <p:nvPr/>
       </p:nvGrpSpPr>
-      <p:grpSpPr/>
+      <p:grpSpPr>
+        <a:xfrm>
+          <a:off x="0" y="0"/>
+          <a:ext cx="0" cy="0"/>
+          <a:chOff x="0" y="0"/>
+          <a:chExt cx="0" cy="0"/>
+        </a:xfrm>
+      </p:grpSpPr>
       <p:sp>
         <p:nvSpPr>
           <p:cNvPr id="40" name="Google Shape;40;p3"/>
@@ -7235,23 +7391,23 @@
           <a:solidFill>
             <a:schemeClr val="dk2"/>
           </a:solidFill>
-          <a:ln cap="flat" cmpd="sng" w="9525">
+          <a:ln w="9525" cap="flat" cmpd="sng">
             <a:solidFill>
               <a:srgbClr val="4A7DBA"/>
             </a:solidFill>
             <a:prstDash val="solid"/>
             <a:round/>
-            <a:headEnd len="sm" w="sm" type="none"/>
-            <a:tailEnd len="sm" w="sm" type="none"/>
+            <a:headEnd type="none" w="sm" len="sm"/>
+            <a:tailEnd type="none" w="sm" len="sm"/>
           </a:ln>
         </p:spPr>
         <p:txBody>
-          <a:bodyPr anchorCtr="0" anchor="ctr" bIns="45700" lIns="91425" spcFirstLastPara="1" rIns="91425" wrap="square" tIns="45700">
+          <a:bodyPr spcFirstLastPara="1" wrap="square" lIns="91425" tIns="45700" rIns="91425" bIns="45700" anchor="ctr" anchorCtr="0">
             <a:noAutofit/>
           </a:bodyPr>
           <a:lstStyle/>
           <a:p>
-            <a:pPr indent="0" lvl="0" marL="0" marR="0" rtl="0" algn="ctr">
+            <a:pPr marL="0" marR="0" lvl="0" indent="0" algn="ctr" rtl="0">
               <a:spcBef>
                 <a:spcPts val="0"/>
               </a:spcBef>
@@ -7261,7 +7417,7 @@
               <a:buNone/>
             </a:pPr>
             <a:r>
-              <a:rPr b="0" i="0" lang="ja-JP" sz="1800" u="none" cap="none" strike="noStrike">
+              <a:rPr lang="ja-JP" sz="1800" b="0" i="0" u="none" strike="noStrike" cap="none">
                 <a:solidFill>
                   <a:schemeClr val="lt1"/>
                 </a:solidFill>
@@ -7293,23 +7449,23 @@
           <a:solidFill>
             <a:schemeClr val="bg1"/>
           </a:solidFill>
-          <a:ln cap="flat" cmpd="sng" w="9525">
+          <a:ln w="9525" cap="flat" cmpd="sng">
             <a:solidFill>
               <a:srgbClr val="4F81BD"/>
             </a:solidFill>
             <a:prstDash val="sysDash"/>
             <a:round/>
-            <a:headEnd len="sm" w="sm" type="none"/>
-            <a:tailEnd len="sm" w="sm" type="none"/>
+            <a:headEnd type="none" w="sm" len="sm"/>
+            <a:tailEnd type="none" w="sm" len="sm"/>
           </a:ln>
         </p:spPr>
         <p:txBody>
-          <a:bodyPr anchorCtr="0" anchor="ctr" bIns="45700" lIns="91425" spcFirstLastPara="1" rIns="91425" wrap="square" tIns="45700">
+          <a:bodyPr spcFirstLastPara="1" wrap="square" lIns="91425" tIns="45700" rIns="91425" bIns="45700" anchor="ctr" anchorCtr="0">
             <a:noAutofit/>
           </a:bodyPr>
           <a:lstStyle/>
           <a:p>
-            <a:pPr indent="0" lvl="0" marL="0" marR="0" rtl="0" algn="ctr">
+            <a:pPr marL="0" marR="0" lvl="0" indent="0" algn="ctr" rtl="0">
               <a:spcBef>
                 <a:spcPts val="0"/>
               </a:spcBef>
@@ -7319,7 +7475,7 @@
               <a:buNone/>
             </a:pPr>
             <a:r>
-              <a:rPr b="0" i="0" lang="ja-JP" sz="1200" u="none" cap="none" strike="noStrike">
+              <a:rPr lang="ja-JP" sz="1200" b="0" i="0" u="none" strike="noStrike" cap="none">
                 <a:solidFill>
                   <a:schemeClr val="dk1"/>
                 </a:solidFill>
@@ -7330,7 +7486,7 @@
               </a:rPr>
               <a:t>その他</a:t>
             </a:r>
-            <a:endParaRPr b="0" i="0" sz="1200" u="none" cap="none" strike="noStrike">
+            <a:endParaRPr sz="1200" b="0" i="0" u="none" strike="noStrike" cap="none">
               <a:solidFill>
                 <a:schemeClr val="dk1"/>
               </a:solidFill>
@@ -7359,23 +7515,23 @@
           <a:solidFill>
             <a:schemeClr val="tx2"/>
           </a:solidFill>
-          <a:ln cap="flat" cmpd="sng" w="9525">
+          <a:ln w="9525" cap="flat" cmpd="sng">
             <a:solidFill>
               <a:srgbClr val="4F81BD"/>
             </a:solidFill>
             <a:prstDash val="solid"/>
             <a:round/>
-            <a:headEnd len="sm" w="sm" type="none"/>
-            <a:tailEnd len="sm" w="sm" type="none"/>
+            <a:headEnd type="none" w="sm" len="sm"/>
+            <a:tailEnd type="none" w="sm" len="sm"/>
           </a:ln>
         </p:spPr>
         <p:txBody>
-          <a:bodyPr anchorCtr="0" anchor="ctr" bIns="45700" lIns="91425" spcFirstLastPara="1" rIns="91425" wrap="square" tIns="45700">
+          <a:bodyPr spcFirstLastPara="1" wrap="square" lIns="91425" tIns="45700" rIns="91425" bIns="45700" anchor="ctr" anchorCtr="0">
             <a:noAutofit/>
           </a:bodyPr>
           <a:lstStyle/>
           <a:p>
-            <a:pPr indent="0" lvl="0" marL="0" marR="0" rtl="0" algn="ctr">
+            <a:pPr marL="0" marR="0" lvl="0" indent="0" algn="ctr" rtl="0">
               <a:spcBef>
                 <a:spcPts val="0"/>
               </a:spcBef>
@@ -7385,7 +7541,7 @@
               <a:buNone/>
             </a:pPr>
             <a:r>
-              <a:rPr b="0" i="0" lang="ja-JP" sz="1000" u="none" cap="none" strike="noStrike">
+              <a:rPr lang="ja-JP" sz="1000" b="0" i="0" u="none" strike="noStrike" cap="none">
                 <a:solidFill>
                   <a:schemeClr val="dk1"/>
                 </a:solidFill>
@@ -7396,7 +7552,7 @@
               </a:rPr>
               <a:t>配信面</a:t>
             </a:r>
-            <a:endParaRPr b="0" i="0" sz="1000" u="none" cap="none" strike="noStrike">
+            <a:endParaRPr sz="1000" b="0" i="0" u="none" strike="noStrike" cap="none">
               <a:solidFill>
                 <a:schemeClr val="dk1"/>
               </a:solidFill>
@@ -7423,23 +7579,23 @@
             <a:avLst/>
           </a:prstGeom>
           <a:noFill/>
-          <a:ln cap="flat" cmpd="sng" w="9525">
+          <a:ln w="9525" cap="flat" cmpd="sng">
             <a:solidFill>
               <a:srgbClr val="4A7DBA"/>
             </a:solidFill>
             <a:prstDash val="solid"/>
             <a:round/>
-            <a:headEnd len="sm" w="sm" type="none"/>
-            <a:tailEnd len="sm" w="sm" type="none"/>
+            <a:headEnd type="none" w="sm" len="sm"/>
+            <a:tailEnd type="none" w="sm" len="sm"/>
           </a:ln>
         </p:spPr>
         <p:txBody>
-          <a:bodyPr anchorCtr="0" anchor="ctr" bIns="45700" lIns="91425" spcFirstLastPara="1" rIns="91425" wrap="square" tIns="45700">
+          <a:bodyPr spcFirstLastPara="1" wrap="square" lIns="91425" tIns="45700" rIns="91425" bIns="45700" anchor="ctr" anchorCtr="0">
             <a:noAutofit/>
           </a:bodyPr>
           <a:lstStyle/>
           <a:p>
-            <a:pPr indent="0" lvl="0" marL="0" marR="0" rtl="0" algn="ctr">
+            <a:pPr marL="0" marR="0" lvl="0" indent="0" algn="ctr" rtl="0">
               <a:spcBef>
                 <a:spcPts val="0"/>
               </a:spcBef>
@@ -7449,7 +7605,7 @@
               <a:buNone/>
             </a:pPr>
             <a:r>
-              <a:rPr b="0" i="0" lang="ja-JP" sz="1300" u="none" cap="none" strike="noStrike">
+              <a:rPr lang="ja-JP" sz="1300" b="0" i="0" u="none" strike="noStrike" cap="none">
                 <a:solidFill>
                   <a:schemeClr val="dk1"/>
                 </a:solidFill>
@@ -7484,12 +7640,12 @@
           </a:ln>
         </p:spPr>
         <p:txBody>
-          <a:bodyPr anchorCtr="0" anchor="t" bIns="45700" lIns="91425" spcFirstLastPara="1" rIns="91425" wrap="square" tIns="45700">
+          <a:bodyPr spcFirstLastPara="1" wrap="square" lIns="91425" tIns="45700" rIns="91425" bIns="45700" anchor="t" anchorCtr="0">
             <a:spAutoFit/>
           </a:bodyPr>
           <a:lstStyle/>
           <a:p>
-            <a:pPr indent="0" lvl="0" marL="0" marR="0" rtl="0" algn="l">
+            <a:pPr marL="0" marR="0" lvl="0" indent="0" algn="l" rtl="0">
               <a:spcBef>
                 <a:spcPts val="0"/>
               </a:spcBef>
@@ -7499,7 +7655,7 @@
               <a:buNone/>
             </a:pPr>
             <a:r>
-              <a:rPr b="0" i="0" lang="ja-JP" sz="800" u="none" cap="none" strike="noStrike">
+              <a:rPr lang="ja-JP" sz="800" b="0" i="0" u="none" strike="noStrike" cap="none">
                 <a:solidFill>
                   <a:schemeClr val="lt1"/>
                 </a:solidFill>
@@ -7544,12 +7700,12 @@
           </a:ln>
         </p:spPr>
         <p:txBody>
-          <a:bodyPr anchorCtr="0" anchor="ctr" bIns="45700" lIns="91425" spcFirstLastPara="1" rIns="91425" wrap="square" tIns="45700">
+          <a:bodyPr spcFirstLastPara="1" wrap="square" lIns="91425" tIns="45700" rIns="91425" bIns="45700" anchor="ctr" anchorCtr="0">
             <a:noAutofit/>
           </a:bodyPr>
           <a:lstStyle/>
           <a:p>
-            <a:pPr indent="0" lvl="0" marL="0" marR="0" rtl="0" algn="ctr">
+            <a:pPr marL="0" marR="0" lvl="0" indent="0" algn="ctr" rtl="0">
               <a:spcBef>
                 <a:spcPts val="0"/>
               </a:spcBef>
@@ -7559,7 +7715,7 @@
               <a:buNone/>
             </a:pPr>
             <a:r>
-              <a:rPr b="1" lang="ja-JP" sz="1600">
+              <a:rPr lang="ja-JP" sz="1600" b="1">
                 <a:solidFill>
                   <a:srgbClr val="004DE6"/>
                 </a:solidFill>
@@ -7570,7 +7726,7 @@
               </a:rPr>
               <a:t>　　　　　　</a:t>
             </a:r>
-            <a:endParaRPr b="1" sz="1800">
+            <a:endParaRPr sz="1800" b="1">
               <a:solidFill>
                 <a:srgbClr val="004DE6"/>
               </a:solidFill>
@@ -7602,12 +7758,12 @@
           </a:ln>
         </p:spPr>
         <p:txBody>
-          <a:bodyPr anchorCtr="0" anchor="t" bIns="45700" lIns="91425" spcFirstLastPara="1" rIns="91425" wrap="square" tIns="45700">
+          <a:bodyPr spcFirstLastPara="1" wrap="square" lIns="91425" tIns="45700" rIns="91425" bIns="45700" anchor="t" anchorCtr="0">
             <a:spAutoFit/>
           </a:bodyPr>
           <a:lstStyle/>
           <a:p>
-            <a:pPr indent="0" lvl="0" marL="0" marR="0" rtl="0" algn="l">
+            <a:pPr marL="0" marR="0" lvl="0" indent="0" algn="l" rtl="0">
               <a:spcBef>
                 <a:spcPts val="0"/>
               </a:spcBef>
@@ -7617,7 +7773,7 @@
               <a:buNone/>
             </a:pPr>
             <a:r>
-              <a:rPr b="1" lang="ja-JP" sz="1600">
+              <a:rPr lang="ja-JP" sz="1600" b="1">
                 <a:solidFill>
                   <a:srgbClr val="004DE6"/>
                 </a:solidFill>
@@ -7628,7 +7784,7 @@
               </a:rPr>
               <a:t>【LINE VOOM】サービス終了に伴う広告枠の終了</a:t>
             </a:r>
-            <a:endParaRPr b="1" sz="1600">
+            <a:endParaRPr sz="1600" b="1">
               <a:solidFill>
                 <a:srgbClr val="004DE6"/>
               </a:solidFill>
@@ -7660,12 +7816,12 @@
           </a:ln>
         </p:spPr>
         <p:txBody>
-          <a:bodyPr anchorCtr="0" anchor="t" bIns="45700" lIns="91425" spcFirstLastPara="1" rIns="91425" wrap="square" tIns="72000">
+          <a:bodyPr spcFirstLastPara="1" wrap="square" lIns="91425" tIns="72000" rIns="91425" bIns="45700" anchor="t" anchorCtr="0">
             <a:spAutoFit/>
           </a:bodyPr>
           <a:lstStyle/>
           <a:p>
-            <a:pPr indent="0" lvl="0" marL="0" marR="0" rtl="0" algn="l">
+            <a:pPr marL="0" marR="0" lvl="0" indent="0" algn="l" rtl="0">
               <a:spcBef>
                 <a:spcPts val="0"/>
               </a:spcBef>
@@ -7680,7 +7836,7 @@
               <a:buNone/>
             </a:pPr>
             <a:r>
-              <a:rPr b="0" lang="ja-JP" sz="1600" u="none">
+              <a:rPr lang="ja-JP" sz="1600" b="0" u="none">
                 <a:solidFill>
                   <a:schemeClr val="dk1"/>
                 </a:solidFill>
@@ -7691,7 +7847,7 @@
               </a:rPr>
               <a:t>    今後のアップデート情報</a:t>
             </a:r>
-            <a:endParaRPr b="0" sz="1600" u="none">
+            <a:endParaRPr sz="1600" b="0" u="none">
               <a:solidFill>
                 <a:schemeClr val="dk1"/>
               </a:solidFill>
@@ -7720,23 +7876,23 @@
           <a:solidFill>
             <a:schemeClr val="bg1"/>
           </a:solidFill>
-          <a:ln cap="flat" cmpd="sng" w="9525">
+          <a:ln w="9525" cap="flat" cmpd="sng">
             <a:solidFill>
               <a:srgbClr val="4F81BD"/>
             </a:solidFill>
             <a:prstDash val="sysDash"/>
             <a:round/>
-            <a:headEnd len="sm" w="sm" type="none"/>
-            <a:tailEnd len="sm" w="sm" type="none"/>
+            <a:headEnd type="none" w="sm" len="sm"/>
+            <a:tailEnd type="none" w="sm" len="sm"/>
           </a:ln>
         </p:spPr>
         <p:txBody>
-          <a:bodyPr anchorCtr="0" anchor="ctr" bIns="45700" lIns="91425" spcFirstLastPara="1" rIns="91425" wrap="square" tIns="45700">
+          <a:bodyPr spcFirstLastPara="1" wrap="square" lIns="91425" tIns="45700" rIns="91425" bIns="45700" anchor="ctr" anchorCtr="0">
             <a:noAutofit/>
           </a:bodyPr>
           <a:lstStyle/>
           <a:p>
-            <a:pPr indent="0" lvl="0" marL="0" marR="0" rtl="0" algn="ctr">
+            <a:pPr marL="0" marR="0" lvl="0" indent="0" algn="ctr" rtl="0">
               <a:spcBef>
                 <a:spcPts val="0"/>
               </a:spcBef>
@@ -7773,7 +7929,7 @@
             </a:endParaRPr>
           </a:p>
           <a:p>
-            <a:pPr indent="0" lvl="0" marL="0" marR="0" rtl="0" algn="ctr">
+            <a:pPr marL="0" marR="0" lvl="0" indent="0" algn="ctr" rtl="0">
               <a:spcBef>
                 <a:spcPts val="0"/>
               </a:spcBef>
@@ -7828,23 +7984,23 @@
           <a:solidFill>
             <a:schemeClr val="bg1"/>
           </a:solidFill>
-          <a:ln cap="flat" cmpd="sng" w="9525">
+          <a:ln w="9525" cap="flat" cmpd="sng">
             <a:solidFill>
               <a:srgbClr val="4F81BD"/>
             </a:solidFill>
             <a:prstDash val="sysDash"/>
             <a:round/>
-            <a:headEnd len="sm" w="sm" type="none"/>
-            <a:tailEnd len="sm" w="sm" type="none"/>
+            <a:headEnd type="none" w="sm" len="sm"/>
+            <a:tailEnd type="none" w="sm" len="sm"/>
           </a:ln>
         </p:spPr>
         <p:txBody>
-          <a:bodyPr anchorCtr="0" anchor="ctr" bIns="45700" lIns="91425" spcFirstLastPara="1" rIns="91425" wrap="square" tIns="45700">
+          <a:bodyPr spcFirstLastPara="1" wrap="square" lIns="91425" tIns="45700" rIns="91425" bIns="45700" anchor="ctr" anchorCtr="0">
             <a:noAutofit/>
           </a:bodyPr>
           <a:lstStyle/>
           <a:p>
-            <a:pPr indent="0" lvl="0" marL="0" marR="0" rtl="0" algn="ctr">
+            <a:pPr marL="0" marR="0" lvl="0" indent="0" algn="ctr" rtl="0">
               <a:spcBef>
                 <a:spcPts val="0"/>
               </a:spcBef>
@@ -7899,12 +8055,12 @@
           </a:ln>
         </p:spPr>
         <p:txBody>
-          <a:bodyPr anchorCtr="0" anchor="ctr" bIns="45700" lIns="91425" spcFirstLastPara="1" rIns="91425" wrap="square" tIns="45700">
+          <a:bodyPr spcFirstLastPara="1" wrap="square" lIns="91425" tIns="45700" rIns="91425" bIns="45700" anchor="ctr" anchorCtr="0">
             <a:noAutofit/>
           </a:bodyPr>
           <a:lstStyle/>
           <a:p>
-            <a:pPr indent="0" lvl="0" marL="0" marR="0" rtl="0" algn="ctr">
+            <a:pPr marL="0" marR="0" lvl="0" indent="0" algn="ctr" rtl="0">
               <a:spcBef>
                 <a:spcPts val="0"/>
               </a:spcBef>
@@ -7913,12 +8069,6 @@
               </a:spcAft>
               <a:buNone/>
             </a:pPr>
-            <a:r>
-              <a:rPr>
-                <a:latin typeface="メイリオ"/>
-              </a:rPr>
-              <a:t/>
-            </a:r>
             <a:endParaRPr sz="1200">
               <a:solidFill>
                 <a:schemeClr val="dk1"/>
@@ -7951,12 +8101,12 @@
           </a:ln>
         </p:spPr>
         <p:txBody>
-          <a:bodyPr anchorCtr="0" anchor="t" bIns="45700" lIns="91425" spcFirstLastPara="1" rIns="91425" wrap="square" tIns="45700">
+          <a:bodyPr spcFirstLastPara="1" wrap="square" lIns="91425" tIns="45700" rIns="91425" bIns="45700" anchor="t" anchorCtr="0">
             <a:spAutoFit/>
           </a:bodyPr>
           <a:lstStyle/>
           <a:p>
-            <a:pPr indent="0" lvl="0" marL="0" marR="0" rtl="0" algn="ctr">
+            <a:pPr marL="0" marR="0" lvl="0" indent="0" algn="ctr" rtl="0">
               <a:spcBef>
                 <a:spcPts val="0"/>
               </a:spcBef>
@@ -7966,7 +8116,7 @@
               <a:buNone/>
             </a:pPr>
             <a:r>
-              <a:rPr b="1" lang="ja-JP" sz="1200">
+              <a:rPr lang="ja-JP" sz="1200" b="1">
                 <a:solidFill>
                   <a:schemeClr val="dk1"/>
                 </a:solidFill>
@@ -7977,7 +8127,7 @@
               </a:rPr>
               <a:t>2026年9月30日（水）11時に、LINE VOOMのサービスが終了した。</a:t>
             </a:r>
-            <a:endParaRPr b="1" sz="1200">
+            <a:endParaRPr sz="1200" b="1">
               <a:solidFill>
                 <a:schemeClr val="dk1"/>
               </a:solidFill>
@@ -7988,7 +8138,7 @@
             </a:endParaRPr>
           </a:p>
           <a:p>
-            <a:pPr indent="0" lvl="0" marL="0" marR="0" rtl="0" algn="ctr">
+            <a:pPr marL="0" marR="0" lvl="0" indent="0" algn="ctr" rtl="0">
               <a:spcBef>
                 <a:spcPts val="0"/>
               </a:spcBef>
@@ -7998,7 +8148,7 @@
               <a:buNone/>
             </a:pPr>
             <a:r>
-              <a:rPr b="1" lang="ja-JP" sz="1200">
+              <a:rPr lang="ja-JP" sz="1200" b="1">
                 <a:solidFill>
                   <a:schemeClr val="dk1"/>
                 </a:solidFill>
@@ -8012,7 +8162,7 @@
             <a:endParaRPr/>
           </a:p>
           <a:p>
-            <a:pPr indent="0" lvl="0" marL="0" marR="0" rtl="0" algn="ctr">
+            <a:pPr marL="0" marR="0" lvl="0" indent="0" algn="ctr" rtl="0">
               <a:spcBef>
                 <a:spcPts val="0"/>
               </a:spcBef>
@@ -8022,7 +8172,7 @@
               <a:buNone/>
             </a:pPr>
             <a:r>
-              <a:rPr b="1" lang="ja-JP" sz="1200">
+              <a:rPr lang="ja-JP" sz="1200" b="1">
                 <a:solidFill>
                   <a:schemeClr val="dk1"/>
                 </a:solidFill>
@@ -8033,7 +8183,7 @@
               </a:rPr>
               <a:t>LINEアプリのVOOMタブは、ショッピングタブに切り替わる。</a:t>
             </a:r>
-            <a:endParaRPr b="1" sz="1400">
+            <a:endParaRPr sz="1400" b="1">
               <a:solidFill>
                 <a:schemeClr val="dk1"/>
               </a:solidFill>
@@ -8065,12 +8215,12 @@
           </a:ln>
         </p:spPr>
         <p:txBody>
-          <a:bodyPr anchorCtr="0" anchor="t" bIns="45700" lIns="91425" spcFirstLastPara="1" rIns="91425" wrap="square" tIns="45700">
+          <a:bodyPr spcFirstLastPara="1" wrap="square" lIns="91425" tIns="45700" rIns="91425" bIns="45700" anchor="t" anchorCtr="0">
             <a:noAutofit/>
           </a:bodyPr>
           <a:lstStyle/>
           <a:p>
-            <a:pPr indent="0" lvl="0" marL="0" marR="0" rtl="0" algn="l">
+            <a:pPr marL="0" marR="0" lvl="0" indent="0" algn="l" rtl="0">
               <a:spcBef>
                 <a:spcPts val="0"/>
               </a:spcBef>
@@ -8080,7 +8230,7 @@
               <a:buNone/>
             </a:pPr>
             <a:r>
-              <a:rPr b="1" lang="ja-JP" sz="1400">
+              <a:rPr lang="ja-JP" sz="1400" b="1">
                 <a:solidFill>
                   <a:srgbClr val="15133D"/>
                 </a:solidFill>
@@ -8122,29 +8272,29 @@
             </a:xfrm>
             <a:prstGeom prst="trapezoid">
               <a:avLst>
-                <a:gd fmla="val 60792" name="adj"/>
+                <a:gd name="adj" fmla="val 60792"/>
               </a:avLst>
             </a:prstGeom>
             <a:solidFill>
               <a:srgbClr val="EAEDF5"/>
             </a:solidFill>
-            <a:ln cap="flat" cmpd="sng" w="25400">
+            <a:ln w="25400" cap="flat" cmpd="sng">
               <a:solidFill>
                 <a:schemeClr val="dk2"/>
               </a:solidFill>
               <a:prstDash val="solid"/>
               <a:round/>
-              <a:headEnd len="sm" w="sm" type="none"/>
-              <a:tailEnd len="sm" w="sm" type="none"/>
+              <a:headEnd type="none" w="sm" len="sm"/>
+              <a:tailEnd type="none" w="sm" len="sm"/>
             </a:ln>
           </p:spPr>
           <p:txBody>
-            <a:bodyPr anchorCtr="0" anchor="ctr" bIns="91425" lIns="91425" spcFirstLastPara="1" rIns="91425" wrap="square" tIns="91425">
+            <a:bodyPr spcFirstLastPara="1" wrap="square" lIns="91425" tIns="91425" rIns="91425" bIns="91425" anchor="ctr" anchorCtr="0">
               <a:noAutofit/>
             </a:bodyPr>
             <a:lstStyle/>
             <a:p>
-              <a:pPr indent="0" lvl="0" marL="0" rtl="0" algn="l">
+              <a:pPr marL="0" lvl="0" indent="0" algn="l" rtl="0">
                 <a:spcBef>
                   <a:spcPts val="0"/>
                 </a:spcBef>
@@ -8153,9 +8303,6 @@
                 </a:spcAft>
                 <a:buNone/>
               </a:pPr>
-              <a:r>
-                <a:t/>
-              </a:r>
               <a:endParaRPr/>
             </a:p>
           </p:txBody>
@@ -8180,12 +8327,12 @@
             </a:ln>
           </p:spPr>
           <p:txBody>
-            <a:bodyPr anchorCtr="0" anchor="ctr" bIns="10150" lIns="10150" spcFirstLastPara="1" rIns="10150" wrap="square" tIns="10150">
+            <a:bodyPr spcFirstLastPara="1" wrap="square" lIns="10150" tIns="10150" rIns="10150" bIns="10150" anchor="ctr" anchorCtr="0">
               <a:noAutofit/>
             </a:bodyPr>
             <a:lstStyle/>
             <a:p>
-              <a:pPr indent="0" lvl="0" marL="0" marR="0" rtl="0" algn="ctr">
+              <a:pPr marL="0" marR="0" lvl="0" indent="0" algn="ctr" rtl="0">
                 <a:lnSpc>
                   <a:spcPct val="90000"/>
                 </a:lnSpc>
@@ -8203,7 +8350,7 @@
                 <a:buNone/>
               </a:pPr>
               <a:r>
-                <a:rPr b="1" lang="ja-JP" sz="800">
+                <a:rPr lang="ja-JP" sz="800" b="1">
                   <a:solidFill>
                     <a:srgbClr val="262626"/>
                   </a:solidFill>
@@ -8231,29 +8378,29 @@
             </a:xfrm>
             <a:prstGeom prst="trapezoid">
               <a:avLst>
-                <a:gd fmla="val 60792" name="adj"/>
+                <a:gd name="adj" fmla="val 60792"/>
               </a:avLst>
             </a:prstGeom>
             <a:solidFill>
               <a:schemeClr val="lt1"/>
             </a:solidFill>
-            <a:ln cap="flat" cmpd="sng" w="25400">
+            <a:ln w="25400" cap="flat" cmpd="sng">
               <a:solidFill>
                 <a:schemeClr val="dk2"/>
               </a:solidFill>
               <a:prstDash val="solid"/>
               <a:round/>
-              <a:headEnd len="sm" w="sm" type="none"/>
-              <a:tailEnd len="sm" w="sm" type="none"/>
+              <a:headEnd type="none" w="sm" len="sm"/>
+              <a:tailEnd type="none" w="sm" len="sm"/>
             </a:ln>
           </p:spPr>
           <p:txBody>
-            <a:bodyPr anchorCtr="0" anchor="ctr" bIns="91425" lIns="91425" spcFirstLastPara="1" rIns="91425" wrap="square" tIns="91425">
+            <a:bodyPr spcFirstLastPara="1" wrap="square" lIns="91425" tIns="91425" rIns="91425" bIns="91425" anchor="ctr" anchorCtr="0">
               <a:noAutofit/>
             </a:bodyPr>
             <a:lstStyle/>
             <a:p>
-              <a:pPr indent="0" lvl="0" marL="0" rtl="0" algn="l">
+              <a:pPr marL="0" lvl="0" indent="0" algn="l" rtl="0">
                 <a:spcBef>
                   <a:spcPts val="0"/>
                 </a:spcBef>
@@ -8262,9 +8409,6 @@
                 </a:spcAft>
                 <a:buNone/>
               </a:pPr>
-              <a:r>
-                <a:t/>
-              </a:r>
               <a:endParaRPr/>
             </a:p>
           </p:txBody>
@@ -8289,12 +8433,12 @@
             </a:ln>
           </p:spPr>
           <p:txBody>
-            <a:bodyPr anchorCtr="0" anchor="ctr" bIns="10150" lIns="10150" spcFirstLastPara="1" rIns="10150" wrap="square" tIns="10150">
+            <a:bodyPr spcFirstLastPara="1" wrap="square" lIns="10150" tIns="10150" rIns="10150" bIns="10150" anchor="ctr" anchorCtr="0">
               <a:noAutofit/>
             </a:bodyPr>
             <a:lstStyle/>
             <a:p>
-              <a:pPr indent="0" lvl="0" marL="0" marR="0" rtl="0" algn="ctr">
+              <a:pPr marL="0" marR="0" lvl="0" indent="0" algn="ctr" rtl="0">
                 <a:lnSpc>
                   <a:spcPct val="90000"/>
                 </a:lnSpc>
@@ -8312,7 +8456,7 @@
                 <a:buNone/>
               </a:pPr>
               <a:r>
-                <a:rPr b="1" lang="ja-JP" sz="800">
+                <a:rPr lang="ja-JP" sz="800" b="1">
                   <a:solidFill>
                     <a:srgbClr val="262626"/>
                   </a:solidFill>
@@ -8340,29 +8484,29 @@
             </a:xfrm>
             <a:prstGeom prst="trapezoid">
               <a:avLst>
-                <a:gd fmla="val 60792" name="adj"/>
+                <a:gd name="adj" fmla="val 60792"/>
               </a:avLst>
             </a:prstGeom>
             <a:solidFill>
               <a:schemeClr val="lt1"/>
             </a:solidFill>
-            <a:ln cap="flat" cmpd="sng" w="25400">
+            <a:ln w="25400" cap="flat" cmpd="sng">
               <a:solidFill>
                 <a:schemeClr val="dk2"/>
               </a:solidFill>
               <a:prstDash val="solid"/>
               <a:round/>
-              <a:headEnd len="sm" w="sm" type="none"/>
-              <a:tailEnd len="sm" w="sm" type="none"/>
+              <a:headEnd type="none" w="sm" len="sm"/>
+              <a:tailEnd type="none" w="sm" len="sm"/>
             </a:ln>
           </p:spPr>
           <p:txBody>
-            <a:bodyPr anchorCtr="0" anchor="ctr" bIns="91425" lIns="91425" spcFirstLastPara="1" rIns="91425" wrap="square" tIns="91425">
+            <a:bodyPr spcFirstLastPara="1" wrap="square" lIns="91425" tIns="91425" rIns="91425" bIns="91425" anchor="ctr" anchorCtr="0">
               <a:noAutofit/>
             </a:bodyPr>
             <a:lstStyle/>
             <a:p>
-              <a:pPr indent="0" lvl="0" marL="0" rtl="0" algn="l">
+              <a:pPr marL="0" lvl="0" indent="0" algn="l" rtl="0">
                 <a:spcBef>
                   <a:spcPts val="0"/>
                 </a:spcBef>
@@ -8371,9 +8515,6 @@
                 </a:spcAft>
                 <a:buNone/>
               </a:pPr>
-              <a:r>
-                <a:t/>
-              </a:r>
               <a:endParaRPr/>
             </a:p>
           </p:txBody>
@@ -8398,12 +8539,12 @@
             </a:ln>
           </p:spPr>
           <p:txBody>
-            <a:bodyPr anchorCtr="0" anchor="ctr" bIns="10150" lIns="10150" spcFirstLastPara="1" rIns="10150" wrap="square" tIns="10150">
+            <a:bodyPr spcFirstLastPara="1" wrap="square" lIns="10150" tIns="10150" rIns="10150" bIns="10150" anchor="ctr" anchorCtr="0">
               <a:noAutofit/>
             </a:bodyPr>
             <a:lstStyle/>
             <a:p>
-              <a:pPr indent="0" lvl="0" marL="0" marR="0" rtl="0" algn="ctr">
+              <a:pPr marL="0" marR="0" lvl="0" indent="0" algn="ctr" rtl="0">
                 <a:lnSpc>
                   <a:spcPct val="90000"/>
                 </a:lnSpc>
@@ -8421,7 +8562,7 @@
                 <a:buNone/>
               </a:pPr>
               <a:r>
-                <a:rPr b="1" lang="ja-JP" sz="800">
+                <a:rPr lang="ja-JP" sz="800" b="1">
                   <a:solidFill>
                     <a:srgbClr val="262626"/>
                   </a:solidFill>
@@ -8449,27 +8590,27 @@
             </a:xfrm>
             <a:prstGeom prst="trapezoid">
               <a:avLst>
-                <a:gd fmla="val 60792" name="adj"/>
+                <a:gd name="adj" fmla="val 60792"/>
               </a:avLst>
             </a:prstGeom>
             <a:noFill/>
-            <a:ln cap="flat" cmpd="sng" w="25400">
+            <a:ln w="25400" cap="flat" cmpd="sng">
               <a:solidFill>
                 <a:schemeClr val="dk2"/>
               </a:solidFill>
               <a:prstDash val="solid"/>
               <a:round/>
-              <a:headEnd len="sm" w="sm" type="none"/>
-              <a:tailEnd len="sm" w="sm" type="none"/>
+              <a:headEnd type="none" w="sm" len="sm"/>
+              <a:tailEnd type="none" w="sm" len="sm"/>
             </a:ln>
           </p:spPr>
           <p:txBody>
-            <a:bodyPr anchorCtr="0" anchor="ctr" bIns="91425" lIns="91425" spcFirstLastPara="1" rIns="91425" wrap="square" tIns="91425">
+            <a:bodyPr spcFirstLastPara="1" wrap="square" lIns="91425" tIns="91425" rIns="91425" bIns="91425" anchor="ctr" anchorCtr="0">
               <a:noAutofit/>
             </a:bodyPr>
             <a:lstStyle/>
             <a:p>
-              <a:pPr indent="0" lvl="0" marL="0" rtl="0" algn="l">
+              <a:pPr marL="0" lvl="0" indent="0" algn="l" rtl="0">
                 <a:spcBef>
                   <a:spcPts val="0"/>
                 </a:spcBef>
@@ -8478,9 +8619,6 @@
                 </a:spcAft>
                 <a:buNone/>
               </a:pPr>
-              <a:r>
-                <a:t/>
-              </a:r>
               <a:endParaRPr/>
             </a:p>
           </p:txBody>
@@ -8505,12 +8643,12 @@
             </a:ln>
           </p:spPr>
           <p:txBody>
-            <a:bodyPr anchorCtr="0" anchor="ctr" bIns="10150" lIns="10150" spcFirstLastPara="1" rIns="10150" wrap="square" tIns="10150">
+            <a:bodyPr spcFirstLastPara="1" wrap="square" lIns="10150" tIns="10150" rIns="10150" bIns="10150" anchor="ctr" anchorCtr="0">
               <a:noAutofit/>
             </a:bodyPr>
             <a:lstStyle/>
             <a:p>
-              <a:pPr indent="0" lvl="0" marL="0" marR="0" rtl="0" algn="ctr">
+              <a:pPr marL="0" marR="0" lvl="0" indent="0" algn="ctr" rtl="0">
                 <a:lnSpc>
                   <a:spcPct val="90000"/>
                 </a:lnSpc>
@@ -8528,7 +8666,7 @@
                 <a:buNone/>
               </a:pPr>
               <a:r>
-                <a:rPr b="1" lang="ja-JP" sz="800">
+                <a:rPr lang="ja-JP" sz="800" b="1">
                   <a:solidFill>
                     <a:srgbClr val="262626"/>
                   </a:solidFill>
@@ -8546,7 +8684,7 @@
       </p:grpSp>
       <p:pic>
         <p:nvPicPr>
-          <p:cNvPr descr="LINE公式アカウントのロゴの使用方法とは？種類やダウンロード方法、利用時の注意点を紹介 | Mico（ミコ）" id="62" name="Google Shape;62;p3"/>
+          <p:cNvPr id="62" name="Google Shape;62;p3" descr="LINE公式アカウントのロゴの使用方法とは？種類やダウンロード方法、利用時の注意点を紹介 | Mico（ミコ）"/>
           <p:cNvPicPr preferRelativeResize="0"/>
           <p:nvPr/>
         </p:nvPicPr>
@@ -8554,7 +8692,7 @@
           <a:blip r:embed="rId2">
             <a:alphaModFix/>
           </a:blip>
-          <a:srcRect b="0" l="0" r="0" t="0"/>
+          <a:srcRect/>
           <a:stretch/>
         </p:blipFill>
         <p:spPr>
@@ -8608,7 +8746,7 @@
           </a:fontRef>
         </p:style>
         <p:txBody>
-          <a:bodyPr rtlCol="0" anchor="ctr" wrap="square" rIns="45720"/>
+          <a:bodyPr wrap="square" rIns="45720" rtlCol="0" anchor="ctr"/>
           <a:lstStyle/>
           <a:p>
             <a:pPr algn="ctr"/>
@@ -8663,7 +8801,7 @@
           </a:fontRef>
         </p:style>
         <p:txBody>
-          <a:bodyPr rtlCol="0" anchor="ctr" wrap="square" lIns="182880" rIns="137160" tIns="54864" bIns="54864"/>
+          <a:bodyPr wrap="square" lIns="182880" tIns="54864" rIns="137160" bIns="54864" rtlCol="0" anchor="ctr"/>
           <a:lstStyle/>
           <a:p>
             <a:pPr algn="ctr">
@@ -8755,7 +8893,7 @@
           </a:fontRef>
         </p:style>
         <p:txBody>
-          <a:bodyPr rtlCol="0" anchor="ctr" wrap="square" rIns="45720"/>
+          <a:bodyPr wrap="square" rIns="45720" rtlCol="0" anchor="ctr"/>
           <a:lstStyle/>
           <a:p>
             <a:pPr algn="ctr"/>
@@ -8810,7 +8948,7 @@
           </a:fontRef>
         </p:style>
         <p:txBody>
-          <a:bodyPr rtlCol="0" anchor="ctr" wrap="square" lIns="182880" rIns="137160" tIns="54864" bIns="54864"/>
+          <a:bodyPr wrap="square" lIns="182880" tIns="54864" rIns="137160" bIns="54864" rtlCol="0" anchor="ctr"/>
           <a:lstStyle/>
           <a:p>
             <a:pPr algn="ctr">
@@ -8890,7 +9028,7 @@
           </a:fontRef>
         </p:style>
         <p:txBody>
-          <a:bodyPr rtlCol="0" anchor="ctr" wrap="square" lIns="228600" rIns="182880"/>
+          <a:bodyPr wrap="square" lIns="228600" rIns="182880" rtlCol="0" anchor="ctr"/>
           <a:lstStyle/>
           <a:p>
             <a:pPr algn="l"/>
@@ -8966,7 +9104,7 @@
           </a:fontRef>
         </p:style>
         <p:txBody>
-          <a:bodyPr rtlCol="0" anchor="ctr" wrap="square" lIns="228600" rIns="182880"/>
+          <a:bodyPr wrap="square" lIns="228600" rIns="182880" rtlCol="0" anchor="ctr"/>
           <a:lstStyle/>
           <a:p>
             <a:pPr algn="l"/>
@@ -9010,7 +9148,7 @@
 </file>
 
 <file path=ppt/theme/theme1.xml><?xml version="1.0" encoding="utf-8"?>
-<a:theme xmlns:a="http://schemas.openxmlformats.org/drawingml/2006/main" xmlns:r="http://schemas.openxmlformats.org/officeDocument/2006/relationships" name="Office ​​テーマ">
+<a:theme xmlns:a="http://schemas.openxmlformats.org/drawingml/2006/main" name="DYMJAPAN">
   <a:themeElements>
     <a:clrScheme name="Office">
       <a:dk1>
@@ -9285,11 +9423,13 @@
       </a:bgFillStyleLst>
     </a:fmtScheme>
   </a:themeElements>
+  <a:objectDefaults/>
+  <a:extraClrSchemeLst/>
 </a:theme>
 </file>
 
 <file path=ppt/theme/theme2.xml><?xml version="1.0" encoding="utf-8"?>
-<a:theme xmlns:a="http://schemas.openxmlformats.org/drawingml/2006/main" xmlns:r="http://schemas.openxmlformats.org/officeDocument/2006/relationships" name="DYMJAPAN">
+<a:theme xmlns:a="http://schemas.openxmlformats.org/drawingml/2006/main" name="Office ​​テーマ">
   <a:themeElements>
     <a:clrScheme name="Office">
       <a:dk1>
@@ -9564,5 +9704,7 @@
       </a:bgFillStyleLst>
     </a:fmtScheme>
   </a:themeElements>
+  <a:objectDefaults/>
+  <a:extraClrSchemeLst/>
 </a:theme>
 </file>
--- a/LINE広告トレンドレポート_2026年10月.pptx
+++ b/LINE広告トレンドレポート_2026年10月.pptx
@@ -4922,7 +4922,7 @@
         <p:spPr>
           <a:xfrm>
             <a:off x="544108" y="3068960"/>
-            <a:ext cx="1964416" cy="365760"/>
+            <a:ext cx="2726422" cy="365760"/>
           </a:xfrm>
           <a:prstGeom prst="rect">
             <a:avLst/>
@@ -4975,7 +4975,7 @@
         <p:spPr>
           <a:xfrm>
             <a:off x="544108" y="3434720"/>
-            <a:ext cx="1964416" cy="1005840"/>
+            <a:ext cx="2726422" cy="1005840"/>
           </a:xfrm>
           <a:prstGeom prst="rect">
             <a:avLst/>
@@ -5039,7 +5039,7 @@
         </p:nvSpPr>
         <p:spPr>
           <a:xfrm>
-            <a:off x="2508524" y="3068960"/>
+            <a:off x="3270530" y="3068960"/>
             <a:ext cx="320040" cy="1371600"/>
           </a:xfrm>
           <a:prstGeom prst="rect">
@@ -5074,8 +5074,8 @@
         </p:nvSpPr>
         <p:spPr>
           <a:xfrm>
-            <a:off x="2828564" y="3068960"/>
-            <a:ext cx="1964416" cy="365760"/>
+            <a:off x="3590570" y="3068960"/>
+            <a:ext cx="2726422" cy="365760"/>
           </a:xfrm>
           <a:prstGeom prst="rect">
             <a:avLst/>
@@ -5127,8 +5127,8 @@
         </p:nvSpPr>
         <p:spPr>
           <a:xfrm>
-            <a:off x="2828564" y="3434720"/>
-            <a:ext cx="1964416" cy="1005840"/>
+            <a:off x="3590570" y="3434720"/>
+            <a:ext cx="2726422" cy="1005840"/>
           </a:xfrm>
           <a:prstGeom prst="rect">
             <a:avLst/>
@@ -5173,7 +5173,7 @@
                 </a:solidFill>
                 <a:latin typeface="メイリオ"/>
               </a:rPr>
-              <a:t>新規作成・編集・広告配信が停止</a:t>
+              <a:t>新規作成・編集・広告配信が停止（以降は管理画面の閲覧のみ）</a:t>
             </a:r>
           </a:p>
         </p:txBody>
@@ -5186,7 +5186,7 @@
         </p:nvSpPr>
         <p:spPr>
           <a:xfrm>
-            <a:off x="4792980" y="3068960"/>
+            <a:off x="6316992" y="3068960"/>
             <a:ext cx="320040" cy="1371600"/>
           </a:xfrm>
           <a:prstGeom prst="rect">
@@ -5215,14 +5215,14 @@
       </p:sp>
       <p:sp>
         <p:nvSpPr>
-          <p:cNvPr id="69" name="Rectangle 68"/>
+          <p:cNvPr id="72" name="Rectangle 71"/>
           <p:cNvSpPr/>
           <p:nvPr/>
         </p:nvSpPr>
         <p:spPr>
           <a:xfrm>
-            <a:off x="5113020" y="3068960"/>
-            <a:ext cx="1964416" cy="365760"/>
+            <a:off x="6637032" y="3068960"/>
+            <a:ext cx="2726422" cy="365760"/>
           </a:xfrm>
           <a:prstGeom prst="rect">
             <a:avLst/>
@@ -5261,193 +5261,6 @@
                 </a:solidFill>
                 <a:latin typeface="メイリオ"/>
               </a:rPr>
-              <a:t>停止後〜</a:t>
-            </a:r>
-          </a:p>
-        </p:txBody>
-      </p:sp>
-      <p:sp>
-        <p:nvSpPr>
-          <p:cNvPr id="70" name="Rectangle 69"/>
-          <p:cNvSpPr/>
-          <p:nvPr/>
-        </p:nvSpPr>
-        <p:spPr>
-          <a:xfrm>
-            <a:off x="5113020" y="3434720"/>
-            <a:ext cx="1964416" cy="1005840"/>
-          </a:xfrm>
-          <a:prstGeom prst="rect">
-            <a:avLst/>
-          </a:prstGeom>
-          <a:solidFill>
-            <a:srgbClr val="EAF0FA"/>
-          </a:solidFill>
-          <a:ln w="12700">
-            <a:solidFill>
-              <a:srgbClr val="3467B2"/>
-            </a:solidFill>
-          </a:ln>
-          <a:effectLst/>
-        </p:spPr>
-        <p:style>
-          <a:lnRef idx="1">
-            <a:schemeClr val="accent1"/>
-          </a:lnRef>
-          <a:fillRef idx="3">
-            <a:schemeClr val="accent1"/>
-          </a:fillRef>
-          <a:effectRef idx="2">
-            <a:schemeClr val="accent1"/>
-          </a:effectRef>
-          <a:fontRef idx="minor">
-            <a:schemeClr val="lt1"/>
-          </a:fontRef>
-        </p:style>
-        <p:txBody>
-          <a:bodyPr wrap="square" lIns="182880" tIns="54864" rIns="137160" bIns="54864" rtlCol="0" anchor="ctr"/>
-          <a:lstStyle/>
-          <a:p>
-            <a:pPr algn="ctr">
-              <a:lnSpc>
-                <a:spcPct val="110000"/>
-              </a:lnSpc>
-            </a:pPr>
-            <a:r>
-              <a:rPr sz="1200" dirty="0" err="1">
-                <a:solidFill>
-                  <a:srgbClr val="333333"/>
-                </a:solidFill>
-                <a:latin typeface="メイリオ"/>
-              </a:rPr>
-              <a:t>管理画面は閲覧のみ</a:t>
-            </a:r>
-            <a:endParaRPr lang="en-US" sz="1200" dirty="0">
-              <a:solidFill>
-                <a:srgbClr val="333333"/>
-              </a:solidFill>
-              <a:latin typeface="メイリオ"/>
-            </a:endParaRPr>
-          </a:p>
-          <a:p>
-            <a:pPr algn="ctr">
-              <a:lnSpc>
-                <a:spcPct val="110000"/>
-              </a:lnSpc>
-            </a:pPr>
-            <a:r>
-              <a:rPr sz="1200" dirty="0">
-                <a:solidFill>
-                  <a:srgbClr val="333333"/>
-                </a:solidFill>
-                <a:latin typeface="メイリオ"/>
-              </a:rPr>
-              <a:t>（</a:t>
-            </a:r>
-            <a:r>
-              <a:rPr sz="1200" dirty="0" err="1">
-                <a:solidFill>
-                  <a:srgbClr val="333333"/>
-                </a:solidFill>
-                <a:latin typeface="メイリオ"/>
-              </a:rPr>
-              <a:t>レポート・明細は確認可</a:t>
-            </a:r>
-            <a:r>
-              <a:rPr sz="1200" dirty="0">
-                <a:solidFill>
-                  <a:srgbClr val="333333"/>
-                </a:solidFill>
-                <a:latin typeface="メイリオ"/>
-              </a:rPr>
-              <a:t>）</a:t>
-            </a:r>
-          </a:p>
-        </p:txBody>
-      </p:sp>
-      <p:sp>
-        <p:nvSpPr>
-          <p:cNvPr id="71" name="TextBox 70"/>
-          <p:cNvSpPr txBox="1"/>
-          <p:nvPr/>
-        </p:nvSpPr>
-        <p:spPr>
-          <a:xfrm>
-            <a:off x="7077436" y="3068960"/>
-            <a:ext cx="320040" cy="1371600"/>
-          </a:xfrm>
-          <a:prstGeom prst="rect">
-            <a:avLst/>
-          </a:prstGeom>
-          <a:noFill/>
-        </p:spPr>
-        <p:txBody>
-          <a:bodyPr wrap="none" anchor="ctr">
-            <a:spAutoFit/>
-          </a:bodyPr>
-          <a:lstStyle/>
-          <a:p>
-            <a:pPr algn="ctr"/>
-            <a:r>
-              <a:rPr sz="1600" b="1">
-                <a:solidFill>
-                  <a:srgbClr val="3467B2"/>
-                </a:solidFill>
-                <a:latin typeface="メイリオ"/>
-              </a:rPr>
-              <a:t>▶</a:t>
-            </a:r>
-          </a:p>
-        </p:txBody>
-      </p:sp>
-      <p:sp>
-        <p:nvSpPr>
-          <p:cNvPr id="72" name="Rectangle 71"/>
-          <p:cNvSpPr/>
-          <p:nvPr/>
-        </p:nvSpPr>
-        <p:spPr>
-          <a:xfrm>
-            <a:off x="7397476" y="3068960"/>
-            <a:ext cx="1964416" cy="365760"/>
-          </a:xfrm>
-          <a:prstGeom prst="rect">
-            <a:avLst/>
-          </a:prstGeom>
-          <a:solidFill>
-            <a:srgbClr val="15133D"/>
-          </a:solidFill>
-          <a:ln>
-            <a:noFill/>
-          </a:ln>
-          <a:effectLst/>
-        </p:spPr>
-        <p:style>
-          <a:lnRef idx="1">
-            <a:schemeClr val="accent1"/>
-          </a:lnRef>
-          <a:fillRef idx="3">
-            <a:schemeClr val="accent1"/>
-          </a:fillRef>
-          <a:effectRef idx="2">
-            <a:schemeClr val="accent1"/>
-          </a:effectRef>
-          <a:fontRef idx="minor">
-            <a:schemeClr val="lt1"/>
-          </a:fontRef>
-        </p:style>
-        <p:txBody>
-          <a:bodyPr wrap="square" rIns="45720" rtlCol="0" anchor="ctr"/>
-          <a:lstStyle/>
-          <a:p>
-            <a:pPr algn="ctr"/>
-            <a:r>
-              <a:rPr sz="1300" b="1">
-                <a:solidFill>
-                  <a:srgbClr val="FFFFFF"/>
-                </a:solidFill>
-                <a:latin typeface="メイリオ"/>
-              </a:rPr>
               <a:t>2027年3月末頃</a:t>
             </a:r>
           </a:p>
@@ -5461,8 +5274,8 @@
         </p:nvSpPr>
         <p:spPr>
           <a:xfrm>
-            <a:off x="7397476" y="3434720"/>
-            <a:ext cx="1964416" cy="1005840"/>
+            <a:off x="6637032" y="3434720"/>
+            <a:ext cx="2726422" cy="1005840"/>
           </a:xfrm>
           <a:prstGeom prst="rect">
             <a:avLst/>

--- a/LINE広告トレンドレポート_2026年10月.pptx
+++ b/LINE広告トレンドレポート_2026年10月.pptx
@@ -12,6 +12,8 @@
     <p:sldId id="257" r:id="rId3"/>
     <p:sldId id="258" r:id="rId4"/>
     <p:sldId id="259" r:id="rId5"/>
+    <p:sldId id="261" r:id="rId20"/>
+    <p:sldId id="262" r:id="rId19"/>
     <p:sldId id="260" r:id="rId6"/>
   </p:sldIdLst>
   <p:sldSz cx="9906000" cy="6858000" type="A4"/>
@@ -3331,7 +3333,7 @@
                 <a:cs typeface="Meiryo"/>
                 <a:sym typeface="Meiryo"/>
               </a:rPr>
-              <a:t>P.4</a:t>
+              <a:t>P.4-6</a:t>
             </a:r>
             <a:endParaRPr/>
           </a:p>
@@ -3358,7 +3360,7 @@
                 <a:cs typeface="Meiryo"/>
                 <a:sym typeface="Meiryo"/>
               </a:rPr>
-              <a:t>P.5</a:t>
+              <a:t>P.7</a:t>
             </a:r>
             <a:endParaRPr sz="1500" b="1" i="0" u="none" strike="noStrike" cap="none">
               <a:solidFill>
@@ -3446,7 +3448,7 @@
                 <a:cs typeface="Meiryo"/>
                 <a:sym typeface="Meiryo"/>
               </a:rPr>
-              <a:t>【LINEヤフー広告】ディスプレイ広告への移行で必要な対応</a:t>
+              <a:t>【LINEヤフー広告】統合の概要・移行の対象と方法・移行ツール</a:t>
             </a:r>
             <a:endParaRPr/>
           </a:p>
@@ -4915,435 +4917,14 @@
       </p:pic>
       <p:sp>
         <p:nvSpPr>
-          <p:cNvPr id="63" name="Rectangle 62"/>
-          <p:cNvSpPr/>
-          <p:nvPr/>
-        </p:nvSpPr>
-        <p:spPr>
-          <a:xfrm>
-            <a:off x="544108" y="3068960"/>
-            <a:ext cx="2726422" cy="365760"/>
-          </a:xfrm>
-          <a:prstGeom prst="rect">
-            <a:avLst/>
-          </a:prstGeom>
-          <a:solidFill>
-            <a:srgbClr val="15133D"/>
-          </a:solidFill>
-          <a:ln>
-            <a:noFill/>
-          </a:ln>
-          <a:effectLst/>
-        </p:spPr>
-        <p:style>
-          <a:lnRef idx="1">
-            <a:schemeClr val="accent1"/>
-          </a:lnRef>
-          <a:fillRef idx="3">
-            <a:schemeClr val="accent1"/>
-          </a:fillRef>
-          <a:effectRef idx="2">
-            <a:schemeClr val="accent1"/>
-          </a:effectRef>
-          <a:fontRef idx="minor">
-            <a:schemeClr val="lt1"/>
-          </a:fontRef>
-        </p:style>
-        <p:txBody>
-          <a:bodyPr wrap="square" rIns="45720" rtlCol="0" anchor="ctr"/>
-          <a:lstStyle/>
-          <a:p>
-            <a:pPr algn="ctr"/>
-            <a:r>
-              <a:rPr sz="1300" b="1">
-                <a:solidFill>
-                  <a:srgbClr val="FFFFFF"/>
-                </a:solidFill>
-                <a:latin typeface="メイリオ"/>
-              </a:rPr>
-              <a:t>2026年6月30日</a:t>
-            </a:r>
-          </a:p>
-        </p:txBody>
-      </p:sp>
-      <p:sp>
-        <p:nvSpPr>
-          <p:cNvPr id="64" name="Rectangle 63"/>
-          <p:cNvSpPr/>
-          <p:nvPr/>
-        </p:nvSpPr>
-        <p:spPr>
-          <a:xfrm>
-            <a:off x="544108" y="3434720"/>
-            <a:ext cx="2726422" cy="1005840"/>
-          </a:xfrm>
-          <a:prstGeom prst="rect">
-            <a:avLst/>
-          </a:prstGeom>
-          <a:solidFill>
-            <a:srgbClr val="EAF0FA"/>
-          </a:solidFill>
-          <a:ln w="12700">
-            <a:solidFill>
-              <a:srgbClr val="3467B2"/>
-            </a:solidFill>
-          </a:ln>
-          <a:effectLst/>
-        </p:spPr>
-        <p:style>
-          <a:lnRef idx="1">
-            <a:schemeClr val="accent1"/>
-          </a:lnRef>
-          <a:fillRef idx="3">
-            <a:schemeClr val="accent1"/>
-          </a:fillRef>
-          <a:effectRef idx="2">
-            <a:schemeClr val="accent1"/>
-          </a:effectRef>
-          <a:fontRef idx="minor">
-            <a:schemeClr val="lt1"/>
-          </a:fontRef>
-        </p:style>
-        <p:txBody>
-          <a:bodyPr wrap="square" lIns="182880" tIns="54864" rIns="137160" bIns="54864" rtlCol="0" anchor="ctr"/>
-          <a:lstStyle/>
-          <a:p>
-            <a:pPr algn="ctr">
-              <a:lnSpc>
-                <a:spcPct val="110000"/>
-              </a:lnSpc>
-            </a:pPr>
-            <a:r>
-              <a:rPr sz="1200" dirty="0" err="1">
-                <a:solidFill>
-                  <a:srgbClr val="333333"/>
-                </a:solidFill>
-                <a:latin typeface="メイリオ"/>
-              </a:rPr>
-              <a:t>新規アカウントの作成が停止</a:t>
-            </a:r>
-            <a:endParaRPr sz="1200" dirty="0">
-              <a:solidFill>
-                <a:srgbClr val="333333"/>
-              </a:solidFill>
-              <a:latin typeface="メイリオ"/>
-            </a:endParaRPr>
-          </a:p>
-        </p:txBody>
-      </p:sp>
-      <p:sp>
-        <p:nvSpPr>
-          <p:cNvPr id="65" name="TextBox 64"/>
-          <p:cNvSpPr txBox="1"/>
-          <p:nvPr/>
-        </p:nvSpPr>
-        <p:spPr>
-          <a:xfrm>
-            <a:off x="3270530" y="3068960"/>
-            <a:ext cx="320040" cy="1371600"/>
-          </a:xfrm>
-          <a:prstGeom prst="rect">
-            <a:avLst/>
-          </a:prstGeom>
-          <a:noFill/>
-        </p:spPr>
-        <p:txBody>
-          <a:bodyPr wrap="none" anchor="ctr">
-            <a:spAutoFit/>
-          </a:bodyPr>
-          <a:lstStyle/>
-          <a:p>
-            <a:pPr algn="ctr"/>
-            <a:r>
-              <a:rPr sz="1600" b="1">
-                <a:solidFill>
-                  <a:srgbClr val="3467B2"/>
-                </a:solidFill>
-                <a:latin typeface="メイリオ"/>
-              </a:rPr>
-              <a:t>▶</a:t>
-            </a:r>
-          </a:p>
-        </p:txBody>
-      </p:sp>
-      <p:sp>
-        <p:nvSpPr>
-          <p:cNvPr id="66" name="Rectangle 65"/>
-          <p:cNvSpPr/>
-          <p:nvPr/>
-        </p:nvSpPr>
-        <p:spPr>
-          <a:xfrm>
-            <a:off x="3590570" y="3068960"/>
-            <a:ext cx="2726422" cy="365760"/>
-          </a:xfrm>
-          <a:prstGeom prst="rect">
-            <a:avLst/>
-          </a:prstGeom>
-          <a:solidFill>
-            <a:srgbClr val="15133D"/>
-          </a:solidFill>
-          <a:ln>
-            <a:noFill/>
-          </a:ln>
-          <a:effectLst/>
-        </p:spPr>
-        <p:style>
-          <a:lnRef idx="1">
-            <a:schemeClr val="accent1"/>
-          </a:lnRef>
-          <a:fillRef idx="3">
-            <a:schemeClr val="accent1"/>
-          </a:fillRef>
-          <a:effectRef idx="2">
-            <a:schemeClr val="accent1"/>
-          </a:effectRef>
-          <a:fontRef idx="minor">
-            <a:schemeClr val="lt1"/>
-          </a:fontRef>
-        </p:style>
-        <p:txBody>
-          <a:bodyPr wrap="square" rIns="45720" rtlCol="0" anchor="ctr"/>
-          <a:lstStyle/>
-          <a:p>
-            <a:pPr algn="ctr"/>
-            <a:r>
-              <a:rPr sz="1300" b="1">
-                <a:solidFill>
-                  <a:srgbClr val="FFFFFF"/>
-                </a:solidFill>
-                <a:latin typeface="メイリオ"/>
-              </a:rPr>
-              <a:t>2026年10月26日</a:t>
-            </a:r>
-          </a:p>
-        </p:txBody>
-      </p:sp>
-      <p:sp>
-        <p:nvSpPr>
-          <p:cNvPr id="67" name="Rectangle 66"/>
-          <p:cNvSpPr/>
-          <p:nvPr/>
-        </p:nvSpPr>
-        <p:spPr>
-          <a:xfrm>
-            <a:off x="3590570" y="3434720"/>
-            <a:ext cx="2726422" cy="1005840"/>
-          </a:xfrm>
-          <a:prstGeom prst="rect">
-            <a:avLst/>
-          </a:prstGeom>
-          <a:solidFill>
-            <a:srgbClr val="EAF0FA"/>
-          </a:solidFill>
-          <a:ln w="12700">
-            <a:solidFill>
-              <a:srgbClr val="3467B2"/>
-            </a:solidFill>
-          </a:ln>
-          <a:effectLst/>
-        </p:spPr>
-        <p:style>
-          <a:lnRef idx="1">
-            <a:schemeClr val="accent1"/>
-          </a:lnRef>
-          <a:fillRef idx="3">
-            <a:schemeClr val="accent1"/>
-          </a:fillRef>
-          <a:effectRef idx="2">
-            <a:schemeClr val="accent1"/>
-          </a:effectRef>
-          <a:fontRef idx="minor">
-            <a:schemeClr val="lt1"/>
-          </a:fontRef>
-        </p:style>
-        <p:txBody>
-          <a:bodyPr wrap="square" lIns="182880" tIns="54864" rIns="137160" bIns="54864" rtlCol="0" anchor="ctr"/>
-          <a:lstStyle/>
-          <a:p>
-            <a:pPr algn="ctr">
-              <a:lnSpc>
-                <a:spcPct val="110000"/>
-              </a:lnSpc>
-            </a:pPr>
-            <a:r>
-              <a:rPr sz="1200">
-                <a:solidFill>
-                  <a:srgbClr val="333333"/>
-                </a:solidFill>
-                <a:latin typeface="メイリオ"/>
-              </a:rPr>
-              <a:t>新規作成・編集・広告配信が停止（以降は管理画面の閲覧のみ）</a:t>
-            </a:r>
-          </a:p>
-        </p:txBody>
-      </p:sp>
-      <p:sp>
-        <p:nvSpPr>
-          <p:cNvPr id="68" name="TextBox 67"/>
-          <p:cNvSpPr txBox="1"/>
-          <p:nvPr/>
-        </p:nvSpPr>
-        <p:spPr>
-          <a:xfrm>
-            <a:off x="6316992" y="3068960"/>
-            <a:ext cx="320040" cy="1371600"/>
-          </a:xfrm>
-          <a:prstGeom prst="rect">
-            <a:avLst/>
-          </a:prstGeom>
-          <a:noFill/>
-        </p:spPr>
-        <p:txBody>
-          <a:bodyPr wrap="none" anchor="ctr">
-            <a:spAutoFit/>
-          </a:bodyPr>
-          <a:lstStyle/>
-          <a:p>
-            <a:pPr algn="ctr"/>
-            <a:r>
-              <a:rPr sz="1600" b="1">
-                <a:solidFill>
-                  <a:srgbClr val="3467B2"/>
-                </a:solidFill>
-                <a:latin typeface="メイリオ"/>
-              </a:rPr>
-              <a:t>▶</a:t>
-            </a:r>
-          </a:p>
-        </p:txBody>
-      </p:sp>
-      <p:sp>
-        <p:nvSpPr>
-          <p:cNvPr id="72" name="Rectangle 71"/>
-          <p:cNvSpPr/>
-          <p:nvPr/>
-        </p:nvSpPr>
-        <p:spPr>
-          <a:xfrm>
-            <a:off x="6637032" y="3068960"/>
-            <a:ext cx="2726422" cy="365760"/>
-          </a:xfrm>
-          <a:prstGeom prst="rect">
-            <a:avLst/>
-          </a:prstGeom>
-          <a:solidFill>
-            <a:srgbClr val="15133D"/>
-          </a:solidFill>
-          <a:ln>
-            <a:noFill/>
-          </a:ln>
-          <a:effectLst/>
-        </p:spPr>
-        <p:style>
-          <a:lnRef idx="1">
-            <a:schemeClr val="accent1"/>
-          </a:lnRef>
-          <a:fillRef idx="3">
-            <a:schemeClr val="accent1"/>
-          </a:fillRef>
-          <a:effectRef idx="2">
-            <a:schemeClr val="accent1"/>
-          </a:effectRef>
-          <a:fontRef idx="minor">
-            <a:schemeClr val="lt1"/>
-          </a:fontRef>
-        </p:style>
-        <p:txBody>
-          <a:bodyPr wrap="square" rIns="45720" rtlCol="0" anchor="ctr"/>
-          <a:lstStyle/>
-          <a:p>
-            <a:pPr algn="ctr"/>
-            <a:r>
-              <a:rPr sz="1300" b="1">
-                <a:solidFill>
-                  <a:srgbClr val="FFFFFF"/>
-                </a:solidFill>
-                <a:latin typeface="メイリオ"/>
-              </a:rPr>
-              <a:t>2027年3月末頃</a:t>
-            </a:r>
-          </a:p>
-        </p:txBody>
-      </p:sp>
-      <p:sp>
-        <p:nvSpPr>
-          <p:cNvPr id="73" name="Rectangle 72"/>
-          <p:cNvSpPr/>
-          <p:nvPr/>
-        </p:nvSpPr>
-        <p:spPr>
-          <a:xfrm>
-            <a:off x="6637032" y="3434720"/>
-            <a:ext cx="2726422" cy="1005840"/>
-          </a:xfrm>
-          <a:prstGeom prst="rect">
-            <a:avLst/>
-          </a:prstGeom>
-          <a:solidFill>
-            <a:srgbClr val="EAF0FA"/>
-          </a:solidFill>
-          <a:ln w="12700">
-            <a:solidFill>
-              <a:srgbClr val="3467B2"/>
-            </a:solidFill>
-          </a:ln>
-          <a:effectLst/>
-        </p:spPr>
-        <p:style>
-          <a:lnRef idx="1">
-            <a:schemeClr val="accent1"/>
-          </a:lnRef>
-          <a:fillRef idx="3">
-            <a:schemeClr val="accent1"/>
-          </a:fillRef>
-          <a:effectRef idx="2">
-            <a:schemeClr val="accent1"/>
-          </a:effectRef>
-          <a:fontRef idx="minor">
-            <a:schemeClr val="lt1"/>
-          </a:fontRef>
-        </p:style>
-        <p:txBody>
-          <a:bodyPr wrap="square" lIns="182880" tIns="54864" rIns="137160" bIns="54864" rtlCol="0" anchor="ctr"/>
-          <a:lstStyle/>
-          <a:p>
-            <a:pPr algn="ctr">
-              <a:lnSpc>
-                <a:spcPct val="110000"/>
-              </a:lnSpc>
-            </a:pPr>
-            <a:r>
-              <a:rPr sz="1200" dirty="0" err="1">
-                <a:solidFill>
-                  <a:srgbClr val="333333"/>
-                </a:solidFill>
-                <a:latin typeface="メイリオ"/>
-              </a:rPr>
-              <a:t>提供終了（レポートも確認不可</a:t>
-            </a:r>
-            <a:r>
-              <a:rPr sz="1200" dirty="0">
-                <a:solidFill>
-                  <a:srgbClr val="333333"/>
-                </a:solidFill>
-                <a:latin typeface="メイリオ"/>
-              </a:rPr>
-              <a:t>）</a:t>
-            </a:r>
-          </a:p>
-        </p:txBody>
-      </p:sp>
-      <p:sp>
-        <p:nvSpPr>
           <p:cNvPr id="74" name="Rounded Rectangle 73"/>
           <p:cNvSpPr/>
           <p:nvPr/>
         </p:nvSpPr>
         <p:spPr>
           <a:xfrm>
-            <a:off x="544108" y="4669160"/>
-            <a:ext cx="4317452" cy="1371600"/>
+            <a:off x="548640" y="5535519"/>
+            <a:ext cx="4315968" cy="865280"/>
           </a:xfrm>
           <a:prstGeom prst="roundRect">
             <a:avLst>
@@ -5380,7 +4961,7 @@
           <a:p>
             <a:pPr algn="l"/>
             <a:r>
-              <a:rPr sz="1900" b="1" dirty="0" err="1">
+              <a:rPr sz="1700" b="1" dirty="0" err="1">
                 <a:solidFill>
                   <a:srgbClr val="15133D"/>
                 </a:solidFill>
@@ -5405,13 +4986,13 @@
               </a:spcBef>
             </a:pPr>
             <a:r>
-              <a:rPr dirty="0">
+              <a:rPr dirty="0" sz="1100">
                 <a:solidFill>
                   <a:srgbClr val="333333"/>
                 </a:solidFill>
                 <a:latin typeface="メイリオ"/>
               </a:rPr>
-              <a:t>コピー・一括登録での作成、画像・動画の追加・編集、再審査の依頼もできない。API経由の作成・編集も10/26に停止。</a:t>
+              <a:t>コピー・一括登録での作成、画像・動画の追加・編集、再審査の依頼も不可。API経由も10/26に停止。</a:t>
             </a:r>
           </a:p>
         </p:txBody>
@@ -5424,8 +5005,8 @@
         </p:nvSpPr>
         <p:spPr>
           <a:xfrm>
-            <a:off x="5044440" y="4669160"/>
-            <a:ext cx="4317452" cy="1371600"/>
+            <a:off x="5047488" y="5535519"/>
+            <a:ext cx="4315968" cy="865280"/>
           </a:xfrm>
           <a:prstGeom prst="roundRect">
             <a:avLst>
@@ -5462,7 +5043,7 @@
           <a:p>
             <a:pPr algn="l"/>
             <a:r>
-              <a:rPr sz="1900" b="1" dirty="0" err="1">
+              <a:rPr sz="1700" b="1" dirty="0" err="1">
                 <a:solidFill>
                   <a:srgbClr val="15133D"/>
                 </a:solidFill>
@@ -5487,17 +5068,41 @@
               </a:spcBef>
             </a:pPr>
             <a:r>
-              <a:rPr dirty="0">
+              <a:rPr dirty="0" sz="1100">
                 <a:solidFill>
                   <a:srgbClr val="333333"/>
                 </a:solidFill>
                 <a:latin typeface="メイリオ"/>
               </a:rPr>
-              <a:t>停止後も費用・明細があとから更新されることがある。クレジットカードの決済が配信終了後になる場合もある。</a:t>
+              <a:t>停止後も費用・明細があとから更新されることがある。カード決済が配信終了後になる場合もある。</a:t>
             </a:r>
           </a:p>
         </p:txBody>
       </p:sp>
+      <p:pic>
+        <p:nvPicPr>
+          <p:cNvPr id="76" name="Picture 75" descr="schedule_nonote.png"/>
+          <p:cNvPicPr>
+            <a:picLocks noChangeAspect="1"/>
+          </p:cNvPicPr>
+          <p:nvPr/>
+        </p:nvPicPr>
+        <p:blipFill>
+          <a:blip r:embed="rId5"/>
+          <a:stretch>
+            <a:fillRect/>
+          </a:stretch>
+        </p:blipFill>
+        <p:spPr>
+          <a:xfrm>
+            <a:off x="1615440" y="3072384"/>
+            <a:ext cx="6675120" cy="2353407"/>
+          </a:xfrm>
+          <a:prstGeom prst="rect">
+            <a:avLst/>
+          </a:prstGeom>
+        </p:spPr>
+      </p:pic>
     </p:spTree>
   </p:cSld>
   <p:clrMapOvr>
@@ -5931,7 +5536,7 @@
                 <a:cs typeface="Meiryo"/>
                 <a:sym typeface="Meiryo"/>
               </a:rPr>
-              <a:t>【LINEヤフー広告】ディスプレイ広告への移行で必要な対応</a:t>
+              <a:t>【LINEヤフー広告】ディスプレイ広告 統合の概要</a:t>
             </a:r>
             <a:endParaRPr sz="1600" b="1">
               <a:solidFill>
@@ -6274,7 +5879,7 @@
                 <a:cs typeface="Meiryo"/>
                 <a:sym typeface="Meiryo"/>
               </a:rPr>
-              <a:t>配信を続けるには「LINEヤフー広告 ディスプレイ広告」への切り替えが必要。</a:t>
+              <a:t>2026年4月、LINE広告とYahoo!広告 ディスプレイ広告が統合され、</a:t>
             </a:r>
             <a:endParaRPr sz="1200" b="1">
               <a:solidFill>
@@ -6306,7 +5911,7 @@
                 <a:cs typeface="Meiryo"/>
                 <a:sym typeface="Meiryo"/>
               </a:rPr>
-              <a:t>アカウントや配信設定は自動では移らず、移行ツールか手動で移す。</a:t>
+              <a:t>「LINEヤフー広告 ディスプレイ広告」の提供が始まった。</a:t>
             </a:r>
             <a:endParaRPr/>
           </a:p>
@@ -6330,7 +5935,7 @@
                 <a:cs typeface="Meiryo"/>
                 <a:sym typeface="Meiryo"/>
               </a:rPr>
-              <a:t>タグ・コンバージョン設定と自動入札の学習データは引き継がれない。</a:t>
+              <a:t>Yahoo!広告は自動で移行済み。LINE広告は自動では移らないため、移行が必要。</a:t>
             </a:r>
             <a:endParaRPr sz="1400" b="1">
               <a:solidFill>
@@ -6866,8 +6471,8 @@
         </p:nvSpPr>
         <p:spPr>
           <a:xfrm>
-            <a:off x="544108" y="3068960"/>
-            <a:ext cx="4317452" cy="1463040"/>
+            <a:off x="548640" y="5399382"/>
+            <a:ext cx="4315968" cy="1001417"/>
           </a:xfrm>
           <a:prstGeom prst="roundRect">
             <a:avLst>
@@ -6904,13 +6509,13 @@
           <a:p>
             <a:pPr algn="l"/>
             <a:r>
-              <a:rPr sz="1900" b="1">
+              <a:rPr sz="1700" b="1">
                 <a:solidFill>
                   <a:srgbClr val="15133D"/>
                 </a:solidFill>
                 <a:latin typeface="メイリオ"/>
               </a:rPr>
-              <a:t>移行ツールで移せるもの</a:t>
+              <a:t>Yahoo!広告は自動で移行済み</a:t>
             </a:r>
           </a:p>
           <a:p>
@@ -6923,13 +6528,13 @@
               </a:spcBef>
             </a:pPr>
             <a:r>
-              <a:rPr sz="1300">
+              <a:rPr sz="1100">
                 <a:solidFill>
                   <a:srgbClr val="333333"/>
                 </a:solidFill>
                 <a:latin typeface="メイリオ"/>
               </a:rPr>
-              <a:t>キャンペーン・広告グループ・広告の設定、画像・動画、オーディエンス。</a:t>
+              <a:t>Yahoo!広告 ディスプレイ広告は、2026年4月の統合で自動的に移行。追加の対応は不要。</a:t>
             </a:r>
           </a:p>
         </p:txBody>
@@ -6942,8 +6547,8 @@
         </p:nvSpPr>
         <p:spPr>
           <a:xfrm>
-            <a:off x="5044440" y="3068960"/>
-            <a:ext cx="4317452" cy="1463040"/>
+            <a:off x="5047488" y="5399382"/>
+            <a:ext cx="4315968" cy="1001417"/>
           </a:xfrm>
           <a:prstGeom prst="roundRect">
             <a:avLst>
@@ -6980,13 +6585,13 @@
           <a:p>
             <a:pPr algn="l"/>
             <a:r>
-              <a:rPr sz="1900" b="1">
+              <a:rPr sz="1700" b="1">
                 <a:solidFill>
                   <a:srgbClr val="15133D"/>
                 </a:solidFill>
                 <a:latin typeface="メイリオ"/>
               </a:rPr>
-              <a:t>移せないもの</a:t>
+              <a:t>LINE広告は自動では移らない</a:t>
             </a:r>
           </a:p>
           <a:p>
@@ -6999,26 +6604,1403 @@
               </a:spcBef>
             </a:pPr>
             <a:r>
-              <a:rPr sz="1300">
+              <a:rPr sz="1100">
                 <a:solidFill>
                   <a:srgbClr val="333333"/>
                 </a:solidFill>
                 <a:latin typeface="メイリオ"/>
               </a:rPr>
-              <a:t>LINE Tagとコンバージョン設定、過去の配信実績・レポート、自動入札の学習データ。</a:t>
+              <a:t>画面や仕様はそのまま引き継がれない。アカウントや配信設定は、移行ツールか手動で移す。</a:t>
             </a:r>
+          </a:p>
+        </p:txBody>
+      </p:sp>
+      <p:pic>
+        <p:nvPicPr>
+          <p:cNvPr id="65" name="Picture 64" descr="image.png"/>
+          <p:cNvPicPr>
+            <a:picLocks noChangeAspect="1"/>
+          </p:cNvPicPr>
+          <p:nvPr/>
+        </p:nvPicPr>
+        <p:blipFill>
+          <a:blip r:embed="rId3"/>
+          <a:stretch>
+            <a:fillRect/>
+          </a:stretch>
+        </p:blipFill>
+        <p:spPr>
+          <a:xfrm>
+            <a:off x="2209800" y="3072384"/>
+            <a:ext cx="5486400" cy="2217270"/>
+          </a:xfrm>
+          <a:prstGeom prst="rect">
+            <a:avLst/>
+          </a:prstGeom>
+        </p:spPr>
+      </p:pic>
+    </p:spTree>
+  </p:cSld>
+  <p:clrMapOvr>
+    <a:masterClrMapping/>
+  </p:clrMapOvr>
+</p:sld>
+</file>
+
+<file path=ppt/slides/slide5.xml><?xml version="1.0" encoding="utf-8"?>
+<p:sld xmlns:a="http://schemas.openxmlformats.org/drawingml/2006/main" xmlns:p="http://schemas.openxmlformats.org/presentationml/2006/main" xmlns:r="http://schemas.openxmlformats.org/officeDocument/2006/relationships">
+  <p:cSld>
+    <p:spTree>
+      <p:nvGrpSpPr>
+        <p:cNvPr id="1" name=""/>
+        <p:cNvGrpSpPr/>
+        <p:nvPr/>
+      </p:nvGrpSpPr>
+      <p:grpSpPr/>
+      <p:sp>
+        <p:nvSpPr>
+          <p:cNvPr id="40" name="Google Shape;40;p3"/>
+          <p:cNvSpPr/>
+          <p:nvPr/>
+        </p:nvSpPr>
+        <p:spPr>
+          <a:xfrm>
+            <a:off x="292801" y="730955"/>
+            <a:ext cx="1296144" cy="435690"/>
+          </a:xfrm>
+          <a:prstGeom prst="rect">
+            <a:avLst/>
+          </a:prstGeom>
+          <a:solidFill>
+            <a:schemeClr val="dk2"/>
+          </a:solidFill>
+          <a:ln w="9525" cap="flat" cmpd="sng">
+            <a:solidFill>
+              <a:srgbClr val="4A7DBA"/>
+            </a:solidFill>
+            <a:prstDash val="solid"/>
+            <a:round/>
+            <a:headEnd type="none" w="sm" len="sm"/>
+            <a:tailEnd type="none" w="sm" len="sm"/>
+          </a:ln>
+        </p:spPr>
+        <p:txBody>
+          <a:bodyPr spcFirstLastPara="1" wrap="square" lIns="91425" tIns="45700" rIns="91425" bIns="45700" anchor="ctr" anchorCtr="0">
+            <a:noAutofit/>
+          </a:bodyPr>
+          <a:lstStyle/>
+          <a:p>
+            <a:pPr marL="0" marR="0" lvl="0" indent="0" algn="ctr" rtl="0">
+              <a:spcBef>
+                <a:spcPts val="0"/>
+              </a:spcBef>
+              <a:spcAft>
+                <a:spcPts val="0"/>
+              </a:spcAft>
+              <a:buNone/>
+            </a:pPr>
+            <a:r>
+              <a:rPr lang="ja-JP" sz="1800" b="0" i="0" u="none" strike="noStrike" cap="none">
+                <a:solidFill>
+                  <a:schemeClr val="lt1"/>
+                </a:solidFill>
+                <a:latin typeface="メイリオ"/>
+                <a:ea typeface="Meiryo"/>
+                <a:cs typeface="Meiryo"/>
+                <a:sym typeface="Meiryo"/>
+              </a:rPr>
+              <a:t>対象業界</a:t>
+            </a:r>
+            <a:endParaRPr/>
           </a:p>
         </p:txBody>
       </p:sp>
       <p:sp>
         <p:nvSpPr>
-          <p:cNvPr id="65" name="Rounded Rectangle 64"/>
+          <p:cNvPr id="41" name="Google Shape;41;p3"/>
           <p:cNvSpPr/>
           <p:nvPr/>
         </p:nvSpPr>
         <p:spPr>
           <a:xfrm>
-            <a:off x="544108" y="4714880"/>
+            <a:off x="7560840" y="730955"/>
+            <a:ext cx="829618" cy="435690"/>
+          </a:xfrm>
+          <a:prstGeom prst="rect">
+            <a:avLst/>
+          </a:prstGeom>
+          <a:solidFill>
+            <a:schemeClr val="bg1"/>
+          </a:solidFill>
+          <a:ln w="9525" cap="flat" cmpd="sng">
+            <a:solidFill>
+              <a:srgbClr val="4F81BD"/>
+            </a:solidFill>
+            <a:prstDash val="sysDash"/>
+            <a:round/>
+            <a:headEnd type="none" w="sm" len="sm"/>
+            <a:tailEnd type="none" w="sm" len="sm"/>
+          </a:ln>
+        </p:spPr>
+        <p:txBody>
+          <a:bodyPr spcFirstLastPara="1" wrap="square" lIns="91425" tIns="45700" rIns="91425" bIns="45700" anchor="ctr" anchorCtr="0">
+            <a:noAutofit/>
+          </a:bodyPr>
+          <a:lstStyle/>
+          <a:p>
+            <a:pPr marL="0" marR="0" lvl="0" indent="0" algn="ctr" rtl="0">
+              <a:spcBef>
+                <a:spcPts val="0"/>
+              </a:spcBef>
+              <a:spcAft>
+                <a:spcPts val="0"/>
+              </a:spcAft>
+              <a:buNone/>
+            </a:pPr>
+            <a:r>
+              <a:rPr lang="ja-JP" sz="1200" b="0" i="0" u="none" strike="noStrike" cap="none">
+                <a:solidFill>
+                  <a:schemeClr val="dk1"/>
+                </a:solidFill>
+                <a:latin typeface="メイリオ"/>
+                <a:ea typeface="Meiryo"/>
+                <a:cs typeface="Meiryo"/>
+                <a:sym typeface="Meiryo"/>
+              </a:rPr>
+              <a:t>その他</a:t>
+            </a:r>
+            <a:endParaRPr sz="1200" b="0" i="0" u="none" strike="noStrike" cap="none">
+              <a:solidFill>
+                <a:schemeClr val="dk1"/>
+              </a:solidFill>
+              <a:latin typeface="Meiryo"/>
+              <a:ea typeface="Meiryo"/>
+              <a:cs typeface="Meiryo"/>
+              <a:sym typeface="Meiryo"/>
+            </a:endParaRPr>
+          </a:p>
+        </p:txBody>
+      </p:sp>
+      <p:sp>
+        <p:nvSpPr>
+          <p:cNvPr id="42" name="Google Shape;42;p3"/>
+          <p:cNvSpPr/>
+          <p:nvPr/>
+        </p:nvSpPr>
+        <p:spPr>
+          <a:xfrm>
+            <a:off x="6679050" y="730955"/>
+            <a:ext cx="829618" cy="435690"/>
+          </a:xfrm>
+          <a:prstGeom prst="rect">
+            <a:avLst/>
+          </a:prstGeom>
+          <a:solidFill>
+            <a:schemeClr val="bg1"/>
+          </a:solidFill>
+          <a:ln w="9525" cap="flat" cmpd="sng">
+            <a:solidFill>
+              <a:srgbClr val="4F81BD"/>
+            </a:solidFill>
+            <a:prstDash val="sysDash"/>
+            <a:round/>
+            <a:headEnd type="none" w="sm" len="sm"/>
+            <a:tailEnd type="none" w="sm" len="sm"/>
+          </a:ln>
+        </p:spPr>
+        <p:txBody>
+          <a:bodyPr spcFirstLastPara="1" wrap="square" lIns="91425" tIns="45700" rIns="91425" bIns="45700" anchor="ctr" anchorCtr="0">
+            <a:noAutofit/>
+          </a:bodyPr>
+          <a:lstStyle/>
+          <a:p>
+            <a:pPr marL="0" marR="0" lvl="0" indent="0" algn="ctr" rtl="0">
+              <a:spcBef>
+                <a:spcPts val="0"/>
+              </a:spcBef>
+              <a:spcAft>
+                <a:spcPts val="0"/>
+              </a:spcAft>
+              <a:buNone/>
+            </a:pPr>
+            <a:r>
+              <a:rPr lang="ja-JP" sz="1000" b="0" i="0" u="none" strike="noStrike" cap="none">
+                <a:solidFill>
+                  <a:schemeClr val="dk1"/>
+                </a:solidFill>
+                <a:latin typeface="メイリオ"/>
+                <a:ea typeface="Meiryo"/>
+                <a:cs typeface="Meiryo"/>
+                <a:sym typeface="Meiryo"/>
+              </a:rPr>
+              <a:t>配信面</a:t>
+            </a:r>
+            <a:endParaRPr sz="1000" b="0" i="0" u="none" strike="noStrike" cap="none">
+              <a:solidFill>
+                <a:schemeClr val="dk1"/>
+              </a:solidFill>
+              <a:latin typeface="Meiryo"/>
+              <a:ea typeface="Meiryo"/>
+              <a:cs typeface="Meiryo"/>
+              <a:sym typeface="Meiryo"/>
+            </a:endParaRPr>
+          </a:p>
+        </p:txBody>
+      </p:sp>
+      <p:sp>
+        <p:nvSpPr>
+          <p:cNvPr id="43" name="Google Shape;43;p3"/>
+          <p:cNvSpPr/>
+          <p:nvPr/>
+        </p:nvSpPr>
+        <p:spPr>
+          <a:xfrm>
+            <a:off x="1594068" y="730955"/>
+            <a:ext cx="2926883" cy="435690"/>
+          </a:xfrm>
+          <a:prstGeom prst="rect">
+            <a:avLst/>
+          </a:prstGeom>
+          <a:noFill/>
+          <a:ln w="9525" cap="flat" cmpd="sng">
+            <a:solidFill>
+              <a:srgbClr val="4A7DBA"/>
+            </a:solidFill>
+            <a:prstDash val="solid"/>
+            <a:round/>
+            <a:headEnd type="none" w="sm" len="sm"/>
+            <a:tailEnd type="none" w="sm" len="sm"/>
+          </a:ln>
+        </p:spPr>
+        <p:txBody>
+          <a:bodyPr spcFirstLastPara="1" wrap="square" lIns="91425" tIns="45700" rIns="91425" bIns="45700" anchor="ctr" anchorCtr="0">
+            <a:noAutofit/>
+          </a:bodyPr>
+          <a:lstStyle/>
+          <a:p>
+            <a:pPr marL="0" marR="0" lvl="0" indent="0" algn="ctr" rtl="0">
+              <a:spcBef>
+                <a:spcPts val="0"/>
+              </a:spcBef>
+              <a:spcAft>
+                <a:spcPts val="0"/>
+              </a:spcAft>
+              <a:buNone/>
+            </a:pPr>
+            <a:r>
+              <a:rPr lang="ja-JP" sz="1300" b="0" i="0" u="none" strike="noStrike" cap="none">
+                <a:solidFill>
+                  <a:schemeClr val="dk1"/>
+                </a:solidFill>
+                <a:latin typeface="メイリオ"/>
+                <a:ea typeface="Meiryo"/>
+                <a:cs typeface="Meiryo"/>
+                <a:sym typeface="Meiryo"/>
+              </a:rPr>
+              <a:t>LINE広告を運用中の広告主</a:t>
+            </a:r>
+            <a:endParaRPr/>
+          </a:p>
+        </p:txBody>
+      </p:sp>
+      <p:sp>
+        <p:nvSpPr>
+          <p:cNvPr id="44" name="Google Shape;44;p3"/>
+          <p:cNvSpPr txBox="1"/>
+          <p:nvPr/>
+        </p:nvSpPr>
+        <p:spPr>
+          <a:xfrm>
+            <a:off x="3296816" y="6597352"/>
+            <a:ext cx="6209091" cy="215444"/>
+          </a:xfrm>
+          <a:prstGeom prst="rect">
+            <a:avLst/>
+          </a:prstGeom>
+          <a:noFill/>
+          <a:ln>
+            <a:noFill/>
+          </a:ln>
+        </p:spPr>
+        <p:txBody>
+          <a:bodyPr spcFirstLastPara="1" wrap="square" lIns="91425" tIns="45700" rIns="91425" bIns="45700" anchor="t" anchorCtr="0">
+            <a:spAutoFit/>
+          </a:bodyPr>
+          <a:lstStyle/>
+          <a:p>
+            <a:pPr marL="0" marR="0" lvl="0" indent="0" algn="l" rtl="0">
+              <a:spcBef>
+                <a:spcPts val="0"/>
+              </a:spcBef>
+              <a:spcAft>
+                <a:spcPts val="0"/>
+              </a:spcAft>
+              <a:buNone/>
+            </a:pPr>
+            <a:r>
+              <a:rPr lang="ja-JP" sz="800" b="0" i="0" u="none" strike="noStrike" cap="none">
+                <a:solidFill>
+                  <a:schemeClr val="lt1"/>
+                </a:solidFill>
+                <a:latin typeface="メイリオ"/>
+                <a:ea typeface="Meiryo"/>
+                <a:cs typeface="Meiryo"/>
+                <a:sym typeface="Meiryo"/>
+              </a:rPr>
+              <a:t>出典：https://www.lycbiz.com/jp/column/line-ads/service-information/migration-guide/</a:t>
+            </a:r>
+            <a:endParaRPr sz="800">
+              <a:solidFill>
+                <a:schemeClr val="lt1"/>
+              </a:solidFill>
+              <a:latin typeface="Meiryo"/>
+              <a:ea typeface="Meiryo"/>
+              <a:cs typeface="Meiryo"/>
+              <a:sym typeface="Meiryo"/>
+            </a:endParaRPr>
+          </a:p>
+        </p:txBody>
+      </p:sp>
+      <p:sp>
+        <p:nvSpPr>
+          <p:cNvPr id="45" name="Google Shape;45;p3"/>
+          <p:cNvSpPr/>
+          <p:nvPr/>
+        </p:nvSpPr>
+        <p:spPr>
+          <a:xfrm>
+            <a:off x="0" y="1234746"/>
+            <a:ext cx="9906000" cy="672259"/>
+          </a:xfrm>
+          <a:prstGeom prst="rect">
+            <a:avLst/>
+          </a:prstGeom>
+          <a:solidFill>
+            <a:srgbClr val="C5D8F1"/>
+          </a:solidFill>
+          <a:ln>
+            <a:noFill/>
+          </a:ln>
+        </p:spPr>
+        <p:txBody>
+          <a:bodyPr spcFirstLastPara="1" wrap="square" lIns="91425" tIns="45700" rIns="91425" bIns="45700" anchor="ctr" anchorCtr="0">
+            <a:noAutofit/>
+          </a:bodyPr>
+          <a:lstStyle/>
+          <a:p>
+            <a:pPr marL="0" marR="0" lvl="0" indent="0" algn="ctr" rtl="0">
+              <a:spcBef>
+                <a:spcPts val="0"/>
+              </a:spcBef>
+              <a:spcAft>
+                <a:spcPts val="0"/>
+              </a:spcAft>
+              <a:buNone/>
+            </a:pPr>
+            <a:r>
+              <a:rPr lang="ja-JP" sz="1600" b="1">
+                <a:solidFill>
+                  <a:srgbClr val="004DE6"/>
+                </a:solidFill>
+                <a:latin typeface="メイリオ"/>
+                <a:ea typeface="Meiryo"/>
+                <a:cs typeface="Meiryo"/>
+                <a:sym typeface="Meiryo"/>
+              </a:rPr>
+              <a:t>　　　　　　</a:t>
+            </a:r>
+            <a:endParaRPr sz="1800" b="1">
+              <a:solidFill>
+                <a:srgbClr val="004DE6"/>
+              </a:solidFill>
+              <a:latin typeface="Meiryo"/>
+              <a:ea typeface="Meiryo"/>
+              <a:cs typeface="Meiryo"/>
+              <a:sym typeface="Meiryo"/>
+            </a:endParaRPr>
+          </a:p>
+        </p:txBody>
+      </p:sp>
+      <p:sp>
+        <p:nvSpPr>
+          <p:cNvPr id="46" name="Google Shape;46;p3"/>
+          <p:cNvSpPr/>
+          <p:nvPr/>
+        </p:nvSpPr>
+        <p:spPr>
+          <a:xfrm>
+            <a:off x="1089832" y="1437370"/>
+            <a:ext cx="7031520" cy="338554"/>
+          </a:xfrm>
+          <a:prstGeom prst="rect">
+            <a:avLst/>
+          </a:prstGeom>
+          <a:noFill/>
+          <a:ln>
+            <a:noFill/>
+          </a:ln>
+        </p:spPr>
+        <p:txBody>
+          <a:bodyPr spcFirstLastPara="1" wrap="square" lIns="91425" tIns="45700" rIns="91425" bIns="45700" anchor="t" anchorCtr="0">
+            <a:spAutoFit/>
+          </a:bodyPr>
+          <a:lstStyle/>
+          <a:p>
+            <a:pPr marL="0" marR="0" lvl="0" indent="0" algn="l" rtl="0">
+              <a:spcBef>
+                <a:spcPts val="0"/>
+              </a:spcBef>
+              <a:spcAft>
+                <a:spcPts val="0"/>
+              </a:spcAft>
+              <a:buNone/>
+            </a:pPr>
+            <a:r>
+              <a:rPr lang="ja-JP" sz="1600" b="1">
+                <a:solidFill>
+                  <a:srgbClr val="004DE6"/>
+                </a:solidFill>
+                <a:latin typeface="メイリオ"/>
+                <a:ea typeface="Meiryo"/>
+                <a:cs typeface="Meiryo"/>
+                <a:sym typeface="Meiryo"/>
+              </a:rPr>
+              <a:t>【LINEヤフー広告】移行の対象と方法</a:t>
+            </a:r>
+            <a:endParaRPr sz="1600" b="1">
+              <a:solidFill>
+                <a:srgbClr val="004DE6"/>
+              </a:solidFill>
+              <a:latin typeface="Meiryo"/>
+              <a:ea typeface="Meiryo"/>
+              <a:cs typeface="Meiryo"/>
+              <a:sym typeface="Meiryo"/>
+            </a:endParaRPr>
+          </a:p>
+        </p:txBody>
+      </p:sp>
+      <p:sp>
+        <p:nvSpPr>
+          <p:cNvPr id="47" name="Google Shape;47;p3"/>
+          <p:cNvSpPr txBox="1"/>
+          <p:nvPr/>
+        </p:nvSpPr>
+        <p:spPr>
+          <a:xfrm>
+            <a:off x="182880" y="88175"/>
+            <a:ext cx="7512385" cy="365091"/>
+          </a:xfrm>
+          <a:prstGeom prst="rect">
+            <a:avLst/>
+          </a:prstGeom>
+          <a:noFill/>
+          <a:ln>
+            <a:noFill/>
+          </a:ln>
+        </p:spPr>
+        <p:txBody>
+          <a:bodyPr spcFirstLastPara="1" wrap="square" lIns="91425" tIns="72000" rIns="91425" bIns="45700" anchor="t" anchorCtr="0">
+            <a:spAutoFit/>
+          </a:bodyPr>
+          <a:lstStyle/>
+          <a:p>
+            <a:pPr marL="0" marR="0" lvl="0" indent="0" algn="l" rtl="0">
+              <a:spcBef>
+                <a:spcPts val="0"/>
+              </a:spcBef>
+              <a:spcAft>
+                <a:spcPts val="0"/>
+              </a:spcAft>
+              <a:buClr>
+                <a:schemeClr val="dk1"/>
+              </a:buClr>
+              <a:buSzPts val="1600"/>
+              <a:buFont typeface="Arial"/>
+              <a:buNone/>
+            </a:pPr>
+            <a:r>
+              <a:rPr lang="ja-JP" sz="1600" b="0" u="none">
+                <a:solidFill>
+                  <a:schemeClr val="dk1"/>
+                </a:solidFill>
+                <a:latin typeface="メイリオ"/>
+                <a:ea typeface="Meiryo"/>
+                <a:cs typeface="Meiryo"/>
+                <a:sym typeface="Meiryo"/>
+              </a:rPr>
+              <a:t>    今後のアップデート情報</a:t>
+            </a:r>
+            <a:endParaRPr sz="1600" b="0" u="none">
+              <a:solidFill>
+                <a:schemeClr val="dk1"/>
+              </a:solidFill>
+              <a:latin typeface="Meiryo"/>
+              <a:ea typeface="Meiryo"/>
+              <a:cs typeface="Meiryo"/>
+              <a:sym typeface="Meiryo"/>
+            </a:endParaRPr>
+          </a:p>
+        </p:txBody>
+      </p:sp>
+      <p:sp>
+        <p:nvSpPr>
+          <p:cNvPr id="48" name="Google Shape;48;p3"/>
+          <p:cNvSpPr/>
+          <p:nvPr/>
+        </p:nvSpPr>
+        <p:spPr>
+          <a:xfrm>
+            <a:off x="5797260" y="730955"/>
+            <a:ext cx="829618" cy="435690"/>
+          </a:xfrm>
+          <a:prstGeom prst="rect">
+            <a:avLst/>
+          </a:prstGeom>
+          <a:solidFill>
+            <a:schemeClr val="tx2"/>
+          </a:solidFill>
+          <a:ln w="9525" cap="flat" cmpd="sng">
+            <a:solidFill>
+              <a:srgbClr val="4F81BD"/>
+            </a:solidFill>
+            <a:prstDash val="solid"/>
+            <a:round/>
+            <a:headEnd type="none" w="sm" len="sm"/>
+            <a:tailEnd type="none" w="sm" len="sm"/>
+          </a:ln>
+        </p:spPr>
+        <p:txBody>
+          <a:bodyPr spcFirstLastPara="1" wrap="square" lIns="91425" tIns="45700" rIns="91425" bIns="45700" anchor="ctr" anchorCtr="0">
+            <a:noAutofit/>
+          </a:bodyPr>
+          <a:lstStyle/>
+          <a:p>
+            <a:pPr marL="0" marR="0" lvl="0" indent="0" algn="ctr" rtl="0">
+              <a:spcBef>
+                <a:spcPts val="0"/>
+              </a:spcBef>
+              <a:spcAft>
+                <a:spcPts val="0"/>
+              </a:spcAft>
+              <a:buClr>
+                <a:schemeClr val="dk1"/>
+              </a:buClr>
+              <a:buSzPts val="1000"/>
+              <a:buFont typeface="Meiryo"/>
+              <a:buNone/>
+            </a:pPr>
+            <a:r>
+              <a:rPr lang="ja-JP" sz="900">
+                <a:solidFill>
+                  <a:schemeClr val="dk1"/>
+                </a:solidFill>
+                <a:latin typeface="メイリオ"/>
+                <a:ea typeface="Meiryo"/>
+                <a:cs typeface="Meiryo"/>
+                <a:sym typeface="Meiryo"/>
+              </a:rPr>
+              <a:t>LINEヤフー</a:t>
+            </a:r>
+            <a:endParaRPr sz="1000">
+              <a:solidFill>
+                <a:schemeClr val="dk1"/>
+              </a:solidFill>
+              <a:latin typeface="Meiryo"/>
+              <a:ea typeface="Meiryo"/>
+              <a:cs typeface="Meiryo"/>
+              <a:sym typeface="Meiryo"/>
+            </a:endParaRPr>
+          </a:p>
+          <a:p>
+            <a:pPr marL="0" marR="0" lvl="0" indent="0" algn="ctr" rtl="0">
+              <a:spcBef>
+                <a:spcPts val="0"/>
+              </a:spcBef>
+              <a:spcAft>
+                <a:spcPts val="0"/>
+              </a:spcAft>
+              <a:buClr>
+                <a:schemeClr val="dk1"/>
+              </a:buClr>
+              <a:buSzPts val="1000"/>
+              <a:buFont typeface="Meiryo"/>
+              <a:buNone/>
+            </a:pPr>
+            <a:r>
+              <a:rPr lang="ja-JP" sz="900">
+                <a:solidFill>
+                  <a:schemeClr val="dk1"/>
+                </a:solidFill>
+                <a:latin typeface="メイリオ"/>
+                <a:ea typeface="Meiryo"/>
+                <a:cs typeface="Meiryo"/>
+                <a:sym typeface="Meiryo"/>
+              </a:rPr>
+              <a:t>広告</a:t>
+            </a:r>
+            <a:endParaRPr sz="1000">
+              <a:solidFill>
+                <a:schemeClr val="dk1"/>
+              </a:solidFill>
+              <a:latin typeface="Meiryo"/>
+              <a:ea typeface="Meiryo"/>
+              <a:cs typeface="Meiryo"/>
+              <a:sym typeface="Meiryo"/>
+            </a:endParaRPr>
+          </a:p>
+        </p:txBody>
+      </p:sp>
+      <p:sp>
+        <p:nvSpPr>
+          <p:cNvPr id="49" name="Google Shape;49;p3"/>
+          <p:cNvSpPr/>
+          <p:nvPr/>
+        </p:nvSpPr>
+        <p:spPr>
+          <a:xfrm>
+            <a:off x="4915470" y="730955"/>
+            <a:ext cx="829618" cy="435690"/>
+          </a:xfrm>
+          <a:prstGeom prst="rect">
+            <a:avLst/>
+          </a:prstGeom>
+          <a:solidFill>
+            <a:schemeClr val="bg1"/>
+          </a:solidFill>
+          <a:ln w="9525" cap="flat" cmpd="sng">
+            <a:solidFill>
+              <a:srgbClr val="4F81BD"/>
+            </a:solidFill>
+            <a:prstDash val="sysDash"/>
+            <a:round/>
+            <a:headEnd type="none" w="sm" len="sm"/>
+            <a:tailEnd type="none" w="sm" len="sm"/>
+          </a:ln>
+        </p:spPr>
+        <p:txBody>
+          <a:bodyPr spcFirstLastPara="1" wrap="square" lIns="91425" tIns="45700" rIns="91425" bIns="45700" anchor="ctr" anchorCtr="0">
+            <a:noAutofit/>
+          </a:bodyPr>
+          <a:lstStyle/>
+          <a:p>
+            <a:pPr marL="0" marR="0" lvl="0" indent="0" algn="ctr" rtl="0">
+              <a:spcBef>
+                <a:spcPts val="0"/>
+              </a:spcBef>
+              <a:spcAft>
+                <a:spcPts val="0"/>
+              </a:spcAft>
+              <a:buNone/>
+            </a:pPr>
+            <a:r>
+              <a:rPr lang="ja-JP" sz="1000">
+                <a:solidFill>
+                  <a:schemeClr val="dk1"/>
+                </a:solidFill>
+                <a:latin typeface="メイリオ"/>
+                <a:ea typeface="Meiryo"/>
+                <a:cs typeface="Meiryo"/>
+                <a:sym typeface="Meiryo"/>
+              </a:rPr>
+              <a:t>LINE広告</a:t>
+            </a:r>
+            <a:endParaRPr sz="1000">
+              <a:solidFill>
+                <a:schemeClr val="dk1"/>
+              </a:solidFill>
+              <a:latin typeface="Meiryo"/>
+              <a:ea typeface="Meiryo"/>
+              <a:cs typeface="Meiryo"/>
+              <a:sym typeface="Meiryo"/>
+            </a:endParaRPr>
+          </a:p>
+        </p:txBody>
+      </p:sp>
+      <p:sp>
+        <p:nvSpPr>
+          <p:cNvPr id="50" name="Google Shape;50;p3"/>
+          <p:cNvSpPr/>
+          <p:nvPr/>
+        </p:nvSpPr>
+        <p:spPr>
+          <a:xfrm>
+            <a:off x="0" y="1890267"/>
+            <a:ext cx="9906000" cy="733579"/>
+          </a:xfrm>
+          <a:prstGeom prst="rect">
+            <a:avLst/>
+          </a:prstGeom>
+          <a:solidFill>
+            <a:srgbClr val="F2F2F2"/>
+          </a:solidFill>
+          <a:ln>
+            <a:noFill/>
+          </a:ln>
+        </p:spPr>
+        <p:txBody>
+          <a:bodyPr spcFirstLastPara="1" wrap="square" lIns="91425" tIns="45700" rIns="91425" bIns="45700" anchor="ctr" anchorCtr="0">
+            <a:noAutofit/>
+          </a:bodyPr>
+          <a:lstStyle/>
+          <a:p>
+            <a:pPr marL="0" marR="0" lvl="0" indent="0" algn="ctr" rtl="0">
+              <a:spcBef>
+                <a:spcPts val="0"/>
+              </a:spcBef>
+              <a:spcAft>
+                <a:spcPts val="0"/>
+              </a:spcAft>
+              <a:buNone/>
+            </a:pPr>
+            <a:endParaRPr sz="1200">
+              <a:solidFill>
+                <a:schemeClr val="dk1"/>
+              </a:solidFill>
+              <a:latin typeface="Meiryo"/>
+              <a:ea typeface="Meiryo"/>
+              <a:cs typeface="Meiryo"/>
+              <a:sym typeface="Meiryo"/>
+            </a:endParaRPr>
+          </a:p>
+        </p:txBody>
+      </p:sp>
+      <p:sp>
+        <p:nvSpPr>
+          <p:cNvPr id="51" name="Google Shape;51;p3"/>
+          <p:cNvSpPr/>
+          <p:nvPr/>
+        </p:nvSpPr>
+        <p:spPr>
+          <a:xfrm>
+            <a:off x="544108" y="1961282"/>
+            <a:ext cx="8817783" cy="646331"/>
+          </a:xfrm>
+          <a:prstGeom prst="rect">
+            <a:avLst/>
+          </a:prstGeom>
+          <a:noFill/>
+          <a:ln>
+            <a:noFill/>
+          </a:ln>
+        </p:spPr>
+        <p:txBody>
+          <a:bodyPr spcFirstLastPara="1" wrap="square" lIns="91425" tIns="45700" rIns="91425" bIns="45700" anchor="t" anchorCtr="0">
+            <a:spAutoFit/>
+          </a:bodyPr>
+          <a:lstStyle/>
+          <a:p>
+            <a:pPr marL="0" marR="0" lvl="0" indent="0" algn="ctr" rtl="0">
+              <a:spcBef>
+                <a:spcPts val="0"/>
+              </a:spcBef>
+              <a:spcAft>
+                <a:spcPts val="0"/>
+              </a:spcAft>
+              <a:buNone/>
+            </a:pPr>
+            <a:r>
+              <a:rPr lang="ja-JP" sz="1200" b="1">
+                <a:solidFill>
+                  <a:schemeClr val="dk1"/>
+                </a:solidFill>
+                <a:latin typeface="メイリオ"/>
+                <a:ea typeface="Meiryo"/>
+                <a:cs typeface="Meiryo"/>
+                <a:sym typeface="Meiryo"/>
+              </a:rPr>
+              <a:t>LINE広告を使っている広告主・代理店は、LINEヤフー広告への移行が必要。</a:t>
+            </a:r>
+            <a:endParaRPr sz="1200" b="1">
+              <a:solidFill>
+                <a:schemeClr val="dk1"/>
+              </a:solidFill>
+              <a:latin typeface="Meiryo"/>
+              <a:ea typeface="Meiryo"/>
+              <a:cs typeface="Meiryo"/>
+              <a:sym typeface="Meiryo"/>
+            </a:endParaRPr>
+          </a:p>
+          <a:p>
+            <a:pPr marL="0" marR="0" lvl="0" indent="0" algn="ctr" rtl="0">
+              <a:spcBef>
+                <a:spcPts val="0"/>
+              </a:spcBef>
+              <a:spcAft>
+                <a:spcPts val="0"/>
+              </a:spcAft>
+              <a:buNone/>
+            </a:pPr>
+            <a:r>
+              <a:rPr lang="ja-JP" sz="1200" b="1">
+                <a:solidFill>
+                  <a:schemeClr val="dk1"/>
+                </a:solidFill>
+                <a:latin typeface="メイリオ"/>
+                <a:ea typeface="Meiryo"/>
+                <a:cs typeface="Meiryo"/>
+                <a:sym typeface="Meiryo"/>
+              </a:rPr>
+              <a:t>移行の方法は、移行ツールを使う方法と手動の2つ。</a:t>
+            </a:r>
+            <a:endParaRPr/>
+          </a:p>
+          <a:p>
+            <a:pPr marL="0" marR="0" lvl="0" indent="0" algn="ctr" rtl="0">
+              <a:spcBef>
+                <a:spcPts val="0"/>
+              </a:spcBef>
+              <a:spcAft>
+                <a:spcPts val="0"/>
+              </a:spcAft>
+              <a:buNone/>
+            </a:pPr>
+            <a:r>
+              <a:rPr lang="ja-JP" sz="1200" b="1">
+                <a:solidFill>
+                  <a:schemeClr val="dk1"/>
+                </a:solidFill>
+                <a:latin typeface="メイリオ"/>
+                <a:ea typeface="Meiryo"/>
+                <a:cs typeface="Meiryo"/>
+                <a:sym typeface="Meiryo"/>
+              </a:rPr>
+              <a:t>配信実績とオーディエンスの蓄積で最適化されるため、早めの移行が推奨されている。</a:t>
+            </a:r>
+            <a:endParaRPr sz="1400" b="1">
+              <a:solidFill>
+                <a:schemeClr val="dk1"/>
+              </a:solidFill>
+              <a:latin typeface="Meiryo"/>
+              <a:ea typeface="Meiryo"/>
+              <a:cs typeface="Meiryo"/>
+              <a:sym typeface="Meiryo"/>
+            </a:endParaRPr>
+          </a:p>
+        </p:txBody>
+      </p:sp>
+      <p:sp>
+        <p:nvSpPr>
+          <p:cNvPr id="52" name="Google Shape;52;p3"/>
+          <p:cNvSpPr/>
+          <p:nvPr/>
+        </p:nvSpPr>
+        <p:spPr>
+          <a:xfrm>
+            <a:off x="351381" y="2714173"/>
+            <a:ext cx="5200000" cy="338554"/>
+          </a:xfrm>
+          <a:prstGeom prst="rect">
+            <a:avLst/>
+          </a:prstGeom>
+          <a:noFill/>
+          <a:ln>
+            <a:noFill/>
+          </a:ln>
+        </p:spPr>
+        <p:txBody>
+          <a:bodyPr spcFirstLastPara="1" wrap="square" lIns="91425" tIns="45700" rIns="91425" bIns="45700" anchor="t" anchorCtr="0">
+            <a:noAutofit/>
+          </a:bodyPr>
+          <a:lstStyle/>
+          <a:p>
+            <a:pPr marL="0" marR="0" lvl="0" indent="0" algn="l" rtl="0">
+              <a:spcBef>
+                <a:spcPts val="0"/>
+              </a:spcBef>
+              <a:spcAft>
+                <a:spcPts val="0"/>
+              </a:spcAft>
+              <a:buNone/>
+            </a:pPr>
+            <a:r>
+              <a:rPr lang="ja-JP" sz="1400" b="1">
+                <a:solidFill>
+                  <a:srgbClr val="15133D"/>
+                </a:solidFill>
+                <a:latin typeface="メイリオ"/>
+                <a:ea typeface="Meiryo"/>
+                <a:cs typeface="Meiryo"/>
+                <a:sym typeface="Meiryo"/>
+              </a:rPr>
+              <a:t>■ 詳細</a:t>
+            </a:r>
+            <a:endParaRPr/>
+          </a:p>
+        </p:txBody>
+      </p:sp>
+      <p:grpSp>
+        <p:nvGrpSpPr>
+          <p:cNvPr id="53" name="Google Shape;53;p3"/>
+          <p:cNvGrpSpPr/>
+          <p:nvPr/>
+        </p:nvGrpSpPr>
+        <p:grpSpPr>
+          <a:xfrm>
+            <a:off x="8473303" y="730955"/>
+            <a:ext cx="1376241" cy="1131930"/>
+            <a:chOff x="0" y="0"/>
+            <a:chExt cx="1376241" cy="1131930"/>
+          </a:xfrm>
+        </p:grpSpPr>
+        <p:sp>
+          <p:nvSpPr>
+            <p:cNvPr id="54" name="Google Shape;54;p3"/>
+            <p:cNvSpPr/>
+            <p:nvPr/>
+          </p:nvSpPr>
+          <p:spPr>
+            <a:xfrm rot="10800000">
+              <a:off x="0" y="0"/>
+              <a:ext cx="1376241" cy="282982"/>
+            </a:xfrm>
+            <a:prstGeom prst="trapezoid">
+              <a:avLst>
+                <a:gd name="adj" fmla="val 60792"/>
+              </a:avLst>
+            </a:prstGeom>
+            <a:solidFill>
+              <a:srgbClr val="EAEDF5"/>
+            </a:solidFill>
+            <a:ln w="25400" cap="flat" cmpd="sng">
+              <a:solidFill>
+                <a:schemeClr val="dk2"/>
+              </a:solidFill>
+              <a:prstDash val="solid"/>
+              <a:round/>
+              <a:headEnd type="none" w="sm" len="sm"/>
+              <a:tailEnd type="none" w="sm" len="sm"/>
+            </a:ln>
+          </p:spPr>
+          <p:txBody>
+            <a:bodyPr spcFirstLastPara="1" wrap="square" lIns="91425" tIns="91425" rIns="91425" bIns="91425" anchor="ctr" anchorCtr="0">
+              <a:noAutofit/>
+            </a:bodyPr>
+            <a:lstStyle/>
+            <a:p>
+              <a:pPr marL="0" lvl="0" indent="0" algn="l" rtl="0">
+                <a:spcBef>
+                  <a:spcPts val="0"/>
+                </a:spcBef>
+                <a:spcAft>
+                  <a:spcPts val="0"/>
+                </a:spcAft>
+                <a:buNone/>
+              </a:pPr>
+              <a:endParaRPr/>
+            </a:p>
+          </p:txBody>
+        </p:sp>
+        <p:sp>
+          <p:nvSpPr>
+            <p:cNvPr id="55" name="Google Shape;55;p3"/>
+            <p:cNvSpPr txBox="1"/>
+            <p:nvPr/>
+          </p:nvSpPr>
+          <p:spPr>
+            <a:xfrm>
+              <a:off x="240842" y="0"/>
+              <a:ext cx="894556" cy="282982"/>
+            </a:xfrm>
+            <a:prstGeom prst="rect">
+              <a:avLst/>
+            </a:prstGeom>
+            <a:noFill/>
+            <a:ln>
+              <a:noFill/>
+            </a:ln>
+          </p:spPr>
+          <p:txBody>
+            <a:bodyPr spcFirstLastPara="1" wrap="square" lIns="10150" tIns="10150" rIns="10150" bIns="10150" anchor="ctr" anchorCtr="0">
+              <a:noAutofit/>
+            </a:bodyPr>
+            <a:lstStyle/>
+            <a:p>
+              <a:pPr marL="0" marR="0" lvl="0" indent="0" algn="ctr" rtl="0">
+                <a:lnSpc>
+                  <a:spcPct val="90000"/>
+                </a:lnSpc>
+                <a:spcBef>
+                  <a:spcPts val="0"/>
+                </a:spcBef>
+                <a:spcAft>
+                  <a:spcPts val="0"/>
+                </a:spcAft>
+                <a:buClr>
+                  <a:srgbClr val="262626"/>
+                </a:buClr>
+                <a:buSzPts val="800"/>
+                <a:buFont typeface="Arial"/>
+                <a:buNone/>
+              </a:pPr>
+              <a:r>
+                <a:rPr lang="ja-JP" sz="800" b="1">
+                  <a:solidFill>
+                    <a:srgbClr val="262626"/>
+                  </a:solidFill>
+                  <a:latin typeface="Arial"/>
+                  <a:ea typeface="Arial"/>
+                  <a:cs typeface="Arial"/>
+                  <a:sym typeface="Arial"/>
+                </a:rPr>
+                <a:t>認知</a:t>
+              </a:r>
+              <a:endParaRPr/>
+            </a:p>
+          </p:txBody>
+        </p:sp>
+        <p:sp>
+          <p:nvSpPr>
+            <p:cNvPr id="56" name="Google Shape;56;p3"/>
+            <p:cNvSpPr/>
+            <p:nvPr/>
+          </p:nvSpPr>
+          <p:spPr>
+            <a:xfrm rot="10800000">
+              <a:off x="172030" y="282982"/>
+              <a:ext cx="1032180" cy="282982"/>
+            </a:xfrm>
+            <a:prstGeom prst="trapezoid">
+              <a:avLst>
+                <a:gd name="adj" fmla="val 60792"/>
+              </a:avLst>
+            </a:prstGeom>
+            <a:solidFill>
+              <a:schemeClr val="lt1"/>
+            </a:solidFill>
+            <a:ln w="25400" cap="flat" cmpd="sng">
+              <a:solidFill>
+                <a:schemeClr val="dk2"/>
+              </a:solidFill>
+              <a:prstDash val="solid"/>
+              <a:round/>
+              <a:headEnd type="none" w="sm" len="sm"/>
+              <a:tailEnd type="none" w="sm" len="sm"/>
+            </a:ln>
+          </p:spPr>
+          <p:txBody>
+            <a:bodyPr spcFirstLastPara="1" wrap="square" lIns="91425" tIns="91425" rIns="91425" bIns="91425" anchor="ctr" anchorCtr="0">
+              <a:noAutofit/>
+            </a:bodyPr>
+            <a:lstStyle/>
+            <a:p>
+              <a:pPr marL="0" lvl="0" indent="0" algn="l" rtl="0">
+                <a:spcBef>
+                  <a:spcPts val="0"/>
+                </a:spcBef>
+                <a:spcAft>
+                  <a:spcPts val="0"/>
+                </a:spcAft>
+                <a:buNone/>
+              </a:pPr>
+              <a:endParaRPr/>
+            </a:p>
+          </p:txBody>
+        </p:sp>
+        <p:sp>
+          <p:nvSpPr>
+            <p:cNvPr id="57" name="Google Shape;57;p3"/>
+            <p:cNvSpPr txBox="1"/>
+            <p:nvPr/>
+          </p:nvSpPr>
+          <p:spPr>
+            <a:xfrm>
+              <a:off x="352661" y="282982"/>
+              <a:ext cx="670917" cy="282982"/>
+            </a:xfrm>
+            <a:prstGeom prst="rect">
+              <a:avLst/>
+            </a:prstGeom>
+            <a:noFill/>
+            <a:ln>
+              <a:noFill/>
+            </a:ln>
+          </p:spPr>
+          <p:txBody>
+            <a:bodyPr spcFirstLastPara="1" wrap="square" lIns="10150" tIns="10150" rIns="10150" bIns="10150" anchor="ctr" anchorCtr="0">
+              <a:noAutofit/>
+            </a:bodyPr>
+            <a:lstStyle/>
+            <a:p>
+              <a:pPr marL="0" marR="0" lvl="0" indent="0" algn="ctr" rtl="0">
+                <a:lnSpc>
+                  <a:spcPct val="90000"/>
+                </a:lnSpc>
+                <a:spcBef>
+                  <a:spcPts val="0"/>
+                </a:spcBef>
+                <a:spcAft>
+                  <a:spcPts val="0"/>
+                </a:spcAft>
+                <a:buClr>
+                  <a:srgbClr val="262626"/>
+                </a:buClr>
+                <a:buSzPts val="800"/>
+                <a:buFont typeface="Arial"/>
+                <a:buNone/>
+              </a:pPr>
+              <a:r>
+                <a:rPr lang="ja-JP" sz="800" b="1">
+                  <a:solidFill>
+                    <a:srgbClr val="262626"/>
+                  </a:solidFill>
+                  <a:latin typeface="Arial"/>
+                  <a:ea typeface="Arial"/>
+                  <a:cs typeface="Arial"/>
+                  <a:sym typeface="Arial"/>
+                </a:rPr>
+                <a:t>検討</a:t>
+              </a:r>
+              <a:endParaRPr/>
+            </a:p>
+          </p:txBody>
+        </p:sp>
+        <p:sp>
+          <p:nvSpPr>
+            <p:cNvPr id="58" name="Google Shape;58;p3"/>
+            <p:cNvSpPr/>
+            <p:nvPr/>
+          </p:nvSpPr>
+          <p:spPr>
+            <a:xfrm rot="10800000">
+              <a:off x="344060" y="565965"/>
+              <a:ext cx="688120" cy="282982"/>
+            </a:xfrm>
+            <a:prstGeom prst="trapezoid">
+              <a:avLst>
+                <a:gd name="adj" fmla="val 60792"/>
+              </a:avLst>
+            </a:prstGeom>
+            <a:solidFill>
+              <a:schemeClr val="lt1"/>
+            </a:solidFill>
+            <a:ln w="25400" cap="flat" cmpd="sng">
+              <a:solidFill>
+                <a:schemeClr val="dk2"/>
+              </a:solidFill>
+              <a:prstDash val="solid"/>
+              <a:round/>
+              <a:headEnd type="none" w="sm" len="sm"/>
+              <a:tailEnd type="none" w="sm" len="sm"/>
+            </a:ln>
+          </p:spPr>
+          <p:txBody>
+            <a:bodyPr spcFirstLastPara="1" wrap="square" lIns="91425" tIns="91425" rIns="91425" bIns="91425" anchor="ctr" anchorCtr="0">
+              <a:noAutofit/>
+            </a:bodyPr>
+            <a:lstStyle/>
+            <a:p>
+              <a:pPr marL="0" lvl="0" indent="0" algn="l" rtl="0">
+                <a:spcBef>
+                  <a:spcPts val="0"/>
+                </a:spcBef>
+                <a:spcAft>
+                  <a:spcPts val="0"/>
+                </a:spcAft>
+                <a:buNone/>
+              </a:pPr>
+              <a:endParaRPr/>
+            </a:p>
+          </p:txBody>
+        </p:sp>
+        <p:sp>
+          <p:nvSpPr>
+            <p:cNvPr id="59" name="Google Shape;59;p3"/>
+            <p:cNvSpPr txBox="1"/>
+            <p:nvPr/>
+          </p:nvSpPr>
+          <p:spPr>
+            <a:xfrm>
+              <a:off x="464481" y="565965"/>
+              <a:ext cx="447278" cy="282982"/>
+            </a:xfrm>
+            <a:prstGeom prst="rect">
+              <a:avLst/>
+            </a:prstGeom>
+            <a:noFill/>
+            <a:ln>
+              <a:noFill/>
+            </a:ln>
+          </p:spPr>
+          <p:txBody>
+            <a:bodyPr spcFirstLastPara="1" wrap="square" lIns="10150" tIns="10150" rIns="10150" bIns="10150" anchor="ctr" anchorCtr="0">
+              <a:noAutofit/>
+            </a:bodyPr>
+            <a:lstStyle/>
+            <a:p>
+              <a:pPr marL="0" marR="0" lvl="0" indent="0" algn="ctr" rtl="0">
+                <a:lnSpc>
+                  <a:spcPct val="90000"/>
+                </a:lnSpc>
+                <a:spcBef>
+                  <a:spcPts val="0"/>
+                </a:spcBef>
+                <a:spcAft>
+                  <a:spcPts val="0"/>
+                </a:spcAft>
+                <a:buClr>
+                  <a:srgbClr val="262626"/>
+                </a:buClr>
+                <a:buSzPts val="800"/>
+                <a:buFont typeface="Arial"/>
+                <a:buNone/>
+              </a:pPr>
+              <a:r>
+                <a:rPr lang="ja-JP" sz="800" b="1">
+                  <a:solidFill>
+                    <a:srgbClr val="262626"/>
+                  </a:solidFill>
+                  <a:latin typeface="Arial"/>
+                  <a:ea typeface="Arial"/>
+                  <a:cs typeface="Arial"/>
+                  <a:sym typeface="Arial"/>
+                </a:rPr>
+                <a:t>獲得</a:t>
+              </a:r>
+              <a:endParaRPr/>
+            </a:p>
+          </p:txBody>
+        </p:sp>
+        <p:sp>
+          <p:nvSpPr>
+            <p:cNvPr id="60" name="Google Shape;60;p3"/>
+            <p:cNvSpPr/>
+            <p:nvPr/>
+          </p:nvSpPr>
+          <p:spPr>
+            <a:xfrm rot="10800000">
+              <a:off x="516090" y="848948"/>
+              <a:ext cx="344060" cy="282982"/>
+            </a:xfrm>
+            <a:prstGeom prst="trapezoid">
+              <a:avLst>
+                <a:gd name="adj" fmla="val 60792"/>
+              </a:avLst>
+            </a:prstGeom>
+            <a:noFill/>
+            <a:ln w="25400" cap="flat" cmpd="sng">
+              <a:solidFill>
+                <a:schemeClr val="dk2"/>
+              </a:solidFill>
+              <a:prstDash val="solid"/>
+              <a:round/>
+              <a:headEnd type="none" w="sm" len="sm"/>
+              <a:tailEnd type="none" w="sm" len="sm"/>
+            </a:ln>
+          </p:spPr>
+          <p:txBody>
+            <a:bodyPr spcFirstLastPara="1" wrap="square" lIns="91425" tIns="91425" rIns="91425" bIns="91425" anchor="ctr" anchorCtr="0">
+              <a:noAutofit/>
+            </a:bodyPr>
+            <a:lstStyle/>
+            <a:p>
+              <a:pPr marL="0" lvl="0" indent="0" algn="l" rtl="0">
+                <a:spcBef>
+                  <a:spcPts val="0"/>
+                </a:spcBef>
+                <a:spcAft>
+                  <a:spcPts val="0"/>
+                </a:spcAft>
+                <a:buNone/>
+              </a:pPr>
+              <a:endParaRPr/>
+            </a:p>
+          </p:txBody>
+        </p:sp>
+        <p:sp>
+          <p:nvSpPr>
+            <p:cNvPr id="61" name="Google Shape;61;p3"/>
+            <p:cNvSpPr txBox="1"/>
+            <p:nvPr/>
+          </p:nvSpPr>
+          <p:spPr>
+            <a:xfrm>
+              <a:off x="516090" y="848948"/>
+              <a:ext cx="344060" cy="282982"/>
+            </a:xfrm>
+            <a:prstGeom prst="rect">
+              <a:avLst/>
+            </a:prstGeom>
+            <a:noFill/>
+            <a:ln>
+              <a:noFill/>
+            </a:ln>
+          </p:spPr>
+          <p:txBody>
+            <a:bodyPr spcFirstLastPara="1" wrap="square" lIns="10150" tIns="10150" rIns="10150" bIns="10150" anchor="ctr" anchorCtr="0">
+              <a:noAutofit/>
+            </a:bodyPr>
+            <a:lstStyle/>
+            <a:p>
+              <a:pPr marL="0" marR="0" lvl="0" indent="0" algn="ctr" rtl="0">
+                <a:lnSpc>
+                  <a:spcPct val="90000"/>
+                </a:lnSpc>
+                <a:spcBef>
+                  <a:spcPts val="0"/>
+                </a:spcBef>
+                <a:spcAft>
+                  <a:spcPts val="0"/>
+                </a:spcAft>
+                <a:buClr>
+                  <a:srgbClr val="262626"/>
+                </a:buClr>
+                <a:buSzPts val="800"/>
+                <a:buFont typeface="Arial"/>
+                <a:buNone/>
+              </a:pPr>
+              <a:r>
+                <a:rPr lang="ja-JP" sz="800" b="1">
+                  <a:solidFill>
+                    <a:srgbClr val="262626"/>
+                  </a:solidFill>
+                  <a:latin typeface="Arial"/>
+                  <a:ea typeface="Arial"/>
+                  <a:cs typeface="Arial"/>
+                  <a:sym typeface="Arial"/>
+                </a:rPr>
+                <a:t>伸長</a:t>
+              </a:r>
+              <a:endParaRPr/>
+            </a:p>
+          </p:txBody>
+        </p:sp>
+      </p:grpSp>
+      <p:pic>
+        <p:nvPicPr>
+          <p:cNvPr id="62" name="Google Shape;62;p3" descr="LINE公式アカウントのロゴの使用方法とは？種類やダウンロード方法、利用時の注意点を紹介 | Mico（ミコ）"/>
+          <p:cNvPicPr preferRelativeResize="0"/>
+          <p:nvPr/>
+        </p:nvPicPr>
+        <p:blipFill rotWithShape="1">
+          <a:blip r:embed="rId2">
+            <a:alphaModFix/>
+          </a:blip>
+          <a:srcRect/>
+          <a:stretch/>
+        </p:blipFill>
+        <p:spPr>
+          <a:xfrm>
+            <a:off x="351381" y="1234746"/>
+            <a:ext cx="656177" cy="655521"/>
+          </a:xfrm>
+          <a:prstGeom prst="rect">
+            <a:avLst/>
+          </a:prstGeom>
+          <a:noFill/>
+          <a:ln>
+            <a:noFill/>
+          </a:ln>
+        </p:spPr>
+      </p:pic>
+      <p:sp>
+        <p:nvSpPr>
+          <p:cNvPr id="63" name="Rounded Rectangle 62"/>
+          <p:cNvSpPr/>
+          <p:nvPr/>
+        </p:nvSpPr>
+        <p:spPr>
+          <a:xfrm>
+            <a:off x="544108" y="3068960"/>
             <a:ext cx="4317452" cy="1463040"/>
           </a:xfrm>
           <a:prstGeom prst="roundRect">
@@ -7062,7 +8044,7 @@
                 </a:solidFill>
                 <a:latin typeface="メイリオ"/>
               </a:rPr>
-              <a:t>移行後にやること</a:t>
+              <a:t>移行が必要な方</a:t>
             </a:r>
           </a:p>
           <a:p>
@@ -7081,20 +8063,20 @@
                 </a:solidFill>
                 <a:latin typeface="メイリオ"/>
               </a:rPr>
-              <a:t>タグとコンバージョンを設定し直す。学習データがない状態から始まるため、移行直後は学習期間を見込む。</a:t>
+              <a:t>LINE広告を使っている広告主と代理店。代理店が管理しているアカウントも対象。</a:t>
             </a:r>
           </a:p>
         </p:txBody>
       </p:sp>
       <p:sp>
         <p:nvSpPr>
-          <p:cNvPr id="66" name="Rounded Rectangle 65"/>
+          <p:cNvPr id="64" name="Rounded Rectangle 63"/>
           <p:cNvSpPr/>
           <p:nvPr/>
         </p:nvSpPr>
         <p:spPr>
           <a:xfrm>
-            <a:off x="5044440" y="4714880"/>
+            <a:off x="5044440" y="3068960"/>
             <a:ext cx="4317452" cy="1463040"/>
           </a:xfrm>
           <a:prstGeom prst="roundRect">
@@ -7138,7 +8120,7 @@
                 </a:solidFill>
                 <a:latin typeface="メイリオ"/>
               </a:rPr>
-              <a:t>移行ツールの対象</a:t>
+              <a:t>移行が不要な方</a:t>
             </a:r>
           </a:p>
           <a:p>
@@ -7157,7 +8139,159 @@
                 </a:solidFill>
                 <a:latin typeface="メイリオ"/>
               </a:rPr>
-              <a:t>日本向け配信・運用型・審査承認済みのアカウントで、認証済みビジネスマネージャーとの連携が必須。予約型や審査待ち・否認のものは対象外。</a:t>
+              <a:t>Yahoo!広告だけを使っている場合は、原則として対応不要。</a:t>
+            </a:r>
+          </a:p>
+        </p:txBody>
+      </p:sp>
+      <p:sp>
+        <p:nvSpPr>
+          <p:cNvPr id="65" name="Rounded Rectangle 64"/>
+          <p:cNvSpPr/>
+          <p:nvPr/>
+        </p:nvSpPr>
+        <p:spPr>
+          <a:xfrm>
+            <a:off x="544108" y="4714880"/>
+            <a:ext cx="4317452" cy="1463040"/>
+          </a:xfrm>
+          <a:prstGeom prst="roundRect">
+            <a:avLst>
+              <a:gd name="adj" fmla="val 6000"/>
+            </a:avLst>
+          </a:prstGeom>
+          <a:solidFill>
+            <a:srgbClr val="EAF0FA"/>
+          </a:solidFill>
+          <a:ln w="12700">
+            <a:solidFill>
+              <a:srgbClr val="3467B2"/>
+            </a:solidFill>
+          </a:ln>
+          <a:effectLst/>
+        </p:spPr>
+        <p:style>
+          <a:lnRef idx="1">
+            <a:schemeClr val="accent1"/>
+          </a:lnRef>
+          <a:fillRef idx="3">
+            <a:schemeClr val="accent1"/>
+          </a:fillRef>
+          <a:effectRef idx="2">
+            <a:schemeClr val="accent1"/>
+          </a:effectRef>
+          <a:fontRef idx="minor">
+            <a:schemeClr val="lt1"/>
+          </a:fontRef>
+        </p:style>
+        <p:txBody>
+          <a:bodyPr wrap="square" lIns="228600" rIns="182880" rtlCol="0" anchor="ctr"/>
+          <a:lstStyle/>
+          <a:p>
+            <a:pPr algn="l"/>
+            <a:r>
+              <a:rPr sz="1900" b="1">
+                <a:solidFill>
+                  <a:srgbClr val="15133D"/>
+                </a:solidFill>
+                <a:latin typeface="メイリオ"/>
+              </a:rPr>
+              <a:t>方法①：移行ツール</a:t>
+            </a:r>
+          </a:p>
+          <a:p>
+            <a:pPr algn="l">
+              <a:lnSpc>
+                <a:spcPct val="115000"/>
+              </a:lnSpc>
+              <a:spcBef>
+                <a:spcPts val="600"/>
+              </a:spcBef>
+            </a:pPr>
+            <a:r>
+              <a:rPr sz="1300">
+                <a:solidFill>
+                  <a:srgbClr val="333333"/>
+                </a:solidFill>
+                <a:latin typeface="メイリオ"/>
+              </a:rPr>
+              <a:t>できる限り自動で移せる。認証済みのビジネスマネージャーとの連携が必須。</a:t>
+            </a:r>
+          </a:p>
+        </p:txBody>
+      </p:sp>
+      <p:sp>
+        <p:nvSpPr>
+          <p:cNvPr id="66" name="Rounded Rectangle 65"/>
+          <p:cNvSpPr/>
+          <p:nvPr/>
+        </p:nvSpPr>
+        <p:spPr>
+          <a:xfrm>
+            <a:off x="5044440" y="4714880"/>
+            <a:ext cx="4317452" cy="1463040"/>
+          </a:xfrm>
+          <a:prstGeom prst="roundRect">
+            <a:avLst>
+              <a:gd name="adj" fmla="val 6000"/>
+            </a:avLst>
+          </a:prstGeom>
+          <a:solidFill>
+            <a:srgbClr val="EAF0FA"/>
+          </a:solidFill>
+          <a:ln w="12700">
+            <a:solidFill>
+              <a:srgbClr val="3467B2"/>
+            </a:solidFill>
+          </a:ln>
+          <a:effectLst/>
+        </p:spPr>
+        <p:style>
+          <a:lnRef idx="1">
+            <a:schemeClr val="accent1"/>
+          </a:lnRef>
+          <a:fillRef idx="3">
+            <a:schemeClr val="accent1"/>
+          </a:fillRef>
+          <a:effectRef idx="2">
+            <a:schemeClr val="accent1"/>
+          </a:effectRef>
+          <a:fontRef idx="minor">
+            <a:schemeClr val="lt1"/>
+          </a:fontRef>
+        </p:style>
+        <p:txBody>
+          <a:bodyPr wrap="square" lIns="228600" rIns="182880" rtlCol="0" anchor="ctr"/>
+          <a:lstStyle/>
+          <a:p>
+            <a:pPr algn="l"/>
+            <a:r>
+              <a:rPr sz="1900" b="1">
+                <a:solidFill>
+                  <a:srgbClr val="15133D"/>
+                </a:solidFill>
+                <a:latin typeface="メイリオ"/>
+              </a:rPr>
+              <a:t>方法②：手動</a:t>
+            </a:r>
+          </a:p>
+          <a:p>
+            <a:pPr algn="l">
+              <a:lnSpc>
+                <a:spcPct val="115000"/>
+              </a:lnSpc>
+              <a:spcBef>
+                <a:spcPts val="600"/>
+              </a:spcBef>
+            </a:pPr>
+            <a:r>
+              <a:rPr sz="1300">
+                <a:solidFill>
+                  <a:srgbClr val="333333"/>
+                </a:solidFill>
+                <a:latin typeface="メイリオ"/>
+              </a:rPr>
+              <a:t>Yahoo!広告のアカウントがあれば、そこへ移すか新しく作る。なければLINEヤフー広告で新しく作る。</a:t>
             </a:r>
           </a:p>
         </p:txBody>
@@ -7170,7 +8304,1664 @@
 </p:sld>
 </file>
 
-<file path=ppt/slides/slide5.xml><?xml version="1.0" encoding="utf-8"?>
+<file path=ppt/slides/slide6.xml><?xml version="1.0" encoding="utf-8"?>
+<p:sld xmlns:a="http://schemas.openxmlformats.org/drawingml/2006/main" xmlns:p="http://schemas.openxmlformats.org/presentationml/2006/main" xmlns:r="http://schemas.openxmlformats.org/officeDocument/2006/relationships">
+  <p:cSld>
+    <p:spTree>
+      <p:nvGrpSpPr>
+        <p:cNvPr id="1" name=""/>
+        <p:cNvGrpSpPr/>
+        <p:nvPr/>
+      </p:nvGrpSpPr>
+      <p:grpSpPr/>
+      <p:sp>
+        <p:nvSpPr>
+          <p:cNvPr id="40" name="Google Shape;40;p3"/>
+          <p:cNvSpPr/>
+          <p:nvPr/>
+        </p:nvSpPr>
+        <p:spPr>
+          <a:xfrm>
+            <a:off x="292801" y="730955"/>
+            <a:ext cx="1296144" cy="435690"/>
+          </a:xfrm>
+          <a:prstGeom prst="rect">
+            <a:avLst/>
+          </a:prstGeom>
+          <a:solidFill>
+            <a:schemeClr val="dk2"/>
+          </a:solidFill>
+          <a:ln w="9525" cap="flat" cmpd="sng">
+            <a:solidFill>
+              <a:srgbClr val="4A7DBA"/>
+            </a:solidFill>
+            <a:prstDash val="solid"/>
+            <a:round/>
+            <a:headEnd type="none" w="sm" len="sm"/>
+            <a:tailEnd type="none" w="sm" len="sm"/>
+          </a:ln>
+        </p:spPr>
+        <p:txBody>
+          <a:bodyPr spcFirstLastPara="1" wrap="square" lIns="91425" tIns="45700" rIns="91425" bIns="45700" anchor="ctr" anchorCtr="0">
+            <a:noAutofit/>
+          </a:bodyPr>
+          <a:lstStyle/>
+          <a:p>
+            <a:pPr marL="0" marR="0" lvl="0" indent="0" algn="ctr" rtl="0">
+              <a:spcBef>
+                <a:spcPts val="0"/>
+              </a:spcBef>
+              <a:spcAft>
+                <a:spcPts val="0"/>
+              </a:spcAft>
+              <a:buNone/>
+            </a:pPr>
+            <a:r>
+              <a:rPr lang="ja-JP" sz="1800" b="0" i="0" u="none" strike="noStrike" cap="none">
+                <a:solidFill>
+                  <a:schemeClr val="lt1"/>
+                </a:solidFill>
+                <a:latin typeface="メイリオ"/>
+                <a:ea typeface="Meiryo"/>
+                <a:cs typeface="Meiryo"/>
+                <a:sym typeface="Meiryo"/>
+              </a:rPr>
+              <a:t>対象業界</a:t>
+            </a:r>
+            <a:endParaRPr/>
+          </a:p>
+        </p:txBody>
+      </p:sp>
+      <p:sp>
+        <p:nvSpPr>
+          <p:cNvPr id="41" name="Google Shape;41;p3"/>
+          <p:cNvSpPr/>
+          <p:nvPr/>
+        </p:nvSpPr>
+        <p:spPr>
+          <a:xfrm>
+            <a:off x="7560840" y="730955"/>
+            <a:ext cx="829618" cy="435690"/>
+          </a:xfrm>
+          <a:prstGeom prst="rect">
+            <a:avLst/>
+          </a:prstGeom>
+          <a:solidFill>
+            <a:schemeClr val="bg1"/>
+          </a:solidFill>
+          <a:ln w="9525" cap="flat" cmpd="sng">
+            <a:solidFill>
+              <a:srgbClr val="4F81BD"/>
+            </a:solidFill>
+            <a:prstDash val="sysDash"/>
+            <a:round/>
+            <a:headEnd type="none" w="sm" len="sm"/>
+            <a:tailEnd type="none" w="sm" len="sm"/>
+          </a:ln>
+        </p:spPr>
+        <p:txBody>
+          <a:bodyPr spcFirstLastPara="1" wrap="square" lIns="91425" tIns="45700" rIns="91425" bIns="45700" anchor="ctr" anchorCtr="0">
+            <a:noAutofit/>
+          </a:bodyPr>
+          <a:lstStyle/>
+          <a:p>
+            <a:pPr marL="0" marR="0" lvl="0" indent="0" algn="ctr" rtl="0">
+              <a:spcBef>
+                <a:spcPts val="0"/>
+              </a:spcBef>
+              <a:spcAft>
+                <a:spcPts val="0"/>
+              </a:spcAft>
+              <a:buNone/>
+            </a:pPr>
+            <a:r>
+              <a:rPr lang="ja-JP" sz="1200" b="0" i="0" u="none" strike="noStrike" cap="none">
+                <a:solidFill>
+                  <a:schemeClr val="dk1"/>
+                </a:solidFill>
+                <a:latin typeface="メイリオ"/>
+                <a:ea typeface="Meiryo"/>
+                <a:cs typeface="Meiryo"/>
+                <a:sym typeface="Meiryo"/>
+              </a:rPr>
+              <a:t>その他</a:t>
+            </a:r>
+            <a:endParaRPr sz="1200" b="0" i="0" u="none" strike="noStrike" cap="none">
+              <a:solidFill>
+                <a:schemeClr val="dk1"/>
+              </a:solidFill>
+              <a:latin typeface="Meiryo"/>
+              <a:ea typeface="Meiryo"/>
+              <a:cs typeface="Meiryo"/>
+              <a:sym typeface="Meiryo"/>
+            </a:endParaRPr>
+          </a:p>
+        </p:txBody>
+      </p:sp>
+      <p:sp>
+        <p:nvSpPr>
+          <p:cNvPr id="42" name="Google Shape;42;p3"/>
+          <p:cNvSpPr/>
+          <p:nvPr/>
+        </p:nvSpPr>
+        <p:spPr>
+          <a:xfrm>
+            <a:off x="6679050" y="730955"/>
+            <a:ext cx="829618" cy="435690"/>
+          </a:xfrm>
+          <a:prstGeom prst="rect">
+            <a:avLst/>
+          </a:prstGeom>
+          <a:solidFill>
+            <a:schemeClr val="bg1"/>
+          </a:solidFill>
+          <a:ln w="9525" cap="flat" cmpd="sng">
+            <a:solidFill>
+              <a:srgbClr val="4F81BD"/>
+            </a:solidFill>
+            <a:prstDash val="sysDash"/>
+            <a:round/>
+            <a:headEnd type="none" w="sm" len="sm"/>
+            <a:tailEnd type="none" w="sm" len="sm"/>
+          </a:ln>
+        </p:spPr>
+        <p:txBody>
+          <a:bodyPr spcFirstLastPara="1" wrap="square" lIns="91425" tIns="45700" rIns="91425" bIns="45700" anchor="ctr" anchorCtr="0">
+            <a:noAutofit/>
+          </a:bodyPr>
+          <a:lstStyle/>
+          <a:p>
+            <a:pPr marL="0" marR="0" lvl="0" indent="0" algn="ctr" rtl="0">
+              <a:spcBef>
+                <a:spcPts val="0"/>
+              </a:spcBef>
+              <a:spcAft>
+                <a:spcPts val="0"/>
+              </a:spcAft>
+              <a:buNone/>
+            </a:pPr>
+            <a:r>
+              <a:rPr lang="ja-JP" sz="1000" b="0" i="0" u="none" strike="noStrike" cap="none">
+                <a:solidFill>
+                  <a:schemeClr val="dk1"/>
+                </a:solidFill>
+                <a:latin typeface="メイリオ"/>
+                <a:ea typeface="Meiryo"/>
+                <a:cs typeface="Meiryo"/>
+                <a:sym typeface="Meiryo"/>
+              </a:rPr>
+              <a:t>配信面</a:t>
+            </a:r>
+            <a:endParaRPr sz="1000" b="0" i="0" u="none" strike="noStrike" cap="none">
+              <a:solidFill>
+                <a:schemeClr val="dk1"/>
+              </a:solidFill>
+              <a:latin typeface="Meiryo"/>
+              <a:ea typeface="Meiryo"/>
+              <a:cs typeface="Meiryo"/>
+              <a:sym typeface="Meiryo"/>
+            </a:endParaRPr>
+          </a:p>
+        </p:txBody>
+      </p:sp>
+      <p:sp>
+        <p:nvSpPr>
+          <p:cNvPr id="43" name="Google Shape;43;p3"/>
+          <p:cNvSpPr/>
+          <p:nvPr/>
+        </p:nvSpPr>
+        <p:spPr>
+          <a:xfrm>
+            <a:off x="1594068" y="730955"/>
+            <a:ext cx="2926883" cy="435690"/>
+          </a:xfrm>
+          <a:prstGeom prst="rect">
+            <a:avLst/>
+          </a:prstGeom>
+          <a:noFill/>
+          <a:ln w="9525" cap="flat" cmpd="sng">
+            <a:solidFill>
+              <a:srgbClr val="4A7DBA"/>
+            </a:solidFill>
+            <a:prstDash val="solid"/>
+            <a:round/>
+            <a:headEnd type="none" w="sm" len="sm"/>
+            <a:tailEnd type="none" w="sm" len="sm"/>
+          </a:ln>
+        </p:spPr>
+        <p:txBody>
+          <a:bodyPr spcFirstLastPara="1" wrap="square" lIns="91425" tIns="45700" rIns="91425" bIns="45700" anchor="ctr" anchorCtr="0">
+            <a:noAutofit/>
+          </a:bodyPr>
+          <a:lstStyle/>
+          <a:p>
+            <a:pPr marL="0" marR="0" lvl="0" indent="0" algn="ctr" rtl="0">
+              <a:spcBef>
+                <a:spcPts val="0"/>
+              </a:spcBef>
+              <a:spcAft>
+                <a:spcPts val="0"/>
+              </a:spcAft>
+              <a:buNone/>
+            </a:pPr>
+            <a:r>
+              <a:rPr lang="ja-JP" sz="1300" b="0" i="0" u="none" strike="noStrike" cap="none">
+                <a:solidFill>
+                  <a:schemeClr val="dk1"/>
+                </a:solidFill>
+                <a:latin typeface="メイリオ"/>
+                <a:ea typeface="Meiryo"/>
+                <a:cs typeface="Meiryo"/>
+                <a:sym typeface="Meiryo"/>
+              </a:rPr>
+              <a:t>LINE広告を運用中の広告主</a:t>
+            </a:r>
+            <a:endParaRPr/>
+          </a:p>
+        </p:txBody>
+      </p:sp>
+      <p:sp>
+        <p:nvSpPr>
+          <p:cNvPr id="44" name="Google Shape;44;p3"/>
+          <p:cNvSpPr txBox="1"/>
+          <p:nvPr/>
+        </p:nvSpPr>
+        <p:spPr>
+          <a:xfrm>
+            <a:off x="3296816" y="6597352"/>
+            <a:ext cx="6209091" cy="215444"/>
+          </a:xfrm>
+          <a:prstGeom prst="rect">
+            <a:avLst/>
+          </a:prstGeom>
+          <a:noFill/>
+          <a:ln>
+            <a:noFill/>
+          </a:ln>
+        </p:spPr>
+        <p:txBody>
+          <a:bodyPr spcFirstLastPara="1" wrap="square" lIns="91425" tIns="45700" rIns="91425" bIns="45700" anchor="t" anchorCtr="0">
+            <a:spAutoFit/>
+          </a:bodyPr>
+          <a:lstStyle/>
+          <a:p>
+            <a:pPr marL="0" marR="0" lvl="0" indent="0" algn="l" rtl="0">
+              <a:spcBef>
+                <a:spcPts val="0"/>
+              </a:spcBef>
+              <a:spcAft>
+                <a:spcPts val="0"/>
+              </a:spcAft>
+              <a:buNone/>
+            </a:pPr>
+            <a:r>
+              <a:rPr lang="ja-JP" sz="800" b="0" i="0" u="none" strike="noStrike" cap="none">
+                <a:solidFill>
+                  <a:schemeClr val="lt1"/>
+                </a:solidFill>
+                <a:latin typeface="メイリオ"/>
+                <a:ea typeface="Meiryo"/>
+                <a:cs typeface="Meiryo"/>
+                <a:sym typeface="Meiryo"/>
+              </a:rPr>
+              <a:t>出典：https://www.lycbiz.com/jp/column/line-ads/service-information/migration-guide/</a:t>
+            </a:r>
+            <a:endParaRPr sz="800">
+              <a:solidFill>
+                <a:schemeClr val="lt1"/>
+              </a:solidFill>
+              <a:latin typeface="Meiryo"/>
+              <a:ea typeface="Meiryo"/>
+              <a:cs typeface="Meiryo"/>
+              <a:sym typeface="Meiryo"/>
+            </a:endParaRPr>
+          </a:p>
+        </p:txBody>
+      </p:sp>
+      <p:sp>
+        <p:nvSpPr>
+          <p:cNvPr id="45" name="Google Shape;45;p3"/>
+          <p:cNvSpPr/>
+          <p:nvPr/>
+        </p:nvSpPr>
+        <p:spPr>
+          <a:xfrm>
+            <a:off x="0" y="1234746"/>
+            <a:ext cx="9906000" cy="672259"/>
+          </a:xfrm>
+          <a:prstGeom prst="rect">
+            <a:avLst/>
+          </a:prstGeom>
+          <a:solidFill>
+            <a:srgbClr val="C5D8F1"/>
+          </a:solidFill>
+          <a:ln>
+            <a:noFill/>
+          </a:ln>
+        </p:spPr>
+        <p:txBody>
+          <a:bodyPr spcFirstLastPara="1" wrap="square" lIns="91425" tIns="45700" rIns="91425" bIns="45700" anchor="ctr" anchorCtr="0">
+            <a:noAutofit/>
+          </a:bodyPr>
+          <a:lstStyle/>
+          <a:p>
+            <a:pPr marL="0" marR="0" lvl="0" indent="0" algn="ctr" rtl="0">
+              <a:spcBef>
+                <a:spcPts val="0"/>
+              </a:spcBef>
+              <a:spcAft>
+                <a:spcPts val="0"/>
+              </a:spcAft>
+              <a:buNone/>
+            </a:pPr>
+            <a:r>
+              <a:rPr lang="ja-JP" sz="1600" b="1">
+                <a:solidFill>
+                  <a:srgbClr val="004DE6"/>
+                </a:solidFill>
+                <a:latin typeface="メイリオ"/>
+                <a:ea typeface="Meiryo"/>
+                <a:cs typeface="Meiryo"/>
+                <a:sym typeface="Meiryo"/>
+              </a:rPr>
+              <a:t>　　　　　　</a:t>
+            </a:r>
+            <a:endParaRPr sz="1800" b="1">
+              <a:solidFill>
+                <a:srgbClr val="004DE6"/>
+              </a:solidFill>
+              <a:latin typeface="Meiryo"/>
+              <a:ea typeface="Meiryo"/>
+              <a:cs typeface="Meiryo"/>
+              <a:sym typeface="Meiryo"/>
+            </a:endParaRPr>
+          </a:p>
+        </p:txBody>
+      </p:sp>
+      <p:sp>
+        <p:nvSpPr>
+          <p:cNvPr id="46" name="Google Shape;46;p3"/>
+          <p:cNvSpPr/>
+          <p:nvPr/>
+        </p:nvSpPr>
+        <p:spPr>
+          <a:xfrm>
+            <a:off x="1089832" y="1437370"/>
+            <a:ext cx="7031520" cy="338554"/>
+          </a:xfrm>
+          <a:prstGeom prst="rect">
+            <a:avLst/>
+          </a:prstGeom>
+          <a:noFill/>
+          <a:ln>
+            <a:noFill/>
+          </a:ln>
+        </p:spPr>
+        <p:txBody>
+          <a:bodyPr spcFirstLastPara="1" wrap="square" lIns="91425" tIns="45700" rIns="91425" bIns="45700" anchor="t" anchorCtr="0">
+            <a:spAutoFit/>
+          </a:bodyPr>
+          <a:lstStyle/>
+          <a:p>
+            <a:pPr marL="0" marR="0" lvl="0" indent="0" algn="l" rtl="0">
+              <a:spcBef>
+                <a:spcPts val="0"/>
+              </a:spcBef>
+              <a:spcAft>
+                <a:spcPts val="0"/>
+              </a:spcAft>
+              <a:buNone/>
+            </a:pPr>
+            <a:r>
+              <a:rPr lang="ja-JP" sz="1600" b="1">
+                <a:solidFill>
+                  <a:srgbClr val="004DE6"/>
+                </a:solidFill>
+                <a:latin typeface="メイリオ"/>
+                <a:ea typeface="Meiryo"/>
+                <a:cs typeface="Meiryo"/>
+                <a:sym typeface="Meiryo"/>
+              </a:rPr>
+              <a:t>【LINEヤフー広告】移行ツールで移せるもの・移せないもの</a:t>
+            </a:r>
+            <a:endParaRPr sz="1600" b="1">
+              <a:solidFill>
+                <a:srgbClr val="004DE6"/>
+              </a:solidFill>
+              <a:latin typeface="Meiryo"/>
+              <a:ea typeface="Meiryo"/>
+              <a:cs typeface="Meiryo"/>
+              <a:sym typeface="Meiryo"/>
+            </a:endParaRPr>
+          </a:p>
+        </p:txBody>
+      </p:sp>
+      <p:sp>
+        <p:nvSpPr>
+          <p:cNvPr id="47" name="Google Shape;47;p3"/>
+          <p:cNvSpPr txBox="1"/>
+          <p:nvPr/>
+        </p:nvSpPr>
+        <p:spPr>
+          <a:xfrm>
+            <a:off x="182880" y="88175"/>
+            <a:ext cx="7512385" cy="365091"/>
+          </a:xfrm>
+          <a:prstGeom prst="rect">
+            <a:avLst/>
+          </a:prstGeom>
+          <a:noFill/>
+          <a:ln>
+            <a:noFill/>
+          </a:ln>
+        </p:spPr>
+        <p:txBody>
+          <a:bodyPr spcFirstLastPara="1" wrap="square" lIns="91425" tIns="72000" rIns="91425" bIns="45700" anchor="t" anchorCtr="0">
+            <a:spAutoFit/>
+          </a:bodyPr>
+          <a:lstStyle/>
+          <a:p>
+            <a:pPr marL="0" marR="0" lvl="0" indent="0" algn="l" rtl="0">
+              <a:spcBef>
+                <a:spcPts val="0"/>
+              </a:spcBef>
+              <a:spcAft>
+                <a:spcPts val="0"/>
+              </a:spcAft>
+              <a:buClr>
+                <a:schemeClr val="dk1"/>
+              </a:buClr>
+              <a:buSzPts val="1600"/>
+              <a:buFont typeface="Arial"/>
+              <a:buNone/>
+            </a:pPr>
+            <a:r>
+              <a:rPr lang="ja-JP" sz="1600" b="0" u="none">
+                <a:solidFill>
+                  <a:schemeClr val="dk1"/>
+                </a:solidFill>
+                <a:latin typeface="メイリオ"/>
+                <a:ea typeface="Meiryo"/>
+                <a:cs typeface="Meiryo"/>
+                <a:sym typeface="Meiryo"/>
+              </a:rPr>
+              <a:t>    今後のアップデート情報</a:t>
+            </a:r>
+            <a:endParaRPr sz="1600" b="0" u="none">
+              <a:solidFill>
+                <a:schemeClr val="dk1"/>
+              </a:solidFill>
+              <a:latin typeface="Meiryo"/>
+              <a:ea typeface="Meiryo"/>
+              <a:cs typeface="Meiryo"/>
+              <a:sym typeface="Meiryo"/>
+            </a:endParaRPr>
+          </a:p>
+        </p:txBody>
+      </p:sp>
+      <p:sp>
+        <p:nvSpPr>
+          <p:cNvPr id="48" name="Google Shape;48;p3"/>
+          <p:cNvSpPr/>
+          <p:nvPr/>
+        </p:nvSpPr>
+        <p:spPr>
+          <a:xfrm>
+            <a:off x="5797260" y="730955"/>
+            <a:ext cx="829618" cy="435690"/>
+          </a:xfrm>
+          <a:prstGeom prst="rect">
+            <a:avLst/>
+          </a:prstGeom>
+          <a:solidFill>
+            <a:schemeClr val="tx2"/>
+          </a:solidFill>
+          <a:ln w="9525" cap="flat" cmpd="sng">
+            <a:solidFill>
+              <a:srgbClr val="4F81BD"/>
+            </a:solidFill>
+            <a:prstDash val="solid"/>
+            <a:round/>
+            <a:headEnd type="none" w="sm" len="sm"/>
+            <a:tailEnd type="none" w="sm" len="sm"/>
+          </a:ln>
+        </p:spPr>
+        <p:txBody>
+          <a:bodyPr spcFirstLastPara="1" wrap="square" lIns="91425" tIns="45700" rIns="91425" bIns="45700" anchor="ctr" anchorCtr="0">
+            <a:noAutofit/>
+          </a:bodyPr>
+          <a:lstStyle/>
+          <a:p>
+            <a:pPr marL="0" marR="0" lvl="0" indent="0" algn="ctr" rtl="0">
+              <a:spcBef>
+                <a:spcPts val="0"/>
+              </a:spcBef>
+              <a:spcAft>
+                <a:spcPts val="0"/>
+              </a:spcAft>
+              <a:buClr>
+                <a:schemeClr val="dk1"/>
+              </a:buClr>
+              <a:buSzPts val="1000"/>
+              <a:buFont typeface="Meiryo"/>
+              <a:buNone/>
+            </a:pPr>
+            <a:r>
+              <a:rPr lang="ja-JP" sz="900">
+                <a:solidFill>
+                  <a:schemeClr val="dk1"/>
+                </a:solidFill>
+                <a:latin typeface="メイリオ"/>
+                <a:ea typeface="Meiryo"/>
+                <a:cs typeface="Meiryo"/>
+                <a:sym typeface="Meiryo"/>
+              </a:rPr>
+              <a:t>LINEヤフー</a:t>
+            </a:r>
+            <a:endParaRPr sz="1000">
+              <a:solidFill>
+                <a:schemeClr val="dk1"/>
+              </a:solidFill>
+              <a:latin typeface="Meiryo"/>
+              <a:ea typeface="Meiryo"/>
+              <a:cs typeface="Meiryo"/>
+              <a:sym typeface="Meiryo"/>
+            </a:endParaRPr>
+          </a:p>
+          <a:p>
+            <a:pPr marL="0" marR="0" lvl="0" indent="0" algn="ctr" rtl="0">
+              <a:spcBef>
+                <a:spcPts val="0"/>
+              </a:spcBef>
+              <a:spcAft>
+                <a:spcPts val="0"/>
+              </a:spcAft>
+              <a:buClr>
+                <a:schemeClr val="dk1"/>
+              </a:buClr>
+              <a:buSzPts val="1000"/>
+              <a:buFont typeface="Meiryo"/>
+              <a:buNone/>
+            </a:pPr>
+            <a:r>
+              <a:rPr lang="ja-JP" sz="900">
+                <a:solidFill>
+                  <a:schemeClr val="dk1"/>
+                </a:solidFill>
+                <a:latin typeface="メイリオ"/>
+                <a:ea typeface="Meiryo"/>
+                <a:cs typeface="Meiryo"/>
+                <a:sym typeface="Meiryo"/>
+              </a:rPr>
+              <a:t>広告</a:t>
+            </a:r>
+            <a:endParaRPr sz="1000">
+              <a:solidFill>
+                <a:schemeClr val="dk1"/>
+              </a:solidFill>
+              <a:latin typeface="Meiryo"/>
+              <a:ea typeface="Meiryo"/>
+              <a:cs typeface="Meiryo"/>
+              <a:sym typeface="Meiryo"/>
+            </a:endParaRPr>
+          </a:p>
+        </p:txBody>
+      </p:sp>
+      <p:sp>
+        <p:nvSpPr>
+          <p:cNvPr id="49" name="Google Shape;49;p3"/>
+          <p:cNvSpPr/>
+          <p:nvPr/>
+        </p:nvSpPr>
+        <p:spPr>
+          <a:xfrm>
+            <a:off x="4915470" y="730955"/>
+            <a:ext cx="829618" cy="435690"/>
+          </a:xfrm>
+          <a:prstGeom prst="rect">
+            <a:avLst/>
+          </a:prstGeom>
+          <a:solidFill>
+            <a:schemeClr val="bg1"/>
+          </a:solidFill>
+          <a:ln w="9525" cap="flat" cmpd="sng">
+            <a:solidFill>
+              <a:srgbClr val="4F81BD"/>
+            </a:solidFill>
+            <a:prstDash val="sysDash"/>
+            <a:round/>
+            <a:headEnd type="none" w="sm" len="sm"/>
+            <a:tailEnd type="none" w="sm" len="sm"/>
+          </a:ln>
+        </p:spPr>
+        <p:txBody>
+          <a:bodyPr spcFirstLastPara="1" wrap="square" lIns="91425" tIns="45700" rIns="91425" bIns="45700" anchor="ctr" anchorCtr="0">
+            <a:noAutofit/>
+          </a:bodyPr>
+          <a:lstStyle/>
+          <a:p>
+            <a:pPr marL="0" marR="0" lvl="0" indent="0" algn="ctr" rtl="0">
+              <a:spcBef>
+                <a:spcPts val="0"/>
+              </a:spcBef>
+              <a:spcAft>
+                <a:spcPts val="0"/>
+              </a:spcAft>
+              <a:buNone/>
+            </a:pPr>
+            <a:r>
+              <a:rPr lang="ja-JP" sz="1000">
+                <a:solidFill>
+                  <a:schemeClr val="dk1"/>
+                </a:solidFill>
+                <a:latin typeface="メイリオ"/>
+                <a:ea typeface="Meiryo"/>
+                <a:cs typeface="Meiryo"/>
+                <a:sym typeface="Meiryo"/>
+              </a:rPr>
+              <a:t>LINE広告</a:t>
+            </a:r>
+            <a:endParaRPr sz="1000">
+              <a:solidFill>
+                <a:schemeClr val="dk1"/>
+              </a:solidFill>
+              <a:latin typeface="Meiryo"/>
+              <a:ea typeface="Meiryo"/>
+              <a:cs typeface="Meiryo"/>
+              <a:sym typeface="Meiryo"/>
+            </a:endParaRPr>
+          </a:p>
+        </p:txBody>
+      </p:sp>
+      <p:sp>
+        <p:nvSpPr>
+          <p:cNvPr id="50" name="Google Shape;50;p3"/>
+          <p:cNvSpPr/>
+          <p:nvPr/>
+        </p:nvSpPr>
+        <p:spPr>
+          <a:xfrm>
+            <a:off x="0" y="1890267"/>
+            <a:ext cx="9906000" cy="733579"/>
+          </a:xfrm>
+          <a:prstGeom prst="rect">
+            <a:avLst/>
+          </a:prstGeom>
+          <a:solidFill>
+            <a:srgbClr val="F2F2F2"/>
+          </a:solidFill>
+          <a:ln>
+            <a:noFill/>
+          </a:ln>
+        </p:spPr>
+        <p:txBody>
+          <a:bodyPr spcFirstLastPara="1" wrap="square" lIns="91425" tIns="45700" rIns="91425" bIns="45700" anchor="ctr" anchorCtr="0">
+            <a:noAutofit/>
+          </a:bodyPr>
+          <a:lstStyle/>
+          <a:p>
+            <a:pPr marL="0" marR="0" lvl="0" indent="0" algn="ctr" rtl="0">
+              <a:spcBef>
+                <a:spcPts val="0"/>
+              </a:spcBef>
+              <a:spcAft>
+                <a:spcPts val="0"/>
+              </a:spcAft>
+              <a:buNone/>
+            </a:pPr>
+            <a:endParaRPr sz="1200">
+              <a:solidFill>
+                <a:schemeClr val="dk1"/>
+              </a:solidFill>
+              <a:latin typeface="Meiryo"/>
+              <a:ea typeface="Meiryo"/>
+              <a:cs typeface="Meiryo"/>
+              <a:sym typeface="Meiryo"/>
+            </a:endParaRPr>
+          </a:p>
+        </p:txBody>
+      </p:sp>
+      <p:sp>
+        <p:nvSpPr>
+          <p:cNvPr id="51" name="Google Shape;51;p3"/>
+          <p:cNvSpPr/>
+          <p:nvPr/>
+        </p:nvSpPr>
+        <p:spPr>
+          <a:xfrm>
+            <a:off x="544108" y="1961282"/>
+            <a:ext cx="8817783" cy="646331"/>
+          </a:xfrm>
+          <a:prstGeom prst="rect">
+            <a:avLst/>
+          </a:prstGeom>
+          <a:noFill/>
+          <a:ln>
+            <a:noFill/>
+          </a:ln>
+        </p:spPr>
+        <p:txBody>
+          <a:bodyPr spcFirstLastPara="1" wrap="square" lIns="91425" tIns="45700" rIns="91425" bIns="45700" anchor="t" anchorCtr="0">
+            <a:spAutoFit/>
+          </a:bodyPr>
+          <a:lstStyle/>
+          <a:p>
+            <a:pPr marL="0" marR="0" lvl="0" indent="0" algn="ctr" rtl="0">
+              <a:spcBef>
+                <a:spcPts val="0"/>
+              </a:spcBef>
+              <a:spcAft>
+                <a:spcPts val="0"/>
+              </a:spcAft>
+              <a:buNone/>
+            </a:pPr>
+            <a:r>
+              <a:rPr lang="ja-JP" sz="1200" b="1">
+                <a:solidFill>
+                  <a:schemeClr val="dk1"/>
+                </a:solidFill>
+                <a:latin typeface="メイリオ"/>
+                <a:ea typeface="Meiryo"/>
+                <a:cs typeface="Meiryo"/>
+                <a:sym typeface="Meiryo"/>
+              </a:rPr>
+              <a:t>移行ツールは、LINE広告の配信データをできる限りLINEヤフー広告へコピーする機能。</a:t>
+            </a:r>
+            <a:endParaRPr sz="1200" b="1">
+              <a:solidFill>
+                <a:schemeClr val="dk1"/>
+              </a:solidFill>
+              <a:latin typeface="Meiryo"/>
+              <a:ea typeface="Meiryo"/>
+              <a:cs typeface="Meiryo"/>
+              <a:sym typeface="Meiryo"/>
+            </a:endParaRPr>
+          </a:p>
+          <a:p>
+            <a:pPr marL="0" marR="0" lvl="0" indent="0" algn="ctr" rtl="0">
+              <a:spcBef>
+                <a:spcPts val="0"/>
+              </a:spcBef>
+              <a:spcAft>
+                <a:spcPts val="0"/>
+              </a:spcAft>
+              <a:buNone/>
+            </a:pPr>
+            <a:r>
+              <a:rPr lang="ja-JP" sz="1200" b="1">
+                <a:solidFill>
+                  <a:schemeClr val="dk1"/>
+                </a:solidFill>
+                <a:latin typeface="メイリオ"/>
+                <a:ea typeface="Meiryo"/>
+                <a:cs typeface="Meiryo"/>
+                <a:sym typeface="Meiryo"/>
+              </a:rPr>
+              <a:t>タグ・コンバージョン設定や過去の実績など、移せないデータもある。</a:t>
+            </a:r>
+            <a:endParaRPr/>
+          </a:p>
+          <a:p>
+            <a:pPr marL="0" marR="0" lvl="0" indent="0" algn="ctr" rtl="0">
+              <a:spcBef>
+                <a:spcPts val="0"/>
+              </a:spcBef>
+              <a:spcAft>
+                <a:spcPts val="0"/>
+              </a:spcAft>
+              <a:buNone/>
+            </a:pPr>
+            <a:r>
+              <a:rPr lang="ja-JP" sz="1200" b="1">
+                <a:solidFill>
+                  <a:schemeClr val="dk1"/>
+                </a:solidFill>
+                <a:latin typeface="メイリオ"/>
+                <a:ea typeface="Meiryo"/>
+                <a:cs typeface="Meiryo"/>
+                <a:sym typeface="Meiryo"/>
+              </a:rPr>
+              <a:t>移行後はキャンペーンが配信オフになるため、設定を確認してから配信を再開する。</a:t>
+            </a:r>
+            <a:endParaRPr sz="1400" b="1">
+              <a:solidFill>
+                <a:schemeClr val="dk1"/>
+              </a:solidFill>
+              <a:latin typeface="Meiryo"/>
+              <a:ea typeface="Meiryo"/>
+              <a:cs typeface="Meiryo"/>
+              <a:sym typeface="Meiryo"/>
+            </a:endParaRPr>
+          </a:p>
+        </p:txBody>
+      </p:sp>
+      <p:sp>
+        <p:nvSpPr>
+          <p:cNvPr id="52" name="Google Shape;52;p3"/>
+          <p:cNvSpPr/>
+          <p:nvPr/>
+        </p:nvSpPr>
+        <p:spPr>
+          <a:xfrm>
+            <a:off x="351381" y="2714173"/>
+            <a:ext cx="5200000" cy="338554"/>
+          </a:xfrm>
+          <a:prstGeom prst="rect">
+            <a:avLst/>
+          </a:prstGeom>
+          <a:noFill/>
+          <a:ln>
+            <a:noFill/>
+          </a:ln>
+        </p:spPr>
+        <p:txBody>
+          <a:bodyPr spcFirstLastPara="1" wrap="square" lIns="91425" tIns="45700" rIns="91425" bIns="45700" anchor="t" anchorCtr="0">
+            <a:noAutofit/>
+          </a:bodyPr>
+          <a:lstStyle/>
+          <a:p>
+            <a:pPr marL="0" marR="0" lvl="0" indent="0" algn="l" rtl="0">
+              <a:spcBef>
+                <a:spcPts val="0"/>
+              </a:spcBef>
+              <a:spcAft>
+                <a:spcPts val="0"/>
+              </a:spcAft>
+              <a:buNone/>
+            </a:pPr>
+            <a:r>
+              <a:rPr lang="ja-JP" sz="1400" b="1">
+                <a:solidFill>
+                  <a:srgbClr val="15133D"/>
+                </a:solidFill>
+                <a:latin typeface="メイリオ"/>
+                <a:ea typeface="Meiryo"/>
+                <a:cs typeface="Meiryo"/>
+                <a:sym typeface="Meiryo"/>
+              </a:rPr>
+              <a:t>■ 詳細</a:t>
+            </a:r>
+            <a:endParaRPr/>
+          </a:p>
+        </p:txBody>
+      </p:sp>
+      <p:grpSp>
+        <p:nvGrpSpPr>
+          <p:cNvPr id="53" name="Google Shape;53;p3"/>
+          <p:cNvGrpSpPr/>
+          <p:nvPr/>
+        </p:nvGrpSpPr>
+        <p:grpSpPr>
+          <a:xfrm>
+            <a:off x="8473303" y="730955"/>
+            <a:ext cx="1376241" cy="1131930"/>
+            <a:chOff x="0" y="0"/>
+            <a:chExt cx="1376241" cy="1131930"/>
+          </a:xfrm>
+        </p:grpSpPr>
+        <p:sp>
+          <p:nvSpPr>
+            <p:cNvPr id="54" name="Google Shape;54;p3"/>
+            <p:cNvSpPr/>
+            <p:nvPr/>
+          </p:nvSpPr>
+          <p:spPr>
+            <a:xfrm rot="10800000">
+              <a:off x="0" y="0"/>
+              <a:ext cx="1376241" cy="282982"/>
+            </a:xfrm>
+            <a:prstGeom prst="trapezoid">
+              <a:avLst>
+                <a:gd name="adj" fmla="val 60792"/>
+              </a:avLst>
+            </a:prstGeom>
+            <a:solidFill>
+              <a:srgbClr val="EAEDF5"/>
+            </a:solidFill>
+            <a:ln w="25400" cap="flat" cmpd="sng">
+              <a:solidFill>
+                <a:schemeClr val="dk2"/>
+              </a:solidFill>
+              <a:prstDash val="solid"/>
+              <a:round/>
+              <a:headEnd type="none" w="sm" len="sm"/>
+              <a:tailEnd type="none" w="sm" len="sm"/>
+            </a:ln>
+          </p:spPr>
+          <p:txBody>
+            <a:bodyPr spcFirstLastPara="1" wrap="square" lIns="91425" tIns="91425" rIns="91425" bIns="91425" anchor="ctr" anchorCtr="0">
+              <a:noAutofit/>
+            </a:bodyPr>
+            <a:lstStyle/>
+            <a:p>
+              <a:pPr marL="0" lvl="0" indent="0" algn="l" rtl="0">
+                <a:spcBef>
+                  <a:spcPts val="0"/>
+                </a:spcBef>
+                <a:spcAft>
+                  <a:spcPts val="0"/>
+                </a:spcAft>
+                <a:buNone/>
+              </a:pPr>
+              <a:endParaRPr/>
+            </a:p>
+          </p:txBody>
+        </p:sp>
+        <p:sp>
+          <p:nvSpPr>
+            <p:cNvPr id="55" name="Google Shape;55;p3"/>
+            <p:cNvSpPr txBox="1"/>
+            <p:nvPr/>
+          </p:nvSpPr>
+          <p:spPr>
+            <a:xfrm>
+              <a:off x="240842" y="0"/>
+              <a:ext cx="894556" cy="282982"/>
+            </a:xfrm>
+            <a:prstGeom prst="rect">
+              <a:avLst/>
+            </a:prstGeom>
+            <a:noFill/>
+            <a:ln>
+              <a:noFill/>
+            </a:ln>
+          </p:spPr>
+          <p:txBody>
+            <a:bodyPr spcFirstLastPara="1" wrap="square" lIns="10150" tIns="10150" rIns="10150" bIns="10150" anchor="ctr" anchorCtr="0">
+              <a:noAutofit/>
+            </a:bodyPr>
+            <a:lstStyle/>
+            <a:p>
+              <a:pPr marL="0" marR="0" lvl="0" indent="0" algn="ctr" rtl="0">
+                <a:lnSpc>
+                  <a:spcPct val="90000"/>
+                </a:lnSpc>
+                <a:spcBef>
+                  <a:spcPts val="0"/>
+                </a:spcBef>
+                <a:spcAft>
+                  <a:spcPts val="0"/>
+                </a:spcAft>
+                <a:buClr>
+                  <a:srgbClr val="262626"/>
+                </a:buClr>
+                <a:buSzPts val="800"/>
+                <a:buFont typeface="Arial"/>
+                <a:buNone/>
+              </a:pPr>
+              <a:r>
+                <a:rPr lang="ja-JP" sz="800" b="1">
+                  <a:solidFill>
+                    <a:srgbClr val="262626"/>
+                  </a:solidFill>
+                  <a:latin typeface="Arial"/>
+                  <a:ea typeface="Arial"/>
+                  <a:cs typeface="Arial"/>
+                  <a:sym typeface="Arial"/>
+                </a:rPr>
+                <a:t>認知</a:t>
+              </a:r>
+              <a:endParaRPr/>
+            </a:p>
+          </p:txBody>
+        </p:sp>
+        <p:sp>
+          <p:nvSpPr>
+            <p:cNvPr id="56" name="Google Shape;56;p3"/>
+            <p:cNvSpPr/>
+            <p:nvPr/>
+          </p:nvSpPr>
+          <p:spPr>
+            <a:xfrm rot="10800000">
+              <a:off x="172030" y="282982"/>
+              <a:ext cx="1032180" cy="282982"/>
+            </a:xfrm>
+            <a:prstGeom prst="trapezoid">
+              <a:avLst>
+                <a:gd name="adj" fmla="val 60792"/>
+              </a:avLst>
+            </a:prstGeom>
+            <a:solidFill>
+              <a:schemeClr val="lt1"/>
+            </a:solidFill>
+            <a:ln w="25400" cap="flat" cmpd="sng">
+              <a:solidFill>
+                <a:schemeClr val="dk2"/>
+              </a:solidFill>
+              <a:prstDash val="solid"/>
+              <a:round/>
+              <a:headEnd type="none" w="sm" len="sm"/>
+              <a:tailEnd type="none" w="sm" len="sm"/>
+            </a:ln>
+          </p:spPr>
+          <p:txBody>
+            <a:bodyPr spcFirstLastPara="1" wrap="square" lIns="91425" tIns="91425" rIns="91425" bIns="91425" anchor="ctr" anchorCtr="0">
+              <a:noAutofit/>
+            </a:bodyPr>
+            <a:lstStyle/>
+            <a:p>
+              <a:pPr marL="0" lvl="0" indent="0" algn="l" rtl="0">
+                <a:spcBef>
+                  <a:spcPts val="0"/>
+                </a:spcBef>
+                <a:spcAft>
+                  <a:spcPts val="0"/>
+                </a:spcAft>
+                <a:buNone/>
+              </a:pPr>
+              <a:endParaRPr/>
+            </a:p>
+          </p:txBody>
+        </p:sp>
+        <p:sp>
+          <p:nvSpPr>
+            <p:cNvPr id="57" name="Google Shape;57;p3"/>
+            <p:cNvSpPr txBox="1"/>
+            <p:nvPr/>
+          </p:nvSpPr>
+          <p:spPr>
+            <a:xfrm>
+              <a:off x="352661" y="282982"/>
+              <a:ext cx="670917" cy="282982"/>
+            </a:xfrm>
+            <a:prstGeom prst="rect">
+              <a:avLst/>
+            </a:prstGeom>
+            <a:noFill/>
+            <a:ln>
+              <a:noFill/>
+            </a:ln>
+          </p:spPr>
+          <p:txBody>
+            <a:bodyPr spcFirstLastPara="1" wrap="square" lIns="10150" tIns="10150" rIns="10150" bIns="10150" anchor="ctr" anchorCtr="0">
+              <a:noAutofit/>
+            </a:bodyPr>
+            <a:lstStyle/>
+            <a:p>
+              <a:pPr marL="0" marR="0" lvl="0" indent="0" algn="ctr" rtl="0">
+                <a:lnSpc>
+                  <a:spcPct val="90000"/>
+                </a:lnSpc>
+                <a:spcBef>
+                  <a:spcPts val="0"/>
+                </a:spcBef>
+                <a:spcAft>
+                  <a:spcPts val="0"/>
+                </a:spcAft>
+                <a:buClr>
+                  <a:srgbClr val="262626"/>
+                </a:buClr>
+                <a:buSzPts val="800"/>
+                <a:buFont typeface="Arial"/>
+                <a:buNone/>
+              </a:pPr>
+              <a:r>
+                <a:rPr lang="ja-JP" sz="800" b="1">
+                  <a:solidFill>
+                    <a:srgbClr val="262626"/>
+                  </a:solidFill>
+                  <a:latin typeface="Arial"/>
+                  <a:ea typeface="Arial"/>
+                  <a:cs typeface="Arial"/>
+                  <a:sym typeface="Arial"/>
+                </a:rPr>
+                <a:t>検討</a:t>
+              </a:r>
+              <a:endParaRPr/>
+            </a:p>
+          </p:txBody>
+        </p:sp>
+        <p:sp>
+          <p:nvSpPr>
+            <p:cNvPr id="58" name="Google Shape;58;p3"/>
+            <p:cNvSpPr/>
+            <p:nvPr/>
+          </p:nvSpPr>
+          <p:spPr>
+            <a:xfrm rot="10800000">
+              <a:off x="344060" y="565965"/>
+              <a:ext cx="688120" cy="282982"/>
+            </a:xfrm>
+            <a:prstGeom prst="trapezoid">
+              <a:avLst>
+                <a:gd name="adj" fmla="val 60792"/>
+              </a:avLst>
+            </a:prstGeom>
+            <a:solidFill>
+              <a:schemeClr val="lt1"/>
+            </a:solidFill>
+            <a:ln w="25400" cap="flat" cmpd="sng">
+              <a:solidFill>
+                <a:schemeClr val="dk2"/>
+              </a:solidFill>
+              <a:prstDash val="solid"/>
+              <a:round/>
+              <a:headEnd type="none" w="sm" len="sm"/>
+              <a:tailEnd type="none" w="sm" len="sm"/>
+            </a:ln>
+          </p:spPr>
+          <p:txBody>
+            <a:bodyPr spcFirstLastPara="1" wrap="square" lIns="91425" tIns="91425" rIns="91425" bIns="91425" anchor="ctr" anchorCtr="0">
+              <a:noAutofit/>
+            </a:bodyPr>
+            <a:lstStyle/>
+            <a:p>
+              <a:pPr marL="0" lvl="0" indent="0" algn="l" rtl="0">
+                <a:spcBef>
+                  <a:spcPts val="0"/>
+                </a:spcBef>
+                <a:spcAft>
+                  <a:spcPts val="0"/>
+                </a:spcAft>
+                <a:buNone/>
+              </a:pPr>
+              <a:endParaRPr/>
+            </a:p>
+          </p:txBody>
+        </p:sp>
+        <p:sp>
+          <p:nvSpPr>
+            <p:cNvPr id="59" name="Google Shape;59;p3"/>
+            <p:cNvSpPr txBox="1"/>
+            <p:nvPr/>
+          </p:nvSpPr>
+          <p:spPr>
+            <a:xfrm>
+              <a:off x="464481" y="565965"/>
+              <a:ext cx="447278" cy="282982"/>
+            </a:xfrm>
+            <a:prstGeom prst="rect">
+              <a:avLst/>
+            </a:prstGeom>
+            <a:noFill/>
+            <a:ln>
+              <a:noFill/>
+            </a:ln>
+          </p:spPr>
+          <p:txBody>
+            <a:bodyPr spcFirstLastPara="1" wrap="square" lIns="10150" tIns="10150" rIns="10150" bIns="10150" anchor="ctr" anchorCtr="0">
+              <a:noAutofit/>
+            </a:bodyPr>
+            <a:lstStyle/>
+            <a:p>
+              <a:pPr marL="0" marR="0" lvl="0" indent="0" algn="ctr" rtl="0">
+                <a:lnSpc>
+                  <a:spcPct val="90000"/>
+                </a:lnSpc>
+                <a:spcBef>
+                  <a:spcPts val="0"/>
+                </a:spcBef>
+                <a:spcAft>
+                  <a:spcPts val="0"/>
+                </a:spcAft>
+                <a:buClr>
+                  <a:srgbClr val="262626"/>
+                </a:buClr>
+                <a:buSzPts val="800"/>
+                <a:buFont typeface="Arial"/>
+                <a:buNone/>
+              </a:pPr>
+              <a:r>
+                <a:rPr lang="ja-JP" sz="800" b="1">
+                  <a:solidFill>
+                    <a:srgbClr val="262626"/>
+                  </a:solidFill>
+                  <a:latin typeface="Arial"/>
+                  <a:ea typeface="Arial"/>
+                  <a:cs typeface="Arial"/>
+                  <a:sym typeface="Arial"/>
+                </a:rPr>
+                <a:t>獲得</a:t>
+              </a:r>
+              <a:endParaRPr/>
+            </a:p>
+          </p:txBody>
+        </p:sp>
+        <p:sp>
+          <p:nvSpPr>
+            <p:cNvPr id="60" name="Google Shape;60;p3"/>
+            <p:cNvSpPr/>
+            <p:nvPr/>
+          </p:nvSpPr>
+          <p:spPr>
+            <a:xfrm rot="10800000">
+              <a:off x="516090" y="848948"/>
+              <a:ext cx="344060" cy="282982"/>
+            </a:xfrm>
+            <a:prstGeom prst="trapezoid">
+              <a:avLst>
+                <a:gd name="adj" fmla="val 60792"/>
+              </a:avLst>
+            </a:prstGeom>
+            <a:noFill/>
+            <a:ln w="25400" cap="flat" cmpd="sng">
+              <a:solidFill>
+                <a:schemeClr val="dk2"/>
+              </a:solidFill>
+              <a:prstDash val="solid"/>
+              <a:round/>
+              <a:headEnd type="none" w="sm" len="sm"/>
+              <a:tailEnd type="none" w="sm" len="sm"/>
+            </a:ln>
+          </p:spPr>
+          <p:txBody>
+            <a:bodyPr spcFirstLastPara="1" wrap="square" lIns="91425" tIns="91425" rIns="91425" bIns="91425" anchor="ctr" anchorCtr="0">
+              <a:noAutofit/>
+            </a:bodyPr>
+            <a:lstStyle/>
+            <a:p>
+              <a:pPr marL="0" lvl="0" indent="0" algn="l" rtl="0">
+                <a:spcBef>
+                  <a:spcPts val="0"/>
+                </a:spcBef>
+                <a:spcAft>
+                  <a:spcPts val="0"/>
+                </a:spcAft>
+                <a:buNone/>
+              </a:pPr>
+              <a:endParaRPr/>
+            </a:p>
+          </p:txBody>
+        </p:sp>
+        <p:sp>
+          <p:nvSpPr>
+            <p:cNvPr id="61" name="Google Shape;61;p3"/>
+            <p:cNvSpPr txBox="1"/>
+            <p:nvPr/>
+          </p:nvSpPr>
+          <p:spPr>
+            <a:xfrm>
+              <a:off x="516090" y="848948"/>
+              <a:ext cx="344060" cy="282982"/>
+            </a:xfrm>
+            <a:prstGeom prst="rect">
+              <a:avLst/>
+            </a:prstGeom>
+            <a:noFill/>
+            <a:ln>
+              <a:noFill/>
+            </a:ln>
+          </p:spPr>
+          <p:txBody>
+            <a:bodyPr spcFirstLastPara="1" wrap="square" lIns="10150" tIns="10150" rIns="10150" bIns="10150" anchor="ctr" anchorCtr="0">
+              <a:noAutofit/>
+            </a:bodyPr>
+            <a:lstStyle/>
+            <a:p>
+              <a:pPr marL="0" marR="0" lvl="0" indent="0" algn="ctr" rtl="0">
+                <a:lnSpc>
+                  <a:spcPct val="90000"/>
+                </a:lnSpc>
+                <a:spcBef>
+                  <a:spcPts val="0"/>
+                </a:spcBef>
+                <a:spcAft>
+                  <a:spcPts val="0"/>
+                </a:spcAft>
+                <a:buClr>
+                  <a:srgbClr val="262626"/>
+                </a:buClr>
+                <a:buSzPts val="800"/>
+                <a:buFont typeface="Arial"/>
+                <a:buNone/>
+              </a:pPr>
+              <a:r>
+                <a:rPr lang="ja-JP" sz="800" b="1">
+                  <a:solidFill>
+                    <a:srgbClr val="262626"/>
+                  </a:solidFill>
+                  <a:latin typeface="Arial"/>
+                  <a:ea typeface="Arial"/>
+                  <a:cs typeface="Arial"/>
+                  <a:sym typeface="Arial"/>
+                </a:rPr>
+                <a:t>伸長</a:t>
+              </a:r>
+              <a:endParaRPr/>
+            </a:p>
+          </p:txBody>
+        </p:sp>
+      </p:grpSp>
+      <p:pic>
+        <p:nvPicPr>
+          <p:cNvPr id="62" name="Google Shape;62;p3" descr="LINE公式アカウントのロゴの使用方法とは？種類やダウンロード方法、利用時の注意点を紹介 | Mico（ミコ）"/>
+          <p:cNvPicPr preferRelativeResize="0"/>
+          <p:nvPr/>
+        </p:nvPicPr>
+        <p:blipFill rotWithShape="1">
+          <a:blip r:embed="rId2">
+            <a:alphaModFix/>
+          </a:blip>
+          <a:srcRect/>
+          <a:stretch/>
+        </p:blipFill>
+        <p:spPr>
+          <a:xfrm>
+            <a:off x="351381" y="1234746"/>
+            <a:ext cx="656177" cy="655521"/>
+          </a:xfrm>
+          <a:prstGeom prst="rect">
+            <a:avLst/>
+          </a:prstGeom>
+          <a:noFill/>
+          <a:ln>
+            <a:noFill/>
+          </a:ln>
+        </p:spPr>
+      </p:pic>
+      <p:sp>
+        <p:nvSpPr>
+          <p:cNvPr id="63" name="Rounded Rectangle 62"/>
+          <p:cNvSpPr/>
+          <p:nvPr/>
+        </p:nvSpPr>
+        <p:spPr>
+          <a:xfrm>
+            <a:off x="544108" y="3068960"/>
+            <a:ext cx="4317452" cy="1463040"/>
+          </a:xfrm>
+          <a:prstGeom prst="roundRect">
+            <a:avLst>
+              <a:gd name="adj" fmla="val 6000"/>
+            </a:avLst>
+          </a:prstGeom>
+          <a:solidFill>
+            <a:srgbClr val="EAF0FA"/>
+          </a:solidFill>
+          <a:ln w="12700">
+            <a:solidFill>
+              <a:srgbClr val="3467B2"/>
+            </a:solidFill>
+          </a:ln>
+          <a:effectLst/>
+        </p:spPr>
+        <p:style>
+          <a:lnRef idx="1">
+            <a:schemeClr val="accent1"/>
+          </a:lnRef>
+          <a:fillRef idx="3">
+            <a:schemeClr val="accent1"/>
+          </a:fillRef>
+          <a:effectRef idx="2">
+            <a:schemeClr val="accent1"/>
+          </a:effectRef>
+          <a:fontRef idx="minor">
+            <a:schemeClr val="lt1"/>
+          </a:fontRef>
+        </p:style>
+        <p:txBody>
+          <a:bodyPr wrap="square" lIns="228600" rIns="182880" rtlCol="0" anchor="ctr"/>
+          <a:lstStyle/>
+          <a:p>
+            <a:pPr algn="l"/>
+            <a:r>
+              <a:rPr sz="1900" b="1">
+                <a:solidFill>
+                  <a:srgbClr val="15133D"/>
+                </a:solidFill>
+                <a:latin typeface="メイリオ"/>
+              </a:rPr>
+              <a:t>移せるもの</a:t>
+            </a:r>
+          </a:p>
+          <a:p>
+            <a:pPr algn="l">
+              <a:lnSpc>
+                <a:spcPct val="115000"/>
+              </a:lnSpc>
+              <a:spcBef>
+                <a:spcPts val="600"/>
+              </a:spcBef>
+            </a:pPr>
+            <a:r>
+              <a:rPr sz="1300">
+                <a:solidFill>
+                  <a:srgbClr val="333333"/>
+                </a:solidFill>
+                <a:latin typeface="メイリオ"/>
+              </a:rPr>
+              <a:t>アカウント・グループ、クレジットカード情報と権限（移すか選べる）、キャンペーン・広告グループ・広告の設定、画像・動画、オーディエンス。</a:t>
+            </a:r>
+          </a:p>
+        </p:txBody>
+      </p:sp>
+      <p:sp>
+        <p:nvSpPr>
+          <p:cNvPr id="64" name="Rounded Rectangle 63"/>
+          <p:cNvSpPr/>
+          <p:nvPr/>
+        </p:nvSpPr>
+        <p:spPr>
+          <a:xfrm>
+            <a:off x="5044440" y="3068960"/>
+            <a:ext cx="4317452" cy="1463040"/>
+          </a:xfrm>
+          <a:prstGeom prst="roundRect">
+            <a:avLst>
+              <a:gd name="adj" fmla="val 6000"/>
+            </a:avLst>
+          </a:prstGeom>
+          <a:solidFill>
+            <a:srgbClr val="EAF0FA"/>
+          </a:solidFill>
+          <a:ln w="12700">
+            <a:solidFill>
+              <a:srgbClr val="3467B2"/>
+            </a:solidFill>
+          </a:ln>
+          <a:effectLst/>
+        </p:spPr>
+        <p:style>
+          <a:lnRef idx="1">
+            <a:schemeClr val="accent1"/>
+          </a:lnRef>
+          <a:fillRef idx="3">
+            <a:schemeClr val="accent1"/>
+          </a:fillRef>
+          <a:effectRef idx="2">
+            <a:schemeClr val="accent1"/>
+          </a:effectRef>
+          <a:fontRef idx="minor">
+            <a:schemeClr val="lt1"/>
+          </a:fontRef>
+        </p:style>
+        <p:txBody>
+          <a:bodyPr wrap="square" lIns="228600" rIns="182880" rtlCol="0" anchor="ctr"/>
+          <a:lstStyle/>
+          <a:p>
+            <a:pPr algn="l"/>
+            <a:r>
+              <a:rPr sz="1900" b="1">
+                <a:solidFill>
+                  <a:srgbClr val="15133D"/>
+                </a:solidFill>
+                <a:latin typeface="メイリオ"/>
+              </a:rPr>
+              <a:t>移せないもの</a:t>
+            </a:r>
+          </a:p>
+          <a:p>
+            <a:pPr algn="l">
+              <a:lnSpc>
+                <a:spcPct val="115000"/>
+              </a:lnSpc>
+              <a:spcBef>
+                <a:spcPts val="600"/>
+              </a:spcBef>
+            </a:pPr>
+            <a:r>
+              <a:rPr sz="1300">
+                <a:solidFill>
+                  <a:srgbClr val="333333"/>
+                </a:solidFill>
+                <a:latin typeface="メイリオ"/>
+              </a:rPr>
+              <a:t>「商品フィードから販売」のキャンペーン、LINE Tag・コンバージョン設定、過去の実績・レポート（自動入札の学習データ含む）、外部ツールとのAPI連携。</a:t>
+            </a:r>
+          </a:p>
+        </p:txBody>
+      </p:sp>
+      <p:sp>
+        <p:nvSpPr>
+          <p:cNvPr id="65" name="Rounded Rectangle 64"/>
+          <p:cNvSpPr/>
+          <p:nvPr/>
+        </p:nvSpPr>
+        <p:spPr>
+          <a:xfrm>
+            <a:off x="544108" y="4714880"/>
+            <a:ext cx="4317452" cy="1463040"/>
+          </a:xfrm>
+          <a:prstGeom prst="roundRect">
+            <a:avLst>
+              <a:gd name="adj" fmla="val 6000"/>
+            </a:avLst>
+          </a:prstGeom>
+          <a:solidFill>
+            <a:srgbClr val="EAF0FA"/>
+          </a:solidFill>
+          <a:ln w="12700">
+            <a:solidFill>
+              <a:srgbClr val="3467B2"/>
+            </a:solidFill>
+          </a:ln>
+          <a:effectLst/>
+        </p:spPr>
+        <p:style>
+          <a:lnRef idx="1">
+            <a:schemeClr val="accent1"/>
+          </a:lnRef>
+          <a:fillRef idx="3">
+            <a:schemeClr val="accent1"/>
+          </a:fillRef>
+          <a:effectRef idx="2">
+            <a:schemeClr val="accent1"/>
+          </a:effectRef>
+          <a:fontRef idx="minor">
+            <a:schemeClr val="lt1"/>
+          </a:fontRef>
+        </p:style>
+        <p:txBody>
+          <a:bodyPr wrap="square" lIns="228600" rIns="182880" rtlCol="0" anchor="ctr"/>
+          <a:lstStyle/>
+          <a:p>
+            <a:pPr algn="l"/>
+            <a:r>
+              <a:rPr sz="1900" b="1">
+                <a:solidFill>
+                  <a:srgbClr val="15133D"/>
+                </a:solidFill>
+                <a:latin typeface="メイリオ"/>
+              </a:rPr>
+              <a:t>事前準備</a:t>
+            </a:r>
+          </a:p>
+          <a:p>
+            <a:pPr algn="l">
+              <a:lnSpc>
+                <a:spcPct val="115000"/>
+              </a:lnSpc>
+              <a:spcBef>
+                <a:spcPts val="600"/>
+              </a:spcBef>
+            </a:pPr>
+            <a:r>
+              <a:rPr sz="1300">
+                <a:solidFill>
+                  <a:srgbClr val="333333"/>
+                </a:solidFill>
+                <a:latin typeface="メイリオ"/>
+              </a:rPr>
+              <a:t>LINE広告と接続しているLINE公式アカウントを、同じ認証済みビジネスマネージャーに接続。操作する方はビジネスIDを統合しておく。</a:t>
+            </a:r>
+          </a:p>
+        </p:txBody>
+      </p:sp>
+      <p:sp>
+        <p:nvSpPr>
+          <p:cNvPr id="66" name="Rounded Rectangle 65"/>
+          <p:cNvSpPr/>
+          <p:nvPr/>
+        </p:nvSpPr>
+        <p:spPr>
+          <a:xfrm>
+            <a:off x="5044440" y="4714880"/>
+            <a:ext cx="4317452" cy="1463040"/>
+          </a:xfrm>
+          <a:prstGeom prst="roundRect">
+            <a:avLst>
+              <a:gd name="adj" fmla="val 6000"/>
+            </a:avLst>
+          </a:prstGeom>
+          <a:solidFill>
+            <a:srgbClr val="EAF0FA"/>
+          </a:solidFill>
+          <a:ln w="12700">
+            <a:solidFill>
+              <a:srgbClr val="3467B2"/>
+            </a:solidFill>
+          </a:ln>
+          <a:effectLst/>
+        </p:spPr>
+        <p:style>
+          <a:lnRef idx="1">
+            <a:schemeClr val="accent1"/>
+          </a:lnRef>
+          <a:fillRef idx="3">
+            <a:schemeClr val="accent1"/>
+          </a:fillRef>
+          <a:effectRef idx="2">
+            <a:schemeClr val="accent1"/>
+          </a:effectRef>
+          <a:fontRef idx="minor">
+            <a:schemeClr val="lt1"/>
+          </a:fontRef>
+        </p:style>
+        <p:txBody>
+          <a:bodyPr wrap="square" lIns="228600" rIns="182880" rtlCol="0" anchor="ctr"/>
+          <a:lstStyle/>
+          <a:p>
+            <a:pPr algn="l"/>
+            <a:r>
+              <a:rPr sz="1900" b="1">
+                <a:solidFill>
+                  <a:srgbClr val="15133D"/>
+                </a:solidFill>
+                <a:latin typeface="メイリオ"/>
+              </a:rPr>
+              <a:t>対象アカウントと移行後</a:t>
+            </a:r>
+          </a:p>
+          <a:p>
+            <a:pPr algn="l">
+              <a:lnSpc>
+                <a:spcPct val="115000"/>
+              </a:lnSpc>
+              <a:spcBef>
+                <a:spcPts val="600"/>
+              </a:spcBef>
+            </a:pPr>
+            <a:r>
+              <a:rPr sz="1300">
+                <a:solidFill>
+                  <a:srgbClr val="333333"/>
+                </a:solidFill>
+                <a:latin typeface="メイリオ"/>
+              </a:rPr>
+              <a:t>日本向け配信・運用型・審査承認済みのアカウントが対象。移行後のキャンペーンは配信オフなので、設定を確認してからオンにする。</a:t>
+            </a:r>
+          </a:p>
+        </p:txBody>
+      </p:sp>
+    </p:spTree>
+  </p:cSld>
+  <p:clrMapOvr>
+    <a:masterClrMapping/>
+  </p:clrMapOvr>
+</p:sld>
+</file>
+
+<file path=ppt/slides/slide7.xml><?xml version="1.0" encoding="utf-8"?>
 <p:sld xmlns:a="http://schemas.openxmlformats.org/drawingml/2006/main" xmlns:r="http://schemas.openxmlformats.org/officeDocument/2006/relationships" xmlns:p="http://schemas.openxmlformats.org/presentationml/2006/main">
   <p:cSld>
     <p:spTree>

--- a/LINE広告トレンドレポート_2026年10月.pptx
+++ b/LINE広告トレンドレポート_2026年10月.pptx
@@ -3475,7 +3475,7 @@
                 <a:cs typeface="Meiryo"/>
                 <a:sym typeface="Meiryo"/>
               </a:rPr>
-              <a:t>【LINE VOOM】サービス終了に伴う広告枠の終了</a:t>
+              <a:t>【LINE VOOM】サービス終了に伴う広告配信の終了</a:t>
             </a:r>
             <a:endParaRPr sz="1500" b="1" i="0" u="none" strike="noStrike" cap="none">
               <a:solidFill>
@@ -10386,7 +10386,7 @@
                 <a:cs typeface="Meiryo"/>
                 <a:sym typeface="Meiryo"/>
               </a:rPr>
-              <a:t>【LINE VOOM】サービス終了に伴う広告枠の終了</a:t>
+              <a:t>【LINE VOOM】サービス終了に伴う広告配信の終了</a:t>
             </a:r>
             <a:endParaRPr sz="1600" b="1">
               <a:solidFill>
@@ -10729,7 +10729,7 @@
                 <a:cs typeface="Meiryo"/>
                 <a:sym typeface="Meiryo"/>
               </a:rPr>
-              <a:t>2026年9月30日（水）11時に、LINE VOOMのサービスが終了した。</a:t>
+              <a:t>LINEのリニューアルに伴い、2026年9月30日（水）にLINE VOOMのサービスが終了した。</a:t>
             </a:r>
             <a:endParaRPr sz="1200" b="1">
               <a:solidFill>
@@ -10761,7 +10761,7 @@
                 <a:cs typeface="Meiryo"/>
                 <a:sym typeface="Meiryo"/>
               </a:rPr>
-              <a:t>あわせて、LINE VOOM面への広告配信も終了している。</a:t>
+              <a:t>LINEヤフー広告 ディスプレイ広告（運用型）・LINE広告ともに、VOOM面への広告配信も終了。</a:t>
             </a:r>
             <a:endParaRPr/>
           </a:p>
@@ -10785,7 +10785,7 @@
                 <a:cs typeface="Meiryo"/>
                 <a:sym typeface="Meiryo"/>
               </a:rPr>
-              <a:t>LINEアプリのVOOMタブは、ショッピングタブに切り替わる。</a:t>
+              <a:t>終了前の配信実績は、終了後も配信面ごとに確認できる。</a:t>
             </a:r>
             <a:endParaRPr sz="1400" b="1">
               <a:solidFill>
@@ -11315,292 +11315,14 @@
       </p:pic>
       <p:sp>
         <p:nvSpPr>
-          <p:cNvPr id="63" name="Rectangle 62"/>
-          <p:cNvSpPr/>
-          <p:nvPr/>
-        </p:nvSpPr>
-        <p:spPr>
-          <a:xfrm>
-            <a:off x="544108" y="3068960"/>
-            <a:ext cx="4180292" cy="274320"/>
-          </a:xfrm>
-          <a:prstGeom prst="rect">
-            <a:avLst/>
-          </a:prstGeom>
-          <a:solidFill>
-            <a:srgbClr val="F2F2F2"/>
-          </a:solidFill>
-          <a:ln>
-            <a:noFill/>
-          </a:ln>
-          <a:effectLst/>
-        </p:spPr>
-        <p:style>
-          <a:lnRef idx="1">
-            <a:schemeClr val="accent1"/>
-          </a:lnRef>
-          <a:fillRef idx="3">
-            <a:schemeClr val="accent1"/>
-          </a:fillRef>
-          <a:effectRef idx="2">
-            <a:schemeClr val="accent1"/>
-          </a:effectRef>
-          <a:fontRef idx="minor">
-            <a:schemeClr val="lt1"/>
-          </a:fontRef>
-        </p:style>
-        <p:txBody>
-          <a:bodyPr wrap="square" rIns="45720" rtlCol="0" anchor="ctr"/>
-          <a:lstStyle/>
-          <a:p>
-            <a:pPr algn="ctr"/>
-            <a:r>
-              <a:rPr sz="1300" b="1">
-                <a:solidFill>
-                  <a:srgbClr val="333333"/>
-                </a:solidFill>
-                <a:latin typeface="メイリオ"/>
-              </a:rPr>
-              <a:t>AS-IS</a:t>
-            </a:r>
-          </a:p>
-        </p:txBody>
-      </p:sp>
-      <p:sp>
-        <p:nvSpPr>
-          <p:cNvPr id="64" name="Rectangle 63"/>
-          <p:cNvSpPr/>
-          <p:nvPr/>
-        </p:nvSpPr>
-        <p:spPr>
-          <a:xfrm>
-            <a:off x="544108" y="3343280"/>
-            <a:ext cx="4180292" cy="640080"/>
-          </a:xfrm>
-          <a:prstGeom prst="rect">
-            <a:avLst/>
-          </a:prstGeom>
-          <a:solidFill>
-            <a:srgbClr val="F2F2F2"/>
-          </a:solidFill>
-          <a:ln w="12700">
-            <a:solidFill>
-              <a:srgbClr val="D9D9D9"/>
-            </a:solidFill>
-          </a:ln>
-          <a:effectLst/>
-        </p:spPr>
-        <p:style>
-          <a:lnRef idx="1">
-            <a:schemeClr val="accent1"/>
-          </a:lnRef>
-          <a:fillRef idx="3">
-            <a:schemeClr val="accent1"/>
-          </a:fillRef>
-          <a:effectRef idx="2">
-            <a:schemeClr val="accent1"/>
-          </a:effectRef>
-          <a:fontRef idx="minor">
-            <a:schemeClr val="lt1"/>
-          </a:fontRef>
-        </p:style>
-        <p:txBody>
-          <a:bodyPr wrap="square" lIns="182880" tIns="54864" rIns="137160" bIns="54864" rtlCol="0" anchor="ctr"/>
-          <a:lstStyle/>
-          <a:p>
-            <a:pPr algn="ctr">
-              <a:lnSpc>
-                <a:spcPct val="110000"/>
-              </a:lnSpc>
-            </a:pPr>
-            <a:r>
-              <a:rPr sz="1800" b="1">
-                <a:solidFill>
-                  <a:srgbClr val="15133D"/>
-                </a:solidFill>
-                <a:latin typeface="メイリオ"/>
-              </a:rPr>
-              <a:t>LINE VOOM面に広告を配信できる</a:t>
-            </a:r>
-          </a:p>
-        </p:txBody>
-      </p:sp>
-      <p:sp>
-        <p:nvSpPr>
-          <p:cNvPr id="65" name="TextBox 64"/>
-          <p:cNvSpPr txBox="1"/>
-          <p:nvPr/>
-        </p:nvSpPr>
-        <p:spPr>
-          <a:xfrm>
-            <a:off x="4724400" y="3068960"/>
-            <a:ext cx="457200" cy="914400"/>
-          </a:xfrm>
-          <a:prstGeom prst="rect">
-            <a:avLst/>
-          </a:prstGeom>
-          <a:noFill/>
-        </p:spPr>
-        <p:txBody>
-          <a:bodyPr wrap="none" anchor="ctr">
-            <a:spAutoFit/>
-          </a:bodyPr>
-          <a:lstStyle/>
-          <a:p>
-            <a:pPr algn="ctr"/>
-            <a:r>
-              <a:rPr sz="1800" b="1">
-                <a:solidFill>
-                  <a:srgbClr val="3467B2"/>
-                </a:solidFill>
-                <a:latin typeface="メイリオ"/>
-              </a:rPr>
-              <a:t>▶</a:t>
-            </a:r>
-          </a:p>
-        </p:txBody>
-      </p:sp>
-      <p:sp>
-        <p:nvSpPr>
-          <p:cNvPr id="66" name="Rectangle 65"/>
-          <p:cNvSpPr/>
-          <p:nvPr/>
-        </p:nvSpPr>
-        <p:spPr>
-          <a:xfrm>
-            <a:off x="5181600" y="3068960"/>
-            <a:ext cx="4180292" cy="274320"/>
-          </a:xfrm>
-          <a:prstGeom prst="rect">
-            <a:avLst/>
-          </a:prstGeom>
-          <a:solidFill>
-            <a:srgbClr val="15133D"/>
-          </a:solidFill>
-          <a:ln>
-            <a:noFill/>
-          </a:ln>
-          <a:effectLst/>
-        </p:spPr>
-        <p:style>
-          <a:lnRef idx="1">
-            <a:schemeClr val="accent1"/>
-          </a:lnRef>
-          <a:fillRef idx="3">
-            <a:schemeClr val="accent1"/>
-          </a:fillRef>
-          <a:effectRef idx="2">
-            <a:schemeClr val="accent1"/>
-          </a:effectRef>
-          <a:fontRef idx="minor">
-            <a:schemeClr val="lt1"/>
-          </a:fontRef>
-        </p:style>
-        <p:txBody>
-          <a:bodyPr wrap="square" rIns="45720" rtlCol="0" anchor="ctr"/>
-          <a:lstStyle/>
-          <a:p>
-            <a:pPr algn="ctr"/>
-            <a:r>
-              <a:rPr sz="1300" b="1">
-                <a:solidFill>
-                  <a:srgbClr val="FFFFFF"/>
-                </a:solidFill>
-                <a:latin typeface="メイリオ"/>
-              </a:rPr>
-              <a:t>TO-BE</a:t>
-            </a:r>
-          </a:p>
-        </p:txBody>
-      </p:sp>
-      <p:sp>
-        <p:nvSpPr>
-          <p:cNvPr id="67" name="Rectangle 66"/>
-          <p:cNvSpPr/>
-          <p:nvPr/>
-        </p:nvSpPr>
-        <p:spPr>
-          <a:xfrm>
-            <a:off x="5181600" y="3343280"/>
-            <a:ext cx="4180292" cy="640080"/>
-          </a:xfrm>
-          <a:prstGeom prst="rect">
-            <a:avLst/>
-          </a:prstGeom>
-          <a:solidFill>
-            <a:srgbClr val="EAF0FA"/>
-          </a:solidFill>
-          <a:ln w="12700">
-            <a:solidFill>
-              <a:srgbClr val="3467B2"/>
-            </a:solidFill>
-          </a:ln>
-          <a:effectLst/>
-        </p:spPr>
-        <p:style>
-          <a:lnRef idx="1">
-            <a:schemeClr val="accent1"/>
-          </a:lnRef>
-          <a:fillRef idx="3">
-            <a:schemeClr val="accent1"/>
-          </a:fillRef>
-          <a:effectRef idx="2">
-            <a:schemeClr val="accent1"/>
-          </a:effectRef>
-          <a:fontRef idx="minor">
-            <a:schemeClr val="lt1"/>
-          </a:fontRef>
-        </p:style>
-        <p:txBody>
-          <a:bodyPr wrap="square" lIns="182880" tIns="54864" rIns="137160" bIns="54864" rtlCol="0" anchor="ctr"/>
-          <a:lstStyle/>
-          <a:p>
-            <a:pPr algn="ctr">
-              <a:lnSpc>
-                <a:spcPct val="110000"/>
-              </a:lnSpc>
-            </a:pPr>
-            <a:r>
-              <a:rPr sz="1600" b="1">
-                <a:solidFill>
-                  <a:srgbClr val="15133D"/>
-                </a:solidFill>
-                <a:latin typeface="メイリオ"/>
-              </a:rPr>
-              <a:t>VOOM面への広告配信は終了</a:t>
-            </a:r>
-          </a:p>
-          <a:p>
-            <a:pPr>
-              <a:lnSpc>
-                <a:spcPct val="110000"/>
-              </a:lnSpc>
-              <a:spcBef>
-                <a:spcPts val="500"/>
-              </a:spcBef>
-            </a:pPr>
-            <a:r>
-              <a:rPr sz="1050">
-                <a:solidFill>
-                  <a:srgbClr val="333333"/>
-                </a:solidFill>
-                <a:latin typeface="メイリオ"/>
-              </a:rPr>
-              <a:t>9/30 11時にサービス終了。投稿・閲覧もできない</a:t>
-            </a:r>
-          </a:p>
-        </p:txBody>
-      </p:sp>
-      <p:sp>
-        <p:nvSpPr>
           <p:cNvPr id="68" name="Rounded Rectangle 67"/>
           <p:cNvSpPr/>
           <p:nvPr/>
         </p:nvSpPr>
         <p:spPr>
           <a:xfrm>
-            <a:off x="544108" y="4211960"/>
-            <a:ext cx="4317452" cy="1371600"/>
+            <a:off x="548640" y="3108960"/>
+            <a:ext cx="2816352" cy="1325880"/>
           </a:xfrm>
           <a:prstGeom prst="roundRect">
             <a:avLst>
@@ -11637,13 +11359,13 @@
           <a:p>
             <a:pPr algn="l"/>
             <a:r>
-              <a:rPr sz="1900" b="1">
+              <a:rPr sz="1700" b="1">
                 <a:solidFill>
                   <a:srgbClr val="15133D"/>
                 </a:solidFill>
                 <a:latin typeface="メイリオ"/>
               </a:rPr>
-              <a:t>VOOMタブはショッピングタブへ</a:t>
+              <a:t>① VOOM面だけ指定</a:t>
             </a:r>
           </a:p>
           <a:p>
@@ -11656,13 +11378,13 @@
               </a:spcBef>
             </a:pPr>
             <a:r>
-              <a:rPr sz="1300">
+              <a:rPr sz="1200">
                 <a:solidFill>
                   <a:srgbClr val="333333"/>
                 </a:solidFill>
                 <a:latin typeface="メイリオ"/>
               </a:rPr>
-              <a:t>LINEアプリ下部のVOOMタブは、ショッピングタブに切り替わる。</a:t>
+              <a:t>終了後は配信されない。配信設定がONのままでも、配信できる面がなくなるため。</a:t>
             </a:r>
           </a:p>
         </p:txBody>
@@ -11675,8 +11397,8 @@
         </p:nvSpPr>
         <p:spPr>
           <a:xfrm>
-            <a:off x="5044440" y="4211960"/>
-            <a:ext cx="4317452" cy="1371600"/>
+            <a:off x="3547872" y="3108960"/>
+            <a:ext cx="2816352" cy="1325880"/>
           </a:xfrm>
           <a:prstGeom prst="roundRect">
             <a:avLst>
@@ -11713,13 +11435,13 @@
           <a:p>
             <a:pPr algn="l"/>
             <a:r>
-              <a:rPr sz="1900" b="1">
+              <a:rPr sz="1700" b="1">
                 <a:solidFill>
                   <a:srgbClr val="15133D"/>
                 </a:solidFill>
                 <a:latin typeface="メイリオ"/>
               </a:rPr>
-              <a:t>VOOM面向けの設定は見直し</a:t>
+              <a:t>② VOOM面＋他の面</a:t>
             </a:r>
           </a:p>
           <a:p>
@@ -11732,13 +11454,182 @@
               </a:spcBef>
             </a:pPr>
             <a:r>
-              <a:rPr sz="1300">
+              <a:rPr sz="1200">
                 <a:solidFill>
                   <a:srgbClr val="333333"/>
                 </a:solidFill>
                 <a:latin typeface="メイリオ"/>
               </a:rPr>
-              <a:t>VOOM面を前提にした配信設定・クリエイティブは、残りの配信面に合わせて見直す。</a:t>
+              <a:t>VOOM面以外への配信は、そのまま続く。</a:t>
+            </a:r>
+          </a:p>
+        </p:txBody>
+      </p:sp>
+      <p:sp>
+        <p:nvSpPr>
+          <p:cNvPr id="71" name="Rounded Rectangle 68_v1"/>
+          <p:cNvSpPr/>
+          <p:nvPr/>
+        </p:nvSpPr>
+        <p:spPr>
+          <a:xfrm>
+            <a:off x="548640" y="4663440"/>
+            <a:ext cx="8814816" cy="1417320"/>
+          </a:xfrm>
+          <a:prstGeom prst="roundRect">
+            <a:avLst>
+              <a:gd name="adj" fmla="val 6000"/>
+            </a:avLst>
+          </a:prstGeom>
+          <a:solidFill>
+            <a:srgbClr val="EAF0FA"/>
+          </a:solidFill>
+          <a:ln w="12700">
+            <a:solidFill>
+              <a:srgbClr val="3467B2"/>
+            </a:solidFill>
+          </a:ln>
+          <a:effectLst/>
+        </p:spPr>
+        <p:style>
+          <a:lnRef idx="1">
+            <a:schemeClr val="accent1"/>
+          </a:lnRef>
+          <a:fillRef idx="3">
+            <a:schemeClr val="accent1"/>
+          </a:fillRef>
+          <a:effectRef idx="2">
+            <a:schemeClr val="accent1"/>
+          </a:effectRef>
+          <a:fontRef idx="minor">
+            <a:schemeClr val="lt1"/>
+          </a:fontRef>
+        </p:style>
+        <p:txBody>
+          <a:bodyPr wrap="square" lIns="228600" rIns="182880" rtlCol="0" anchor="ctr"/>
+          <a:lstStyle/>
+          <a:p>
+            <a:pPr algn="l"/>
+            <a:r>
+              <a:rPr sz="1900" b="1">
+                <a:solidFill>
+                  <a:srgbClr val="15133D"/>
+                </a:solidFill>
+                <a:latin typeface="メイリオ"/>
+              </a:rPr>
+              <a:t>やるべきこと</a:t>
+            </a:r>
+          </a:p>
+          <a:p>
+            <a:pPr algn="l">
+              <a:lnSpc>
+                <a:spcPct val="115000"/>
+              </a:lnSpc>
+              <a:spcBef>
+                <a:spcPts val="600"/>
+              </a:spcBef>
+            </a:pPr>
+            <a:r>
+              <a:rPr sz="1300">
+                <a:solidFill>
+                  <a:srgbClr val="333333"/>
+                </a:solidFill>
+                <a:latin typeface="メイリオ"/>
+              </a:rPr>
+              <a:t>LINEヤフー広告：配信先リストの中のVOOM関連の設定は自動では消えないため、必要に応じて削除する。</a:t>
+            </a:r>
+            <a:br>
+              <a:rPr sz="1300">
+                <a:solidFill>
+                  <a:srgbClr val="333333"/>
+                </a:solidFill>
+                <a:latin typeface="メイリオ"/>
+              </a:rPr>
+            </a:br>
+            <a:r>
+              <a:rPr sz="1300">
+                <a:solidFill>
+                  <a:srgbClr val="333333"/>
+                </a:solidFill>
+                <a:latin typeface="メイリオ"/>
+              </a:rPr>
+              <a:t>LINE広告：配信先の「LINE VOOM」は9月30日に選択肢ごと管理画面から消えるため、VOOMだけを選んでいた広告は配信先を見直す。</a:t>
+            </a:r>
+          </a:p>
+        </p:txBody>
+      </p:sp>
+      <p:sp>
+        <p:nvSpPr>
+          <p:cNvPr id="70" name="Rounded Rectangle 67_v0"/>
+          <p:cNvSpPr/>
+          <p:nvPr/>
+        </p:nvSpPr>
+        <p:spPr>
+          <a:xfrm>
+            <a:off x="6547104" y="3108960"/>
+            <a:ext cx="2816352" cy="1325880"/>
+          </a:xfrm>
+          <a:prstGeom prst="roundRect">
+            <a:avLst>
+              <a:gd name="adj" fmla="val 6000"/>
+            </a:avLst>
+          </a:prstGeom>
+          <a:solidFill>
+            <a:srgbClr val="EAF0FA"/>
+          </a:solidFill>
+          <a:ln w="12700">
+            <a:solidFill>
+              <a:srgbClr val="3467B2"/>
+            </a:solidFill>
+          </a:ln>
+          <a:effectLst/>
+        </p:spPr>
+        <p:style>
+          <a:lnRef idx="1">
+            <a:schemeClr val="accent1"/>
+          </a:lnRef>
+          <a:fillRef idx="3">
+            <a:schemeClr val="accent1"/>
+          </a:fillRef>
+          <a:effectRef idx="2">
+            <a:schemeClr val="accent1"/>
+          </a:effectRef>
+          <a:fontRef idx="minor">
+            <a:schemeClr val="lt1"/>
+          </a:fontRef>
+        </p:style>
+        <p:txBody>
+          <a:bodyPr wrap="square" lIns="228600" rIns="182880" rtlCol="0" anchor="ctr"/>
+          <a:lstStyle/>
+          <a:p>
+            <a:pPr algn="l"/>
+            <a:r>
+              <a:rPr sz="1700" b="1">
+                <a:solidFill>
+                  <a:srgbClr val="15133D"/>
+                </a:solidFill>
+                <a:latin typeface="メイリオ"/>
+              </a:rPr>
+              <a:t>③ VOOM面を除外</a:t>
+            </a:r>
+          </a:p>
+          <a:p>
+            <a:pPr algn="l">
+              <a:lnSpc>
+                <a:spcPct val="115000"/>
+              </a:lnSpc>
+              <a:spcBef>
+                <a:spcPts val="600"/>
+              </a:spcBef>
+            </a:pPr>
+            <a:r>
+              <a:rPr sz="1200">
+                <a:solidFill>
+                  <a:srgbClr val="333333"/>
+                </a:solidFill>
+                <a:latin typeface="メイリオ"/>
+              </a:rPr>
+              <a:t>VOOM終了による影響はない。</a:t>
             </a:r>
           </a:p>
         </p:txBody>

--- a/LINE広告トレンドレポート_2026年10月.pptx
+++ b/LINE広告トレンドレポート_2026年10月.pptx
@@ -5,40 +5,40 @@
     <p:sldMasterId id="2147483648" r:id="rId1"/>
   </p:sldMasterIdLst>
   <p:notesMasterIdLst>
-    <p:notesMasterId r:id="rId7"/>
+    <p:notesMasterId r:id="rId9"/>
   </p:notesMasterIdLst>
   <p:sldIdLst>
     <p:sldId id="256" r:id="rId2"/>
     <p:sldId id="257" r:id="rId3"/>
     <p:sldId id="258" r:id="rId4"/>
     <p:sldId id="259" r:id="rId5"/>
-    <p:sldId id="261" r:id="rId20"/>
-    <p:sldId id="262" r:id="rId19"/>
-    <p:sldId id="260" r:id="rId6"/>
+    <p:sldId id="261" r:id="rId6"/>
+    <p:sldId id="262" r:id="rId7"/>
+    <p:sldId id="260" r:id="rId8"/>
   </p:sldIdLst>
   <p:sldSz cx="9906000" cy="6858000" type="A4"/>
   <p:notesSz cx="6799263" cy="9929813"/>
   <p:embeddedFontLst>
     <p:embeddedFont>
       <p:font typeface="Meiryo" panose="020B0604030504040204" pitchFamily="50" charset="-128"/>
-      <p:regular r:id="rId8"/>
-      <p:bold r:id="rId9"/>
-      <p:italic r:id="rId10"/>
-      <p:boldItalic r:id="rId11"/>
+      <p:regular r:id="rId10"/>
+      <p:bold r:id="rId11"/>
+      <p:italic r:id="rId12"/>
+      <p:boldItalic r:id="rId13"/>
     </p:embeddedFont>
     <p:embeddedFont>
       <p:font typeface="Meiryo" panose="020B0604030504040204" pitchFamily="50" charset="-128"/>
-      <p:regular r:id="rId8"/>
-      <p:bold r:id="rId9"/>
-      <p:italic r:id="rId10"/>
-      <p:boldItalic r:id="rId11"/>
+      <p:regular r:id="rId10"/>
+      <p:bold r:id="rId11"/>
+      <p:italic r:id="rId12"/>
+      <p:boldItalic r:id="rId13"/>
     </p:embeddedFont>
     <p:embeddedFont>
       <p:font typeface="Century Gothic" panose="020B0502020202020204" pitchFamily="34" charset="0"/>
-      <p:regular r:id="rId12"/>
-      <p:bold r:id="rId13"/>
-      <p:italic r:id="rId14"/>
-      <p:boldItalic r:id="rId15"/>
+      <p:regular r:id="rId14"/>
+      <p:bold r:id="rId15"/>
+      <p:italic r:id="rId16"/>
+      <p:boldItalic r:id="rId17"/>
     </p:embeddedFont>
   </p:embeddedFontLst>
   <p:defaultTextStyle>
@@ -271,8 +271,11 @@
     </a:lvl9pPr>
   </p:defaultTextStyle>
   <p:extLst>
+    <p:ext uri="{EFAFB233-063F-42B5-8137-9DF3F51BA10A}">
+      <p15:sldGuideLst xmlns:p15="http://schemas.microsoft.com/office/powerpoint/2012/main"/>
+    </p:ext>
     <p:ext uri="GoogleSlidesCustomDataVersion2">
-      <go:slidesCustomData xmlns:go="http://customooxmlschemas.google.com/" xmlns:ahyp="http://schemas.microsoft.com/office/drawing/2018/hyperlinkcolor" xmlns:p15="http://schemas.microsoft.com/office/powerpoint/2012/main" xmlns:p14="http://schemas.microsoft.com/office/powerpoint/2010/main" xmlns:com="http://schemas.openxmlformats.org/drawingml/2006/compatibility" xmlns:pvml="urn:schemas-microsoft-com:office:powerpoint" xmlns:v="urn:schemas-microsoft-com:vml" xmlns:o="urn:schemas-microsoft-com:office:office" xmlns:dgm="http://schemas.openxmlformats.org/drawingml/2006/diagram" xmlns:c="http://schemas.openxmlformats.org/drawingml/2006/chart" xmlns:mv="urn:schemas-microsoft-com:mac:vml" xmlns:mc="http://schemas.openxmlformats.org/markup-compatibility/2006" xmlns="" r:id="rId21" roundtripDataSignature="AMtx7mgQCoaVnfxROPv51WSWo8GFar7+Gw=="/>
+      <go:slidesCustomData xmlns="" xmlns:mc="http://schemas.openxmlformats.org/markup-compatibility/2006" xmlns:mv="urn:schemas-microsoft-com:mac:vml" xmlns:c="http://schemas.openxmlformats.org/drawingml/2006/chart" xmlns:dgm="http://schemas.openxmlformats.org/drawingml/2006/diagram" xmlns:o="urn:schemas-microsoft-com:office:office" xmlns:v="urn:schemas-microsoft-com:vml" xmlns:pvml="urn:schemas-microsoft-com:office:powerpoint" xmlns:com="http://schemas.openxmlformats.org/drawingml/2006/compatibility" xmlns:p14="http://schemas.microsoft.com/office/powerpoint/2010/main" xmlns:p15="http://schemas.microsoft.com/office/powerpoint/2012/main" xmlns:ahyp="http://schemas.microsoft.com/office/drawing/2018/hyperlinkcolor" xmlns:go="http://customooxmlschemas.google.com/" r:id="rId21" roundtripDataSignature="AMtx7mgQCoaVnfxROPv51WSWo8GFar7+Gw=="/>
     </p:ext>
   </p:extLst>
 </p:presentation>
@@ -4923,8 +4926,8 @@
         </p:nvSpPr>
         <p:spPr>
           <a:xfrm>
-            <a:off x="548640" y="5535519"/>
-            <a:ext cx="4315968" cy="865280"/>
+            <a:off x="548640" y="5535518"/>
+            <a:ext cx="4315968" cy="975009"/>
           </a:xfrm>
           <a:prstGeom prst="roundRect">
             <a:avLst>
@@ -4986,7 +4989,7 @@
               </a:spcBef>
             </a:pPr>
             <a:r>
-              <a:rPr dirty="0" sz="1100">
+              <a:rPr sz="1200" dirty="0">
                 <a:solidFill>
                   <a:srgbClr val="333333"/>
                 </a:solidFill>
@@ -5006,7 +5009,7 @@
         <p:spPr>
           <a:xfrm>
             <a:off x="5047488" y="5535519"/>
-            <a:ext cx="4315968" cy="865280"/>
+            <a:ext cx="4315968" cy="975008"/>
           </a:xfrm>
           <a:prstGeom prst="roundRect">
             <a:avLst>
@@ -5068,7 +5071,7 @@
               </a:spcBef>
             </a:pPr>
             <a:r>
-              <a:rPr dirty="0" sz="1100">
+              <a:rPr sz="1200" dirty="0">
                 <a:solidFill>
                   <a:srgbClr val="333333"/>
                 </a:solidFill>
@@ -5088,15 +5091,15 @@
           <p:nvPr/>
         </p:nvPicPr>
         <p:blipFill>
-          <a:blip r:embed="rId5"/>
+          <a:blip r:embed="rId4"/>
           <a:stretch>
             <a:fillRect/>
           </a:stretch>
         </p:blipFill>
         <p:spPr>
           <a:xfrm>
-            <a:off x="1615440" y="3072384"/>
-            <a:ext cx="6675120" cy="2353407"/>
+            <a:off x="1089833" y="2738190"/>
+            <a:ext cx="7555500" cy="2687602"/>
           </a:xfrm>
           <a:prstGeom prst="rect">
             <a:avLst/>
@@ -6472,7 +6475,7 @@
         <p:spPr>
           <a:xfrm>
             <a:off x="548640" y="5399382"/>
-            <a:ext cx="4315968" cy="1001417"/>
+            <a:ext cx="4315968" cy="1111146"/>
           </a:xfrm>
           <a:prstGeom prst="roundRect">
             <a:avLst>
@@ -6509,7 +6512,7 @@
           <a:p>
             <a:pPr algn="l"/>
             <a:r>
-              <a:rPr sz="1700" b="1">
+              <a:rPr sz="1700" b="1" dirty="0" err="1">
                 <a:solidFill>
                   <a:srgbClr val="15133D"/>
                 </a:solidFill>
@@ -6517,6 +6520,12 @@
               </a:rPr>
               <a:t>Yahoo!広告は自動で移行済み</a:t>
             </a:r>
+            <a:endParaRPr sz="1700" b="1" dirty="0">
+              <a:solidFill>
+                <a:srgbClr val="15133D"/>
+              </a:solidFill>
+              <a:latin typeface="メイリオ"/>
+            </a:endParaRPr>
           </a:p>
           <a:p>
             <a:pPr algn="l">
@@ -6528,13 +6537,22 @@
               </a:spcBef>
             </a:pPr>
             <a:r>
-              <a:rPr sz="1100">
+              <a:rPr sz="1200" dirty="0" err="1">
                 <a:solidFill>
                   <a:srgbClr val="333333"/>
                 </a:solidFill>
                 <a:latin typeface="メイリオ"/>
               </a:rPr>
-              <a:t>Yahoo!広告 ディスプレイ広告は、2026年4月の統合で自動的に移行。追加の対応は不要。</a:t>
+              <a:t>Yahoo!広告</a:t>
+            </a:r>
+            <a:r>
+              <a:rPr sz="1200" dirty="0">
+                <a:solidFill>
+                  <a:srgbClr val="333333"/>
+                </a:solidFill>
+                <a:latin typeface="メイリオ"/>
+              </a:rPr>
+              <a:t> ディスプレイ広告は、2026年4月の統合で自動的に移行。追加の対応は不要。</a:t>
             </a:r>
           </a:p>
         </p:txBody>
@@ -6548,7 +6566,7 @@
         <p:spPr>
           <a:xfrm>
             <a:off x="5047488" y="5399382"/>
-            <a:ext cx="4315968" cy="1001417"/>
+            <a:ext cx="4315968" cy="1111146"/>
           </a:xfrm>
           <a:prstGeom prst="roundRect">
             <a:avLst>
@@ -6585,7 +6603,7 @@
           <a:p>
             <a:pPr algn="l"/>
             <a:r>
-              <a:rPr sz="1700" b="1">
+              <a:rPr sz="1700" b="1" dirty="0">
                 <a:solidFill>
                   <a:srgbClr val="15133D"/>
                 </a:solidFill>
@@ -6604,13 +6622,56 @@
               </a:spcBef>
             </a:pPr>
             <a:r>
-              <a:rPr sz="1100">
+              <a:rPr sz="1200" dirty="0" err="1">
                 <a:solidFill>
                   <a:srgbClr val="333333"/>
                 </a:solidFill>
                 <a:latin typeface="メイリオ"/>
               </a:rPr>
-              <a:t>画面や仕様はそのまま引き継がれない。アカウントや配信設定は、移行ツールか手動で移す。</a:t>
+              <a:t>画面や仕様はそのまま引き継がれない</a:t>
+            </a:r>
+            <a:r>
+              <a:rPr sz="1200" dirty="0">
+                <a:solidFill>
+                  <a:srgbClr val="333333"/>
+                </a:solidFill>
+                <a:latin typeface="メイリオ"/>
+              </a:rPr>
+              <a:t>。</a:t>
+            </a:r>
+            <a:endParaRPr lang="en-US" sz="1200" dirty="0">
+              <a:solidFill>
+                <a:srgbClr val="333333"/>
+              </a:solidFill>
+              <a:latin typeface="メイリオ"/>
+            </a:endParaRPr>
+          </a:p>
+          <a:p>
+            <a:pPr algn="l">
+              <a:lnSpc>
+                <a:spcPct val="115000"/>
+              </a:lnSpc>
+              <a:spcBef>
+                <a:spcPts val="600"/>
+              </a:spcBef>
+            </a:pPr>
+            <a:r>
+              <a:rPr sz="1200" dirty="0" err="1">
+                <a:solidFill>
+                  <a:srgbClr val="333333"/>
+                </a:solidFill>
+                <a:latin typeface="メイリオ"/>
+              </a:rPr>
+              <a:t>アカウントや配信設定は、移行ツールか手動で移す</a:t>
+            </a:r>
+            <a:r>
+              <a:rPr sz="1200" dirty="0">
+                <a:solidFill>
+                  <a:srgbClr val="333333"/>
+                </a:solidFill>
+                <a:latin typeface="メイリオ"/>
+              </a:rPr>
+              <a:t>。</a:t>
             </a:r>
           </a:p>
         </p:txBody>
@@ -6631,8 +6692,8 @@
         </p:blipFill>
         <p:spPr>
           <a:xfrm>
-            <a:off x="2209800" y="3072384"/>
-            <a:ext cx="5486400" cy="2217270"/>
+            <a:off x="1325880" y="2934210"/>
+            <a:ext cx="7064578" cy="2355444"/>
           </a:xfrm>
           <a:prstGeom prst="rect">
             <a:avLst/>
@@ -6648,7 +6709,7 @@
 </file>
 
 <file path=ppt/slides/slide5.xml><?xml version="1.0" encoding="utf-8"?>
-<p:sld xmlns:a="http://schemas.openxmlformats.org/drawingml/2006/main" xmlns:p="http://schemas.openxmlformats.org/presentationml/2006/main" xmlns:r="http://schemas.openxmlformats.org/officeDocument/2006/relationships">
+<p:sld xmlns:a="http://schemas.openxmlformats.org/drawingml/2006/main" xmlns:r="http://schemas.openxmlformats.org/officeDocument/2006/relationships" xmlns:p="http://schemas.openxmlformats.org/presentationml/2006/main">
   <p:cSld>
     <p:spTree>
       <p:nvGrpSpPr>
@@ -6656,7 +6717,14 @@
         <p:cNvGrpSpPr/>
         <p:nvPr/>
       </p:nvGrpSpPr>
-      <p:grpSpPr/>
+      <p:grpSpPr>
+        <a:xfrm>
+          <a:off x="0" y="0"/>
+          <a:ext cx="0" cy="0"/>
+          <a:chOff x="0" y="0"/>
+          <a:chExt cx="0" cy="0"/>
+        </a:xfrm>
+      </p:grpSpPr>
       <p:sp>
         <p:nvSpPr>
           <p:cNvPr id="40" name="Google Shape;40;p3"/>
@@ -8038,7 +8106,7 @@
           <a:p>
             <a:pPr algn="l"/>
             <a:r>
-              <a:rPr sz="1900" b="1">
+              <a:rPr sz="1900" b="1" dirty="0" err="1">
                 <a:solidFill>
                   <a:srgbClr val="15133D"/>
                 </a:solidFill>
@@ -8046,6 +8114,12 @@
               </a:rPr>
               <a:t>移行が必要な方</a:t>
             </a:r>
+            <a:endParaRPr sz="1900" b="1" dirty="0">
+              <a:solidFill>
+                <a:srgbClr val="15133D"/>
+              </a:solidFill>
+              <a:latin typeface="メイリオ"/>
+            </a:endParaRPr>
           </a:p>
           <a:p>
             <a:pPr algn="l">
@@ -8057,13 +8131,56 @@
               </a:spcBef>
             </a:pPr>
             <a:r>
-              <a:rPr sz="1300">
+              <a:rPr sz="1300" dirty="0" err="1">
                 <a:solidFill>
                   <a:srgbClr val="333333"/>
                 </a:solidFill>
                 <a:latin typeface="メイリオ"/>
               </a:rPr>
-              <a:t>LINE広告を使っている広告主と代理店。代理店が管理しているアカウントも対象。</a:t>
+              <a:t>LINE広告を使っている広告主と代理店</a:t>
+            </a:r>
+            <a:r>
+              <a:rPr sz="1300" dirty="0">
+                <a:solidFill>
+                  <a:srgbClr val="333333"/>
+                </a:solidFill>
+                <a:latin typeface="メイリオ"/>
+              </a:rPr>
+              <a:t>。</a:t>
+            </a:r>
+            <a:endParaRPr lang="en-US" sz="1300" dirty="0">
+              <a:solidFill>
+                <a:srgbClr val="333333"/>
+              </a:solidFill>
+              <a:latin typeface="メイリオ"/>
+            </a:endParaRPr>
+          </a:p>
+          <a:p>
+            <a:pPr algn="l">
+              <a:lnSpc>
+                <a:spcPct val="115000"/>
+              </a:lnSpc>
+              <a:spcBef>
+                <a:spcPts val="600"/>
+              </a:spcBef>
+            </a:pPr>
+            <a:r>
+              <a:rPr sz="1300" dirty="0" err="1">
+                <a:solidFill>
+                  <a:srgbClr val="333333"/>
+                </a:solidFill>
+                <a:latin typeface="メイリオ"/>
+              </a:rPr>
+              <a:t>代理店が管理しているアカウントも対象</a:t>
+            </a:r>
+            <a:r>
+              <a:rPr sz="1300" dirty="0">
+                <a:solidFill>
+                  <a:srgbClr val="333333"/>
+                </a:solidFill>
+                <a:latin typeface="メイリオ"/>
+              </a:rPr>
+              <a:t>。</a:t>
             </a:r>
           </a:p>
         </p:txBody>
@@ -8190,14 +8307,38 @@
           <a:p>
             <a:pPr algn="l"/>
             <a:r>
-              <a:rPr sz="1900" b="1">
+              <a:rPr sz="1900" b="1" dirty="0" err="1">
                 <a:solidFill>
                   <a:srgbClr val="15133D"/>
                 </a:solidFill>
                 <a:latin typeface="メイリオ"/>
               </a:rPr>
-              <a:t>方法①：移行ツール</a:t>
-            </a:r>
+              <a:t>方法</a:t>
+            </a:r>
+            <a:r>
+              <a:rPr sz="1900" b="1" dirty="0">
+                <a:solidFill>
+                  <a:srgbClr val="15133D"/>
+                </a:solidFill>
+                <a:latin typeface="メイリオ"/>
+              </a:rPr>
+              <a:t>①：</a:t>
+            </a:r>
+            <a:r>
+              <a:rPr sz="1900" b="1" dirty="0" err="1">
+                <a:solidFill>
+                  <a:srgbClr val="15133D"/>
+                </a:solidFill>
+                <a:latin typeface="メイリオ"/>
+              </a:rPr>
+              <a:t>移行ツール</a:t>
+            </a:r>
+            <a:endParaRPr sz="1900" b="1" dirty="0">
+              <a:solidFill>
+                <a:srgbClr val="15133D"/>
+              </a:solidFill>
+              <a:latin typeface="メイリオ"/>
+            </a:endParaRPr>
           </a:p>
           <a:p>
             <a:pPr algn="l">
@@ -8209,13 +8350,56 @@
               </a:spcBef>
             </a:pPr>
             <a:r>
-              <a:rPr sz="1300">
+              <a:rPr sz="1300" dirty="0" err="1">
                 <a:solidFill>
                   <a:srgbClr val="333333"/>
                 </a:solidFill>
                 <a:latin typeface="メイリオ"/>
               </a:rPr>
-              <a:t>できる限り自動で移せる。認証済みのビジネスマネージャーとの連携が必須。</a:t>
+              <a:t>できる限り自動で移せる</a:t>
+            </a:r>
+            <a:r>
+              <a:rPr sz="1300" dirty="0">
+                <a:solidFill>
+                  <a:srgbClr val="333333"/>
+                </a:solidFill>
+                <a:latin typeface="メイリオ"/>
+              </a:rPr>
+              <a:t>。</a:t>
+            </a:r>
+            <a:endParaRPr lang="en-US" sz="1300" dirty="0">
+              <a:solidFill>
+                <a:srgbClr val="333333"/>
+              </a:solidFill>
+              <a:latin typeface="メイリオ"/>
+            </a:endParaRPr>
+          </a:p>
+          <a:p>
+            <a:pPr algn="l">
+              <a:lnSpc>
+                <a:spcPct val="115000"/>
+              </a:lnSpc>
+              <a:spcBef>
+                <a:spcPts val="600"/>
+              </a:spcBef>
+            </a:pPr>
+            <a:r>
+              <a:rPr sz="1300" dirty="0" err="1">
+                <a:solidFill>
+                  <a:srgbClr val="333333"/>
+                </a:solidFill>
+                <a:latin typeface="メイリオ"/>
+              </a:rPr>
+              <a:t>認証済みのビジネスマネージャーとの連携が必須</a:t>
+            </a:r>
+            <a:r>
+              <a:rPr sz="1300" dirty="0">
+                <a:solidFill>
+                  <a:srgbClr val="333333"/>
+                </a:solidFill>
+                <a:latin typeface="メイリオ"/>
+              </a:rPr>
+              <a:t>。</a:t>
             </a:r>
           </a:p>
         </p:txBody>
@@ -8266,14 +8450,38 @@
           <a:p>
             <a:pPr algn="l"/>
             <a:r>
-              <a:rPr sz="1900" b="1">
+              <a:rPr sz="1900" b="1" dirty="0" err="1">
                 <a:solidFill>
                   <a:srgbClr val="15133D"/>
                 </a:solidFill>
                 <a:latin typeface="メイリオ"/>
               </a:rPr>
-              <a:t>方法②：手動</a:t>
-            </a:r>
+              <a:t>方法</a:t>
+            </a:r>
+            <a:r>
+              <a:rPr sz="1900" b="1" dirty="0">
+                <a:solidFill>
+                  <a:srgbClr val="15133D"/>
+                </a:solidFill>
+                <a:latin typeface="メイリオ"/>
+              </a:rPr>
+              <a:t>②：</a:t>
+            </a:r>
+            <a:r>
+              <a:rPr sz="1900" b="1" dirty="0" err="1">
+                <a:solidFill>
+                  <a:srgbClr val="15133D"/>
+                </a:solidFill>
+                <a:latin typeface="メイリオ"/>
+              </a:rPr>
+              <a:t>手動</a:t>
+            </a:r>
+            <a:endParaRPr sz="1900" b="1" dirty="0">
+              <a:solidFill>
+                <a:srgbClr val="15133D"/>
+              </a:solidFill>
+              <a:latin typeface="メイリオ"/>
+            </a:endParaRPr>
           </a:p>
           <a:p>
             <a:pPr algn="l">
@@ -8285,13 +8493,56 @@
               </a:spcBef>
             </a:pPr>
             <a:r>
-              <a:rPr sz="1300">
+              <a:rPr sz="1300" dirty="0" err="1">
                 <a:solidFill>
                   <a:srgbClr val="333333"/>
                 </a:solidFill>
                 <a:latin typeface="メイリオ"/>
               </a:rPr>
-              <a:t>Yahoo!広告のアカウントがあれば、そこへ移すか新しく作る。なければLINEヤフー広告で新しく作る。</a:t>
+              <a:t>Yahoo!広告のアカウントがあれば、そこへ移すか新しく作る</a:t>
+            </a:r>
+            <a:r>
+              <a:rPr sz="1300" dirty="0">
+                <a:solidFill>
+                  <a:srgbClr val="333333"/>
+                </a:solidFill>
+                <a:latin typeface="メイリオ"/>
+              </a:rPr>
+              <a:t>。</a:t>
+            </a:r>
+            <a:endParaRPr lang="en-US" sz="1300" dirty="0">
+              <a:solidFill>
+                <a:srgbClr val="333333"/>
+              </a:solidFill>
+              <a:latin typeface="メイリオ"/>
+            </a:endParaRPr>
+          </a:p>
+          <a:p>
+            <a:pPr algn="l">
+              <a:lnSpc>
+                <a:spcPct val="115000"/>
+              </a:lnSpc>
+              <a:spcBef>
+                <a:spcPts val="600"/>
+              </a:spcBef>
+            </a:pPr>
+            <a:r>
+              <a:rPr sz="1300" dirty="0" err="1">
+                <a:solidFill>
+                  <a:srgbClr val="333333"/>
+                </a:solidFill>
+                <a:latin typeface="メイリオ"/>
+              </a:rPr>
+              <a:t>なければLINEヤフー広告で新しく作る</a:t>
+            </a:r>
+            <a:r>
+              <a:rPr sz="1300" dirty="0">
+                <a:solidFill>
+                  <a:srgbClr val="333333"/>
+                </a:solidFill>
+                <a:latin typeface="メイリオ"/>
+              </a:rPr>
+              <a:t>。</a:t>
             </a:r>
           </a:p>
         </p:txBody>
@@ -8305,7 +8556,7 @@
 </file>
 
 <file path=ppt/slides/slide6.xml><?xml version="1.0" encoding="utf-8"?>
-<p:sld xmlns:a="http://schemas.openxmlformats.org/drawingml/2006/main" xmlns:p="http://schemas.openxmlformats.org/presentationml/2006/main" xmlns:r="http://schemas.openxmlformats.org/officeDocument/2006/relationships">
+<p:sld xmlns:a="http://schemas.openxmlformats.org/drawingml/2006/main" xmlns:r="http://schemas.openxmlformats.org/officeDocument/2006/relationships" xmlns:p="http://schemas.openxmlformats.org/presentationml/2006/main">
   <p:cSld>
     <p:spTree>
       <p:nvGrpSpPr>
@@ -8313,7 +8564,14 @@
         <p:cNvGrpSpPr/>
         <p:nvPr/>
       </p:nvGrpSpPr>
-      <p:grpSpPr/>
+      <p:grpSpPr>
+        <a:xfrm>
+          <a:off x="0" y="0"/>
+          <a:ext cx="0" cy="0"/>
+          <a:chOff x="0" y="0"/>
+          <a:chExt cx="0" cy="0"/>
+        </a:xfrm>
+      </p:grpSpPr>
       <p:sp>
         <p:nvSpPr>
           <p:cNvPr id="40" name="Google Shape;40;p3"/>
@@ -9695,7 +9953,7 @@
           <a:p>
             <a:pPr algn="l"/>
             <a:r>
-              <a:rPr sz="1900" b="1">
+              <a:rPr sz="1900" b="1" dirty="0" err="1">
                 <a:solidFill>
                   <a:srgbClr val="15133D"/>
                 </a:solidFill>
@@ -9703,6 +9961,12 @@
               </a:rPr>
               <a:t>移せるもの</a:t>
             </a:r>
+            <a:endParaRPr sz="1900" b="1" dirty="0">
+              <a:solidFill>
+                <a:srgbClr val="15133D"/>
+              </a:solidFill>
+              <a:latin typeface="メイリオ"/>
+            </a:endParaRPr>
           </a:p>
           <a:p>
             <a:pPr algn="l">
@@ -9714,13 +9978,40 @@
               </a:spcBef>
             </a:pPr>
             <a:r>
-              <a:rPr sz="1300">
+              <a:rPr sz="1300" dirty="0" err="1">
                 <a:solidFill>
                   <a:srgbClr val="333333"/>
                 </a:solidFill>
                 <a:latin typeface="メイリオ"/>
               </a:rPr>
-              <a:t>アカウント・グループ、クレジットカード情報と権限（移すか選べる）、キャンペーン・広告グループ・広告の設定、画像・動画、オーディエンス。</a:t>
+              <a:t>アカウント・グループ、クレジットカード情報と権限（移すか選べる</a:t>
+            </a:r>
+            <a:r>
+              <a:rPr sz="1300" dirty="0">
+                <a:solidFill>
+                  <a:srgbClr val="333333"/>
+                </a:solidFill>
+                <a:latin typeface="メイリオ"/>
+              </a:rPr>
+              <a:t>）、</a:t>
+            </a:r>
+            <a:r>
+              <a:rPr sz="1300" dirty="0" err="1">
+                <a:solidFill>
+                  <a:srgbClr val="333333"/>
+                </a:solidFill>
+                <a:latin typeface="メイリオ"/>
+              </a:rPr>
+              <a:t>キャンペーン・広告グループ・広告の設定、画像・動画、オーディエンス</a:t>
+            </a:r>
+            <a:r>
+              <a:rPr sz="1300" dirty="0">
+                <a:solidFill>
+                  <a:srgbClr val="333333"/>
+                </a:solidFill>
+                <a:latin typeface="メイリオ"/>
+              </a:rPr>
+              <a:t>。</a:t>
             </a:r>
           </a:p>
         </p:txBody>
@@ -11467,6 +11758,82 @@
       </p:sp>
       <p:sp>
         <p:nvSpPr>
+          <p:cNvPr id="70" name="Rounded Rectangle 67_v0"/>
+          <p:cNvSpPr/>
+          <p:nvPr/>
+        </p:nvSpPr>
+        <p:spPr>
+          <a:xfrm>
+            <a:off x="6547104" y="3108960"/>
+            <a:ext cx="2816352" cy="1325880"/>
+          </a:xfrm>
+          <a:prstGeom prst="roundRect">
+            <a:avLst>
+              <a:gd name="adj" fmla="val 6000"/>
+            </a:avLst>
+          </a:prstGeom>
+          <a:solidFill>
+            <a:srgbClr val="EAF0FA"/>
+          </a:solidFill>
+          <a:ln w="12700">
+            <a:solidFill>
+              <a:srgbClr val="3467B2"/>
+            </a:solidFill>
+          </a:ln>
+          <a:effectLst/>
+        </p:spPr>
+        <p:style>
+          <a:lnRef idx="1">
+            <a:schemeClr val="accent1"/>
+          </a:lnRef>
+          <a:fillRef idx="3">
+            <a:schemeClr val="accent1"/>
+          </a:fillRef>
+          <a:effectRef idx="2">
+            <a:schemeClr val="accent1"/>
+          </a:effectRef>
+          <a:fontRef idx="minor">
+            <a:schemeClr val="lt1"/>
+          </a:fontRef>
+        </p:style>
+        <p:txBody>
+          <a:bodyPr wrap="square" lIns="228600" rIns="182880" rtlCol="0" anchor="ctr"/>
+          <a:lstStyle/>
+          <a:p>
+            <a:pPr algn="l"/>
+            <a:r>
+              <a:rPr sz="1700" b="1">
+                <a:solidFill>
+                  <a:srgbClr val="15133D"/>
+                </a:solidFill>
+                <a:latin typeface="メイリオ"/>
+              </a:rPr>
+              <a:t>③ VOOM面を除外</a:t>
+            </a:r>
+          </a:p>
+          <a:p>
+            <a:pPr algn="l">
+              <a:lnSpc>
+                <a:spcPct val="115000"/>
+              </a:lnSpc>
+              <a:spcBef>
+                <a:spcPts val="600"/>
+              </a:spcBef>
+            </a:pPr>
+            <a:r>
+              <a:rPr sz="1200">
+                <a:solidFill>
+                  <a:srgbClr val="333333"/>
+                </a:solidFill>
+                <a:latin typeface="メイリオ"/>
+              </a:rPr>
+              <a:t>VOOM終了による影響はない。</a:t>
+            </a:r>
+          </a:p>
+        </p:txBody>
+      </p:sp>
+      <p:sp>
+        <p:nvSpPr>
           <p:cNvPr id="71" name="Rounded Rectangle 68_v1"/>
           <p:cNvSpPr/>
           <p:nvPr/>
@@ -11554,82 +11921,6 @@
                 <a:latin typeface="メイリオ"/>
               </a:rPr>
               <a:t>LINE広告：配信先の「LINE VOOM」は9月30日に選択肢ごと管理画面から消えるため、VOOMだけを選んでいた広告は配信先を見直す。</a:t>
-            </a:r>
-          </a:p>
-        </p:txBody>
-      </p:sp>
-      <p:sp>
-        <p:nvSpPr>
-          <p:cNvPr id="70" name="Rounded Rectangle 67_v0"/>
-          <p:cNvSpPr/>
-          <p:nvPr/>
-        </p:nvSpPr>
-        <p:spPr>
-          <a:xfrm>
-            <a:off x="6547104" y="3108960"/>
-            <a:ext cx="2816352" cy="1325880"/>
-          </a:xfrm>
-          <a:prstGeom prst="roundRect">
-            <a:avLst>
-              <a:gd name="adj" fmla="val 6000"/>
-            </a:avLst>
-          </a:prstGeom>
-          <a:solidFill>
-            <a:srgbClr val="EAF0FA"/>
-          </a:solidFill>
-          <a:ln w="12700">
-            <a:solidFill>
-              <a:srgbClr val="3467B2"/>
-            </a:solidFill>
-          </a:ln>
-          <a:effectLst/>
-        </p:spPr>
-        <p:style>
-          <a:lnRef idx="1">
-            <a:schemeClr val="accent1"/>
-          </a:lnRef>
-          <a:fillRef idx="3">
-            <a:schemeClr val="accent1"/>
-          </a:fillRef>
-          <a:effectRef idx="2">
-            <a:schemeClr val="accent1"/>
-          </a:effectRef>
-          <a:fontRef idx="minor">
-            <a:schemeClr val="lt1"/>
-          </a:fontRef>
-        </p:style>
-        <p:txBody>
-          <a:bodyPr wrap="square" lIns="228600" rIns="182880" rtlCol="0" anchor="ctr"/>
-          <a:lstStyle/>
-          <a:p>
-            <a:pPr algn="l"/>
-            <a:r>
-              <a:rPr sz="1700" b="1">
-                <a:solidFill>
-                  <a:srgbClr val="15133D"/>
-                </a:solidFill>
-                <a:latin typeface="メイリオ"/>
-              </a:rPr>
-              <a:t>③ VOOM面を除外</a:t>
-            </a:r>
-          </a:p>
-          <a:p>
-            <a:pPr algn="l">
-              <a:lnSpc>
-                <a:spcPct val="115000"/>
-              </a:lnSpc>
-              <a:spcBef>
-                <a:spcPts val="600"/>
-              </a:spcBef>
-            </a:pPr>
-            <a:r>
-              <a:rPr sz="1200">
-                <a:solidFill>
-                  <a:srgbClr val="333333"/>
-                </a:solidFill>
-                <a:latin typeface="メイリオ"/>
-              </a:rPr>
-              <a:t>VOOM終了による影響はない。</a:t>
             </a:r>
           </a:p>
         </p:txBody>

--- a/LINE広告トレンドレポート_2026年10月.pptx
+++ b/LINE広告トレンドレポート_2026年10月.pptx
@@ -4935,7 +4935,7 @@
             </a:avLst>
           </a:prstGeom>
           <a:solidFill>
-            <a:srgbClr val="EAF0FA"/>
+            <a:srgbClr val="FFFFFF"/>
           </a:solidFill>
           <a:ln w="12700">
             <a:solidFill>
@@ -5017,7 +5017,7 @@
             </a:avLst>
           </a:prstGeom>
           <a:solidFill>
-            <a:srgbClr val="EAF0FA"/>
+            <a:srgbClr val="FFFFFF"/>
           </a:solidFill>
           <a:ln w="12700">
             <a:solidFill>
@@ -6483,7 +6483,7 @@
             </a:avLst>
           </a:prstGeom>
           <a:solidFill>
-            <a:srgbClr val="EAF0FA"/>
+            <a:srgbClr val="FFFFFF"/>
           </a:solidFill>
           <a:ln w="12700">
             <a:solidFill>
@@ -6574,7 +6574,7 @@
             </a:avLst>
           </a:prstGeom>
           <a:solidFill>
-            <a:srgbClr val="EAF0FA"/>
+            <a:srgbClr val="FFFFFF"/>
           </a:solidFill>
           <a:ln w="12700">
             <a:solidFill>
@@ -8077,7 +8077,7 @@
             </a:avLst>
           </a:prstGeom>
           <a:solidFill>
-            <a:srgbClr val="EAF0FA"/>
+            <a:srgbClr val="FFFFFF"/>
           </a:solidFill>
           <a:ln w="12700">
             <a:solidFill>
@@ -8202,7 +8202,7 @@
             </a:avLst>
           </a:prstGeom>
           <a:solidFill>
-            <a:srgbClr val="EAF0FA"/>
+            <a:srgbClr val="FFFFFF"/>
           </a:solidFill>
           <a:ln w="12700">
             <a:solidFill>
@@ -8278,7 +8278,7 @@
             </a:avLst>
           </a:prstGeom>
           <a:solidFill>
-            <a:srgbClr val="EAF0FA"/>
+            <a:srgbClr val="FFFFFF"/>
           </a:solidFill>
           <a:ln w="12700">
             <a:solidFill>
@@ -8421,7 +8421,7 @@
             </a:avLst>
           </a:prstGeom>
           <a:solidFill>
-            <a:srgbClr val="EAF0FA"/>
+            <a:srgbClr val="FFFFFF"/>
           </a:solidFill>
           <a:ln w="12700">
             <a:solidFill>
@@ -9924,7 +9924,7 @@
             </a:avLst>
           </a:prstGeom>
           <a:solidFill>
-            <a:srgbClr val="EAF0FA"/>
+            <a:srgbClr val="FFFFFF"/>
           </a:solidFill>
           <a:ln w="12700">
             <a:solidFill>
@@ -10033,7 +10033,7 @@
             </a:avLst>
           </a:prstGeom>
           <a:solidFill>
-            <a:srgbClr val="EAF0FA"/>
+            <a:srgbClr val="FFFFFF"/>
           </a:solidFill>
           <a:ln w="12700">
             <a:solidFill>
@@ -10109,7 +10109,7 @@
             </a:avLst>
           </a:prstGeom>
           <a:solidFill>
-            <a:srgbClr val="EAF0FA"/>
+            <a:srgbClr val="FFFFFF"/>
           </a:solidFill>
           <a:ln w="12700">
             <a:solidFill>
@@ -10185,7 +10185,7 @@
             </a:avLst>
           </a:prstGeom>
           <a:solidFill>
-            <a:srgbClr val="EAF0FA"/>
+            <a:srgbClr val="FFFFFF"/>
           </a:solidFill>
           <a:ln w="12700">
             <a:solidFill>
@@ -11621,7 +11621,7 @@
             </a:avLst>
           </a:prstGeom>
           <a:solidFill>
-            <a:srgbClr val="EAF0FA"/>
+            <a:srgbClr val="FFFFFF"/>
           </a:solidFill>
           <a:ln w="12700">
             <a:solidFill>
@@ -11697,7 +11697,7 @@
             </a:avLst>
           </a:prstGeom>
           <a:solidFill>
-            <a:srgbClr val="EAF0FA"/>
+            <a:srgbClr val="FFFFFF"/>
           </a:solidFill>
           <a:ln w="12700">
             <a:solidFill>
@@ -11773,7 +11773,7 @@
             </a:avLst>
           </a:prstGeom>
           <a:solidFill>
-            <a:srgbClr val="EAF0FA"/>
+            <a:srgbClr val="FFFFFF"/>
           </a:solidFill>
           <a:ln w="12700">
             <a:solidFill>
@@ -11849,7 +11849,7 @@
             </a:avLst>
           </a:prstGeom>
           <a:solidFill>
-            <a:srgbClr val="EAF0FA"/>
+            <a:srgbClr val="FFFFFF"/>
           </a:solidFill>
           <a:ln w="12700">
             <a:solidFill>

--- a/LINE広告トレンドレポート_2026年10月.pptx
+++ b/LINE広告トレンドレポート_2026年10月.pptx
@@ -3213,7 +3213,58 @@
                 </a:solidFill>
                 <a:latin typeface="メイリオ"/>
               </a:rPr>
-              <a:t>コピー・一括登録での作成、画像・動画の追加・編集、再審査の依頼も不可。API経由も10/26に停止。</a:t>
+              <a:t>コピー・一括登録での作成、</a:t>
+            </a:r>
+            <a:br>
+              <a:rPr sz="1100" dirty="0">
+                <a:solidFill>
+                  <a:srgbClr val="333333"/>
+                </a:solidFill>
+                <a:latin typeface="メイリオ"/>
+              </a:rPr>
+            </a:br>
+            <a:r>
+              <a:rPr sz="1100" dirty="0">
+                <a:solidFill>
+                  <a:srgbClr val="333333"/>
+                </a:solidFill>
+                <a:latin typeface="メイリオ"/>
+              </a:rPr>
+              <a:t>画像・動画の追加・編集、</a:t>
+            </a:r>
+            <a:br>
+              <a:rPr sz="1100" dirty="0">
+                <a:solidFill>
+                  <a:srgbClr val="333333"/>
+                </a:solidFill>
+                <a:latin typeface="メイリオ"/>
+              </a:rPr>
+            </a:br>
+            <a:r>
+              <a:rPr sz="1100" dirty="0">
+                <a:solidFill>
+                  <a:srgbClr val="333333"/>
+                </a:solidFill>
+                <a:latin typeface="メイリオ"/>
+              </a:rPr>
+              <a:t>再審査の依頼も不可。</a:t>
+            </a:r>
+            <a:br>
+              <a:rPr sz="1100" dirty="0">
+                <a:solidFill>
+                  <a:srgbClr val="333333"/>
+                </a:solidFill>
+                <a:latin typeface="メイリオ"/>
+              </a:rPr>
+            </a:br>
+            <a:r>
+              <a:rPr sz="1100" dirty="0">
+                <a:solidFill>
+                  <a:srgbClr val="333333"/>
+                </a:solidFill>
+                <a:latin typeface="メイリオ"/>
+              </a:rPr>
+              <a:t>API経由も10/26に停止。</a:t>
             </a:r>
           </a:p>
         </p:txBody>
@@ -3295,7 +3346,41 @@
                 </a:solidFill>
                 <a:latin typeface="メイリオ"/>
               </a:rPr>
-              <a:t>停止後も費用・明細があとから更新されることがある。カード決済が配信終了後になる場合もある。</a:t>
+              <a:t>停止後も費用・明細が</a:t>
+            </a:r>
+            <a:br>
+              <a:rPr sz="1100" dirty="0">
+                <a:solidFill>
+                  <a:srgbClr val="333333"/>
+                </a:solidFill>
+                <a:latin typeface="メイリオ"/>
+              </a:rPr>
+            </a:br>
+            <a:r>
+              <a:rPr sz="1100" dirty="0">
+                <a:solidFill>
+                  <a:srgbClr val="333333"/>
+                </a:solidFill>
+                <a:latin typeface="メイリオ"/>
+              </a:rPr>
+              <a:t>あとから更新されることがある。</a:t>
+            </a:r>
+            <a:br>
+              <a:rPr sz="1100" dirty="0">
+                <a:solidFill>
+                  <a:srgbClr val="333333"/>
+                </a:solidFill>
+                <a:latin typeface="メイリオ"/>
+              </a:rPr>
+            </a:br>
+            <a:r>
+              <a:rPr sz="1100" dirty="0">
+                <a:solidFill>
+                  <a:srgbClr val="333333"/>
+                </a:solidFill>
+                <a:latin typeface="メイリオ"/>
+              </a:rPr>
+              <a:t>カード決済が配信終了後になる場合もある。</a:t>
             </a:r>
           </a:p>
         </p:txBody>
@@ -4897,16 +4982,41 @@
                 </a:solidFill>
                 <a:latin typeface="メイリオ"/>
               </a:rPr>
-              <a:t>Yahoo!広告</a:t>
-            </a:r>
-            <a:r>
-              <a:rPr sz="1100" dirty="0">
+              <a:t>Yahoo!広告 ディスプレイ広告は、</a:t>
+            </a:r>
+            <a:br>
+              <a:rPr sz="1100" dirty="0" err="1">
                 <a:solidFill>
                   <a:srgbClr val="333333"/>
                 </a:solidFill>
                 <a:latin typeface="メイリオ"/>
               </a:rPr>
-              <a:t> ディスプレイ広告は、2026年4月の統合で自動的に移行。追加の対応は不要。</a:t>
+            </a:br>
+            <a:r>
+              <a:rPr sz="1100" dirty="0" err="1">
+                <a:solidFill>
+                  <a:srgbClr val="333333"/>
+                </a:solidFill>
+                <a:latin typeface="メイリオ"/>
+              </a:rPr>
+              <a:t>2026年4月の統合で自動的に移行。</a:t>
+            </a:r>
+            <a:br>
+              <a:rPr sz="1100" dirty="0" err="1">
+                <a:solidFill>
+                  <a:srgbClr val="333333"/>
+                </a:solidFill>
+                <a:latin typeface="メイリオ"/>
+              </a:rPr>
+            </a:br>
+            <a:r>
+              <a:rPr sz="1100" dirty="0" err="1">
+                <a:solidFill>
+                  <a:srgbClr val="333333"/>
+                </a:solidFill>
+                <a:latin typeface="メイリオ"/>
+              </a:rPr>
+              <a:t>追加の対応は不要。</a:t>
             </a:r>
           </a:p>
         </p:txBody>
@@ -5016,16 +5126,24 @@
                 </a:solidFill>
                 <a:latin typeface="メイリオ"/>
               </a:rPr>
-              <a:t>アカウントや配信設定は、移行ツールか手動で移す</a:t>
-            </a:r>
-            <a:r>
-              <a:rPr sz="1100" dirty="0">
+              <a:t>アカウントや配信設定は、</a:t>
+            </a:r>
+            <a:br>
+              <a:rPr sz="1100" dirty="0" err="1">
                 <a:solidFill>
                   <a:srgbClr val="333333"/>
                 </a:solidFill>
                 <a:latin typeface="メイリオ"/>
               </a:rPr>
-              <a:t>。</a:t>
+            </a:br>
+            <a:r>
+              <a:rPr sz="1100" dirty="0" err="1">
+                <a:solidFill>
+                  <a:srgbClr val="333333"/>
+                </a:solidFill>
+                <a:latin typeface="メイリオ"/>
+              </a:rPr>
+              <a:t>移行ツールか手動で移す。</a:t>
             </a:r>
           </a:p>
         </p:txBody>
@@ -6722,7 +6840,24 @@
                 </a:solidFill>
                 <a:latin typeface="メイリオ"/>
               </a:rPr>
-              <a:t>Yahoo!広告だけを使っている場合は、原則として対応不要。</a:t>
+              <a:t>Yahoo!広告だけを使っている場合は、</a:t>
+            </a:r>
+            <a:br>
+              <a:rPr sz="1100">
+                <a:solidFill>
+                  <a:srgbClr val="333333"/>
+                </a:solidFill>
+                <a:latin typeface="メイリオ"/>
+              </a:rPr>
+            </a:br>
+            <a:r>
+              <a:rPr sz="1100">
+                <a:solidFill>
+                  <a:srgbClr val="333333"/>
+                </a:solidFill>
+                <a:latin typeface="メイリオ"/>
+              </a:rPr>
+              <a:t>原則として対応不要。</a:t>
             </a:r>
           </a:p>
         </p:txBody>
@@ -6965,16 +7100,24 @@
                 </a:solidFill>
                 <a:latin typeface="メイリオ"/>
               </a:rPr>
-              <a:t>Yahoo!広告のアカウントがあれば、そこへ移すか新しく作る</a:t>
-            </a:r>
-            <a:r>
-              <a:rPr sz="1100" dirty="0">
+              <a:t>Yahoo!広告のアカウントがあれば、</a:t>
+            </a:r>
+            <a:br>
+              <a:rPr sz="1100" dirty="0" err="1">
                 <a:solidFill>
                   <a:srgbClr val="333333"/>
                 </a:solidFill>
                 <a:latin typeface="メイリオ"/>
               </a:rPr>
-              <a:t>。</a:t>
+            </a:br>
+            <a:r>
+              <a:rPr sz="1100" dirty="0" err="1">
+                <a:solidFill>
+                  <a:srgbClr val="333333"/>
+                </a:solidFill>
+                <a:latin typeface="メイリオ"/>
+              </a:rPr>
+              <a:t>そこへ移すか新しく作る。</a:t>
             </a:r>
             <a:endParaRPr lang="en-US" sz="1300" dirty="0">
               <a:solidFill>
@@ -8586,17 +8729,16 @@
                 </a:solidFill>
                 <a:latin typeface="メイリオ"/>
               </a:rPr>
-              <a:t>アカウント・グループ、クレジットカード情報と権限（移すか選べる</a:t>
-            </a:r>
-            <a:r>
-              <a:rPr sz="1050" dirty="0">
+              <a:t>アカウント・グループ、</a:t>
+            </a:r>
+            <a:br>
+              <a:rPr sz="1050" dirty="0" err="1">
                 <a:solidFill>
                   <a:srgbClr val="333333"/>
                 </a:solidFill>
                 <a:latin typeface="メイリオ"/>
               </a:rPr>
-              <a:t>）、</a:t>
-            </a:r>
+            </a:br>
             <a:r>
               <a:rPr sz="1050" dirty="0" err="1">
                 <a:solidFill>
@@ -8604,16 +8746,41 @@
                 </a:solidFill>
                 <a:latin typeface="メイリオ"/>
               </a:rPr>
-              <a:t>キャンペーン・広告グループ・広告の設定、画像・動画、オーディエンス</a:t>
-            </a:r>
-            <a:r>
-              <a:rPr sz="1050" dirty="0">
+              <a:t>クレジットカード情報と権限（移すか選べる）、</a:t>
+            </a:r>
+            <a:br>
+              <a:rPr sz="1050" dirty="0" err="1">
                 <a:solidFill>
                   <a:srgbClr val="333333"/>
                 </a:solidFill>
                 <a:latin typeface="メイリオ"/>
               </a:rPr>
-              <a:t>。</a:t>
+            </a:br>
+            <a:r>
+              <a:rPr sz="1050" dirty="0" err="1">
+                <a:solidFill>
+                  <a:srgbClr val="333333"/>
+                </a:solidFill>
+                <a:latin typeface="メイリオ"/>
+              </a:rPr>
+              <a:t>キャンペーン・広告グループ・広告の設定、</a:t>
+            </a:r>
+            <a:br>
+              <a:rPr sz="1050" dirty="0" err="1">
+                <a:solidFill>
+                  <a:srgbClr val="333333"/>
+                </a:solidFill>
+                <a:latin typeface="メイリオ"/>
+              </a:rPr>
+            </a:br>
+            <a:r>
+              <a:rPr sz="1050" dirty="0" err="1">
+                <a:solidFill>
+                  <a:srgbClr val="333333"/>
+                </a:solidFill>
+                <a:latin typeface="メイリオ"/>
+              </a:rPr>
+              <a:t>画像・動画、オーディエンス。</a:t>
             </a:r>
           </a:p>
         </p:txBody>
@@ -8689,7 +8856,41 @@
                 </a:solidFill>
                 <a:latin typeface="メイリオ"/>
               </a:rPr>
-              <a:t>「商品フィードから販売」のキャンペーン、LINE Tag・コンバージョン設定、過去の実績・レポート（自動入札の学習データ含む）、外部ツールとのAPI連携。</a:t>
+              <a:t>「商品フィードから販売」のキャンペーン、</a:t>
+            </a:r>
+            <a:br>
+              <a:rPr sz="1050">
+                <a:solidFill>
+                  <a:srgbClr val="333333"/>
+                </a:solidFill>
+                <a:latin typeface="メイリオ"/>
+              </a:rPr>
+            </a:br>
+            <a:r>
+              <a:rPr sz="1050">
+                <a:solidFill>
+                  <a:srgbClr val="333333"/>
+                </a:solidFill>
+                <a:latin typeface="メイリオ"/>
+              </a:rPr>
+              <a:t>LINE Tag・コンバージョン設定、過去の実績・レポート</a:t>
+            </a:r>
+            <a:br>
+              <a:rPr sz="1050">
+                <a:solidFill>
+                  <a:srgbClr val="333333"/>
+                </a:solidFill>
+                <a:latin typeface="メイリオ"/>
+              </a:rPr>
+            </a:br>
+            <a:r>
+              <a:rPr sz="1050">
+                <a:solidFill>
+                  <a:srgbClr val="333333"/>
+                </a:solidFill>
+                <a:latin typeface="メイリオ"/>
+              </a:rPr>
+              <a:t>（自動入札の学習データ含む）、外部ツールとのAPI連携。</a:t>
             </a:r>
           </a:p>
         </p:txBody>
@@ -8765,7 +8966,41 @@
                 </a:solidFill>
                 <a:latin typeface="メイリオ"/>
               </a:rPr>
-              <a:t>LINE広告と接続しているLINE公式アカウントを、同じ認証済みビジネスマネージャーに接続。操作する方はビジネスIDを統合しておく。</a:t>
+              <a:t>LINE広告と接続しているLINE公式アカウントを、</a:t>
+            </a:r>
+            <a:br>
+              <a:rPr sz="1050">
+                <a:solidFill>
+                  <a:srgbClr val="333333"/>
+                </a:solidFill>
+                <a:latin typeface="メイリオ"/>
+              </a:rPr>
+            </a:br>
+            <a:r>
+              <a:rPr sz="1050">
+                <a:solidFill>
+                  <a:srgbClr val="333333"/>
+                </a:solidFill>
+                <a:latin typeface="メイリオ"/>
+              </a:rPr>
+              <a:t>同じ認証済みビジネスマネージャーに接続。</a:t>
+            </a:r>
+            <a:br>
+              <a:rPr sz="1050">
+                <a:solidFill>
+                  <a:srgbClr val="333333"/>
+                </a:solidFill>
+                <a:latin typeface="メイリオ"/>
+              </a:rPr>
+            </a:br>
+            <a:r>
+              <a:rPr sz="1050">
+                <a:solidFill>
+                  <a:srgbClr val="333333"/>
+                </a:solidFill>
+                <a:latin typeface="メイリオ"/>
+              </a:rPr>
+              <a:t>操作する方はビジネスIDを統合しておく。</a:t>
             </a:r>
           </a:p>
         </p:txBody>
@@ -8841,7 +9076,41 @@
                 </a:solidFill>
                 <a:latin typeface="メイリオ"/>
               </a:rPr>
-              <a:t>日本向け配信・運用型・審査承認済みのアカウントが対象。移行後のキャンペーンは配信オフなので、設定を確認してからオンにする。</a:t>
+              <a:t>日本向け配信・運用型・審査承認済みのアカウントが対象。</a:t>
+            </a:r>
+            <a:br>
+              <a:rPr sz="1050">
+                <a:solidFill>
+                  <a:srgbClr val="333333"/>
+                </a:solidFill>
+                <a:latin typeface="メイリオ"/>
+              </a:rPr>
+            </a:br>
+            <a:r>
+              <a:rPr sz="1050">
+                <a:solidFill>
+                  <a:srgbClr val="333333"/>
+                </a:solidFill>
+                <a:latin typeface="メイリオ"/>
+              </a:rPr>
+              <a:t>移行後のキャンペーンは配信オフなので、</a:t>
+            </a:r>
+            <a:br>
+              <a:rPr sz="1050">
+                <a:solidFill>
+                  <a:srgbClr val="333333"/>
+                </a:solidFill>
+                <a:latin typeface="メイリオ"/>
+              </a:rPr>
+            </a:br>
+            <a:r>
+              <a:rPr sz="1050">
+                <a:solidFill>
+                  <a:srgbClr val="333333"/>
+                </a:solidFill>
+                <a:latin typeface="メイリオ"/>
+              </a:rPr>
+              <a:t>設定を確認してからオンにする。</a:t>
             </a:r>
           </a:p>
         </p:txBody>
@@ -10390,7 +10659,41 @@
                 </a:solidFill>
                 <a:latin typeface="メイリオ"/>
               </a:rPr>
-              <a:t>終了後は配信されない。配信設定がONのままでも、配信できる面がなくなるため。</a:t>
+              <a:t>終了後は配信されない。</a:t>
+            </a:r>
+            <a:br>
+              <a:rPr sz="1100">
+                <a:solidFill>
+                  <a:srgbClr val="333333"/>
+                </a:solidFill>
+                <a:latin typeface="メイリオ"/>
+              </a:rPr>
+            </a:br>
+            <a:r>
+              <a:rPr sz="1100">
+                <a:solidFill>
+                  <a:srgbClr val="333333"/>
+                </a:solidFill>
+                <a:latin typeface="メイリオ"/>
+              </a:rPr>
+              <a:t>配信設定がONのままでも、</a:t>
+            </a:r>
+            <a:br>
+              <a:rPr sz="1100">
+                <a:solidFill>
+                  <a:srgbClr val="333333"/>
+                </a:solidFill>
+                <a:latin typeface="メイリオ"/>
+              </a:rPr>
+            </a:br>
+            <a:r>
+              <a:rPr sz="1100">
+                <a:solidFill>
+                  <a:srgbClr val="333333"/>
+                </a:solidFill>
+                <a:latin typeface="メイリオ"/>
+              </a:rPr>
+              <a:t>配信できる面がなくなるため。</a:t>
             </a:r>
           </a:p>
         </p:txBody>
@@ -10466,7 +10769,24 @@
                 </a:solidFill>
                 <a:latin typeface="メイリオ"/>
               </a:rPr>
-              <a:t>VOOM面以外への配信は、そのまま続く。</a:t>
+              <a:t>VOOM面以外への配信は、</a:t>
+            </a:r>
+            <a:br>
+              <a:rPr sz="1100">
+                <a:solidFill>
+                  <a:srgbClr val="333333"/>
+                </a:solidFill>
+                <a:latin typeface="メイリオ"/>
+              </a:rPr>
+            </a:br>
+            <a:r>
+              <a:rPr sz="1100">
+                <a:solidFill>
+                  <a:srgbClr val="333333"/>
+                </a:solidFill>
+                <a:latin typeface="メイリオ"/>
+              </a:rPr>
+              <a:t>そのまま続く。</a:t>
             </a:r>
           </a:p>
         </p:txBody>
@@ -10621,7 +10941,7 @@
               <a:t>LINEヤフー広告：配信先リストの中のVOOM関連の設定は自動では消えないため、必要に応じて削除する。</a:t>
             </a:r>
             <a:br>
-              <a:rPr sz="1300">
+              <a:rPr sz="1100">
                 <a:solidFill>
                   <a:srgbClr val="333333"/>
                 </a:solidFill>
@@ -10635,7 +10955,24 @@
                 </a:solidFill>
                 <a:latin typeface="メイリオ"/>
               </a:rPr>
-              <a:t>LINE広告：配信先の「LINE VOOM」は9月30日に選択肢ごと管理画面から消えるため、VOOMだけを選んでいた広告は配信先を見直す。</a:t>
+              <a:t>LINE広告：配信先の「LINE VOOM」は9月30日に選択肢ごと管理画面から消えるため、</a:t>
+            </a:r>
+            <a:br>
+              <a:rPr sz="1100">
+                <a:solidFill>
+                  <a:srgbClr val="333333"/>
+                </a:solidFill>
+                <a:latin typeface="メイリオ"/>
+              </a:rPr>
+            </a:br>
+            <a:r>
+              <a:rPr sz="1100">
+                <a:solidFill>
+                  <a:srgbClr val="333333"/>
+                </a:solidFill>
+                <a:latin typeface="メイリオ"/>
+              </a:rPr>
+              <a:t>VOOMだけを選んでいた広告は配信先を見直す。</a:t>
             </a:r>
           </a:p>
         </p:txBody>
